--- a/Figuras/Figuras_prep.pptx
+++ b/Figuras/Figuras_prep.pptx
@@ -17,12 +17,13 @@
     <p:sldId id="267" r:id="rId11"/>
     <p:sldId id="269" r:id="rId12"/>
     <p:sldId id="270" r:id="rId13"/>
-    <p:sldId id="271" r:id="rId14"/>
-    <p:sldId id="278" r:id="rId15"/>
-    <p:sldId id="279" r:id="rId16"/>
-    <p:sldId id="274" r:id="rId17"/>
-    <p:sldId id="276" r:id="rId18"/>
-    <p:sldId id="277" r:id="rId19"/>
+    <p:sldId id="280" r:id="rId14"/>
+    <p:sldId id="271" r:id="rId15"/>
+    <p:sldId id="278" r:id="rId16"/>
+    <p:sldId id="279" r:id="rId17"/>
+    <p:sldId id="274" r:id="rId18"/>
+    <p:sldId id="276" r:id="rId19"/>
+    <p:sldId id="277" r:id="rId20"/>
   </p:sldIdLst>
   <p:sldSz cx="12192000" cy="6858000"/>
   <p:notesSz cx="6858000" cy="9144000"/>
@@ -132,7 +133,7 @@
 <file path=ppt/revisionInfo.xml><?xml version="1.0" encoding="utf-8"?>
 <p1510:revInfo xmlns:a="http://schemas.openxmlformats.org/drawingml/2006/main" xmlns:r="http://schemas.openxmlformats.org/officeDocument/2006/relationships" xmlns:p1510="http://schemas.microsoft.com/office/powerpoint/2015/10/main">
   <p1510:revLst>
-    <p1510:client id="{E8589E22-55F0-D245-B7BA-3FB71ADCAD28}" v="413" dt="2026-08-13T21:00:10.019"/>
+    <p1510:client id="{E8589E22-55F0-D245-B7BA-3FB71ADCAD28}" v="545" dt="2026-08-14T15:18:40.435"/>
   </p1510:revLst>
 </p1510:revInfo>
 </file>
@@ -142,7 +143,7 @@
   <pc:docChgLst>
     <pc:chgData name="Marie-Christine Rufener" userId="2d6664cfb518d05c" providerId="LiveId" clId="{946B3BF8-DE9F-57F9-A118-BDE1986E26EE}"/>
     <pc:docChg chg="undo redo custSel addSld delSld modSld sldOrd">
-      <pc:chgData name="Marie-Christine Rufener" userId="2d6664cfb518d05c" providerId="LiveId" clId="{946B3BF8-DE9F-57F9-A118-BDE1986E26EE}" dt="2026-08-13T22:33:37.166" v="8318" actId="478"/>
+      <pc:chgData name="Marie-Christine Rufener" userId="2d6664cfb518d05c" providerId="LiveId" clId="{946B3BF8-DE9F-57F9-A118-BDE1986E26EE}" dt="2026-08-14T15:19:08.899" v="8943" actId="164"/>
       <pc:docMkLst>
         <pc:docMk/>
       </pc:docMkLst>
@@ -4255,6 +4256,341 @@
             <ac:picMk id="3" creationId="{C4D1CF19-6EAB-CFF2-B4BA-B8C20A4FA2B2}"/>
           </ac:picMkLst>
         </pc:picChg>
+      </pc:sldChg>
+      <pc:sldChg chg="addSp delSp modSp new mod ord">
+        <pc:chgData name="Marie-Christine Rufener" userId="2d6664cfb518d05c" providerId="LiveId" clId="{946B3BF8-DE9F-57F9-A118-BDE1986E26EE}" dt="2026-08-14T15:19:08.899" v="8943" actId="164"/>
+        <pc:sldMkLst>
+          <pc:docMk/>
+          <pc:sldMk cId="1995668596" sldId="280"/>
+        </pc:sldMkLst>
+        <pc:spChg chg="add mod">
+          <ac:chgData name="Marie-Christine Rufener" userId="2d6664cfb518d05c" providerId="LiveId" clId="{946B3BF8-DE9F-57F9-A118-BDE1986E26EE}" dt="2026-08-14T15:09:55.560" v="8731" actId="207"/>
+          <ac:spMkLst>
+            <pc:docMk/>
+            <pc:sldMk cId="1995668596" sldId="280"/>
+            <ac:spMk id="32" creationId="{0A2BC88F-3C6D-065B-B01C-D2416EF5E913}"/>
+          </ac:spMkLst>
+        </pc:spChg>
+        <pc:spChg chg="add del mod">
+          <ac:chgData name="Marie-Christine Rufener" userId="2d6664cfb518d05c" providerId="LiveId" clId="{946B3BF8-DE9F-57F9-A118-BDE1986E26EE}" dt="2026-08-14T14:56:28.949" v="8477"/>
+          <ac:spMkLst>
+            <pc:docMk/>
+            <pc:sldMk cId="1995668596" sldId="280"/>
+            <ac:spMk id="33" creationId="{312954F0-B4C6-DA1D-2092-209805A8A258}"/>
+          </ac:spMkLst>
+        </pc:spChg>
+        <pc:spChg chg="add del mod">
+          <ac:chgData name="Marie-Christine Rufener" userId="2d6664cfb518d05c" providerId="LiveId" clId="{946B3BF8-DE9F-57F9-A118-BDE1986E26EE}" dt="2026-08-14T14:56:29.484" v="8479"/>
+          <ac:spMkLst>
+            <pc:docMk/>
+            <pc:sldMk cId="1995668596" sldId="280"/>
+            <ac:spMk id="34" creationId="{0412D6FD-CE74-E74B-80C5-1F25EC6A917C}"/>
+          </ac:spMkLst>
+        </pc:spChg>
+        <pc:spChg chg="add mod">
+          <ac:chgData name="Marie-Christine Rufener" userId="2d6664cfb518d05c" providerId="LiveId" clId="{946B3BF8-DE9F-57F9-A118-BDE1986E26EE}" dt="2026-08-14T15:16:18.499" v="8929" actId="1076"/>
+          <ac:spMkLst>
+            <pc:docMk/>
+            <pc:sldMk cId="1995668596" sldId="280"/>
+            <ac:spMk id="35" creationId="{5FA129F4-AB94-94E2-20E3-7D317EC82773}"/>
+          </ac:spMkLst>
+        </pc:spChg>
+        <pc:spChg chg="add mod">
+          <ac:chgData name="Marie-Christine Rufener" userId="2d6664cfb518d05c" providerId="LiveId" clId="{946B3BF8-DE9F-57F9-A118-BDE1986E26EE}" dt="2026-08-14T15:12:52.274" v="8898" actId="1035"/>
+          <ac:spMkLst>
+            <pc:docMk/>
+            <pc:sldMk cId="1995668596" sldId="280"/>
+            <ac:spMk id="37" creationId="{87E44ED8-AF6B-526B-F1CF-CF37C6B581F1}"/>
+          </ac:spMkLst>
+        </pc:spChg>
+        <pc:spChg chg="add mod">
+          <ac:chgData name="Marie-Christine Rufener" userId="2d6664cfb518d05c" providerId="LiveId" clId="{946B3BF8-DE9F-57F9-A118-BDE1986E26EE}" dt="2026-08-14T15:12:52.274" v="8898" actId="1035"/>
+          <ac:spMkLst>
+            <pc:docMk/>
+            <pc:sldMk cId="1995668596" sldId="280"/>
+            <ac:spMk id="38" creationId="{A92EFDDF-E56A-B371-CBF7-2620662D30D8}"/>
+          </ac:spMkLst>
+        </pc:spChg>
+        <pc:spChg chg="add mod">
+          <ac:chgData name="Marie-Christine Rufener" userId="2d6664cfb518d05c" providerId="LiveId" clId="{946B3BF8-DE9F-57F9-A118-BDE1986E26EE}" dt="2026-08-14T15:12:52.274" v="8898" actId="1035"/>
+          <ac:spMkLst>
+            <pc:docMk/>
+            <pc:sldMk cId="1995668596" sldId="280"/>
+            <ac:spMk id="39" creationId="{21FD1E90-CE2C-A1C6-6E5E-E509841F6E75}"/>
+          </ac:spMkLst>
+        </pc:spChg>
+        <pc:spChg chg="add mod">
+          <ac:chgData name="Marie-Christine Rufener" userId="2d6664cfb518d05c" providerId="LiveId" clId="{946B3BF8-DE9F-57F9-A118-BDE1986E26EE}" dt="2026-08-14T15:12:52.274" v="8898" actId="1035"/>
+          <ac:spMkLst>
+            <pc:docMk/>
+            <pc:sldMk cId="1995668596" sldId="280"/>
+            <ac:spMk id="40" creationId="{7487E948-ECD6-6666-D485-3BA0A2967403}"/>
+          </ac:spMkLst>
+        </pc:spChg>
+        <pc:spChg chg="add mod">
+          <ac:chgData name="Marie-Christine Rufener" userId="2d6664cfb518d05c" providerId="LiveId" clId="{946B3BF8-DE9F-57F9-A118-BDE1986E26EE}" dt="2026-08-14T15:12:52.274" v="8898" actId="1035"/>
+          <ac:spMkLst>
+            <pc:docMk/>
+            <pc:sldMk cId="1995668596" sldId="280"/>
+            <ac:spMk id="41" creationId="{93DFD1D4-1004-FECC-F7F5-719B3280A53F}"/>
+          </ac:spMkLst>
+        </pc:spChg>
+        <pc:spChg chg="add mod">
+          <ac:chgData name="Marie-Christine Rufener" userId="2d6664cfb518d05c" providerId="LiveId" clId="{946B3BF8-DE9F-57F9-A118-BDE1986E26EE}" dt="2026-08-14T15:10:05.163" v="8736" actId="1036"/>
+          <ac:spMkLst>
+            <pc:docMk/>
+            <pc:sldMk cId="1995668596" sldId="280"/>
+            <ac:spMk id="60" creationId="{99F515A5-D328-C211-CA4A-CD84C5785392}"/>
+          </ac:spMkLst>
+        </pc:spChg>
+        <pc:spChg chg="add mod">
+          <ac:chgData name="Marie-Christine Rufener" userId="2d6664cfb518d05c" providerId="LiveId" clId="{946B3BF8-DE9F-57F9-A118-BDE1986E26EE}" dt="2026-08-14T15:13:38.085" v="8907" actId="207"/>
+          <ac:spMkLst>
+            <pc:docMk/>
+            <pc:sldMk cId="1995668596" sldId="280"/>
+            <ac:spMk id="61" creationId="{0C73520D-7D4F-DAAB-6555-771081ED2139}"/>
+          </ac:spMkLst>
+        </pc:spChg>
+        <pc:spChg chg="add del mod">
+          <ac:chgData name="Marie-Christine Rufener" userId="2d6664cfb518d05c" providerId="LiveId" clId="{946B3BF8-DE9F-57F9-A118-BDE1986E26EE}" dt="2026-08-14T15:12:56.367" v="8899" actId="478"/>
+          <ac:spMkLst>
+            <pc:docMk/>
+            <pc:sldMk cId="1995668596" sldId="280"/>
+            <ac:spMk id="62" creationId="{697E6FD5-ED94-F458-836F-3C8DA883E059}"/>
+          </ac:spMkLst>
+        </pc:spChg>
+        <pc:spChg chg="add del mod">
+          <ac:chgData name="Marie-Christine Rufener" userId="2d6664cfb518d05c" providerId="LiveId" clId="{946B3BF8-DE9F-57F9-A118-BDE1986E26EE}" dt="2026-08-14T15:12:56.367" v="8899" actId="478"/>
+          <ac:spMkLst>
+            <pc:docMk/>
+            <pc:sldMk cId="1995668596" sldId="280"/>
+            <ac:spMk id="63" creationId="{D1882152-2B79-EF7D-2553-9C092DBF04B8}"/>
+          </ac:spMkLst>
+        </pc:spChg>
+        <pc:spChg chg="add del mod">
+          <ac:chgData name="Marie-Christine Rufener" userId="2d6664cfb518d05c" providerId="LiveId" clId="{946B3BF8-DE9F-57F9-A118-BDE1986E26EE}" dt="2026-08-14T15:12:56.367" v="8899" actId="478"/>
+          <ac:spMkLst>
+            <pc:docMk/>
+            <pc:sldMk cId="1995668596" sldId="280"/>
+            <ac:spMk id="64" creationId="{D052F601-B5FB-30AB-7CFE-F10864F61C9F}"/>
+          </ac:spMkLst>
+        </pc:spChg>
+        <pc:spChg chg="add del mod">
+          <ac:chgData name="Marie-Christine Rufener" userId="2d6664cfb518d05c" providerId="LiveId" clId="{946B3BF8-DE9F-57F9-A118-BDE1986E26EE}" dt="2026-08-14T15:12:56.367" v="8899" actId="478"/>
+          <ac:spMkLst>
+            <pc:docMk/>
+            <pc:sldMk cId="1995668596" sldId="280"/>
+            <ac:spMk id="65" creationId="{7D5C3A7C-FEA5-8A19-400E-190CE1AAA0B3}"/>
+          </ac:spMkLst>
+        </pc:spChg>
+        <pc:spChg chg="add del mod">
+          <ac:chgData name="Marie-Christine Rufener" userId="2d6664cfb518d05c" providerId="LiveId" clId="{946B3BF8-DE9F-57F9-A118-BDE1986E26EE}" dt="2026-08-14T15:12:52.274" v="8898" actId="1035"/>
+          <ac:spMkLst>
+            <pc:docMk/>
+            <pc:sldMk cId="1995668596" sldId="280"/>
+            <ac:spMk id="66" creationId="{04EC279C-6677-03B4-D1E4-717126AE8E01}"/>
+          </ac:spMkLst>
+        </pc:spChg>
+        <pc:spChg chg="add mod">
+          <ac:chgData name="Marie-Christine Rufener" userId="2d6664cfb518d05c" providerId="LiveId" clId="{946B3BF8-DE9F-57F9-A118-BDE1986E26EE}" dt="2026-08-14T15:13:14.495" v="8903" actId="1038"/>
+          <ac:spMkLst>
+            <pc:docMk/>
+            <pc:sldMk cId="1995668596" sldId="280"/>
+            <ac:spMk id="67" creationId="{F683B5FE-1DD6-90A8-B325-6F09DDC0B3E1}"/>
+          </ac:spMkLst>
+        </pc:spChg>
+        <pc:spChg chg="add mod">
+          <ac:chgData name="Marie-Christine Rufener" userId="2d6664cfb518d05c" providerId="LiveId" clId="{946B3BF8-DE9F-57F9-A118-BDE1986E26EE}" dt="2026-08-14T15:16:04.837" v="8926" actId="122"/>
+          <ac:spMkLst>
+            <pc:docMk/>
+            <pc:sldMk cId="1995668596" sldId="280"/>
+            <ac:spMk id="68" creationId="{59B3F19F-8B25-2052-6750-2B94348D6985}"/>
+          </ac:spMkLst>
+        </pc:spChg>
+        <pc:spChg chg="add mod">
+          <ac:chgData name="Marie-Christine Rufener" userId="2d6664cfb518d05c" providerId="LiveId" clId="{946B3BF8-DE9F-57F9-A118-BDE1986E26EE}" dt="2026-08-14T15:19:02.720" v="8942" actId="208"/>
+          <ac:spMkLst>
+            <pc:docMk/>
+            <pc:sldMk cId="1995668596" sldId="280"/>
+            <ac:spMk id="70" creationId="{C31800BA-3AF1-723E-CEDF-EC8624F1C4DB}"/>
+          </ac:spMkLst>
+        </pc:spChg>
+        <pc:grpChg chg="add">
+          <ac:chgData name="Marie-Christine Rufener" userId="2d6664cfb518d05c" providerId="LiveId" clId="{946B3BF8-DE9F-57F9-A118-BDE1986E26EE}" dt="2026-08-14T15:16:25.887" v="8930" actId="164"/>
+          <ac:grpSpMkLst>
+            <pc:docMk/>
+            <pc:sldMk cId="1995668596" sldId="280"/>
+            <ac:grpSpMk id="69" creationId="{9AA77DDB-C9CF-5904-5D44-F6275B53432A}"/>
+          </ac:grpSpMkLst>
+        </pc:grpChg>
+        <pc:grpChg chg="add">
+          <ac:chgData name="Marie-Christine Rufener" userId="2d6664cfb518d05c" providerId="LiveId" clId="{946B3BF8-DE9F-57F9-A118-BDE1986E26EE}" dt="2026-08-14T15:19:08.899" v="8943" actId="164"/>
+          <ac:grpSpMkLst>
+            <pc:docMk/>
+            <pc:sldMk cId="1995668596" sldId="280"/>
+            <ac:grpSpMk id="71" creationId="{6432A2B9-4612-825E-20AF-D20CD8E7C201}"/>
+          </ac:grpSpMkLst>
+        </pc:grpChg>
+        <pc:picChg chg="add del mod">
+          <ac:chgData name="Marie-Christine Rufener" userId="2d6664cfb518d05c" providerId="LiveId" clId="{946B3BF8-DE9F-57F9-A118-BDE1986E26EE}" dt="2026-08-14T14:45:26.930" v="8325" actId="478"/>
+          <ac:picMkLst>
+            <pc:docMk/>
+            <pc:sldMk cId="1995668596" sldId="280"/>
+            <ac:picMk id="3" creationId="{778CADFD-413F-FE58-6FEE-FEDDB4DB0F82}"/>
+          </ac:picMkLst>
+        </pc:picChg>
+        <pc:picChg chg="add del mod">
+          <ac:chgData name="Marie-Christine Rufener" userId="2d6664cfb518d05c" providerId="LiveId" clId="{946B3BF8-DE9F-57F9-A118-BDE1986E26EE}" dt="2026-08-14T14:49:05.871" v="8332" actId="478"/>
+          <ac:picMkLst>
+            <pc:docMk/>
+            <pc:sldMk cId="1995668596" sldId="280"/>
+            <ac:picMk id="5" creationId="{B2080E59-8348-5D04-003E-380C0417E09A}"/>
+          </ac:picMkLst>
+        </pc:picChg>
+        <pc:picChg chg="add del mod">
+          <ac:chgData name="Marie-Christine Rufener" userId="2d6664cfb518d05c" providerId="LiveId" clId="{946B3BF8-DE9F-57F9-A118-BDE1986E26EE}" dt="2026-08-14T14:49:19.956" v="8340" actId="478"/>
+          <ac:picMkLst>
+            <pc:docMk/>
+            <pc:sldMk cId="1995668596" sldId="280"/>
+            <ac:picMk id="7" creationId="{4A7DBCC3-7723-4604-2E33-6F410127158A}"/>
+          </ac:picMkLst>
+        </pc:picChg>
+        <pc:picChg chg="add mod modCrop">
+          <ac:chgData name="Marie-Christine Rufener" userId="2d6664cfb518d05c" providerId="LiveId" clId="{946B3BF8-DE9F-57F9-A118-BDE1986E26EE}" dt="2026-08-14T14:51:24.790" v="8360" actId="732"/>
+          <ac:picMkLst>
+            <pc:docMk/>
+            <pc:sldMk cId="1995668596" sldId="280"/>
+            <ac:picMk id="9" creationId="{5321E672-6B7E-70E7-6FEC-C1A9DB76E49F}"/>
+          </ac:picMkLst>
+        </pc:picChg>
+        <pc:picChg chg="add mod modCrop">
+          <ac:chgData name="Marie-Christine Rufener" userId="2d6664cfb518d05c" providerId="LiveId" clId="{946B3BF8-DE9F-57F9-A118-BDE1986E26EE}" dt="2026-08-14T15:07:04.263" v="8611" actId="1076"/>
+          <ac:picMkLst>
+            <pc:docMk/>
+            <pc:sldMk cId="1995668596" sldId="280"/>
+            <ac:picMk id="14" creationId="{5ED8E0FE-F016-0E2C-D477-13AD495991D0}"/>
+          </ac:picMkLst>
+        </pc:picChg>
+        <pc:cxnChg chg="add mod">
+          <ac:chgData name="Marie-Christine Rufener" userId="2d6664cfb518d05c" providerId="LiveId" clId="{946B3BF8-DE9F-57F9-A118-BDE1986E26EE}" dt="2026-08-14T14:52:30.993" v="8421" actId="1036"/>
+          <ac:cxnSpMkLst>
+            <pc:docMk/>
+            <pc:sldMk cId="1995668596" sldId="280"/>
+            <ac:cxnSpMk id="11" creationId="{67045C29-92EC-A4F5-905F-DDB380B4AC76}"/>
+          </ac:cxnSpMkLst>
+        </pc:cxnChg>
+        <pc:cxnChg chg="add mod">
+          <ac:chgData name="Marie-Christine Rufener" userId="2d6664cfb518d05c" providerId="LiveId" clId="{946B3BF8-DE9F-57F9-A118-BDE1986E26EE}" dt="2026-08-14T14:51:59.917" v="8374" actId="1037"/>
+          <ac:cxnSpMkLst>
+            <pc:docMk/>
+            <pc:sldMk cId="1995668596" sldId="280"/>
+            <ac:cxnSpMk id="15" creationId="{F0E1B570-4BD7-98D4-8FBE-5262EC55B25F}"/>
+          </ac:cxnSpMkLst>
+        </pc:cxnChg>
+        <pc:cxnChg chg="add mod">
+          <ac:chgData name="Marie-Christine Rufener" userId="2d6664cfb518d05c" providerId="LiveId" clId="{946B3BF8-DE9F-57F9-A118-BDE1986E26EE}" dt="2026-08-14T14:52:12.050" v="8418" actId="1035"/>
+          <ac:cxnSpMkLst>
+            <pc:docMk/>
+            <pc:sldMk cId="1995668596" sldId="280"/>
+            <ac:cxnSpMk id="19" creationId="{172426A7-DC0B-4CF9-1689-ABDBFAE7BBE5}"/>
+          </ac:cxnSpMkLst>
+        </pc:cxnChg>
+        <pc:cxnChg chg="add mod">
+          <ac:chgData name="Marie-Christine Rufener" userId="2d6664cfb518d05c" providerId="LiveId" clId="{946B3BF8-DE9F-57F9-A118-BDE1986E26EE}" dt="2026-08-14T15:08:17.628" v="8686" actId="14100"/>
+          <ac:cxnSpMkLst>
+            <pc:docMk/>
+            <pc:sldMk cId="1995668596" sldId="280"/>
+            <ac:cxnSpMk id="22" creationId="{E82698A2-4E00-1AAE-DF08-2095CA6A48C8}"/>
+          </ac:cxnSpMkLst>
+        </pc:cxnChg>
+        <pc:cxnChg chg="add mod">
+          <ac:chgData name="Marie-Christine Rufener" userId="2d6664cfb518d05c" providerId="LiveId" clId="{946B3BF8-DE9F-57F9-A118-BDE1986E26EE}" dt="2026-08-14T15:08:14.534" v="8685" actId="14100"/>
+          <ac:cxnSpMkLst>
+            <pc:docMk/>
+            <pc:sldMk cId="1995668596" sldId="280"/>
+            <ac:cxnSpMk id="24" creationId="{923AB6CC-F065-F0B4-4B36-BBFFB2BC594C}"/>
+          </ac:cxnSpMkLst>
+        </pc:cxnChg>
+        <pc:cxnChg chg="add mod">
+          <ac:chgData name="Marie-Christine Rufener" userId="2d6664cfb518d05c" providerId="LiveId" clId="{946B3BF8-DE9F-57F9-A118-BDE1986E26EE}" dt="2026-08-14T15:08:09.342" v="8684" actId="14100"/>
+          <ac:cxnSpMkLst>
+            <pc:docMk/>
+            <pc:sldMk cId="1995668596" sldId="280"/>
+            <ac:cxnSpMk id="26" creationId="{0F0085C9-AB09-E7FF-124B-A9921D49F7FB}"/>
+          </ac:cxnSpMkLst>
+        </pc:cxnChg>
+        <pc:cxnChg chg="add mod">
+          <ac:chgData name="Marie-Christine Rufener" userId="2d6664cfb518d05c" providerId="LiveId" clId="{946B3BF8-DE9F-57F9-A118-BDE1986E26EE}" dt="2026-08-14T15:08:06.720" v="8683" actId="14100"/>
+          <ac:cxnSpMkLst>
+            <pc:docMk/>
+            <pc:sldMk cId="1995668596" sldId="280"/>
+            <ac:cxnSpMk id="28" creationId="{1B1CC2F2-DE08-F6AA-84BB-A48D210BD97D}"/>
+          </ac:cxnSpMkLst>
+        </pc:cxnChg>
+        <pc:cxnChg chg="add mod">
+          <ac:chgData name="Marie-Christine Rufener" userId="2d6664cfb518d05c" providerId="LiveId" clId="{946B3BF8-DE9F-57F9-A118-BDE1986E26EE}" dt="2026-08-14T15:08:01.837" v="8682" actId="14100"/>
+          <ac:cxnSpMkLst>
+            <pc:docMk/>
+            <pc:sldMk cId="1995668596" sldId="280"/>
+            <ac:cxnSpMk id="30" creationId="{CB39B40C-4576-1F00-C3DF-2B126298368E}"/>
+          </ac:cxnSpMkLst>
+        </pc:cxnChg>
+        <pc:cxnChg chg="add del mod">
+          <ac:chgData name="Marie-Christine Rufener" userId="2d6664cfb518d05c" providerId="LiveId" clId="{946B3BF8-DE9F-57F9-A118-BDE1986E26EE}" dt="2026-08-14T14:59:21.131" v="8513" actId="478"/>
+          <ac:cxnSpMkLst>
+            <pc:docMk/>
+            <pc:sldMk cId="1995668596" sldId="280"/>
+            <ac:cxnSpMk id="36" creationId="{14DE7B2C-C92F-88F7-632D-FFD14F1CF6BF}"/>
+          </ac:cxnSpMkLst>
+        </pc:cxnChg>
+        <pc:cxnChg chg="add mod">
+          <ac:chgData name="Marie-Christine Rufener" userId="2d6664cfb518d05c" providerId="LiveId" clId="{946B3BF8-DE9F-57F9-A118-BDE1986E26EE}" dt="2026-08-14T15:07:48.293" v="8678" actId="1035"/>
+          <ac:cxnSpMkLst>
+            <pc:docMk/>
+            <pc:sldMk cId="1995668596" sldId="280"/>
+            <ac:cxnSpMk id="43" creationId="{1D99A336-64C8-53BD-CCA0-C74BE5F39BBE}"/>
+          </ac:cxnSpMkLst>
+        </pc:cxnChg>
+        <pc:cxnChg chg="add mod">
+          <ac:chgData name="Marie-Christine Rufener" userId="2d6664cfb518d05c" providerId="LiveId" clId="{946B3BF8-DE9F-57F9-A118-BDE1986E26EE}" dt="2026-08-14T15:07:51.532" v="8679" actId="1035"/>
+          <ac:cxnSpMkLst>
+            <pc:docMk/>
+            <pc:sldMk cId="1995668596" sldId="280"/>
+            <ac:cxnSpMk id="45" creationId="{8C49943E-88F0-C0CC-56FC-C7A1F3A9A291}"/>
+          </ac:cxnSpMkLst>
+        </pc:cxnChg>
+        <pc:cxnChg chg="add mod">
+          <ac:chgData name="Marie-Christine Rufener" userId="2d6664cfb518d05c" providerId="LiveId" clId="{946B3BF8-DE9F-57F9-A118-BDE1986E26EE}" dt="2026-08-14T15:07:46.422" v="8677" actId="1035"/>
+          <ac:cxnSpMkLst>
+            <pc:docMk/>
+            <pc:sldMk cId="1995668596" sldId="280"/>
+            <ac:cxnSpMk id="47" creationId="{F5D99511-7E2C-5FFA-B45B-E957585C5458}"/>
+          </ac:cxnSpMkLst>
+        </pc:cxnChg>
+        <pc:cxnChg chg="add mod">
+          <ac:chgData name="Marie-Christine Rufener" userId="2d6664cfb518d05c" providerId="LiveId" clId="{946B3BF8-DE9F-57F9-A118-BDE1986E26EE}" dt="2026-08-14T15:07:54.275" v="8680" actId="1035"/>
+          <ac:cxnSpMkLst>
+            <pc:docMk/>
+            <pc:sldMk cId="1995668596" sldId="280"/>
+            <ac:cxnSpMk id="49" creationId="{031071CB-8A83-7B70-6AC2-44026C1EC2A6}"/>
+          </ac:cxnSpMkLst>
+        </pc:cxnChg>
+        <pc:cxnChg chg="add mod">
+          <ac:chgData name="Marie-Christine Rufener" userId="2d6664cfb518d05c" providerId="LiveId" clId="{946B3BF8-DE9F-57F9-A118-BDE1986E26EE}" dt="2026-08-14T15:07:58.402" v="8681" actId="692"/>
+          <ac:cxnSpMkLst>
+            <pc:docMk/>
+            <pc:sldMk cId="1995668596" sldId="280"/>
+            <ac:cxnSpMk id="51" creationId="{5FC5DE2A-1AA4-5AE1-6B86-F62422708AD8}"/>
+          </ac:cxnSpMkLst>
+        </pc:cxnChg>
+        <pc:cxnChg chg="add mod">
+          <ac:chgData name="Marie-Christine Rufener" userId="2d6664cfb518d05c" providerId="LiveId" clId="{946B3BF8-DE9F-57F9-A118-BDE1986E26EE}" dt="2026-08-14T15:09:02.426" v="8690" actId="692"/>
+          <ac:cxnSpMkLst>
+            <pc:docMk/>
+            <pc:sldMk cId="1995668596" sldId="280"/>
+            <ac:cxnSpMk id="58" creationId="{1D47C2BE-97C7-5AAD-C7D9-0CAF8BFB3FB2}"/>
+          </ac:cxnSpMkLst>
+        </pc:cxnChg>
       </pc:sldChg>
     </pc:docChg>
   </pc:docChgLst>
@@ -11929,6 +12265,2060 @@
       </p:grpSpPr>
       <p:grpSp>
         <p:nvGrpSpPr>
+          <p:cNvPr id="71" name="Group 70">
+            <a:extLst>
+              <a:ext uri="{FF2B5EF4-FFF2-40B4-BE49-F238E27FC236}">
+                <a16:creationId xmlns:a16="http://schemas.microsoft.com/office/drawing/2014/main" id="{6432A2B9-4612-825E-20AF-D20CD8E7C201}"/>
+              </a:ext>
+            </a:extLst>
+          </p:cNvPr>
+          <p:cNvGrpSpPr/>
+          <p:nvPr/>
+        </p:nvGrpSpPr>
+        <p:grpSpPr>
+          <a:xfrm>
+            <a:off x="408212" y="-146957"/>
+            <a:ext cx="11150051" cy="7602891"/>
+            <a:chOff x="408212" y="-146957"/>
+            <a:chExt cx="11150051" cy="7602891"/>
+          </a:xfrm>
+        </p:grpSpPr>
+        <p:sp>
+          <p:nvSpPr>
+            <p:cNvPr id="70" name="Rectangle 69">
+              <a:extLst>
+                <a:ext uri="{FF2B5EF4-FFF2-40B4-BE49-F238E27FC236}">
+                  <a16:creationId xmlns:a16="http://schemas.microsoft.com/office/drawing/2014/main" id="{C31800BA-3AF1-723E-CEDF-EC8624F1C4DB}"/>
+                </a:ext>
+              </a:extLst>
+            </p:cNvPr>
+            <p:cNvSpPr/>
+            <p:nvPr/>
+          </p:nvSpPr>
+          <p:spPr>
+            <a:xfrm>
+              <a:off x="408212" y="-146957"/>
+              <a:ext cx="11150051" cy="7233560"/>
+            </a:xfrm>
+            <a:prstGeom prst="rect">
+              <a:avLst/>
+            </a:prstGeom>
+            <a:solidFill>
+              <a:schemeClr val="bg1"/>
+            </a:solidFill>
+            <a:ln>
+              <a:solidFill>
+                <a:schemeClr val="bg1"/>
+              </a:solidFill>
+            </a:ln>
+          </p:spPr>
+          <p:style>
+            <a:lnRef idx="2">
+              <a:schemeClr val="accent1">
+                <a:shade val="15000"/>
+              </a:schemeClr>
+            </a:lnRef>
+            <a:fillRef idx="1">
+              <a:schemeClr val="accent1"/>
+            </a:fillRef>
+            <a:effectRef idx="0">
+              <a:schemeClr val="accent1"/>
+            </a:effectRef>
+            <a:fontRef idx="minor">
+              <a:schemeClr val="lt1"/>
+            </a:fontRef>
+          </p:style>
+          <p:txBody>
+            <a:bodyPr rtlCol="0" anchor="ctr"/>
+            <a:lstStyle/>
+            <a:p>
+              <a:pPr algn="ctr"/>
+              <a:endParaRPr lang="en-US"/>
+            </a:p>
+          </p:txBody>
+        </p:sp>
+        <p:grpSp>
+          <p:nvGrpSpPr>
+            <p:cNvPr id="69" name="Group 68">
+              <a:extLst>
+                <a:ext uri="{FF2B5EF4-FFF2-40B4-BE49-F238E27FC236}">
+                  <a16:creationId xmlns:a16="http://schemas.microsoft.com/office/drawing/2014/main" id="{9AA77DDB-C9CF-5904-5D44-F6275B53432A}"/>
+                </a:ext>
+              </a:extLst>
+            </p:cNvPr>
+            <p:cNvGrpSpPr/>
+            <p:nvPr/>
+          </p:nvGrpSpPr>
+          <p:grpSpPr>
+            <a:xfrm>
+              <a:off x="702365" y="200590"/>
+              <a:ext cx="10855898" cy="7255344"/>
+              <a:chOff x="702365" y="200590"/>
+              <a:chExt cx="10855898" cy="7255344"/>
+            </a:xfrm>
+          </p:grpSpPr>
+          <p:pic>
+            <p:nvPicPr>
+              <p:cNvPr id="14" name="Picture 13" descr="A diagram of a mountain&#10;&#10;AI-generated content may be incorrect.">
+                <a:extLst>
+                  <a:ext uri="{FF2B5EF4-FFF2-40B4-BE49-F238E27FC236}">
+                    <a16:creationId xmlns:a16="http://schemas.microsoft.com/office/drawing/2014/main" id="{5ED8E0FE-F016-0E2C-D477-13AD495991D0}"/>
+                  </a:ext>
+                </a:extLst>
+              </p:cNvPr>
+              <p:cNvPicPr>
+                <a:picLocks noChangeAspect="1"/>
+              </p:cNvPicPr>
+              <p:nvPr/>
+            </p:nvPicPr>
+            <p:blipFill>
+              <a:blip r:embed="rId2"/>
+              <a:srcRect t="53287"/>
+              <a:stretch>
+                <a:fillRect/>
+              </a:stretch>
+            </p:blipFill>
+            <p:spPr>
+              <a:xfrm>
+                <a:off x="702365" y="3276600"/>
+                <a:ext cx="9071114" cy="2696516"/>
+              </a:xfrm>
+              <a:prstGeom prst="rect">
+                <a:avLst/>
+              </a:prstGeom>
+            </p:spPr>
+          </p:pic>
+          <p:pic>
+            <p:nvPicPr>
+              <p:cNvPr id="9" name="Picture 8" descr="A diagram of a mountain&#10;&#10;AI-generated content may be incorrect.">
+                <a:extLst>
+                  <a:ext uri="{FF2B5EF4-FFF2-40B4-BE49-F238E27FC236}">
+                    <a16:creationId xmlns:a16="http://schemas.microsoft.com/office/drawing/2014/main" id="{5321E672-6B7E-70E7-6FEC-C1A9DB76E49F}"/>
+                  </a:ext>
+                </a:extLst>
+              </p:cNvPr>
+              <p:cNvPicPr>
+                <a:picLocks noChangeAspect="1"/>
+              </p:cNvPicPr>
+              <p:nvPr/>
+            </p:nvPicPr>
+            <p:blipFill>
+              <a:blip r:embed="rId2"/>
+              <a:srcRect b="51711"/>
+              <a:stretch>
+                <a:fillRect/>
+              </a:stretch>
+            </p:blipFill>
+            <p:spPr>
+              <a:xfrm>
+                <a:off x="1205947" y="200590"/>
+                <a:ext cx="9071114" cy="2787474"/>
+              </a:xfrm>
+              <a:prstGeom prst="rect">
+                <a:avLst/>
+              </a:prstGeom>
+            </p:spPr>
+          </p:pic>
+          <p:cxnSp>
+            <p:nvCxnSpPr>
+              <p:cNvPr id="11" name="Straight Connector 10">
+                <a:extLst>
+                  <a:ext uri="{FF2B5EF4-FFF2-40B4-BE49-F238E27FC236}">
+                    <a16:creationId xmlns:a16="http://schemas.microsoft.com/office/drawing/2014/main" id="{67045C29-92EC-A4F5-905F-DDB380B4AC76}"/>
+                  </a:ext>
+                </a:extLst>
+              </p:cNvPr>
+              <p:cNvCxnSpPr>
+                <a:cxnSpLocks/>
+              </p:cNvCxnSpPr>
+              <p:nvPr/>
+            </p:nvCxnSpPr>
+            <p:spPr>
+              <a:xfrm>
+                <a:off x="5741504" y="220468"/>
+                <a:ext cx="0" cy="2575741"/>
+              </a:xfrm>
+              <a:prstGeom prst="line">
+                <a:avLst/>
+              </a:prstGeom>
+              <a:ln>
+                <a:solidFill>
+                  <a:schemeClr val="bg2">
+                    <a:lumMod val="25000"/>
+                  </a:schemeClr>
+                </a:solidFill>
+                <a:prstDash val="dash"/>
+              </a:ln>
+            </p:spPr>
+            <p:style>
+              <a:lnRef idx="2">
+                <a:schemeClr val="dk1"/>
+              </a:lnRef>
+              <a:fillRef idx="0">
+                <a:schemeClr val="dk1"/>
+              </a:fillRef>
+              <a:effectRef idx="1">
+                <a:schemeClr val="dk1"/>
+              </a:effectRef>
+              <a:fontRef idx="minor">
+                <a:schemeClr val="tx1"/>
+              </a:fontRef>
+            </p:style>
+          </p:cxnSp>
+          <p:cxnSp>
+            <p:nvCxnSpPr>
+              <p:cNvPr id="15" name="Straight Connector 14">
+                <a:extLst>
+                  <a:ext uri="{FF2B5EF4-FFF2-40B4-BE49-F238E27FC236}">
+                    <a16:creationId xmlns:a16="http://schemas.microsoft.com/office/drawing/2014/main" id="{F0E1B570-4BD7-98D4-8FBE-5262EC55B25F}"/>
+                  </a:ext>
+                </a:extLst>
+              </p:cNvPr>
+              <p:cNvCxnSpPr>
+                <a:cxnSpLocks/>
+              </p:cNvCxnSpPr>
+              <p:nvPr/>
+            </p:nvCxnSpPr>
+            <p:spPr>
+              <a:xfrm flipH="1">
+                <a:off x="755375" y="2776331"/>
+                <a:ext cx="10515600" cy="0"/>
+              </a:xfrm>
+              <a:prstGeom prst="line">
+                <a:avLst/>
+              </a:prstGeom>
+              <a:ln>
+                <a:solidFill>
+                  <a:schemeClr val="bg2">
+                    <a:lumMod val="25000"/>
+                  </a:schemeClr>
+                </a:solidFill>
+                <a:prstDash val="solid"/>
+              </a:ln>
+            </p:spPr>
+            <p:style>
+              <a:lnRef idx="2">
+                <a:schemeClr val="dk1"/>
+              </a:lnRef>
+              <a:fillRef idx="0">
+                <a:schemeClr val="dk1"/>
+              </a:fillRef>
+              <a:effectRef idx="1">
+                <a:schemeClr val="dk1"/>
+              </a:effectRef>
+              <a:fontRef idx="minor">
+                <a:schemeClr val="tx1"/>
+              </a:fontRef>
+            </p:style>
+          </p:cxnSp>
+          <p:cxnSp>
+            <p:nvCxnSpPr>
+              <p:cNvPr id="19" name="Straight Connector 18">
+                <a:extLst>
+                  <a:ext uri="{FF2B5EF4-FFF2-40B4-BE49-F238E27FC236}">
+                    <a16:creationId xmlns:a16="http://schemas.microsoft.com/office/drawing/2014/main" id="{172426A7-DC0B-4CF9-1689-ABDBFAE7BBE5}"/>
+                  </a:ext>
+                </a:extLst>
+              </p:cNvPr>
+              <p:cNvCxnSpPr>
+                <a:cxnSpLocks/>
+              </p:cNvCxnSpPr>
+              <p:nvPr/>
+            </p:nvCxnSpPr>
+            <p:spPr>
+              <a:xfrm flipH="1">
+                <a:off x="748750" y="5890592"/>
+                <a:ext cx="10515600" cy="0"/>
+              </a:xfrm>
+              <a:prstGeom prst="line">
+                <a:avLst/>
+              </a:prstGeom>
+              <a:ln>
+                <a:solidFill>
+                  <a:schemeClr val="bg2">
+                    <a:lumMod val="25000"/>
+                  </a:schemeClr>
+                </a:solidFill>
+                <a:prstDash val="solid"/>
+              </a:ln>
+            </p:spPr>
+            <p:style>
+              <a:lnRef idx="2">
+                <a:schemeClr val="dk1"/>
+              </a:lnRef>
+              <a:fillRef idx="0">
+                <a:schemeClr val="dk1"/>
+              </a:fillRef>
+              <a:effectRef idx="1">
+                <a:schemeClr val="dk1"/>
+              </a:effectRef>
+              <a:fontRef idx="minor">
+                <a:schemeClr val="tx1"/>
+              </a:fontRef>
+            </p:style>
+          </p:cxnSp>
+          <p:cxnSp>
+            <p:nvCxnSpPr>
+              <p:cNvPr id="22" name="Straight Connector 21">
+                <a:extLst>
+                  <a:ext uri="{FF2B5EF4-FFF2-40B4-BE49-F238E27FC236}">
+                    <a16:creationId xmlns:a16="http://schemas.microsoft.com/office/drawing/2014/main" id="{E82698A2-4E00-1AAE-DF08-2095CA6A48C8}"/>
+                  </a:ext>
+                </a:extLst>
+              </p:cNvPr>
+              <p:cNvCxnSpPr>
+                <a:cxnSpLocks/>
+              </p:cNvCxnSpPr>
+              <p:nvPr/>
+            </p:nvCxnSpPr>
+            <p:spPr>
+              <a:xfrm>
+                <a:off x="3985591" y="4030468"/>
+                <a:ext cx="0" cy="1860124"/>
+              </a:xfrm>
+              <a:prstGeom prst="line">
+                <a:avLst/>
+              </a:prstGeom>
+              <a:ln>
+                <a:solidFill>
+                  <a:srgbClr val="825E65"/>
+                </a:solidFill>
+                <a:prstDash val="dash"/>
+              </a:ln>
+            </p:spPr>
+            <p:style>
+              <a:lnRef idx="2">
+                <a:schemeClr val="dk1"/>
+              </a:lnRef>
+              <a:fillRef idx="0">
+                <a:schemeClr val="dk1"/>
+              </a:fillRef>
+              <a:effectRef idx="1">
+                <a:schemeClr val="dk1"/>
+              </a:effectRef>
+              <a:fontRef idx="minor">
+                <a:schemeClr val="tx1"/>
+              </a:fontRef>
+            </p:style>
+          </p:cxnSp>
+          <p:cxnSp>
+            <p:nvCxnSpPr>
+              <p:cNvPr id="24" name="Straight Connector 23">
+                <a:extLst>
+                  <a:ext uri="{FF2B5EF4-FFF2-40B4-BE49-F238E27FC236}">
+                    <a16:creationId xmlns:a16="http://schemas.microsoft.com/office/drawing/2014/main" id="{923AB6CC-F065-F0B4-4B36-BBFFB2BC594C}"/>
+                  </a:ext>
+                </a:extLst>
+              </p:cNvPr>
+              <p:cNvCxnSpPr>
+                <a:cxnSpLocks/>
+              </p:cNvCxnSpPr>
+              <p:nvPr/>
+            </p:nvCxnSpPr>
+            <p:spPr>
+              <a:xfrm>
+                <a:off x="4786173" y="4955783"/>
+                <a:ext cx="0" cy="934809"/>
+              </a:xfrm>
+              <a:prstGeom prst="line">
+                <a:avLst/>
+              </a:prstGeom>
+              <a:ln>
+                <a:solidFill>
+                  <a:srgbClr val="5B835A"/>
+                </a:solidFill>
+                <a:prstDash val="dash"/>
+              </a:ln>
+            </p:spPr>
+            <p:style>
+              <a:lnRef idx="2">
+                <a:schemeClr val="dk1"/>
+              </a:lnRef>
+              <a:fillRef idx="0">
+                <a:schemeClr val="dk1"/>
+              </a:fillRef>
+              <a:effectRef idx="1">
+                <a:schemeClr val="dk1"/>
+              </a:effectRef>
+              <a:fontRef idx="minor">
+                <a:schemeClr val="tx1"/>
+              </a:fontRef>
+            </p:style>
+          </p:cxnSp>
+          <p:cxnSp>
+            <p:nvCxnSpPr>
+              <p:cNvPr id="26" name="Straight Connector 25">
+                <a:extLst>
+                  <a:ext uri="{FF2B5EF4-FFF2-40B4-BE49-F238E27FC236}">
+                    <a16:creationId xmlns:a16="http://schemas.microsoft.com/office/drawing/2014/main" id="{0F0085C9-AB09-E7FF-124B-A9921D49F7FB}"/>
+                  </a:ext>
+                </a:extLst>
+              </p:cNvPr>
+              <p:cNvCxnSpPr>
+                <a:cxnSpLocks/>
+                <a:endCxn id="14" idx="2"/>
+              </p:cNvCxnSpPr>
+              <p:nvPr/>
+            </p:nvCxnSpPr>
+            <p:spPr>
+              <a:xfrm flipH="1">
+                <a:off x="5237922" y="3417425"/>
+                <a:ext cx="1593" cy="2555691"/>
+              </a:xfrm>
+              <a:prstGeom prst="line">
+                <a:avLst/>
+              </a:prstGeom>
+              <a:ln>
+                <a:solidFill>
+                  <a:srgbClr val="E1795D"/>
+                </a:solidFill>
+                <a:prstDash val="dash"/>
+              </a:ln>
+            </p:spPr>
+            <p:style>
+              <a:lnRef idx="2">
+                <a:schemeClr val="dk1"/>
+              </a:lnRef>
+              <a:fillRef idx="0">
+                <a:schemeClr val="dk1"/>
+              </a:fillRef>
+              <a:effectRef idx="1">
+                <a:schemeClr val="dk1"/>
+              </a:effectRef>
+              <a:fontRef idx="minor">
+                <a:schemeClr val="tx1"/>
+              </a:fontRef>
+            </p:style>
+          </p:cxnSp>
+          <p:cxnSp>
+            <p:nvCxnSpPr>
+              <p:cNvPr id="28" name="Straight Connector 27">
+                <a:extLst>
+                  <a:ext uri="{FF2B5EF4-FFF2-40B4-BE49-F238E27FC236}">
+                    <a16:creationId xmlns:a16="http://schemas.microsoft.com/office/drawing/2014/main" id="{1B1CC2F2-DE08-F6AA-84BB-A48D210BD97D}"/>
+                  </a:ext>
+                </a:extLst>
+              </p:cNvPr>
+              <p:cNvCxnSpPr>
+                <a:cxnSpLocks/>
+              </p:cNvCxnSpPr>
+              <p:nvPr/>
+            </p:nvCxnSpPr>
+            <p:spPr>
+              <a:xfrm>
+                <a:off x="5565535" y="4368478"/>
+                <a:ext cx="0" cy="1522114"/>
+              </a:xfrm>
+              <a:prstGeom prst="line">
+                <a:avLst/>
+              </a:prstGeom>
+              <a:ln>
+                <a:solidFill>
+                  <a:srgbClr val="467C9D"/>
+                </a:solidFill>
+                <a:prstDash val="dash"/>
+              </a:ln>
+            </p:spPr>
+            <p:style>
+              <a:lnRef idx="2">
+                <a:schemeClr val="dk1"/>
+              </a:lnRef>
+              <a:fillRef idx="0">
+                <a:schemeClr val="dk1"/>
+              </a:fillRef>
+              <a:effectRef idx="1">
+                <a:schemeClr val="dk1"/>
+              </a:effectRef>
+              <a:fontRef idx="minor">
+                <a:schemeClr val="tx1"/>
+              </a:fontRef>
+            </p:style>
+          </p:cxnSp>
+          <p:cxnSp>
+            <p:nvCxnSpPr>
+              <p:cNvPr id="30" name="Straight Connector 29">
+                <a:extLst>
+                  <a:ext uri="{FF2B5EF4-FFF2-40B4-BE49-F238E27FC236}">
+                    <a16:creationId xmlns:a16="http://schemas.microsoft.com/office/drawing/2014/main" id="{CB39B40C-4576-1F00-C3DF-2B126298368E}"/>
+                  </a:ext>
+                </a:extLst>
+              </p:cNvPr>
+              <p:cNvCxnSpPr>
+                <a:cxnSpLocks/>
+              </p:cNvCxnSpPr>
+              <p:nvPr/>
+            </p:nvCxnSpPr>
+            <p:spPr>
+              <a:xfrm>
+                <a:off x="6910127" y="5101638"/>
+                <a:ext cx="0" cy="788954"/>
+              </a:xfrm>
+              <a:prstGeom prst="line">
+                <a:avLst/>
+              </a:prstGeom>
+              <a:ln>
+                <a:solidFill>
+                  <a:srgbClr val="F6BD5F"/>
+                </a:solidFill>
+                <a:prstDash val="dash"/>
+              </a:ln>
+            </p:spPr>
+            <p:style>
+              <a:lnRef idx="2">
+                <a:schemeClr val="dk1"/>
+              </a:lnRef>
+              <a:fillRef idx="0">
+                <a:schemeClr val="dk1"/>
+              </a:fillRef>
+              <a:effectRef idx="1">
+                <a:schemeClr val="dk1"/>
+              </a:effectRef>
+              <a:fontRef idx="minor">
+                <a:schemeClr val="tx1"/>
+              </a:fontRef>
+            </p:style>
+          </p:cxnSp>
+          <mc:AlternateContent xmlns:mc="http://schemas.openxmlformats.org/markup-compatibility/2006">
+            <mc:Choice xmlns:a14="http://schemas.microsoft.com/office/drawing/2010/main" Requires="a14">
+              <p:sp>
+                <p:nvSpPr>
+                  <p:cNvPr id="32" name="TextBox 31">
+                    <a:extLst>
+                      <a:ext uri="{FF2B5EF4-FFF2-40B4-BE49-F238E27FC236}">
+                        <a16:creationId xmlns:a16="http://schemas.microsoft.com/office/drawing/2014/main" id="{0A2BC88F-3C6D-065B-B01C-D2416EF5E913}"/>
+                      </a:ext>
+                    </a:extLst>
+                  </p:cNvPr>
+                  <p:cNvSpPr txBox="1"/>
+                  <p:nvPr/>
+                </p:nvSpPr>
+                <p:spPr>
+                  <a:xfrm>
+                    <a:off x="5783305" y="2366970"/>
+                    <a:ext cx="340950" cy="307777"/>
+                  </a:xfrm>
+                  <a:prstGeom prst="rect">
+                    <a:avLst/>
+                  </a:prstGeom>
+                  <a:noFill/>
+                </p:spPr>
+                <p:txBody>
+                  <a:bodyPr wrap="square" lIns="0" tIns="0" rIns="0" bIns="0" rtlCol="0">
+                    <a:spAutoFit/>
+                  </a:bodyPr>
+                  <a:lstStyle/>
+                  <a:p>
+                    <a14:m>
+                      <m:oMathPara xmlns:m="http://schemas.openxmlformats.org/officeDocument/2006/math">
+                        <m:oMathParaPr>
+                          <m:jc m:val="centerGroup"/>
+                        </m:oMathParaPr>
+                        <m:oMath xmlns:m="http://schemas.openxmlformats.org/officeDocument/2006/math">
+                          <m:r>
+                            <a:rPr lang="en-US" sz="2000" b="1" i="1" smtClean="0">
+                              <a:solidFill>
+                                <a:schemeClr val="tx1">
+                                  <a:lumMod val="65000"/>
+                                  <a:lumOff val="35000"/>
+                                </a:schemeClr>
+                              </a:solidFill>
+                              <a:latin typeface="Cambria Math" panose="02040503050406030204" pitchFamily="18" charset="0"/>
+                            </a:rPr>
+                            <m:t>𝝁</m:t>
+                          </m:r>
+                        </m:oMath>
+                      </m:oMathPara>
+                    </a14:m>
+                    <a:endParaRPr lang="en-US" sz="2000" b="1" dirty="0">
+                      <a:solidFill>
+                        <a:schemeClr val="tx1">
+                          <a:lumMod val="65000"/>
+                          <a:lumOff val="35000"/>
+                        </a:schemeClr>
+                      </a:solidFill>
+                    </a:endParaRPr>
+                  </a:p>
+                </p:txBody>
+              </p:sp>
+            </mc:Choice>
+            <mc:Fallback>
+              <p:sp>
+                <p:nvSpPr>
+                  <p:cNvPr id="32" name="TextBox 31">
+                    <a:extLst>
+                      <a:ext uri="{FF2B5EF4-FFF2-40B4-BE49-F238E27FC236}">
+                        <a16:creationId xmlns:a16="http://schemas.microsoft.com/office/drawing/2014/main" id="{0A2BC88F-3C6D-065B-B01C-D2416EF5E913}"/>
+                      </a:ext>
+                    </a:extLst>
+                  </p:cNvPr>
+                  <p:cNvSpPr txBox="1">
+                    <a:spLocks noRot="1" noChangeAspect="1" noMove="1" noResize="1" noEditPoints="1" noAdjustHandles="1" noChangeArrowheads="1" noChangeShapeType="1" noTextEdit="1"/>
+                  </p:cNvSpPr>
+                  <p:nvPr/>
+                </p:nvSpPr>
+                <p:spPr>
+                  <a:xfrm>
+                    <a:off x="5783305" y="2366970"/>
+                    <a:ext cx="340950" cy="307777"/>
+                  </a:xfrm>
+                  <a:prstGeom prst="rect">
+                    <a:avLst/>
+                  </a:prstGeom>
+                  <a:blipFill>
+                    <a:blip r:embed="rId3"/>
+                    <a:stretch>
+                      <a:fillRect b="-24000"/>
+                    </a:stretch>
+                  </a:blipFill>
+                </p:spPr>
+                <p:txBody>
+                  <a:bodyPr/>
+                  <a:lstStyle/>
+                  <a:p>
+                    <a:r>
+                      <a:rPr lang="en-US">
+                        <a:noFill/>
+                      </a:rPr>
+                      <a:t> </a:t>
+                    </a:r>
+                  </a:p>
+                </p:txBody>
+              </p:sp>
+            </mc:Fallback>
+          </mc:AlternateContent>
+          <p:sp>
+            <p:nvSpPr>
+              <p:cNvPr id="35" name="TextBox 34">
+                <a:extLst>
+                  <a:ext uri="{FF2B5EF4-FFF2-40B4-BE49-F238E27FC236}">
+                    <a16:creationId xmlns:a16="http://schemas.microsoft.com/office/drawing/2014/main" id="{5FA129F4-AB94-94E2-20E3-7D317EC82773}"/>
+                  </a:ext>
+                </a:extLst>
+              </p:cNvPr>
+              <p:cNvSpPr txBox="1"/>
+              <p:nvPr/>
+            </p:nvSpPr>
+            <p:spPr>
+              <a:xfrm>
+                <a:off x="9290958" y="2301133"/>
+                <a:ext cx="2267305" cy="369332"/>
+              </a:xfrm>
+              <a:prstGeom prst="rect">
+                <a:avLst/>
+              </a:prstGeom>
+              <a:noFill/>
+            </p:spPr>
+            <p:txBody>
+              <a:bodyPr wrap="square" rtlCol="0">
+                <a:spAutoFit/>
+              </a:bodyPr>
+              <a:lstStyle/>
+              <a:p>
+                <a:r>
+                  <a:rPr lang="en-US" b="1" dirty="0" err="1">
+                    <a:latin typeface="Aptos Light" panose="020B0004020202020204" pitchFamily="34" charset="0"/>
+                  </a:rPr>
+                  <a:t>Nível</a:t>
+                </a:r>
+                <a:r>
+                  <a:rPr lang="en-US" b="1" dirty="0">
+                    <a:latin typeface="Aptos Light" panose="020B0004020202020204" pitchFamily="34" charset="0"/>
+                  </a:rPr>
+                  <a:t> </a:t>
+                </a:r>
+                <a:r>
+                  <a:rPr lang="en-US" b="1" dirty="0" err="1">
+                    <a:latin typeface="Aptos Light" panose="020B0004020202020204" pitchFamily="34" charset="0"/>
+                  </a:rPr>
+                  <a:t>populacional</a:t>
+                </a:r>
+                <a:endParaRPr lang="en-US" b="1" dirty="0">
+                  <a:latin typeface="Aptos Light" panose="020B0004020202020204" pitchFamily="34" charset="0"/>
+                </a:endParaRPr>
+              </a:p>
+            </p:txBody>
+          </p:sp>
+          <mc:AlternateContent xmlns:mc="http://schemas.openxmlformats.org/markup-compatibility/2006">
+            <mc:Choice xmlns:a14="http://schemas.microsoft.com/office/drawing/2010/main" Requires="a14">
+              <p:sp>
+                <p:nvSpPr>
+                  <p:cNvPr id="37" name="TextBox 36">
+                    <a:extLst>
+                      <a:ext uri="{FF2B5EF4-FFF2-40B4-BE49-F238E27FC236}">
+                        <a16:creationId xmlns:a16="http://schemas.microsoft.com/office/drawing/2014/main" id="{87E44ED8-AF6B-526B-F1CF-CF37C6B581F1}"/>
+                      </a:ext>
+                    </a:extLst>
+                  </p:cNvPr>
+                  <p:cNvSpPr txBox="1"/>
+                  <p:nvPr/>
+                </p:nvSpPr>
+                <p:spPr>
+                  <a:xfrm>
+                    <a:off x="3836537" y="6623874"/>
+                    <a:ext cx="340950" cy="615553"/>
+                  </a:xfrm>
+                  <a:prstGeom prst="rect">
+                    <a:avLst/>
+                  </a:prstGeom>
+                  <a:noFill/>
+                </p:spPr>
+                <p:txBody>
+                  <a:bodyPr wrap="square" lIns="0" tIns="0" rIns="0" bIns="0" rtlCol="0">
+                    <a:spAutoFit/>
+                  </a:bodyPr>
+                  <a:lstStyle/>
+                  <a:p>
+                    <a14:m>
+                      <m:oMathPara xmlns:m="http://schemas.openxmlformats.org/officeDocument/2006/math">
+                        <m:oMathParaPr>
+                          <m:jc m:val="centerGroup"/>
+                        </m:oMathParaPr>
+                        <m:oMath xmlns:m="http://schemas.openxmlformats.org/officeDocument/2006/math">
+                          <m:sSub>
+                            <m:sSubPr>
+                              <m:ctrlPr>
+                                <a:rPr lang="en-US" sz="2000" b="1" i="1" smtClean="0">
+                                  <a:solidFill>
+                                    <a:srgbClr val="825E65"/>
+                                  </a:solidFill>
+                                  <a:latin typeface="Cambria Math" panose="02040503050406030204" pitchFamily="18" charset="0"/>
+                                </a:rPr>
+                              </m:ctrlPr>
+                            </m:sSubPr>
+                            <m:e>
+                              <m:r>
+                                <a:rPr lang="en-US" sz="2000" b="1" i="1" smtClean="0">
+                                  <a:solidFill>
+                                    <a:srgbClr val="825E65"/>
+                                  </a:solidFill>
+                                  <a:latin typeface="Cambria Math" panose="02040503050406030204" pitchFamily="18" charset="0"/>
+                                </a:rPr>
+                                <m:t>𝝁</m:t>
+                              </m:r>
+                            </m:e>
+                            <m:sub>
+                              <m:r>
+                                <a:rPr lang="en-US" sz="2000" b="1" i="1" smtClean="0">
+                                  <a:solidFill>
+                                    <a:srgbClr val="825E65"/>
+                                  </a:solidFill>
+                                  <a:latin typeface="Cambria Math" panose="02040503050406030204" pitchFamily="18" charset="0"/>
+                                </a:rPr>
+                                <m:t>𝑨</m:t>
+                              </m:r>
+                            </m:sub>
+                          </m:sSub>
+                        </m:oMath>
+                      </m:oMathPara>
+                    </a14:m>
+                    <a:endParaRPr lang="en-US" sz="2000" b="1" dirty="0">
+                      <a:solidFill>
+                        <a:srgbClr val="825E65"/>
+                      </a:solidFill>
+                    </a:endParaRPr>
+                  </a:p>
+                  <a:p>
+                    <a:endParaRPr lang="en-US" sz="2000" b="1" dirty="0">
+                      <a:solidFill>
+                        <a:srgbClr val="825E65"/>
+                      </a:solidFill>
+                    </a:endParaRPr>
+                  </a:p>
+                </p:txBody>
+              </p:sp>
+            </mc:Choice>
+            <mc:Fallback>
+              <p:sp>
+                <p:nvSpPr>
+                  <p:cNvPr id="37" name="TextBox 36">
+                    <a:extLst>
+                      <a:ext uri="{FF2B5EF4-FFF2-40B4-BE49-F238E27FC236}">
+                        <a16:creationId xmlns:a16="http://schemas.microsoft.com/office/drawing/2014/main" id="{87E44ED8-AF6B-526B-F1CF-CF37C6B581F1}"/>
+                      </a:ext>
+                    </a:extLst>
+                  </p:cNvPr>
+                  <p:cNvSpPr txBox="1">
+                    <a:spLocks noRot="1" noChangeAspect="1" noMove="1" noResize="1" noEditPoints="1" noAdjustHandles="1" noChangeArrowheads="1" noChangeShapeType="1" noTextEdit="1"/>
+                  </p:cNvSpPr>
+                  <p:nvPr/>
+                </p:nvSpPr>
+                <p:spPr>
+                  <a:xfrm>
+                    <a:off x="3836537" y="6623874"/>
+                    <a:ext cx="340950" cy="615553"/>
+                  </a:xfrm>
+                  <a:prstGeom prst="rect">
+                    <a:avLst/>
+                  </a:prstGeom>
+                  <a:blipFill>
+                    <a:blip r:embed="rId4"/>
+                    <a:stretch>
+                      <a:fillRect l="-17857" r="-10714"/>
+                    </a:stretch>
+                  </a:blipFill>
+                </p:spPr>
+                <p:txBody>
+                  <a:bodyPr/>
+                  <a:lstStyle/>
+                  <a:p>
+                    <a:r>
+                      <a:rPr lang="en-US">
+                        <a:noFill/>
+                      </a:rPr>
+                      <a:t> </a:t>
+                    </a:r>
+                  </a:p>
+                </p:txBody>
+              </p:sp>
+            </mc:Fallback>
+          </mc:AlternateContent>
+          <mc:AlternateContent xmlns:mc="http://schemas.openxmlformats.org/markup-compatibility/2006">
+            <mc:Choice xmlns:a14="http://schemas.microsoft.com/office/drawing/2010/main" Requires="a14">
+              <p:sp>
+                <p:nvSpPr>
+                  <p:cNvPr id="38" name="TextBox 37">
+                    <a:extLst>
+                      <a:ext uri="{FF2B5EF4-FFF2-40B4-BE49-F238E27FC236}">
+                        <a16:creationId xmlns:a16="http://schemas.microsoft.com/office/drawing/2014/main" id="{A92EFDDF-E56A-B371-CBF7-2620662D30D8}"/>
+                      </a:ext>
+                    </a:extLst>
+                  </p:cNvPr>
+                  <p:cNvSpPr txBox="1"/>
+                  <p:nvPr/>
+                </p:nvSpPr>
+                <p:spPr>
+                  <a:xfrm>
+                    <a:off x="4637119" y="6628678"/>
+                    <a:ext cx="340950" cy="615553"/>
+                  </a:xfrm>
+                  <a:prstGeom prst="rect">
+                    <a:avLst/>
+                  </a:prstGeom>
+                  <a:noFill/>
+                </p:spPr>
+                <p:txBody>
+                  <a:bodyPr wrap="square" lIns="0" tIns="0" rIns="0" bIns="0" rtlCol="0">
+                    <a:spAutoFit/>
+                  </a:bodyPr>
+                  <a:lstStyle/>
+                  <a:p>
+                    <a14:m>
+                      <m:oMathPara xmlns:m="http://schemas.openxmlformats.org/officeDocument/2006/math">
+                        <m:oMathParaPr>
+                          <m:jc m:val="centerGroup"/>
+                        </m:oMathParaPr>
+                        <m:oMath xmlns:m="http://schemas.openxmlformats.org/officeDocument/2006/math">
+                          <m:sSub>
+                            <m:sSubPr>
+                              <m:ctrlPr>
+                                <a:rPr lang="en-US" sz="2000" b="1" i="1" smtClean="0">
+                                  <a:solidFill>
+                                    <a:srgbClr val="5B835A"/>
+                                  </a:solidFill>
+                                  <a:latin typeface="Cambria Math" panose="02040503050406030204" pitchFamily="18" charset="0"/>
+                                </a:rPr>
+                              </m:ctrlPr>
+                            </m:sSubPr>
+                            <m:e>
+                              <m:r>
+                                <a:rPr lang="en-US" sz="2000" b="1" i="1" smtClean="0">
+                                  <a:solidFill>
+                                    <a:srgbClr val="5B835A"/>
+                                  </a:solidFill>
+                                  <a:latin typeface="Cambria Math" panose="02040503050406030204" pitchFamily="18" charset="0"/>
+                                </a:rPr>
+                                <m:t>𝝁</m:t>
+                              </m:r>
+                            </m:e>
+                            <m:sub>
+                              <m:r>
+                                <m:rPr>
+                                  <m:sty m:val="p"/>
+                                </m:rPr>
+                                <a:rPr lang="en-US" sz="2000" b="1" i="1" smtClean="0">
+                                  <a:solidFill>
+                                    <a:srgbClr val="5B835A"/>
+                                  </a:solidFill>
+                                  <a:latin typeface="Cambria Math" panose="02040503050406030204" pitchFamily="18" charset="0"/>
+                                </a:rPr>
+                                <m:t>B</m:t>
+                              </m:r>
+                            </m:sub>
+                          </m:sSub>
+                        </m:oMath>
+                      </m:oMathPara>
+                    </a14:m>
+                    <a:endParaRPr lang="en-US" sz="2000" b="1" dirty="0">
+                      <a:solidFill>
+                        <a:srgbClr val="5B835A"/>
+                      </a:solidFill>
+                    </a:endParaRPr>
+                  </a:p>
+                  <a:p>
+                    <a:endParaRPr lang="en-US" sz="2000" b="1" dirty="0">
+                      <a:solidFill>
+                        <a:srgbClr val="5B835A"/>
+                      </a:solidFill>
+                    </a:endParaRPr>
+                  </a:p>
+                </p:txBody>
+              </p:sp>
+            </mc:Choice>
+            <mc:Fallback>
+              <p:sp>
+                <p:nvSpPr>
+                  <p:cNvPr id="38" name="TextBox 37">
+                    <a:extLst>
+                      <a:ext uri="{FF2B5EF4-FFF2-40B4-BE49-F238E27FC236}">
+                        <a16:creationId xmlns:a16="http://schemas.microsoft.com/office/drawing/2014/main" id="{A92EFDDF-E56A-B371-CBF7-2620662D30D8}"/>
+                      </a:ext>
+                    </a:extLst>
+                  </p:cNvPr>
+                  <p:cNvSpPr txBox="1">
+                    <a:spLocks noRot="1" noChangeAspect="1" noMove="1" noResize="1" noEditPoints="1" noAdjustHandles="1" noChangeArrowheads="1" noChangeShapeType="1" noTextEdit="1"/>
+                  </p:cNvSpPr>
+                  <p:nvPr/>
+                </p:nvSpPr>
+                <p:spPr>
+                  <a:xfrm>
+                    <a:off x="4637119" y="6628678"/>
+                    <a:ext cx="340950" cy="615553"/>
+                  </a:xfrm>
+                  <a:prstGeom prst="rect">
+                    <a:avLst/>
+                  </a:prstGeom>
+                  <a:blipFill>
+                    <a:blip r:embed="rId5"/>
+                    <a:stretch>
+                      <a:fillRect l="-21429" r="-7143"/>
+                    </a:stretch>
+                  </a:blipFill>
+                </p:spPr>
+                <p:txBody>
+                  <a:bodyPr/>
+                  <a:lstStyle/>
+                  <a:p>
+                    <a:r>
+                      <a:rPr lang="en-US">
+                        <a:noFill/>
+                      </a:rPr>
+                      <a:t> </a:t>
+                    </a:r>
+                  </a:p>
+                </p:txBody>
+              </p:sp>
+            </mc:Fallback>
+          </mc:AlternateContent>
+          <mc:AlternateContent xmlns:mc="http://schemas.openxmlformats.org/markup-compatibility/2006">
+            <mc:Choice xmlns:a14="http://schemas.microsoft.com/office/drawing/2010/main" Requires="a14">
+              <p:sp>
+                <p:nvSpPr>
+                  <p:cNvPr id="39" name="TextBox 38">
+                    <a:extLst>
+                      <a:ext uri="{FF2B5EF4-FFF2-40B4-BE49-F238E27FC236}">
+                        <a16:creationId xmlns:a16="http://schemas.microsoft.com/office/drawing/2014/main" id="{21FD1E90-CE2C-A1C6-6E5E-E509841F6E75}"/>
+                      </a:ext>
+                    </a:extLst>
+                  </p:cNvPr>
+                  <p:cNvSpPr txBox="1"/>
+                  <p:nvPr/>
+                </p:nvSpPr>
+                <p:spPr>
+                  <a:xfrm>
+                    <a:off x="5072491" y="6652480"/>
+                    <a:ext cx="340950" cy="615553"/>
+                  </a:xfrm>
+                  <a:prstGeom prst="rect">
+                    <a:avLst/>
+                  </a:prstGeom>
+                  <a:noFill/>
+                </p:spPr>
+                <p:txBody>
+                  <a:bodyPr wrap="square" lIns="0" tIns="0" rIns="0" bIns="0" rtlCol="0">
+                    <a:spAutoFit/>
+                  </a:bodyPr>
+                  <a:lstStyle/>
+                  <a:p>
+                    <a14:m>
+                      <m:oMathPara xmlns:m="http://schemas.openxmlformats.org/officeDocument/2006/math">
+                        <m:oMathParaPr>
+                          <m:jc m:val="centerGroup"/>
+                        </m:oMathParaPr>
+                        <m:oMath xmlns:m="http://schemas.openxmlformats.org/officeDocument/2006/math">
+                          <m:sSub>
+                            <m:sSubPr>
+                              <m:ctrlPr>
+                                <a:rPr lang="en-US" sz="2000" b="1" i="1" smtClean="0">
+                                  <a:solidFill>
+                                    <a:srgbClr val="E1795D"/>
+                                  </a:solidFill>
+                                  <a:latin typeface="Cambria Math" panose="02040503050406030204" pitchFamily="18" charset="0"/>
+                                </a:rPr>
+                              </m:ctrlPr>
+                            </m:sSubPr>
+                            <m:e>
+                              <m:r>
+                                <a:rPr lang="en-US" sz="2000" b="1" i="1" smtClean="0">
+                                  <a:solidFill>
+                                    <a:srgbClr val="E1795D"/>
+                                  </a:solidFill>
+                                  <a:latin typeface="Cambria Math" panose="02040503050406030204" pitchFamily="18" charset="0"/>
+                                </a:rPr>
+                                <m:t>𝝁</m:t>
+                              </m:r>
+                            </m:e>
+                            <m:sub>
+                              <m:r>
+                                <m:rPr>
+                                  <m:sty m:val="p"/>
+                                </m:rPr>
+                                <a:rPr lang="en-US" sz="2000" b="1" i="1" smtClean="0">
+                                  <a:solidFill>
+                                    <a:srgbClr val="E1795D"/>
+                                  </a:solidFill>
+                                  <a:latin typeface="Cambria Math" panose="02040503050406030204" pitchFamily="18" charset="0"/>
+                                </a:rPr>
+                                <m:t>C</m:t>
+                              </m:r>
+                            </m:sub>
+                          </m:sSub>
+                        </m:oMath>
+                      </m:oMathPara>
+                    </a14:m>
+                    <a:endParaRPr lang="en-US" sz="2000" b="1" dirty="0">
+                      <a:solidFill>
+                        <a:srgbClr val="E1795D"/>
+                      </a:solidFill>
+                    </a:endParaRPr>
+                  </a:p>
+                  <a:p>
+                    <a:endParaRPr lang="en-US" sz="2000" b="1" dirty="0">
+                      <a:solidFill>
+                        <a:srgbClr val="E1795D"/>
+                      </a:solidFill>
+                    </a:endParaRPr>
+                  </a:p>
+                </p:txBody>
+              </p:sp>
+            </mc:Choice>
+            <mc:Fallback>
+              <p:sp>
+                <p:nvSpPr>
+                  <p:cNvPr id="39" name="TextBox 38">
+                    <a:extLst>
+                      <a:ext uri="{FF2B5EF4-FFF2-40B4-BE49-F238E27FC236}">
+                        <a16:creationId xmlns:a16="http://schemas.microsoft.com/office/drawing/2014/main" id="{21FD1E90-CE2C-A1C6-6E5E-E509841F6E75}"/>
+                      </a:ext>
+                    </a:extLst>
+                  </p:cNvPr>
+                  <p:cNvSpPr txBox="1">
+                    <a:spLocks noRot="1" noChangeAspect="1" noMove="1" noResize="1" noEditPoints="1" noAdjustHandles="1" noChangeArrowheads="1" noChangeShapeType="1" noTextEdit="1"/>
+                  </p:cNvSpPr>
+                  <p:nvPr/>
+                </p:nvSpPr>
+                <p:spPr>
+                  <a:xfrm>
+                    <a:off x="5072491" y="6652480"/>
+                    <a:ext cx="340950" cy="615553"/>
+                  </a:xfrm>
+                  <a:prstGeom prst="rect">
+                    <a:avLst/>
+                  </a:prstGeom>
+                  <a:blipFill>
+                    <a:blip r:embed="rId6"/>
+                    <a:stretch>
+                      <a:fillRect l="-17857" r="-7143"/>
+                    </a:stretch>
+                  </a:blipFill>
+                </p:spPr>
+                <p:txBody>
+                  <a:bodyPr/>
+                  <a:lstStyle/>
+                  <a:p>
+                    <a:r>
+                      <a:rPr lang="en-US">
+                        <a:noFill/>
+                      </a:rPr>
+                      <a:t> </a:t>
+                    </a:r>
+                  </a:p>
+                </p:txBody>
+              </p:sp>
+            </mc:Fallback>
+          </mc:AlternateContent>
+          <mc:AlternateContent xmlns:mc="http://schemas.openxmlformats.org/markup-compatibility/2006">
+            <mc:Choice xmlns:a14="http://schemas.microsoft.com/office/drawing/2010/main" Requires="a14">
+              <p:sp>
+                <p:nvSpPr>
+                  <p:cNvPr id="40" name="TextBox 39">
+                    <a:extLst>
+                      <a:ext uri="{FF2B5EF4-FFF2-40B4-BE49-F238E27FC236}">
+                        <a16:creationId xmlns:a16="http://schemas.microsoft.com/office/drawing/2014/main" id="{7487E948-ECD6-6666-D485-3BA0A2967403}"/>
+                      </a:ext>
+                    </a:extLst>
+                  </p:cNvPr>
+                  <p:cNvSpPr txBox="1"/>
+                  <p:nvPr/>
+                </p:nvSpPr>
+                <p:spPr>
+                  <a:xfrm>
+                    <a:off x="5457621" y="6651727"/>
+                    <a:ext cx="340950" cy="615553"/>
+                  </a:xfrm>
+                  <a:prstGeom prst="rect">
+                    <a:avLst/>
+                  </a:prstGeom>
+                  <a:noFill/>
+                </p:spPr>
+                <p:txBody>
+                  <a:bodyPr wrap="square" lIns="0" tIns="0" rIns="0" bIns="0" rtlCol="0">
+                    <a:spAutoFit/>
+                  </a:bodyPr>
+                  <a:lstStyle/>
+                  <a:p>
+                    <a14:m>
+                      <m:oMathPara xmlns:m="http://schemas.openxmlformats.org/officeDocument/2006/math">
+                        <m:oMathParaPr>
+                          <m:jc m:val="centerGroup"/>
+                        </m:oMathParaPr>
+                        <m:oMath xmlns:m="http://schemas.openxmlformats.org/officeDocument/2006/math">
+                          <m:sSub>
+                            <m:sSubPr>
+                              <m:ctrlPr>
+                                <a:rPr lang="en-US" sz="2000" b="1" i="1" smtClean="0">
+                                  <a:solidFill>
+                                    <a:srgbClr val="467C9D"/>
+                                  </a:solidFill>
+                                  <a:latin typeface="Cambria Math" panose="02040503050406030204" pitchFamily="18" charset="0"/>
+                                </a:rPr>
+                              </m:ctrlPr>
+                            </m:sSubPr>
+                            <m:e>
+                              <m:r>
+                                <a:rPr lang="en-US" sz="2000" b="1" i="1" smtClean="0">
+                                  <a:solidFill>
+                                    <a:srgbClr val="467C9D"/>
+                                  </a:solidFill>
+                                  <a:latin typeface="Cambria Math" panose="02040503050406030204" pitchFamily="18" charset="0"/>
+                                </a:rPr>
+                                <m:t>𝝁</m:t>
+                              </m:r>
+                            </m:e>
+                            <m:sub>
+                              <m:r>
+                                <m:rPr>
+                                  <m:sty m:val="p"/>
+                                </m:rPr>
+                                <a:rPr lang="en-US" sz="2000" b="1" i="1" smtClean="0">
+                                  <a:solidFill>
+                                    <a:srgbClr val="467C9D"/>
+                                  </a:solidFill>
+                                  <a:latin typeface="Cambria Math" panose="02040503050406030204" pitchFamily="18" charset="0"/>
+                                </a:rPr>
+                                <m:t>D</m:t>
+                              </m:r>
+                            </m:sub>
+                          </m:sSub>
+                        </m:oMath>
+                      </m:oMathPara>
+                    </a14:m>
+                    <a:endParaRPr lang="en-US" sz="2000" b="1" dirty="0">
+                      <a:solidFill>
+                        <a:srgbClr val="467C9D"/>
+                      </a:solidFill>
+                    </a:endParaRPr>
+                  </a:p>
+                  <a:p>
+                    <a:endParaRPr lang="en-US" sz="2000" b="1" dirty="0">
+                      <a:solidFill>
+                        <a:srgbClr val="467C9D"/>
+                      </a:solidFill>
+                    </a:endParaRPr>
+                  </a:p>
+                </p:txBody>
+              </p:sp>
+            </mc:Choice>
+            <mc:Fallback>
+              <p:sp>
+                <p:nvSpPr>
+                  <p:cNvPr id="40" name="TextBox 39">
+                    <a:extLst>
+                      <a:ext uri="{FF2B5EF4-FFF2-40B4-BE49-F238E27FC236}">
+                        <a16:creationId xmlns:a16="http://schemas.microsoft.com/office/drawing/2014/main" id="{7487E948-ECD6-6666-D485-3BA0A2967403}"/>
+                      </a:ext>
+                    </a:extLst>
+                  </p:cNvPr>
+                  <p:cNvSpPr txBox="1">
+                    <a:spLocks noRot="1" noChangeAspect="1" noMove="1" noResize="1" noEditPoints="1" noAdjustHandles="1" noChangeArrowheads="1" noChangeShapeType="1" noTextEdit="1"/>
+                  </p:cNvSpPr>
+                  <p:nvPr/>
+                </p:nvSpPr>
+                <p:spPr>
+                  <a:xfrm>
+                    <a:off x="5457621" y="6651727"/>
+                    <a:ext cx="340950" cy="615553"/>
+                  </a:xfrm>
+                  <a:prstGeom prst="rect">
+                    <a:avLst/>
+                  </a:prstGeom>
+                  <a:blipFill>
+                    <a:blip r:embed="rId7"/>
+                    <a:stretch>
+                      <a:fillRect l="-21429" r="-10714"/>
+                    </a:stretch>
+                  </a:blipFill>
+                </p:spPr>
+                <p:txBody>
+                  <a:bodyPr/>
+                  <a:lstStyle/>
+                  <a:p>
+                    <a:r>
+                      <a:rPr lang="en-US">
+                        <a:noFill/>
+                      </a:rPr>
+                      <a:t> </a:t>
+                    </a:r>
+                  </a:p>
+                </p:txBody>
+              </p:sp>
+            </mc:Fallback>
+          </mc:AlternateContent>
+          <mc:AlternateContent xmlns:mc="http://schemas.openxmlformats.org/markup-compatibility/2006">
+            <mc:Choice xmlns:a14="http://schemas.microsoft.com/office/drawing/2010/main" Requires="a14">
+              <p:sp>
+                <p:nvSpPr>
+                  <p:cNvPr id="41" name="TextBox 40">
+                    <a:extLst>
+                      <a:ext uri="{FF2B5EF4-FFF2-40B4-BE49-F238E27FC236}">
+                        <a16:creationId xmlns:a16="http://schemas.microsoft.com/office/drawing/2014/main" id="{93DFD1D4-1004-FECC-F7F5-719B3280A53F}"/>
+                      </a:ext>
+                    </a:extLst>
+                  </p:cNvPr>
+                  <p:cNvSpPr txBox="1"/>
+                  <p:nvPr/>
+                </p:nvSpPr>
+                <p:spPr>
+                  <a:xfrm>
+                    <a:off x="6761073" y="6651727"/>
+                    <a:ext cx="340950" cy="615553"/>
+                  </a:xfrm>
+                  <a:prstGeom prst="rect">
+                    <a:avLst/>
+                  </a:prstGeom>
+                  <a:noFill/>
+                </p:spPr>
+                <p:txBody>
+                  <a:bodyPr wrap="square" lIns="0" tIns="0" rIns="0" bIns="0" rtlCol="0">
+                    <a:spAutoFit/>
+                  </a:bodyPr>
+                  <a:lstStyle/>
+                  <a:p>
+                    <a14:m>
+                      <m:oMathPara xmlns:m="http://schemas.openxmlformats.org/officeDocument/2006/math">
+                        <m:oMathParaPr>
+                          <m:jc m:val="centerGroup"/>
+                        </m:oMathParaPr>
+                        <m:oMath xmlns:m="http://schemas.openxmlformats.org/officeDocument/2006/math">
+                          <m:sSub>
+                            <m:sSubPr>
+                              <m:ctrlPr>
+                                <a:rPr lang="en-US" sz="2000" b="1" i="1" smtClean="0">
+                                  <a:solidFill>
+                                    <a:srgbClr val="F6BD5F"/>
+                                  </a:solidFill>
+                                  <a:latin typeface="Cambria Math" panose="02040503050406030204" pitchFamily="18" charset="0"/>
+                                </a:rPr>
+                              </m:ctrlPr>
+                            </m:sSubPr>
+                            <m:e>
+                              <m:r>
+                                <a:rPr lang="en-US" sz="2000" b="1" i="1" smtClean="0">
+                                  <a:solidFill>
+                                    <a:srgbClr val="F6BD5F"/>
+                                  </a:solidFill>
+                                  <a:latin typeface="Cambria Math" panose="02040503050406030204" pitchFamily="18" charset="0"/>
+                                </a:rPr>
+                                <m:t>𝝁</m:t>
+                              </m:r>
+                            </m:e>
+                            <m:sub>
+                              <m:r>
+                                <m:rPr>
+                                  <m:sty m:val="p"/>
+                                </m:rPr>
+                                <a:rPr lang="en-US" sz="2000" b="1" i="1" smtClean="0">
+                                  <a:solidFill>
+                                    <a:srgbClr val="F6BD5F"/>
+                                  </a:solidFill>
+                                  <a:latin typeface="Cambria Math" panose="02040503050406030204" pitchFamily="18" charset="0"/>
+                                </a:rPr>
+                                <m:t>E</m:t>
+                              </m:r>
+                            </m:sub>
+                          </m:sSub>
+                        </m:oMath>
+                      </m:oMathPara>
+                    </a14:m>
+                    <a:endParaRPr lang="en-US" sz="2000" b="1" dirty="0">
+                      <a:solidFill>
+                        <a:srgbClr val="F6BD5F"/>
+                      </a:solidFill>
+                    </a:endParaRPr>
+                  </a:p>
+                  <a:p>
+                    <a:endParaRPr lang="en-US" sz="2000" b="1" dirty="0">
+                      <a:solidFill>
+                        <a:srgbClr val="F6BD5F"/>
+                      </a:solidFill>
+                    </a:endParaRPr>
+                  </a:p>
+                </p:txBody>
+              </p:sp>
+            </mc:Choice>
+            <mc:Fallback>
+              <p:sp>
+                <p:nvSpPr>
+                  <p:cNvPr id="41" name="TextBox 40">
+                    <a:extLst>
+                      <a:ext uri="{FF2B5EF4-FFF2-40B4-BE49-F238E27FC236}">
+                        <a16:creationId xmlns:a16="http://schemas.microsoft.com/office/drawing/2014/main" id="{93DFD1D4-1004-FECC-F7F5-719B3280A53F}"/>
+                      </a:ext>
+                    </a:extLst>
+                  </p:cNvPr>
+                  <p:cNvSpPr txBox="1">
+                    <a:spLocks noRot="1" noChangeAspect="1" noMove="1" noResize="1" noEditPoints="1" noAdjustHandles="1" noChangeArrowheads="1" noChangeShapeType="1" noTextEdit="1"/>
+                  </p:cNvSpPr>
+                  <p:nvPr/>
+                </p:nvSpPr>
+                <p:spPr>
+                  <a:xfrm>
+                    <a:off x="6761073" y="6651727"/>
+                    <a:ext cx="340950" cy="615553"/>
+                  </a:xfrm>
+                  <a:prstGeom prst="rect">
+                    <a:avLst/>
+                  </a:prstGeom>
+                  <a:blipFill>
+                    <a:blip r:embed="rId8"/>
+                    <a:stretch>
+                      <a:fillRect l="-17857" r="-7143"/>
+                    </a:stretch>
+                  </a:blipFill>
+                </p:spPr>
+                <p:txBody>
+                  <a:bodyPr/>
+                  <a:lstStyle/>
+                  <a:p>
+                    <a:r>
+                      <a:rPr lang="en-US">
+                        <a:noFill/>
+                      </a:rPr>
+                      <a:t> </a:t>
+                    </a:r>
+                  </a:p>
+                </p:txBody>
+              </p:sp>
+            </mc:Fallback>
+          </mc:AlternateContent>
+          <p:cxnSp>
+            <p:nvCxnSpPr>
+              <p:cNvPr id="43" name="Straight Arrow Connector 42">
+                <a:extLst>
+                  <a:ext uri="{FF2B5EF4-FFF2-40B4-BE49-F238E27FC236}">
+                    <a16:creationId xmlns:a16="http://schemas.microsoft.com/office/drawing/2014/main" id="{1D99A336-64C8-53BD-CCA0-C74BE5F39BBE}"/>
+                  </a:ext>
+                </a:extLst>
+              </p:cNvPr>
+              <p:cNvCxnSpPr>
+                <a:cxnSpLocks/>
+              </p:cNvCxnSpPr>
+              <p:nvPr/>
+            </p:nvCxnSpPr>
+            <p:spPr>
+              <a:xfrm>
+                <a:off x="4974061" y="6186486"/>
+                <a:ext cx="4022984" cy="0"/>
+              </a:xfrm>
+              <a:prstGeom prst="straightConnector1">
+                <a:avLst/>
+              </a:prstGeom>
+              <a:ln>
+                <a:solidFill>
+                  <a:srgbClr val="FFC000"/>
+                </a:solidFill>
+                <a:headEnd type="triangle"/>
+                <a:tailEnd type="triangle"/>
+              </a:ln>
+            </p:spPr>
+            <p:style>
+              <a:lnRef idx="2">
+                <a:schemeClr val="accent1"/>
+              </a:lnRef>
+              <a:fillRef idx="0">
+                <a:schemeClr val="accent1"/>
+              </a:fillRef>
+              <a:effectRef idx="1">
+                <a:schemeClr val="accent1"/>
+              </a:effectRef>
+              <a:fontRef idx="minor">
+                <a:schemeClr val="tx1"/>
+              </a:fontRef>
+            </p:style>
+          </p:cxnSp>
+          <p:cxnSp>
+            <p:nvCxnSpPr>
+              <p:cNvPr id="45" name="Straight Arrow Connector 44">
+                <a:extLst>
+                  <a:ext uri="{FF2B5EF4-FFF2-40B4-BE49-F238E27FC236}">
+                    <a16:creationId xmlns:a16="http://schemas.microsoft.com/office/drawing/2014/main" id="{8C49943E-88F0-C0CC-56FC-C7A1F3A9A291}"/>
+                  </a:ext>
+                </a:extLst>
+              </p:cNvPr>
+              <p:cNvCxnSpPr>
+                <a:cxnSpLocks/>
+              </p:cNvCxnSpPr>
+              <p:nvPr/>
+            </p:nvCxnSpPr>
+            <p:spPr>
+              <a:xfrm>
+                <a:off x="4359018" y="6306229"/>
+                <a:ext cx="2380634" cy="0"/>
+              </a:xfrm>
+              <a:prstGeom prst="straightConnector1">
+                <a:avLst/>
+              </a:prstGeom>
+              <a:ln>
+                <a:solidFill>
+                  <a:srgbClr val="467C9D"/>
+                </a:solidFill>
+                <a:headEnd type="triangle"/>
+                <a:tailEnd type="triangle"/>
+              </a:ln>
+            </p:spPr>
+            <p:style>
+              <a:lnRef idx="2">
+                <a:schemeClr val="accent1"/>
+              </a:lnRef>
+              <a:fillRef idx="0">
+                <a:schemeClr val="accent1"/>
+              </a:fillRef>
+              <a:effectRef idx="1">
+                <a:schemeClr val="accent1"/>
+              </a:effectRef>
+              <a:fontRef idx="minor">
+                <a:schemeClr val="tx1"/>
+              </a:fontRef>
+            </p:style>
+          </p:cxnSp>
+          <p:cxnSp>
+            <p:nvCxnSpPr>
+              <p:cNvPr id="47" name="Straight Arrow Connector 46">
+                <a:extLst>
+                  <a:ext uri="{FF2B5EF4-FFF2-40B4-BE49-F238E27FC236}">
+                    <a16:creationId xmlns:a16="http://schemas.microsoft.com/office/drawing/2014/main" id="{F5D99511-7E2C-5FFA-B45B-E957585C5458}"/>
+                  </a:ext>
+                </a:extLst>
+              </p:cNvPr>
+              <p:cNvCxnSpPr>
+                <a:cxnSpLocks/>
+              </p:cNvCxnSpPr>
+              <p:nvPr/>
+            </p:nvCxnSpPr>
+            <p:spPr>
+              <a:xfrm>
+                <a:off x="4411067" y="6004895"/>
+                <a:ext cx="1602108" cy="0"/>
+              </a:xfrm>
+              <a:prstGeom prst="straightConnector1">
+                <a:avLst/>
+              </a:prstGeom>
+              <a:ln>
+                <a:solidFill>
+                  <a:srgbClr val="E1795D"/>
+                </a:solidFill>
+                <a:headEnd type="triangle"/>
+                <a:tailEnd type="triangle"/>
+              </a:ln>
+            </p:spPr>
+            <p:style>
+              <a:lnRef idx="2">
+                <a:schemeClr val="accent1"/>
+              </a:lnRef>
+              <a:fillRef idx="0">
+                <a:schemeClr val="accent1"/>
+              </a:fillRef>
+              <a:effectRef idx="1">
+                <a:schemeClr val="accent1"/>
+              </a:effectRef>
+              <a:fontRef idx="minor">
+                <a:schemeClr val="tx1"/>
+              </a:fontRef>
+            </p:style>
+          </p:cxnSp>
+          <p:cxnSp>
+            <p:nvCxnSpPr>
+              <p:cNvPr id="49" name="Straight Arrow Connector 48">
+                <a:extLst>
+                  <a:ext uri="{FF2B5EF4-FFF2-40B4-BE49-F238E27FC236}">
+                    <a16:creationId xmlns:a16="http://schemas.microsoft.com/office/drawing/2014/main" id="{031071CB-8A83-7B70-6AC2-44026C1EC2A6}"/>
+                  </a:ext>
+                </a:extLst>
+              </p:cNvPr>
+              <p:cNvCxnSpPr>
+                <a:cxnSpLocks/>
+              </p:cNvCxnSpPr>
+              <p:nvPr/>
+            </p:nvCxnSpPr>
+            <p:spPr>
+              <a:xfrm>
+                <a:off x="3014062" y="6429438"/>
+                <a:ext cx="3725590" cy="0"/>
+              </a:xfrm>
+              <a:prstGeom prst="straightConnector1">
+                <a:avLst/>
+              </a:prstGeom>
+              <a:ln>
+                <a:solidFill>
+                  <a:srgbClr val="5B835A"/>
+                </a:solidFill>
+                <a:headEnd type="triangle"/>
+                <a:tailEnd type="triangle"/>
+              </a:ln>
+            </p:spPr>
+            <p:style>
+              <a:lnRef idx="2">
+                <a:schemeClr val="accent1"/>
+              </a:lnRef>
+              <a:fillRef idx="0">
+                <a:schemeClr val="accent1"/>
+              </a:fillRef>
+              <a:effectRef idx="1">
+                <a:schemeClr val="accent1"/>
+              </a:effectRef>
+              <a:fontRef idx="minor">
+                <a:schemeClr val="tx1"/>
+              </a:fontRef>
+            </p:style>
+          </p:cxnSp>
+          <p:cxnSp>
+            <p:nvCxnSpPr>
+              <p:cNvPr id="51" name="Straight Arrow Connector 50">
+                <a:extLst>
+                  <a:ext uri="{FF2B5EF4-FFF2-40B4-BE49-F238E27FC236}">
+                    <a16:creationId xmlns:a16="http://schemas.microsoft.com/office/drawing/2014/main" id="{5FC5DE2A-1AA4-5AE1-6B86-F62422708AD8}"/>
+                  </a:ext>
+                </a:extLst>
+              </p:cNvPr>
+              <p:cNvCxnSpPr>
+                <a:cxnSpLocks/>
+              </p:cNvCxnSpPr>
+              <p:nvPr/>
+            </p:nvCxnSpPr>
+            <p:spPr>
+              <a:xfrm>
+                <a:off x="2923378" y="6119193"/>
+                <a:ext cx="2033270" cy="0"/>
+              </a:xfrm>
+              <a:prstGeom prst="straightConnector1">
+                <a:avLst/>
+              </a:prstGeom>
+              <a:ln>
+                <a:solidFill>
+                  <a:srgbClr val="825E65"/>
+                </a:solidFill>
+                <a:headEnd type="triangle"/>
+                <a:tailEnd type="triangle"/>
+              </a:ln>
+            </p:spPr>
+            <p:style>
+              <a:lnRef idx="2">
+                <a:schemeClr val="accent1"/>
+              </a:lnRef>
+              <a:fillRef idx="0">
+                <a:schemeClr val="accent1"/>
+              </a:fillRef>
+              <a:effectRef idx="1">
+                <a:schemeClr val="accent1"/>
+              </a:effectRef>
+              <a:fontRef idx="minor">
+                <a:schemeClr val="tx1"/>
+              </a:fontRef>
+            </p:style>
+          </p:cxnSp>
+          <p:cxnSp>
+            <p:nvCxnSpPr>
+              <p:cNvPr id="58" name="Straight Arrow Connector 57">
+                <a:extLst>
+                  <a:ext uri="{FF2B5EF4-FFF2-40B4-BE49-F238E27FC236}">
+                    <a16:creationId xmlns:a16="http://schemas.microsoft.com/office/drawing/2014/main" id="{1D47C2BE-97C7-5AAD-C7D9-0CAF8BFB3FB2}"/>
+                  </a:ext>
+                </a:extLst>
+              </p:cNvPr>
+              <p:cNvCxnSpPr>
+                <a:cxnSpLocks/>
+              </p:cNvCxnSpPr>
+              <p:nvPr/>
+            </p:nvCxnSpPr>
+            <p:spPr>
+              <a:xfrm>
+                <a:off x="1325480" y="2988064"/>
+                <a:ext cx="8805217" cy="0"/>
+              </a:xfrm>
+              <a:prstGeom prst="straightConnector1">
+                <a:avLst/>
+              </a:prstGeom>
+              <a:ln>
+                <a:solidFill>
+                  <a:schemeClr val="bg2">
+                    <a:lumMod val="50000"/>
+                  </a:schemeClr>
+                </a:solidFill>
+                <a:headEnd type="triangle"/>
+                <a:tailEnd type="triangle"/>
+              </a:ln>
+            </p:spPr>
+            <p:style>
+              <a:lnRef idx="2">
+                <a:schemeClr val="accent1"/>
+              </a:lnRef>
+              <a:fillRef idx="0">
+                <a:schemeClr val="accent1"/>
+              </a:fillRef>
+              <a:effectRef idx="1">
+                <a:schemeClr val="accent1"/>
+              </a:effectRef>
+              <a:fontRef idx="minor">
+                <a:schemeClr val="tx1"/>
+              </a:fontRef>
+            </p:style>
+          </p:cxnSp>
+          <mc:AlternateContent xmlns:mc="http://schemas.openxmlformats.org/markup-compatibility/2006">
+            <mc:Choice xmlns:a14="http://schemas.microsoft.com/office/drawing/2010/main" Requires="a14">
+              <p:sp>
+                <p:nvSpPr>
+                  <p:cNvPr id="60" name="TextBox 59">
+                    <a:extLst>
+                      <a:ext uri="{FF2B5EF4-FFF2-40B4-BE49-F238E27FC236}">
+                        <a16:creationId xmlns:a16="http://schemas.microsoft.com/office/drawing/2014/main" id="{99F515A5-D328-C211-CA4A-CD84C5785392}"/>
+                      </a:ext>
+                    </a:extLst>
+                  </p:cNvPr>
+                  <p:cNvSpPr txBox="1"/>
+                  <p:nvPr/>
+                </p:nvSpPr>
+                <p:spPr>
+                  <a:xfrm>
+                    <a:off x="1205947" y="3081536"/>
+                    <a:ext cx="759009" cy="314766"/>
+                  </a:xfrm>
+                  <a:prstGeom prst="rect">
+                    <a:avLst/>
+                  </a:prstGeom>
+                  <a:noFill/>
+                </p:spPr>
+                <p:txBody>
+                  <a:bodyPr wrap="square" lIns="0" tIns="0" rIns="0" bIns="0" rtlCol="0">
+                    <a:spAutoFit/>
+                  </a:bodyPr>
+                  <a:lstStyle/>
+                  <a:p>
+                    <a14:m>
+                      <m:oMathPara xmlns:m="http://schemas.openxmlformats.org/officeDocument/2006/math">
+                        <m:oMathParaPr>
+                          <m:jc m:val="centerGroup"/>
+                        </m:oMathParaPr>
+                        <m:oMath xmlns:m="http://schemas.openxmlformats.org/officeDocument/2006/math">
+                          <m:sSubSup>
+                            <m:sSubSupPr>
+                              <m:ctrlPr>
+                                <a:rPr lang="en-US" sz="2000" b="1" i="1" smtClean="0">
+                                  <a:solidFill>
+                                    <a:schemeClr val="tx1">
+                                      <a:lumMod val="65000"/>
+                                      <a:lumOff val="35000"/>
+                                    </a:schemeClr>
+                                  </a:solidFill>
+                                  <a:latin typeface="Cambria Math" panose="02040503050406030204" pitchFamily="18" charset="0"/>
+                                </a:rPr>
+                              </m:ctrlPr>
+                            </m:sSubSupPr>
+                            <m:e>
+                              <m:r>
+                                <a:rPr lang="en-US" sz="2000" b="1" i="1" smtClean="0">
+                                  <a:solidFill>
+                                    <a:schemeClr val="tx1">
+                                      <a:lumMod val="65000"/>
+                                      <a:lumOff val="35000"/>
+                                    </a:schemeClr>
+                                  </a:solidFill>
+                                  <a:latin typeface="Cambria Math" panose="02040503050406030204" pitchFamily="18" charset="0"/>
+                                </a:rPr>
+                                <m:t>𝝈</m:t>
+                              </m:r>
+                            </m:e>
+                            <m:sub>
+                              <m:r>
+                                <a:rPr lang="en-US" sz="2000" b="1" i="1" smtClean="0">
+                                  <a:solidFill>
+                                    <a:schemeClr val="tx1">
+                                      <a:lumMod val="65000"/>
+                                      <a:lumOff val="35000"/>
+                                    </a:schemeClr>
+                                  </a:solidFill>
+                                  <a:latin typeface="Cambria Math" panose="02040503050406030204" pitchFamily="18" charset="0"/>
+                                </a:rPr>
+                                <m:t>𝜶</m:t>
+                              </m:r>
+                            </m:sub>
+                            <m:sup>
+                              <m:r>
+                                <a:rPr lang="en-US" sz="2000" b="1" i="1" smtClean="0">
+                                  <a:solidFill>
+                                    <a:schemeClr val="tx1">
+                                      <a:lumMod val="65000"/>
+                                      <a:lumOff val="35000"/>
+                                    </a:schemeClr>
+                                  </a:solidFill>
+                                  <a:latin typeface="Cambria Math" panose="02040503050406030204" pitchFamily="18" charset="0"/>
+                                </a:rPr>
+                                <m:t>𝟐</m:t>
+                              </m:r>
+                            </m:sup>
+                          </m:sSubSup>
+                        </m:oMath>
+                      </m:oMathPara>
+                    </a14:m>
+                    <a:endParaRPr lang="en-US" sz="2000" b="1" dirty="0">
+                      <a:solidFill>
+                        <a:schemeClr val="tx1">
+                          <a:lumMod val="65000"/>
+                          <a:lumOff val="35000"/>
+                        </a:schemeClr>
+                      </a:solidFill>
+                    </a:endParaRPr>
+                  </a:p>
+                </p:txBody>
+              </p:sp>
+            </mc:Choice>
+            <mc:Fallback>
+              <p:sp>
+                <p:nvSpPr>
+                  <p:cNvPr id="60" name="TextBox 59">
+                    <a:extLst>
+                      <a:ext uri="{FF2B5EF4-FFF2-40B4-BE49-F238E27FC236}">
+                        <a16:creationId xmlns:a16="http://schemas.microsoft.com/office/drawing/2014/main" id="{99F515A5-D328-C211-CA4A-CD84C5785392}"/>
+                      </a:ext>
+                    </a:extLst>
+                  </p:cNvPr>
+                  <p:cNvSpPr txBox="1">
+                    <a:spLocks noRot="1" noChangeAspect="1" noMove="1" noResize="1" noEditPoints="1" noAdjustHandles="1" noChangeArrowheads="1" noChangeShapeType="1" noTextEdit="1"/>
+                  </p:cNvSpPr>
+                  <p:nvPr/>
+                </p:nvSpPr>
+                <p:spPr>
+                  <a:xfrm>
+                    <a:off x="1205947" y="3081536"/>
+                    <a:ext cx="759009" cy="314766"/>
+                  </a:xfrm>
+                  <a:prstGeom prst="rect">
+                    <a:avLst/>
+                  </a:prstGeom>
+                  <a:blipFill>
+                    <a:blip r:embed="rId9"/>
+                    <a:stretch>
+                      <a:fillRect t="-3846" b="-7692"/>
+                    </a:stretch>
+                  </a:blipFill>
+                </p:spPr>
+                <p:txBody>
+                  <a:bodyPr/>
+                  <a:lstStyle/>
+                  <a:p>
+                    <a:r>
+                      <a:rPr lang="en-US">
+                        <a:noFill/>
+                      </a:rPr>
+                      <a:t> </a:t>
+                    </a:r>
+                  </a:p>
+                </p:txBody>
+              </p:sp>
+            </mc:Fallback>
+          </mc:AlternateContent>
+          <mc:AlternateContent xmlns:mc="http://schemas.openxmlformats.org/markup-compatibility/2006">
+            <mc:Choice xmlns:a14="http://schemas.microsoft.com/office/drawing/2010/main" Requires="a14">
+              <p:sp>
+                <p:nvSpPr>
+                  <p:cNvPr id="61" name="TextBox 60">
+                    <a:extLst>
+                      <a:ext uri="{FF2B5EF4-FFF2-40B4-BE49-F238E27FC236}">
+                        <a16:creationId xmlns:a16="http://schemas.microsoft.com/office/drawing/2014/main" id="{0C73520D-7D4F-DAAB-6555-771081ED2139}"/>
+                      </a:ext>
+                    </a:extLst>
+                  </p:cNvPr>
+                  <p:cNvSpPr txBox="1"/>
+                  <p:nvPr/>
+                </p:nvSpPr>
+                <p:spPr>
+                  <a:xfrm>
+                    <a:off x="9194267" y="6102324"/>
+                    <a:ext cx="759009" cy="314766"/>
+                  </a:xfrm>
+                  <a:prstGeom prst="rect">
+                    <a:avLst/>
+                  </a:prstGeom>
+                  <a:noFill/>
+                </p:spPr>
+                <p:txBody>
+                  <a:bodyPr wrap="square" lIns="0" tIns="0" rIns="0" bIns="0" rtlCol="0">
+                    <a:spAutoFit/>
+                  </a:bodyPr>
+                  <a:lstStyle/>
+                  <a:p>
+                    <a14:m>
+                      <m:oMathPara xmlns:m="http://schemas.openxmlformats.org/officeDocument/2006/math">
+                        <m:oMathParaPr>
+                          <m:jc m:val="centerGroup"/>
+                        </m:oMathParaPr>
+                        <m:oMath xmlns:m="http://schemas.openxmlformats.org/officeDocument/2006/math">
+                          <m:r>
+                            <m:rPr>
+                              <m:sty m:val="p"/>
+                            </m:rPr>
+                            <a:rPr lang="en-US" sz="2000" b="1" i="1" smtClean="0">
+                              <a:solidFill>
+                                <a:schemeClr val="tx1">
+                                  <a:lumMod val="85000"/>
+                                  <a:lumOff val="15000"/>
+                                </a:schemeClr>
+                              </a:solidFill>
+                              <a:latin typeface="Cambria Math" panose="02040503050406030204" pitchFamily="18" charset="0"/>
+                            </a:rPr>
+                            <m:t>σ</m:t>
+                          </m:r>
+                        </m:oMath>
+                      </m:oMathPara>
+                    </a14:m>
+                    <a:endParaRPr lang="en-US" sz="2000" b="1" dirty="0">
+                      <a:solidFill>
+                        <a:schemeClr val="tx1">
+                          <a:lumMod val="85000"/>
+                          <a:lumOff val="15000"/>
+                        </a:schemeClr>
+                      </a:solidFill>
+                    </a:endParaRPr>
+                  </a:p>
+                </p:txBody>
+              </p:sp>
+            </mc:Choice>
+            <mc:Fallback>
+              <p:sp>
+                <p:nvSpPr>
+                  <p:cNvPr id="61" name="TextBox 60">
+                    <a:extLst>
+                      <a:ext uri="{FF2B5EF4-FFF2-40B4-BE49-F238E27FC236}">
+                        <a16:creationId xmlns:a16="http://schemas.microsoft.com/office/drawing/2014/main" id="{0C73520D-7D4F-DAAB-6555-771081ED2139}"/>
+                      </a:ext>
+                    </a:extLst>
+                  </p:cNvPr>
+                  <p:cNvSpPr txBox="1">
+                    <a:spLocks noRot="1" noChangeAspect="1" noMove="1" noResize="1" noEditPoints="1" noAdjustHandles="1" noChangeArrowheads="1" noChangeShapeType="1" noTextEdit="1"/>
+                  </p:cNvSpPr>
+                  <p:nvPr/>
+                </p:nvSpPr>
+                <p:spPr>
+                  <a:xfrm>
+                    <a:off x="9194267" y="6102324"/>
+                    <a:ext cx="759009" cy="314766"/>
+                  </a:xfrm>
+                  <a:prstGeom prst="rect">
+                    <a:avLst/>
+                  </a:prstGeom>
+                  <a:blipFill>
+                    <a:blip r:embed="rId10"/>
+                    <a:stretch>
+                      <a:fillRect/>
+                    </a:stretch>
+                  </a:blipFill>
+                </p:spPr>
+                <p:txBody>
+                  <a:bodyPr/>
+                  <a:lstStyle/>
+                  <a:p>
+                    <a:r>
+                      <a:rPr lang="en-US">
+                        <a:noFill/>
+                      </a:rPr>
+                      <a:t> </a:t>
+                    </a:r>
+                  </a:p>
+                </p:txBody>
+              </p:sp>
+            </mc:Fallback>
+          </mc:AlternateContent>
+          <p:sp>
+            <p:nvSpPr>
+              <p:cNvPr id="66" name="TextBox 65">
+                <a:extLst>
+                  <a:ext uri="{FF2B5EF4-FFF2-40B4-BE49-F238E27FC236}">
+                    <a16:creationId xmlns:a16="http://schemas.microsoft.com/office/drawing/2014/main" id="{04EC279C-6677-03B4-D1E4-717126AE8E01}"/>
+                  </a:ext>
+                </a:extLst>
+              </p:cNvPr>
+              <p:cNvSpPr txBox="1"/>
+              <p:nvPr/>
+            </p:nvSpPr>
+            <p:spPr>
+              <a:xfrm>
+                <a:off x="7968347" y="7086602"/>
+                <a:ext cx="184731" cy="369332"/>
+              </a:xfrm>
+              <a:prstGeom prst="rect">
+                <a:avLst/>
+              </a:prstGeom>
+              <a:noFill/>
+            </p:spPr>
+            <p:txBody>
+              <a:bodyPr wrap="none" rtlCol="0">
+                <a:spAutoFit/>
+              </a:bodyPr>
+              <a:lstStyle/>
+              <a:p>
+                <a:endParaRPr lang="en-US" dirty="0"/>
+              </a:p>
+            </p:txBody>
+          </p:sp>
+          <p:sp>
+            <p:nvSpPr>
+              <p:cNvPr id="67" name="Right Brace 66">
+                <a:extLst>
+                  <a:ext uri="{FF2B5EF4-FFF2-40B4-BE49-F238E27FC236}">
+                    <a16:creationId xmlns:a16="http://schemas.microsoft.com/office/drawing/2014/main" id="{F683B5FE-1DD6-90A8-B325-6F09DDC0B3E1}"/>
+                  </a:ext>
+                </a:extLst>
+              </p:cNvPr>
+              <p:cNvSpPr/>
+              <p:nvPr/>
+            </p:nvSpPr>
+            <p:spPr>
+              <a:xfrm>
+                <a:off x="9194267" y="6004895"/>
+                <a:ext cx="96691" cy="463909"/>
+              </a:xfrm>
+              <a:prstGeom prst="rightBrace">
+                <a:avLst/>
+              </a:prstGeom>
+            </p:spPr>
+            <p:style>
+              <a:lnRef idx="2">
+                <a:schemeClr val="dk1"/>
+              </a:lnRef>
+              <a:fillRef idx="0">
+                <a:schemeClr val="dk1"/>
+              </a:fillRef>
+              <a:effectRef idx="1">
+                <a:schemeClr val="dk1"/>
+              </a:effectRef>
+              <a:fontRef idx="minor">
+                <a:schemeClr val="tx1"/>
+              </a:fontRef>
+            </p:style>
+            <p:txBody>
+              <a:bodyPr rtlCol="0" anchor="ctr"/>
+              <a:lstStyle/>
+              <a:p>
+                <a:pPr algn="ctr"/>
+                <a:endParaRPr lang="en-US"/>
+              </a:p>
+            </p:txBody>
+          </p:sp>
+          <p:sp>
+            <p:nvSpPr>
+              <p:cNvPr id="68" name="TextBox 67">
+                <a:extLst>
+                  <a:ext uri="{FF2B5EF4-FFF2-40B4-BE49-F238E27FC236}">
+                    <a16:creationId xmlns:a16="http://schemas.microsoft.com/office/drawing/2014/main" id="{59B3F19F-8B25-2052-6750-2B94348D6985}"/>
+                  </a:ext>
+                </a:extLst>
+              </p:cNvPr>
+              <p:cNvSpPr txBox="1"/>
+              <p:nvPr/>
+            </p:nvSpPr>
+            <p:spPr>
+              <a:xfrm>
+                <a:off x="9440408" y="5442460"/>
+                <a:ext cx="1677662" cy="369332"/>
+              </a:xfrm>
+              <a:prstGeom prst="rect">
+                <a:avLst/>
+              </a:prstGeom>
+              <a:noFill/>
+            </p:spPr>
+            <p:txBody>
+              <a:bodyPr wrap="square" rtlCol="0">
+                <a:spAutoFit/>
+              </a:bodyPr>
+              <a:lstStyle/>
+              <a:p>
+                <a:pPr algn="ctr"/>
+                <a:r>
+                  <a:rPr lang="en-US" b="1" dirty="0" err="1">
+                    <a:latin typeface="Aptos Light" panose="020B0004020202020204" pitchFamily="34" charset="0"/>
+                  </a:rPr>
+                  <a:t>Nível</a:t>
+                </a:r>
+                <a:r>
+                  <a:rPr lang="en-US" b="1" dirty="0">
+                    <a:latin typeface="Aptos Light" panose="020B0004020202020204" pitchFamily="34" charset="0"/>
+                  </a:rPr>
+                  <a:t> de </a:t>
+                </a:r>
+                <a:r>
+                  <a:rPr lang="en-US" b="1" dirty="0" err="1">
+                    <a:latin typeface="Aptos Light" panose="020B0004020202020204" pitchFamily="34" charset="0"/>
+                  </a:rPr>
+                  <a:t>grupo</a:t>
+                </a:r>
+                <a:endParaRPr lang="en-US" b="1" dirty="0">
+                  <a:latin typeface="Aptos Light" panose="020B0004020202020204" pitchFamily="34" charset="0"/>
+                </a:endParaRPr>
+              </a:p>
+            </p:txBody>
+          </p:sp>
+        </p:grpSp>
+      </p:grpSp>
+    </p:spTree>
+    <p:extLst>
+      <p:ext uri="{BB962C8B-B14F-4D97-AF65-F5344CB8AC3E}">
+        <p14:creationId xmlns:p14="http://schemas.microsoft.com/office/powerpoint/2010/main" val="1995668596"/>
+      </p:ext>
+    </p:extLst>
+  </p:cSld>
+  <p:clrMapOvr>
+    <a:masterClrMapping/>
+  </p:clrMapOvr>
+</p:sld>
+</file>
+
+<file path=ppt/slides/slide14.xml><?xml version="1.0" encoding="utf-8"?>
+<p:sld xmlns:a="http://schemas.openxmlformats.org/drawingml/2006/main" xmlns:r="http://schemas.openxmlformats.org/officeDocument/2006/relationships" xmlns:p="http://schemas.openxmlformats.org/presentationml/2006/main">
+  <p:cSld>
+    <p:spTree>
+      <p:nvGrpSpPr>
+        <p:cNvPr id="1" name=""/>
+        <p:cNvGrpSpPr/>
+        <p:nvPr/>
+      </p:nvGrpSpPr>
+      <p:grpSpPr>
+        <a:xfrm>
+          <a:off x="0" y="0"/>
+          <a:ext cx="0" cy="0"/>
+          <a:chOff x="0" y="0"/>
+          <a:chExt cx="0" cy="0"/>
+        </a:xfrm>
+      </p:grpSpPr>
+      <p:grpSp>
+        <p:nvGrpSpPr>
           <p:cNvPr id="69" name="Group 68">
             <a:extLst>
               <a:ext uri="{FF2B5EF4-FFF2-40B4-BE49-F238E27FC236}">
@@ -14461,7 +16851,7 @@
 </p:sld>
 </file>
 
-<file path=ppt/slides/slide14.xml><?xml version="1.0" encoding="utf-8"?>
+<file path=ppt/slides/slide15.xml><?xml version="1.0" encoding="utf-8"?>
 <p:sld xmlns:a="http://schemas.openxmlformats.org/drawingml/2006/main" xmlns:r="http://schemas.openxmlformats.org/officeDocument/2006/relationships" xmlns:p="http://schemas.openxmlformats.org/presentationml/2006/main">
   <p:cSld>
     <p:spTree>
@@ -20777,7 +23167,7 @@
 </p:sld>
 </file>
 
-<file path=ppt/slides/slide15.xml><?xml version="1.0" encoding="utf-8"?>
+<file path=ppt/slides/slide16.xml><?xml version="1.0" encoding="utf-8"?>
 <p:sld xmlns:a="http://schemas.openxmlformats.org/drawingml/2006/main" xmlns:r="http://schemas.openxmlformats.org/officeDocument/2006/relationships" xmlns:p="http://schemas.openxmlformats.org/presentationml/2006/main">
   <p:cSld>
     <p:spTree>
@@ -23627,7 +26017,7 @@
 </p:sld>
 </file>
 
-<file path=ppt/slides/slide16.xml><?xml version="1.0" encoding="utf-8"?>
+<file path=ppt/slides/slide17.xml><?xml version="1.0" encoding="utf-8"?>
 <p:sld xmlns:a="http://schemas.openxmlformats.org/drawingml/2006/main" xmlns:r="http://schemas.openxmlformats.org/officeDocument/2006/relationships" xmlns:p="http://schemas.openxmlformats.org/presentationml/2006/main">
   <p:cSld>
     <p:spTree>
@@ -25943,7 +28333,7 @@
 </p:sld>
 </file>
 
-<file path=ppt/slides/slide17.xml><?xml version="1.0" encoding="utf-8"?>
+<file path=ppt/slides/slide18.xml><?xml version="1.0" encoding="utf-8"?>
 <p:sld xmlns:a="http://schemas.openxmlformats.org/drawingml/2006/main" xmlns:r="http://schemas.openxmlformats.org/officeDocument/2006/relationships" xmlns:p="http://schemas.openxmlformats.org/presentationml/2006/main">
   <p:cSld>
     <p:spTree>
@@ -28776,7 +31166,7 @@
 </p:sld>
 </file>
 
-<file path=ppt/slides/slide18.xml><?xml version="1.0" encoding="utf-8"?>
+<file path=ppt/slides/slide19.xml><?xml version="1.0" encoding="utf-8"?>
 <p:sld xmlns:a="http://schemas.openxmlformats.org/drawingml/2006/main" xmlns:r="http://schemas.openxmlformats.org/officeDocument/2006/relationships" xmlns:p="http://schemas.openxmlformats.org/presentationml/2006/main">
   <p:cSld>
     <p:spTree>

--- a/Figuras/Figuras_prep.pptx
+++ b/Figuras/Figuras_prep.pptx
@@ -143,7 +143,7 @@
   <pc:docChgLst>
     <pc:chgData name="Marie-Christine Rufener" userId="2d6664cfb518d05c" providerId="LiveId" clId="{946B3BF8-DE9F-57F9-A118-BDE1986E26EE}"/>
     <pc:docChg chg="undo redo custSel addSld delSld modSld sldOrd">
-      <pc:chgData name="Marie-Christine Rufener" userId="2d6664cfb518d05c" providerId="LiveId" clId="{946B3BF8-DE9F-57F9-A118-BDE1986E26EE}" dt="2026-08-14T15:19:08.899" v="8943" actId="164"/>
+      <pc:chgData name="Marie-Christine Rufener" userId="2d6664cfb518d05c" providerId="LiveId" clId="{946B3BF8-DE9F-57F9-A118-BDE1986E26EE}" dt="2026-08-14T20:32:38.039" v="8999" actId="1076"/>
       <pc:docMkLst>
         <pc:docMk/>
       </pc:docMkLst>
@@ -1076,7 +1076,7 @@
         </pc:sldMkLst>
       </pc:sldChg>
       <pc:sldChg chg="addSp delSp modSp new mod">
-        <pc:chgData name="Marie-Christine Rufener" userId="2d6664cfb518d05c" providerId="LiveId" clId="{946B3BF8-DE9F-57F9-A118-BDE1986E26EE}" dt="2026-08-07T22:46:28.977" v="3497" actId="164"/>
+        <pc:chgData name="Marie-Christine Rufener" userId="2d6664cfb518d05c" providerId="LiveId" clId="{946B3BF8-DE9F-57F9-A118-BDE1986E26EE}" dt="2026-08-14T20:32:38.039" v="8999" actId="1076"/>
         <pc:sldMkLst>
           <pc:docMk/>
           <pc:sldMk cId="2631827586" sldId="270"/>
@@ -1106,7 +1106,7 @@
           </ac:spMkLst>
         </pc:spChg>
         <pc:spChg chg="add mod">
-          <ac:chgData name="Marie-Christine Rufener" userId="2d6664cfb518d05c" providerId="LiveId" clId="{946B3BF8-DE9F-57F9-A118-BDE1986E26EE}" dt="2026-08-07T22:24:17.693" v="3371" actId="20577"/>
+          <ac:chgData name="Marie-Christine Rufener" userId="2d6664cfb518d05c" providerId="LiveId" clId="{946B3BF8-DE9F-57F9-A118-BDE1986E26EE}" dt="2026-08-14T20:32:02.109" v="8993" actId="20577"/>
           <ac:spMkLst>
             <pc:docMk/>
             <pc:sldMk cId="2631827586" sldId="270"/>
@@ -1146,7 +1146,7 @@
           </ac:spMkLst>
         </pc:spChg>
         <pc:spChg chg="add mod topLvl">
-          <ac:chgData name="Marie-Christine Rufener" userId="2d6664cfb518d05c" providerId="LiveId" clId="{946B3BF8-DE9F-57F9-A118-BDE1986E26EE}" dt="2026-08-07T22:46:02.172" v="3473" actId="164"/>
+          <ac:chgData name="Marie-Christine Rufener" userId="2d6664cfb518d05c" providerId="LiveId" clId="{946B3BF8-DE9F-57F9-A118-BDE1986E26EE}" dt="2026-08-14T20:32:24.501" v="8994" actId="1076"/>
           <ac:spMkLst>
             <pc:docMk/>
             <pc:sldMk cId="2631827586" sldId="270"/>
@@ -1178,7 +1178,7 @@
           </ac:spMkLst>
         </pc:spChg>
         <pc:spChg chg="add mod">
-          <ac:chgData name="Marie-Christine Rufener" userId="2d6664cfb518d05c" providerId="LiveId" clId="{946B3BF8-DE9F-57F9-A118-BDE1986E26EE}" dt="2026-08-07T22:28:02.811" v="3415" actId="207"/>
+          <ac:chgData name="Marie-Christine Rufener" userId="2d6664cfb518d05c" providerId="LiveId" clId="{946B3BF8-DE9F-57F9-A118-BDE1986E26EE}" dt="2026-08-14T20:32:31.191" v="8997" actId="1076"/>
           <ac:spMkLst>
             <pc:docMk/>
             <pc:sldMk cId="2631827586" sldId="270"/>
@@ -1186,7 +1186,7 @@
           </ac:spMkLst>
         </pc:spChg>
         <pc:spChg chg="add mod topLvl">
-          <ac:chgData name="Marie-Christine Rufener" userId="2d6664cfb518d05c" providerId="LiveId" clId="{946B3BF8-DE9F-57F9-A118-BDE1986E26EE}" dt="2026-08-07T22:46:02.172" v="3473" actId="164"/>
+          <ac:chgData name="Marie-Christine Rufener" userId="2d6664cfb518d05c" providerId="LiveId" clId="{946B3BF8-DE9F-57F9-A118-BDE1986E26EE}" dt="2026-08-14T20:32:38.039" v="8999" actId="1076"/>
           <ac:spMkLst>
             <pc:docMk/>
             <pc:sldMk cId="2631827586" sldId="270"/>
@@ -1194,7 +1194,7 @@
           </ac:spMkLst>
         </pc:spChg>
         <pc:spChg chg="add mod topLvl">
-          <ac:chgData name="Marie-Christine Rufener" userId="2d6664cfb518d05c" providerId="LiveId" clId="{946B3BF8-DE9F-57F9-A118-BDE1986E26EE}" dt="2026-08-07T22:46:02.172" v="3473" actId="164"/>
+          <ac:chgData name="Marie-Christine Rufener" userId="2d6664cfb518d05c" providerId="LiveId" clId="{946B3BF8-DE9F-57F9-A118-BDE1986E26EE}" dt="2026-08-14T20:32:33.419" v="8998" actId="1076"/>
           <ac:spMkLst>
             <pc:docMk/>
             <pc:sldMk cId="2631827586" sldId="270"/>
@@ -1202,7 +1202,7 @@
           </ac:spMkLst>
         </pc:spChg>
         <pc:spChg chg="add mod topLvl">
-          <ac:chgData name="Marie-Christine Rufener" userId="2d6664cfb518d05c" providerId="LiveId" clId="{946B3BF8-DE9F-57F9-A118-BDE1986E26EE}" dt="2026-08-07T22:46:02.172" v="3473" actId="164"/>
+          <ac:chgData name="Marie-Christine Rufener" userId="2d6664cfb518d05c" providerId="LiveId" clId="{946B3BF8-DE9F-57F9-A118-BDE1986E26EE}" dt="2026-08-14T20:32:26.669" v="8995" actId="1076"/>
           <ac:spMkLst>
             <pc:docMk/>
             <pc:sldMk cId="2631827586" sldId="270"/>
@@ -10920,8 +10920,8 @@
             </a:p>
           </p:txBody>
         </p:sp>
-        <mc:AlternateContent xmlns:mc="http://schemas.openxmlformats.org/markup-compatibility/2006" xmlns:a14="http://schemas.microsoft.com/office/drawing/2010/main">
-          <mc:Choice Requires="a14">
+        <mc:AlternateContent xmlns:mc="http://schemas.openxmlformats.org/markup-compatibility/2006">
+          <mc:Choice xmlns:a14="http://schemas.microsoft.com/office/drawing/2010/main" Requires="a14">
             <p:sp>
               <p:nvSpPr>
                 <p:cNvPr id="11" name="TextBox 10">
@@ -10937,7 +10937,7 @@
               <p:spPr>
                 <a:xfrm>
                   <a:off x="6547089" y="1489628"/>
-                  <a:ext cx="6358419" cy="2677656"/>
+                  <a:ext cx="6358419" cy="3046988"/>
                 </a:xfrm>
                 <a:prstGeom prst="rect">
                   <a:avLst/>
@@ -11000,11 +11000,19 @@
                   </a:r>
                   <a:r>
                     <a:rPr lang="en-GB" sz="2400" dirty="0"/>
-                    <a:t> dos dados, </a:t>
+                    <a:t> dos dados e/</a:t>
                   </a:r>
                   <a:r>
                     <a:rPr lang="en-GB" sz="2400" dirty="0" err="1"/>
-                    <a:t>cujos</a:t>
+                    <a:t>ou</a:t>
+                  </a:r>
+                  <a:r>
+                    <a:rPr lang="en-GB" sz="2400" dirty="0"/>
+                    <a:t> do </a:t>
+                  </a:r>
+                  <a:r>
+                    <a:rPr lang="en-GB" sz="2400" dirty="0" err="1"/>
+                    <a:t>processo</a:t>
                   </a:r>
                   <a:r>
                     <a:rPr lang="en-GB" sz="2400" dirty="0"/>
@@ -11012,7 +11020,15 @@
                   </a:r>
                   <a:r>
                     <a:rPr lang="en-GB" sz="2400" dirty="0" err="1"/>
-                    <a:t>níveis</a:t>
+                    <a:t>estudado</a:t>
+                  </a:r>
+                  <a:r>
+                    <a:rPr lang="en-GB" sz="2400" dirty="0"/>
+                    <a:t>, com </a:t>
+                  </a:r>
+                  <a:r>
+                    <a:rPr lang="en-GB" sz="2400" dirty="0" err="1"/>
+                    <a:t>os</a:t>
                   </a:r>
                   <a:r>
                     <a:rPr lang="en-GB" sz="2400" dirty="0"/>
@@ -11020,11 +11036,19 @@
                   </a:r>
                   <a:r>
                     <a:rPr lang="en-GB" sz="2400" dirty="0" err="1"/>
-                    <a:t>são</a:t>
+                    <a:t>grupos</a:t>
                   </a:r>
                   <a:r>
                     <a:rPr lang="en-GB" sz="2400" dirty="0"/>
-                    <a:t> </a:t>
+                    <a:t> (</a:t>
+                  </a:r>
+                  <a:r>
+                    <a:rPr lang="en-GB" sz="2400" dirty="0" err="1"/>
+                    <a:t>níveis</a:t>
+                  </a:r>
+                  <a:r>
+                    <a:rPr lang="en-GB" sz="2400" dirty="0"/>
+                    <a:t>) </a:t>
                   </a:r>
                   <a:r>
                     <a:rPr lang="en-GB" sz="2400" dirty="0" err="1"/>
@@ -11184,7 +11208,7 @@
               </p:txBody>
             </p:sp>
           </mc:Choice>
-          <mc:Fallback xmlns="">
+          <mc:Fallback>
             <p:sp>
               <p:nvSpPr>
                 <p:cNvPr id="11" name="TextBox 10">
@@ -11202,7 +11226,7 @@
               <p:spPr>
                 <a:xfrm>
                   <a:off x="6547089" y="1489628"/>
-                  <a:ext cx="6358419" cy="2677656"/>
+                  <a:ext cx="6358419" cy="3046988"/>
                 </a:xfrm>
                 <a:prstGeom prst="rect">
                   <a:avLst/>
@@ -11210,7 +11234,7 @@
                 <a:blipFill>
                   <a:blip r:embed="rId2"/>
                   <a:stretch>
-                    <a:fillRect l="-1594" t="-2358" r="-1394" b="-4245"/>
+                    <a:fillRect l="-1594" t="-2075" r="-1394" b="-3734"/>
                   </a:stretch>
                 </a:blipFill>
               </p:spPr>
@@ -11801,7 +11825,7 @@
           </p:nvSpPr>
           <p:spPr>
             <a:xfrm>
-              <a:off x="6709877" y="4419829"/>
+              <a:off x="6806452" y="4692684"/>
               <a:ext cx="3216700" cy="461665"/>
             </a:xfrm>
             <a:prstGeom prst="rect">
@@ -12005,7 +12029,7 @@
           </p:nvSpPr>
           <p:spPr>
             <a:xfrm>
-              <a:off x="8737740" y="5211770"/>
+              <a:off x="9025100" y="5425055"/>
               <a:ext cx="1573306" cy="461665"/>
             </a:xfrm>
             <a:prstGeom prst="rect">
@@ -12050,7 +12074,7 @@
           </p:nvSpPr>
           <p:spPr>
             <a:xfrm>
-              <a:off x="10733604" y="4437245"/>
+              <a:off x="10663568" y="4692684"/>
               <a:ext cx="1981710" cy="461665"/>
             </a:xfrm>
             <a:prstGeom prst="rect">
@@ -12095,7 +12119,7 @@
           </p:nvSpPr>
           <p:spPr>
             <a:xfrm>
-              <a:off x="10698968" y="5168871"/>
+              <a:off x="10901125" y="5425055"/>
               <a:ext cx="2081850" cy="461665"/>
             </a:xfrm>
             <a:prstGeom prst="rect">
@@ -12140,7 +12164,7 @@
           </p:nvSpPr>
           <p:spPr>
             <a:xfrm>
-              <a:off x="6630217" y="5211771"/>
+              <a:off x="6841496" y="5595730"/>
               <a:ext cx="1573306" cy="461665"/>
             </a:xfrm>
             <a:prstGeom prst="rect">

--- a/Figuras/Figuras_prep.pptx
+++ b/Figuras/Figuras_prep.pptx
@@ -24,6 +24,7 @@
     <p:sldId id="274" r:id="rId18"/>
     <p:sldId id="276" r:id="rId19"/>
     <p:sldId id="277" r:id="rId20"/>
+    <p:sldId id="281" r:id="rId21"/>
   </p:sldIdLst>
   <p:sldSz cx="12192000" cy="6858000"/>
   <p:notesSz cx="6858000" cy="9144000"/>
@@ -133,7 +134,7 @@
 <file path=ppt/revisionInfo.xml><?xml version="1.0" encoding="utf-8"?>
 <p1510:revInfo xmlns:a="http://schemas.openxmlformats.org/drawingml/2006/main" xmlns:r="http://schemas.openxmlformats.org/officeDocument/2006/relationships" xmlns:p1510="http://schemas.microsoft.com/office/powerpoint/2015/10/main">
   <p1510:revLst>
-    <p1510:client id="{E8589E22-55F0-D245-B7BA-3FB71ADCAD28}" v="545" dt="2026-08-14T15:18:40.435"/>
+    <p1510:client id="{E8589E22-55F0-D245-B7BA-3FB71ADCAD28}" v="549" dt="2026-08-17T10:21:21.622"/>
   </p1510:revLst>
 </p1510:revInfo>
 </file>
@@ -143,7 +144,7 @@
   <pc:docChgLst>
     <pc:chgData name="Marie-Christine Rufener" userId="2d6664cfb518d05c" providerId="LiveId" clId="{946B3BF8-DE9F-57F9-A118-BDE1986E26EE}"/>
     <pc:docChg chg="undo redo custSel addSld delSld modSld sldOrd">
-      <pc:chgData name="Marie-Christine Rufener" userId="2d6664cfb518d05c" providerId="LiveId" clId="{946B3BF8-DE9F-57F9-A118-BDE1986E26EE}" dt="2026-08-14T20:32:38.039" v="8999" actId="1076"/>
+      <pc:chgData name="Marie-Christine Rufener" userId="2d6664cfb518d05c" providerId="LiveId" clId="{946B3BF8-DE9F-57F9-A118-BDE1986E26EE}" dt="2026-08-17T10:21:21.622" v="9022" actId="207"/>
       <pc:docMkLst>
         <pc:docMk/>
       </pc:docMkLst>
@@ -1856,13 +1857,6 @@
           </ac:picMkLst>
         </pc:picChg>
       </pc:sldChg>
-      <pc:sldChg chg="addSp delSp modSp new del mod">
-        <pc:chgData name="Marie-Christine Rufener" userId="2d6664cfb518d05c" providerId="LiveId" clId="{946B3BF8-DE9F-57F9-A118-BDE1986E26EE}" dt="2026-08-13T14:31:21.317" v="5625" actId="2696"/>
-        <pc:sldMkLst>
-          <pc:docMk/>
-          <pc:sldMk cId="3158162055" sldId="273"/>
-        </pc:sldMkLst>
-      </pc:sldChg>
       <pc:sldChg chg="addSp delSp modSp new mod ord">
         <pc:chgData name="Marie-Christine Rufener" userId="2d6664cfb518d05c" providerId="LiveId" clId="{946B3BF8-DE9F-57F9-A118-BDE1986E26EE}" dt="2026-08-13T16:31:13.796" v="5796" actId="1076"/>
         <pc:sldMkLst>
@@ -2243,173 +2237,6 @@
             <pc:docMk/>
             <pc:sldMk cId="34003845" sldId="274"/>
             <ac:cxnSpMk id="72" creationId="{B9030153-5E9F-6BC1-F0A0-498AB39E2ACC}"/>
-          </ac:cxnSpMkLst>
-        </pc:cxnChg>
-      </pc:sldChg>
-      <pc:sldChg chg="addSp delSp modSp new del mod">
-        <pc:chgData name="Marie-Christine Rufener" userId="2d6664cfb518d05c" providerId="LiveId" clId="{946B3BF8-DE9F-57F9-A118-BDE1986E26EE}" dt="2026-08-13T18:31:27.615" v="6500" actId="2696"/>
-        <pc:sldMkLst>
-          <pc:docMk/>
-          <pc:sldMk cId="1723046856" sldId="275"/>
-        </pc:sldMkLst>
-        <pc:spChg chg="mod">
-          <ac:chgData name="Marie-Christine Rufener" userId="2d6664cfb518d05c" providerId="LiveId" clId="{946B3BF8-DE9F-57F9-A118-BDE1986E26EE}" dt="2026-08-13T16:28:51.834" v="5635" actId="1076"/>
-          <ac:spMkLst>
-            <pc:docMk/>
-            <pc:sldMk cId="1723046856" sldId="275"/>
-            <ac:spMk id="3" creationId="{EAC47A89-5630-F148-5777-7DB91709098D}"/>
-          </ac:spMkLst>
-        </pc:spChg>
-        <pc:spChg chg="mod topLvl">
-          <ac:chgData name="Marie-Christine Rufener" userId="2d6664cfb518d05c" providerId="LiveId" clId="{946B3BF8-DE9F-57F9-A118-BDE1986E26EE}" dt="2026-08-13T16:28:31.298" v="5630" actId="165"/>
-          <ac:spMkLst>
-            <pc:docMk/>
-            <pc:sldMk cId="1723046856" sldId="275"/>
-            <ac:spMk id="5" creationId="{98B295C9-D7F3-FF79-DAFD-D17DABACD050}"/>
-          </ac:spMkLst>
-        </pc:spChg>
-        <pc:spChg chg="mod topLvl">
-          <ac:chgData name="Marie-Christine Rufener" userId="2d6664cfb518d05c" providerId="LiveId" clId="{946B3BF8-DE9F-57F9-A118-BDE1986E26EE}" dt="2026-08-13T16:28:31.298" v="5630" actId="165"/>
-          <ac:spMkLst>
-            <pc:docMk/>
-            <pc:sldMk cId="1723046856" sldId="275"/>
-            <ac:spMk id="7" creationId="{02136A4F-3EBF-61AE-2FC0-E7DFEDFC32B9}"/>
-          </ac:spMkLst>
-        </pc:spChg>
-        <pc:spChg chg="del">
-          <ac:chgData name="Marie-Christine Rufener" userId="2d6664cfb518d05c" providerId="LiveId" clId="{946B3BF8-DE9F-57F9-A118-BDE1986E26EE}" dt="2026-08-13T16:28:37.209" v="5631" actId="478"/>
-          <ac:spMkLst>
-            <pc:docMk/>
-            <pc:sldMk cId="1723046856" sldId="275"/>
-            <ac:spMk id="8" creationId="{B346E933-29A7-752E-8B5E-11DF88979D42}"/>
-          </ac:spMkLst>
-        </pc:spChg>
-        <pc:spChg chg="del">
-          <ac:chgData name="Marie-Christine Rufener" userId="2d6664cfb518d05c" providerId="LiveId" clId="{946B3BF8-DE9F-57F9-A118-BDE1986E26EE}" dt="2026-08-13T16:28:37.209" v="5631" actId="478"/>
-          <ac:spMkLst>
-            <pc:docMk/>
-            <pc:sldMk cId="1723046856" sldId="275"/>
-            <ac:spMk id="9" creationId="{E64A08F0-2E99-DA6F-41FC-B4C7B655D5DD}"/>
-          </ac:spMkLst>
-        </pc:spChg>
-        <pc:spChg chg="mod topLvl">
-          <ac:chgData name="Marie-Christine Rufener" userId="2d6664cfb518d05c" providerId="LiveId" clId="{946B3BF8-DE9F-57F9-A118-BDE1986E26EE}" dt="2026-08-13T16:28:31.298" v="5630" actId="165"/>
-          <ac:spMkLst>
-            <pc:docMk/>
-            <pc:sldMk cId="1723046856" sldId="275"/>
-            <ac:spMk id="10" creationId="{9235D95C-EB05-FB56-5C7E-2683A0D2F36F}"/>
-          </ac:spMkLst>
-        </pc:spChg>
-        <pc:spChg chg="mod topLvl">
-          <ac:chgData name="Marie-Christine Rufener" userId="2d6664cfb518d05c" providerId="LiveId" clId="{946B3BF8-DE9F-57F9-A118-BDE1986E26EE}" dt="2026-08-13T16:28:31.298" v="5630" actId="165"/>
-          <ac:spMkLst>
-            <pc:docMk/>
-            <pc:sldMk cId="1723046856" sldId="275"/>
-            <ac:spMk id="11" creationId="{5FC21C7D-0C1F-CDDB-2810-59CA2A57C371}"/>
-          </ac:spMkLst>
-        </pc:spChg>
-        <pc:spChg chg="mod topLvl">
-          <ac:chgData name="Marie-Christine Rufener" userId="2d6664cfb518d05c" providerId="LiveId" clId="{946B3BF8-DE9F-57F9-A118-BDE1986E26EE}" dt="2026-08-13T16:28:31.298" v="5630" actId="165"/>
-          <ac:spMkLst>
-            <pc:docMk/>
-            <pc:sldMk cId="1723046856" sldId="275"/>
-            <ac:spMk id="14" creationId="{76B04B5A-F721-B638-9C14-5C5628716C96}"/>
-          </ac:spMkLst>
-        </pc:spChg>
-        <pc:spChg chg="mod topLvl">
-          <ac:chgData name="Marie-Christine Rufener" userId="2d6664cfb518d05c" providerId="LiveId" clId="{946B3BF8-DE9F-57F9-A118-BDE1986E26EE}" dt="2026-08-13T16:28:31.298" v="5630" actId="165"/>
-          <ac:spMkLst>
-            <pc:docMk/>
-            <pc:sldMk cId="1723046856" sldId="275"/>
-            <ac:spMk id="30" creationId="{9A643180-861F-4B47-2D2F-4173087F0A57}"/>
-          </ac:spMkLst>
-        </pc:spChg>
-        <pc:spChg chg="mod topLvl">
-          <ac:chgData name="Marie-Christine Rufener" userId="2d6664cfb518d05c" providerId="LiveId" clId="{946B3BF8-DE9F-57F9-A118-BDE1986E26EE}" dt="2026-08-13T16:28:31.298" v="5630" actId="165"/>
-          <ac:spMkLst>
-            <pc:docMk/>
-            <pc:sldMk cId="1723046856" sldId="275"/>
-            <ac:spMk id="36" creationId="{B9A2B724-FD1B-B436-70D1-CCA488EA7039}"/>
-          </ac:spMkLst>
-        </pc:spChg>
-        <pc:spChg chg="mod topLvl">
-          <ac:chgData name="Marie-Christine Rufener" userId="2d6664cfb518d05c" providerId="LiveId" clId="{946B3BF8-DE9F-57F9-A118-BDE1986E26EE}" dt="2026-08-13T16:28:31.298" v="5630" actId="165"/>
-          <ac:spMkLst>
-            <pc:docMk/>
-            <pc:sldMk cId="1723046856" sldId="275"/>
-            <ac:spMk id="37" creationId="{003A22AD-B0E2-F20A-3AB1-EE63BE176ED3}"/>
-          </ac:spMkLst>
-        </pc:spChg>
-        <pc:spChg chg="del">
-          <ac:chgData name="Marie-Christine Rufener" userId="2d6664cfb518d05c" providerId="LiveId" clId="{946B3BF8-DE9F-57F9-A118-BDE1986E26EE}" dt="2026-08-13T16:31:37.303" v="5797" actId="478"/>
-          <ac:spMkLst>
-            <pc:docMk/>
-            <pc:sldMk cId="1723046856" sldId="275"/>
-            <ac:spMk id="38" creationId="{9C02D7A3-D4F0-8E1D-19F0-B2742634EC22}"/>
-          </ac:spMkLst>
-        </pc:spChg>
-        <pc:spChg chg="mod topLvl">
-          <ac:chgData name="Marie-Christine Rufener" userId="2d6664cfb518d05c" providerId="LiveId" clId="{946B3BF8-DE9F-57F9-A118-BDE1986E26EE}" dt="2026-08-13T16:28:31.298" v="5630" actId="165"/>
-          <ac:spMkLst>
-            <pc:docMk/>
-            <pc:sldMk cId="1723046856" sldId="275"/>
-            <ac:spMk id="42" creationId="{FD911A41-C8F8-D282-238D-B73B828A00B3}"/>
-          </ac:spMkLst>
-        </pc:spChg>
-        <pc:spChg chg="mod topLvl">
-          <ac:chgData name="Marie-Christine Rufener" userId="2d6664cfb518d05c" providerId="LiveId" clId="{946B3BF8-DE9F-57F9-A118-BDE1986E26EE}" dt="2026-08-13T16:28:31.298" v="5630" actId="165"/>
-          <ac:spMkLst>
-            <pc:docMk/>
-            <pc:sldMk cId="1723046856" sldId="275"/>
-            <ac:spMk id="43" creationId="{61EA80C8-0B4C-D9B7-A736-FC0D60D714CF}"/>
-          </ac:spMkLst>
-        </pc:spChg>
-        <pc:spChg chg="mod">
-          <ac:chgData name="Marie-Christine Rufener" userId="2d6664cfb518d05c" providerId="LiveId" clId="{946B3BF8-DE9F-57F9-A118-BDE1986E26EE}" dt="2026-08-13T16:28:44.236" v="5632" actId="1076"/>
-          <ac:spMkLst>
-            <pc:docMk/>
-            <pc:sldMk cId="1723046856" sldId="275"/>
-            <ac:spMk id="49" creationId="{59D30DF5-A594-864F-9B32-B7A79BF627C0}"/>
-          </ac:spMkLst>
-        </pc:spChg>
-        <pc:cxnChg chg="mod">
-          <ac:chgData name="Marie-Christine Rufener" userId="2d6664cfb518d05c" providerId="LiveId" clId="{946B3BF8-DE9F-57F9-A118-BDE1986E26EE}" dt="2026-08-13T16:28:44.236" v="5632" actId="1076"/>
-          <ac:cxnSpMkLst>
-            <pc:docMk/>
-            <pc:sldMk cId="1723046856" sldId="275"/>
-            <ac:cxnSpMk id="44" creationId="{79C43C02-14B5-5A51-3747-53F191BE2FDD}"/>
-          </ac:cxnSpMkLst>
-        </pc:cxnChg>
-        <pc:cxnChg chg="mod">
-          <ac:chgData name="Marie-Christine Rufener" userId="2d6664cfb518d05c" providerId="LiveId" clId="{946B3BF8-DE9F-57F9-A118-BDE1986E26EE}" dt="2026-08-13T16:28:46.444" v="5633" actId="1076"/>
-          <ac:cxnSpMkLst>
-            <pc:docMk/>
-            <pc:sldMk cId="1723046856" sldId="275"/>
-            <ac:cxnSpMk id="45" creationId="{6DCF3A9D-1EBE-1623-B2F5-B1B76EEC2BBF}"/>
-          </ac:cxnSpMkLst>
-        </pc:cxnChg>
-        <pc:cxnChg chg="mod">
-          <ac:chgData name="Marie-Christine Rufener" userId="2d6664cfb518d05c" providerId="LiveId" clId="{946B3BF8-DE9F-57F9-A118-BDE1986E26EE}" dt="2026-08-13T16:28:44.236" v="5632" actId="1076"/>
-          <ac:cxnSpMkLst>
-            <pc:docMk/>
-            <pc:sldMk cId="1723046856" sldId="275"/>
-            <ac:cxnSpMk id="46" creationId="{F0DE18B7-698F-2F72-C0C5-D015D992AAF2}"/>
-          </ac:cxnSpMkLst>
-        </pc:cxnChg>
-        <pc:cxnChg chg="mod">
-          <ac:chgData name="Marie-Christine Rufener" userId="2d6664cfb518d05c" providerId="LiveId" clId="{946B3BF8-DE9F-57F9-A118-BDE1986E26EE}" dt="2026-08-13T16:28:44.236" v="5632" actId="1076"/>
-          <ac:cxnSpMkLst>
-            <pc:docMk/>
-            <pc:sldMk cId="1723046856" sldId="275"/>
-            <ac:cxnSpMk id="47" creationId="{1350628E-3909-C3A2-AE8E-7BF461BA5A7A}"/>
-          </ac:cxnSpMkLst>
-        </pc:cxnChg>
-        <pc:cxnChg chg="mod">
-          <ac:chgData name="Marie-Christine Rufener" userId="2d6664cfb518d05c" providerId="LiveId" clId="{946B3BF8-DE9F-57F9-A118-BDE1986E26EE}" dt="2026-08-13T16:28:44.236" v="5632" actId="1076"/>
-          <ac:cxnSpMkLst>
-            <pc:docMk/>
-            <pc:sldMk cId="1723046856" sldId="275"/>
-            <ac:cxnSpMk id="48" creationId="{55542A80-938A-7E1F-398D-E002DCCF5F8D}"/>
           </ac:cxnSpMkLst>
         </pc:cxnChg>
       </pc:sldChg>
@@ -2499,30 +2326,6 @@
             <ac:spMk id="11" creationId="{2C3DDC6D-6782-BB2E-C4BE-8480CA998D3B}"/>
           </ac:spMkLst>
         </pc:spChg>
-        <pc:spChg chg="add del mod">
-          <ac:chgData name="Marie-Christine Rufener" userId="2d6664cfb518d05c" providerId="LiveId" clId="{946B3BF8-DE9F-57F9-A118-BDE1986E26EE}" dt="2026-08-13T16:30:51.790" v="5781" actId="478"/>
-          <ac:spMkLst>
-            <pc:docMk/>
-            <pc:sldMk cId="2313755951" sldId="276"/>
-            <ac:spMk id="12" creationId="{760F5C83-4CE7-EF38-D9A4-4BF5AF9B640F}"/>
-          </ac:spMkLst>
-        </pc:spChg>
-        <pc:spChg chg="add del mod">
-          <ac:chgData name="Marie-Christine Rufener" userId="2d6664cfb518d05c" providerId="LiveId" clId="{946B3BF8-DE9F-57F9-A118-BDE1986E26EE}" dt="2026-08-13T16:30:51.790" v="5781" actId="478"/>
-          <ac:spMkLst>
-            <pc:docMk/>
-            <pc:sldMk cId="2313755951" sldId="276"/>
-            <ac:spMk id="13" creationId="{099BD511-0C5E-9996-4095-BCDE4C99E79E}"/>
-          </ac:spMkLst>
-        </pc:spChg>
-        <pc:spChg chg="add del mod">
-          <ac:chgData name="Marie-Christine Rufener" userId="2d6664cfb518d05c" providerId="LiveId" clId="{946B3BF8-DE9F-57F9-A118-BDE1986E26EE}" dt="2026-08-13T16:30:51.790" v="5781" actId="478"/>
-          <ac:spMkLst>
-            <pc:docMk/>
-            <pc:sldMk cId="2313755951" sldId="276"/>
-            <ac:spMk id="14" creationId="{13E03334-4102-C6AA-D620-4C598113115B}"/>
-          </ac:spMkLst>
-        </pc:spChg>
         <pc:spChg chg="add mod">
           <ac:chgData name="Marie-Christine Rufener" userId="2d6664cfb518d05c" providerId="LiveId" clId="{946B3BF8-DE9F-57F9-A118-BDE1986E26EE}" dt="2026-08-13T16:31:54.202" v="5798"/>
           <ac:spMkLst>
@@ -2732,14 +2535,6 @@
           </ac:spMkLst>
         </pc:spChg>
         <pc:spChg chg="add mod">
-          <ac:chgData name="Marie-Christine Rufener" userId="2d6664cfb518d05c" providerId="LiveId" clId="{946B3BF8-DE9F-57F9-A118-BDE1986E26EE}" dt="2026-08-13T16:41:13.459" v="6126"/>
-          <ac:spMkLst>
-            <pc:docMk/>
-            <pc:sldMk cId="2313755951" sldId="276"/>
-            <ac:spMk id="56" creationId="{09F4223F-FDDE-A8EB-F9AE-389E25A5816F}"/>
-          </ac:spMkLst>
-        </pc:spChg>
-        <pc:spChg chg="add mod">
           <ac:chgData name="Marie-Christine Rufener" userId="2d6664cfb518d05c" providerId="LiveId" clId="{946B3BF8-DE9F-57F9-A118-BDE1986E26EE}" dt="2026-08-13T16:42:38.397" v="6186" actId="1038"/>
           <ac:spMkLst>
             <pc:docMk/>
@@ -2771,30 +2566,6 @@
             <ac:spMk id="66" creationId="{3413643D-4CB4-42AF-5A23-B98BD5D7D6AF}"/>
           </ac:spMkLst>
         </pc:spChg>
-        <pc:spChg chg="add del mod">
-          <ac:chgData name="Marie-Christine Rufener" userId="2d6664cfb518d05c" providerId="LiveId" clId="{946B3BF8-DE9F-57F9-A118-BDE1986E26EE}" dt="2026-08-13T18:12:34.516" v="6469" actId="478"/>
-          <ac:spMkLst>
-            <pc:docMk/>
-            <pc:sldMk cId="2313755951" sldId="276"/>
-            <ac:spMk id="77" creationId="{95D5DBA3-7F3F-4C76-3248-C2E84ECC1069}"/>
-          </ac:spMkLst>
-        </pc:spChg>
-        <pc:spChg chg="add del mod">
-          <ac:chgData name="Marie-Christine Rufener" userId="2d6664cfb518d05c" providerId="LiveId" clId="{946B3BF8-DE9F-57F9-A118-BDE1986E26EE}" dt="2026-08-13T21:11:58.434" v="8317" actId="478"/>
-          <ac:spMkLst>
-            <pc:docMk/>
-            <pc:sldMk cId="2313755951" sldId="276"/>
-            <ac:spMk id="78" creationId="{A4BD1CBE-2F79-244E-D556-ADCDC965F6E5}"/>
-          </ac:spMkLst>
-        </pc:spChg>
-        <pc:spChg chg="add del mod">
-          <ac:chgData name="Marie-Christine Rufener" userId="2d6664cfb518d05c" providerId="LiveId" clId="{946B3BF8-DE9F-57F9-A118-BDE1986E26EE}" dt="2026-08-13T18:13:47.390" v="6496" actId="1076"/>
-          <ac:spMkLst>
-            <pc:docMk/>
-            <pc:sldMk cId="2313755951" sldId="276"/>
-            <ac:spMk id="79" creationId="{B6106462-DA4B-CC11-A8EE-00F692129119}"/>
-          </ac:spMkLst>
-        </pc:spChg>
         <pc:grpChg chg="add mod">
           <ac:chgData name="Marie-Christine Rufener" userId="2d6664cfb518d05c" providerId="LiveId" clId="{946B3BF8-DE9F-57F9-A118-BDE1986E26EE}" dt="2026-08-13T16:32:27.068" v="5808" actId="1036"/>
           <ac:grpSpMkLst>
@@ -2820,14 +2591,6 @@
           </ac:grpSpMkLst>
         </pc:grpChg>
         <pc:grpChg chg="add">
-          <ac:chgData name="Marie-Christine Rufener" userId="2d6664cfb518d05c" providerId="LiveId" clId="{946B3BF8-DE9F-57F9-A118-BDE1986E26EE}" dt="2026-08-13T16:44:43.533" v="6244" actId="164"/>
-          <ac:grpSpMkLst>
-            <pc:docMk/>
-            <pc:sldMk cId="2313755951" sldId="276"/>
-            <ac:grpSpMk id="75" creationId="{59880D74-576F-5CC4-2E14-36F034851169}"/>
-          </ac:grpSpMkLst>
-        </pc:grpChg>
-        <pc:grpChg chg="add">
           <ac:chgData name="Marie-Christine Rufener" userId="2d6664cfb518d05c" providerId="LiveId" clId="{946B3BF8-DE9F-57F9-A118-BDE1986E26EE}" dt="2026-08-13T16:45:17.539" v="6250" actId="164"/>
           <ac:grpSpMkLst>
             <pc:docMk/>
@@ -2873,14 +2636,6 @@
             <pc:docMk/>
             <pc:sldMk cId="2313755951" sldId="276"/>
             <ac:cxnSpMk id="72" creationId="{458FADFD-DF8E-BD31-20CD-A020E2C7ACAF}"/>
-          </ac:cxnSpMkLst>
-        </pc:cxnChg>
-        <pc:cxnChg chg="add mod">
-          <ac:chgData name="Marie-Christine Rufener" userId="2d6664cfb518d05c" providerId="LiveId" clId="{946B3BF8-DE9F-57F9-A118-BDE1986E26EE}" dt="2026-08-13T18:13:45.827" v="6493" actId="1076"/>
-          <ac:cxnSpMkLst>
-            <pc:docMk/>
-            <pc:sldMk cId="2313755951" sldId="276"/>
-            <ac:cxnSpMk id="80" creationId="{96E3337C-E844-DC95-5323-07400C91EFE3}"/>
           </ac:cxnSpMkLst>
         </pc:cxnChg>
       </pc:sldChg>
@@ -2891,86 +2646,6 @@
           <pc:sldMk cId="3640937717" sldId="277"/>
         </pc:sldMkLst>
         <pc:spChg chg="add mod">
-          <ac:chgData name="Marie-Christine Rufener" userId="2d6664cfb518d05c" providerId="LiveId" clId="{946B3BF8-DE9F-57F9-A118-BDE1986E26EE}" dt="2026-08-13T16:44:59.267" v="6248"/>
-          <ac:spMkLst>
-            <pc:docMk/>
-            <pc:sldMk cId="3640937717" sldId="277"/>
-            <ac:spMk id="2" creationId="{5F8A5006-628C-44EC-A3F2-72A7E70EC1AB}"/>
-          </ac:spMkLst>
-        </pc:spChg>
-        <pc:spChg chg="add mod">
-          <ac:chgData name="Marie-Christine Rufener" userId="2d6664cfb518d05c" providerId="LiveId" clId="{946B3BF8-DE9F-57F9-A118-BDE1986E26EE}" dt="2026-08-13T16:44:59.267" v="6248"/>
-          <ac:spMkLst>
-            <pc:docMk/>
-            <pc:sldMk cId="3640937717" sldId="277"/>
-            <ac:spMk id="3" creationId="{14158115-0081-374D-A767-1D63810DE3CB}"/>
-          </ac:spMkLst>
-        </pc:spChg>
-        <pc:spChg chg="add mod">
-          <ac:chgData name="Marie-Christine Rufener" userId="2d6664cfb518d05c" providerId="LiveId" clId="{946B3BF8-DE9F-57F9-A118-BDE1986E26EE}" dt="2026-08-13T16:44:59.267" v="6248"/>
-          <ac:spMkLst>
-            <pc:docMk/>
-            <pc:sldMk cId="3640937717" sldId="277"/>
-            <ac:spMk id="5" creationId="{A7FF298C-97A6-CFAE-2A6D-8DE5D132C90D}"/>
-          </ac:spMkLst>
-        </pc:spChg>
-        <pc:spChg chg="mod">
-          <ac:chgData name="Marie-Christine Rufener" userId="2d6664cfb518d05c" providerId="LiveId" clId="{946B3BF8-DE9F-57F9-A118-BDE1986E26EE}" dt="2026-08-13T16:44:59.267" v="6248"/>
-          <ac:spMkLst>
-            <pc:docMk/>
-            <pc:sldMk cId="3640937717" sldId="277"/>
-            <ac:spMk id="28" creationId="{7A9E9E55-830A-AE1E-8E8E-C2E9DB702AC4}"/>
-          </ac:spMkLst>
-        </pc:spChg>
-        <pc:spChg chg="mod">
-          <ac:chgData name="Marie-Christine Rufener" userId="2d6664cfb518d05c" providerId="LiveId" clId="{946B3BF8-DE9F-57F9-A118-BDE1986E26EE}" dt="2026-08-13T16:44:59.267" v="6248"/>
-          <ac:spMkLst>
-            <pc:docMk/>
-            <pc:sldMk cId="3640937717" sldId="277"/>
-            <ac:spMk id="29" creationId="{1843C98D-3FA1-C97D-E06B-2EA892AD53BD}"/>
-          </ac:spMkLst>
-        </pc:spChg>
-        <pc:spChg chg="mod">
-          <ac:chgData name="Marie-Christine Rufener" userId="2d6664cfb518d05c" providerId="LiveId" clId="{946B3BF8-DE9F-57F9-A118-BDE1986E26EE}" dt="2026-08-13T16:44:59.267" v="6248"/>
-          <ac:spMkLst>
-            <pc:docMk/>
-            <pc:sldMk cId="3640937717" sldId="277"/>
-            <ac:spMk id="32" creationId="{CD7E689B-DF12-7777-5FEF-7EDB8828C889}"/>
-          </ac:spMkLst>
-        </pc:spChg>
-        <pc:spChg chg="mod">
-          <ac:chgData name="Marie-Christine Rufener" userId="2d6664cfb518d05c" providerId="LiveId" clId="{946B3BF8-DE9F-57F9-A118-BDE1986E26EE}" dt="2026-08-13T16:44:59.267" v="6248"/>
-          <ac:spMkLst>
-            <pc:docMk/>
-            <pc:sldMk cId="3640937717" sldId="277"/>
-            <ac:spMk id="37" creationId="{28F7F87E-5F08-8FA6-3CB9-5256AF378109}"/>
-          </ac:spMkLst>
-        </pc:spChg>
-        <pc:spChg chg="mod">
-          <ac:chgData name="Marie-Christine Rufener" userId="2d6664cfb518d05c" providerId="LiveId" clId="{946B3BF8-DE9F-57F9-A118-BDE1986E26EE}" dt="2026-08-13T16:44:59.267" v="6248"/>
-          <ac:spMkLst>
-            <pc:docMk/>
-            <pc:sldMk cId="3640937717" sldId="277"/>
-            <ac:spMk id="43" creationId="{4D053AB4-ACC4-DF1C-0DB0-BC3DB1D87B7D}"/>
-          </ac:spMkLst>
-        </pc:spChg>
-        <pc:spChg chg="mod">
-          <ac:chgData name="Marie-Christine Rufener" userId="2d6664cfb518d05c" providerId="LiveId" clId="{946B3BF8-DE9F-57F9-A118-BDE1986E26EE}" dt="2026-08-13T16:44:59.267" v="6248"/>
-          <ac:spMkLst>
-            <pc:docMk/>
-            <pc:sldMk cId="3640937717" sldId="277"/>
-            <ac:spMk id="45" creationId="{8C463329-1B43-19E2-0AAF-DCEB1461FE23}"/>
-          </ac:spMkLst>
-        </pc:spChg>
-        <pc:spChg chg="add mod">
-          <ac:chgData name="Marie-Christine Rufener" userId="2d6664cfb518d05c" providerId="LiveId" clId="{946B3BF8-DE9F-57F9-A118-BDE1986E26EE}" dt="2026-08-13T16:44:59.267" v="6248"/>
-          <ac:spMkLst>
-            <pc:docMk/>
-            <pc:sldMk cId="3640937717" sldId="277"/>
-            <ac:spMk id="57" creationId="{DED3FB2D-36A8-EFD6-2241-0AFF37A337C1}"/>
-          </ac:spMkLst>
-        </pc:spChg>
-        <pc:spChg chg="add mod">
           <ac:chgData name="Marie-Christine Rufener" userId="2d6664cfb518d05c" providerId="LiveId" clId="{946B3BF8-DE9F-57F9-A118-BDE1986E26EE}" dt="2026-08-13T16:45:02.397" v="6249"/>
           <ac:spMkLst>
             <pc:docMk/>
@@ -3098,14 +2773,6 @@
             <ac:spMk id="112" creationId="{C61D6693-D22F-96D2-EC45-6A0825F02275}"/>
           </ac:spMkLst>
         </pc:spChg>
-        <pc:spChg chg="del mod">
-          <ac:chgData name="Marie-Christine Rufener" userId="2d6664cfb518d05c" providerId="LiveId" clId="{946B3BF8-DE9F-57F9-A118-BDE1986E26EE}" dt="2026-08-13T16:59:12.718" v="6442" actId="478"/>
-          <ac:spMkLst>
-            <pc:docMk/>
-            <pc:sldMk cId="3640937717" sldId="277"/>
-            <ac:spMk id="113" creationId="{63A66740-7300-E79C-2318-02901F87F0CD}"/>
-          </ac:spMkLst>
-        </pc:spChg>
         <pc:spChg chg="mod">
           <ac:chgData name="Marie-Christine Rufener" userId="2d6664cfb518d05c" providerId="LiveId" clId="{946B3BF8-DE9F-57F9-A118-BDE1986E26EE}" dt="2026-08-13T16:46:04.742" v="6307" actId="1037"/>
           <ac:spMkLst>
@@ -3146,14 +2813,6 @@
             <ac:grpSpMk id="154" creationId="{041E4914-48E7-2461-1594-8F95ED24C051}"/>
           </ac:grpSpMkLst>
         </pc:grpChg>
-        <pc:cxnChg chg="del mod">
-          <ac:chgData name="Marie-Christine Rufener" userId="2d6664cfb518d05c" providerId="LiveId" clId="{946B3BF8-DE9F-57F9-A118-BDE1986E26EE}" dt="2026-08-13T16:53:14.481" v="6357" actId="478"/>
-          <ac:cxnSpMkLst>
-            <pc:docMk/>
-            <pc:sldMk cId="3640937717" sldId="277"/>
-            <ac:cxnSpMk id="114" creationId="{6E458BFF-1586-4639-FA8A-29BA00AD9D80}"/>
-          </ac:cxnSpMkLst>
-        </pc:cxnChg>
         <pc:cxnChg chg="mod">
           <ac:chgData name="Marie-Christine Rufener" userId="2d6664cfb518d05c" providerId="LiveId" clId="{946B3BF8-DE9F-57F9-A118-BDE1986E26EE}" dt="2026-08-13T16:52:00.520" v="6344" actId="14100"/>
           <ac:cxnSpMkLst>
@@ -3168,14 +2827,6 @@
             <pc:docMk/>
             <pc:sldMk cId="3640937717" sldId="277"/>
             <ac:cxnSpMk id="119" creationId="{2DF3CF12-5A58-5266-9EB5-933529E15222}"/>
-          </ac:cxnSpMkLst>
-        </pc:cxnChg>
-        <pc:cxnChg chg="del mod">
-          <ac:chgData name="Marie-Christine Rufener" userId="2d6664cfb518d05c" providerId="LiveId" clId="{946B3BF8-DE9F-57F9-A118-BDE1986E26EE}" dt="2026-08-13T16:53:14.481" v="6357" actId="478"/>
-          <ac:cxnSpMkLst>
-            <pc:docMk/>
-            <pc:sldMk cId="3640937717" sldId="277"/>
-            <ac:cxnSpMk id="120" creationId="{3EA08465-ED88-8247-3377-6FF85BDDC3A7}"/>
           </ac:cxnSpMkLst>
         </pc:cxnChg>
         <pc:cxnChg chg="mod">
@@ -3289,14 +2940,6 @@
             <ac:spMk id="9" creationId="{B405ABF7-729D-BFFB-F527-6C46106B2D62}"/>
           </ac:spMkLst>
         </pc:spChg>
-        <pc:spChg chg="del mod">
-          <ac:chgData name="Marie-Christine Rufener" userId="2d6664cfb518d05c" providerId="LiveId" clId="{946B3BF8-DE9F-57F9-A118-BDE1986E26EE}" dt="2026-08-13T18:49:51.697" v="6649" actId="478"/>
-          <ac:spMkLst>
-            <pc:docMk/>
-            <pc:sldMk cId="2042279389" sldId="278"/>
-            <ac:spMk id="10" creationId="{24205C32-FB43-9484-5027-4BD780D2F14A}"/>
-          </ac:spMkLst>
-        </pc:spChg>
         <pc:spChg chg="mod">
           <ac:chgData name="Marie-Christine Rufener" userId="2d6664cfb518d05c" providerId="LiveId" clId="{946B3BF8-DE9F-57F9-A118-BDE1986E26EE}" dt="2026-08-13T18:55:55.507" v="7057" actId="1037"/>
           <ac:spMkLst>
@@ -3321,14 +2964,6 @@
             <ac:spMk id="13" creationId="{4132D932-1DF5-92B2-6A39-CB0E15177371}"/>
           </ac:spMkLst>
         </pc:spChg>
-        <pc:spChg chg="del mod topLvl">
-          <ac:chgData name="Marie-Christine Rufener" userId="2d6664cfb518d05c" providerId="LiveId" clId="{946B3BF8-DE9F-57F9-A118-BDE1986E26EE}" dt="2026-08-13T19:25:23.033" v="7947" actId="478"/>
-          <ac:spMkLst>
-            <pc:docMk/>
-            <pc:sldMk cId="2042279389" sldId="278"/>
-            <ac:spMk id="14" creationId="{19344566-0357-6500-6CC5-0FBA1128E941}"/>
-          </ac:spMkLst>
-        </pc:spChg>
         <pc:spChg chg="mod">
           <ac:chgData name="Marie-Christine Rufener" userId="2d6664cfb518d05c" providerId="LiveId" clId="{946B3BF8-DE9F-57F9-A118-BDE1986E26EE}" dt="2026-08-13T19:00:11.543" v="7349" actId="1037"/>
           <ac:spMkLst>
@@ -3345,28 +2980,12 @@
             <ac:spMk id="16" creationId="{63B9C6CA-5391-2674-60E3-493A28C65DB3}"/>
           </ac:spMkLst>
         </pc:spChg>
-        <pc:spChg chg="del mod">
-          <ac:chgData name="Marie-Christine Rufener" userId="2d6664cfb518d05c" providerId="LiveId" clId="{946B3BF8-DE9F-57F9-A118-BDE1986E26EE}" dt="2026-08-13T19:25:32.498" v="7949" actId="478"/>
-          <ac:spMkLst>
-            <pc:docMk/>
-            <pc:sldMk cId="2042279389" sldId="278"/>
-            <ac:spMk id="17" creationId="{7CA53BB0-1B5E-C0EA-04ED-270842D4B695}"/>
-          </ac:spMkLst>
-        </pc:spChg>
         <pc:spChg chg="mod topLvl">
           <ac:chgData name="Marie-Christine Rufener" userId="2d6664cfb518d05c" providerId="LiveId" clId="{946B3BF8-DE9F-57F9-A118-BDE1986E26EE}" dt="2026-08-13T19:04:10.256" v="7549" actId="1036"/>
           <ac:spMkLst>
             <pc:docMk/>
             <pc:sldMk cId="2042279389" sldId="278"/>
             <ac:spMk id="18" creationId="{149EBED6-6776-3EBC-160B-9C98C73D3E8E}"/>
-          </ac:spMkLst>
-        </pc:spChg>
-        <pc:spChg chg="del mod">
-          <ac:chgData name="Marie-Christine Rufener" userId="2d6664cfb518d05c" providerId="LiveId" clId="{946B3BF8-DE9F-57F9-A118-BDE1986E26EE}" dt="2026-08-13T19:25:21.274" v="7946" actId="478"/>
-          <ac:spMkLst>
-            <pc:docMk/>
-            <pc:sldMk cId="2042279389" sldId="278"/>
-            <ac:spMk id="19" creationId="{4F9FD2C8-398A-26FE-505B-3042D8176E79}"/>
           </ac:spMkLst>
         </pc:spChg>
         <pc:spChg chg="mod topLvl">
@@ -3385,30 +3004,6 @@
             <ac:spMk id="21" creationId="{D01E2DF3-01ED-B4CE-4EF2-29DBA325A45E}"/>
           </ac:spMkLst>
         </pc:spChg>
-        <pc:spChg chg="del mod">
-          <ac:chgData name="Marie-Christine Rufener" userId="2d6664cfb518d05c" providerId="LiveId" clId="{946B3BF8-DE9F-57F9-A118-BDE1986E26EE}" dt="2026-08-13T19:25:32.498" v="7949" actId="478"/>
-          <ac:spMkLst>
-            <pc:docMk/>
-            <pc:sldMk cId="2042279389" sldId="278"/>
-            <ac:spMk id="22" creationId="{49911356-CF9A-F3AF-A1B5-D36EB3295264}"/>
-          </ac:spMkLst>
-        </pc:spChg>
-        <pc:spChg chg="del mod topLvl">
-          <ac:chgData name="Marie-Christine Rufener" userId="2d6664cfb518d05c" providerId="LiveId" clId="{946B3BF8-DE9F-57F9-A118-BDE1986E26EE}" dt="2026-08-13T18:56:08.205" v="7058" actId="478"/>
-          <ac:spMkLst>
-            <pc:docMk/>
-            <pc:sldMk cId="2042279389" sldId="278"/>
-            <ac:spMk id="31" creationId="{87E6F6BA-D8A4-7247-02E7-C66067457CE8}"/>
-          </ac:spMkLst>
-        </pc:spChg>
-        <pc:spChg chg="del mod">
-          <ac:chgData name="Marie-Christine Rufener" userId="2d6664cfb518d05c" providerId="LiveId" clId="{946B3BF8-DE9F-57F9-A118-BDE1986E26EE}" dt="2026-08-13T19:00:29.378" v="7353" actId="478"/>
-          <ac:spMkLst>
-            <pc:docMk/>
-            <pc:sldMk cId="2042279389" sldId="278"/>
-            <ac:spMk id="32" creationId="{4DF626B8-73F1-DD70-D7AB-DD70F2F85BEA}"/>
-          </ac:spMkLst>
-        </pc:spChg>
         <pc:spChg chg="mod">
           <ac:chgData name="Marie-Christine Rufener" userId="2d6664cfb518d05c" providerId="LiveId" clId="{946B3BF8-DE9F-57F9-A118-BDE1986E26EE}" dt="2026-08-13T19:05:57.511" v="7754" actId="1036"/>
           <ac:spMkLst>
@@ -3425,14 +3020,6 @@
             <ac:spMk id="37" creationId="{BA849B98-8B47-25A9-9102-D188CD545949}"/>
           </ac:spMkLst>
         </pc:spChg>
-        <pc:spChg chg="del mod topLvl">
-          <ac:chgData name="Marie-Christine Rufener" userId="2d6664cfb518d05c" providerId="LiveId" clId="{946B3BF8-DE9F-57F9-A118-BDE1986E26EE}" dt="2026-08-13T18:57:46.764" v="7204" actId="478"/>
-          <ac:spMkLst>
-            <pc:docMk/>
-            <pc:sldMk cId="2042279389" sldId="278"/>
-            <ac:spMk id="38" creationId="{EAD5DBCD-2ADD-131C-8827-5F0E41FD9157}"/>
-          </ac:spMkLst>
-        </pc:spChg>
         <pc:spChg chg="add mod">
           <ac:chgData name="Marie-Christine Rufener" userId="2d6664cfb518d05c" providerId="LiveId" clId="{946B3BF8-DE9F-57F9-A118-BDE1986E26EE}" dt="2026-08-13T19:11:06.399" v="7924" actId="1076"/>
           <ac:spMkLst>
@@ -3497,14 +3084,6 @@
             <ac:spMk id="56" creationId="{1A67B293-8C2A-0063-1386-AE69064B02BD}"/>
           </ac:spMkLst>
         </pc:spChg>
-        <pc:spChg chg="add del mod">
-          <ac:chgData name="Marie-Christine Rufener" userId="2d6664cfb518d05c" providerId="LiveId" clId="{946B3BF8-DE9F-57F9-A118-BDE1986E26EE}" dt="2026-08-13T19:25:36.404" v="7950" actId="478"/>
-          <ac:spMkLst>
-            <pc:docMk/>
-            <pc:sldMk cId="2042279389" sldId="278"/>
-            <ac:spMk id="57" creationId="{79503BB6-1E39-14F5-792E-24759AC10E6C}"/>
-          </ac:spMkLst>
-        </pc:spChg>
         <pc:spChg chg="add mod">
           <ac:chgData name="Marie-Christine Rufener" userId="2d6664cfb518d05c" providerId="LiveId" clId="{946B3BF8-DE9F-57F9-A118-BDE1986E26EE}" dt="2026-08-13T20:58:40.169" v="8301" actId="20577"/>
           <ac:spMkLst>
@@ -3521,22 +3100,6 @@
             <ac:spMk id="59" creationId="{859E7572-2D34-0D07-23AB-91F55B4B8580}"/>
           </ac:spMkLst>
         </pc:spChg>
-        <pc:spChg chg="add del mod">
-          <ac:chgData name="Marie-Christine Rufener" userId="2d6664cfb518d05c" providerId="LiveId" clId="{946B3BF8-DE9F-57F9-A118-BDE1986E26EE}" dt="2026-08-13T19:25:36.404" v="7950" actId="478"/>
-          <ac:spMkLst>
-            <pc:docMk/>
-            <pc:sldMk cId="2042279389" sldId="278"/>
-            <ac:spMk id="60" creationId="{9F21A33B-4B6C-E8AE-5CC3-437682D17A6D}"/>
-          </ac:spMkLst>
-        </pc:spChg>
-        <pc:spChg chg="add del mod">
-          <ac:chgData name="Marie-Christine Rufener" userId="2d6664cfb518d05c" providerId="LiveId" clId="{946B3BF8-DE9F-57F9-A118-BDE1986E26EE}" dt="2026-08-13T18:57:48.685" v="7205" actId="478"/>
-          <ac:spMkLst>
-            <pc:docMk/>
-            <pc:sldMk cId="2042279389" sldId="278"/>
-            <ac:spMk id="65" creationId="{6D921D5F-6588-F423-EB36-4A15834CE21A}"/>
-          </ac:spMkLst>
-        </pc:spChg>
         <pc:spChg chg="add mod">
           <ac:chgData name="Marie-Christine Rufener" userId="2d6664cfb518d05c" providerId="LiveId" clId="{946B3BF8-DE9F-57F9-A118-BDE1986E26EE}" dt="2026-08-13T18:56:50.769" v="7188" actId="1037"/>
           <ac:spMkLst>
@@ -3569,22 +3132,6 @@
             <ac:spMk id="73" creationId="{C2BA2522-B8CD-EF99-52D0-5C6E606F6597}"/>
           </ac:spMkLst>
         </pc:spChg>
-        <pc:spChg chg="add del mod">
-          <ac:chgData name="Marie-Christine Rufener" userId="2d6664cfb518d05c" providerId="LiveId" clId="{946B3BF8-DE9F-57F9-A118-BDE1986E26EE}" dt="2026-08-13T19:00:26.141" v="7352" actId="478"/>
-          <ac:spMkLst>
-            <pc:docMk/>
-            <pc:sldMk cId="2042279389" sldId="278"/>
-            <ac:spMk id="76" creationId="{FE0318E7-B66A-0350-36F9-7BDE96CA9753}"/>
-          </ac:spMkLst>
-        </pc:spChg>
-        <pc:spChg chg="add del mod">
-          <ac:chgData name="Marie-Christine Rufener" userId="2d6664cfb518d05c" providerId="LiveId" clId="{946B3BF8-DE9F-57F9-A118-BDE1986E26EE}" dt="2026-08-13T19:02:10.125" v="7476" actId="478"/>
-          <ac:spMkLst>
-            <pc:docMk/>
-            <pc:sldMk cId="2042279389" sldId="278"/>
-            <ac:spMk id="77" creationId="{1E58A9CA-9016-0F2C-1516-156AC2590AF3}"/>
-          </ac:spMkLst>
-        </pc:spChg>
         <pc:spChg chg="add mod topLvl">
           <ac:chgData name="Marie-Christine Rufener" userId="2d6664cfb518d05c" providerId="LiveId" clId="{946B3BF8-DE9F-57F9-A118-BDE1986E26EE}" dt="2026-08-13T19:21:47.259" v="7943" actId="165"/>
           <ac:spMkLst>
@@ -3601,14 +3148,6 @@
             <ac:spMk id="79" creationId="{D34509E7-62C7-3B10-BF01-B244B01A63EE}"/>
           </ac:spMkLst>
         </pc:spChg>
-        <pc:spChg chg="add del mod">
-          <ac:chgData name="Marie-Christine Rufener" userId="2d6664cfb518d05c" providerId="LiveId" clId="{946B3BF8-DE9F-57F9-A118-BDE1986E26EE}" dt="2026-08-13T19:25:39.890" v="7952" actId="478"/>
-          <ac:spMkLst>
-            <pc:docMk/>
-            <pc:sldMk cId="2042279389" sldId="278"/>
-            <ac:spMk id="80" creationId="{73D1EE5A-B2FB-127C-511A-298058C00BF3}"/>
-          </ac:spMkLst>
-        </pc:spChg>
         <pc:spChg chg="add mod topLvl">
           <ac:chgData name="Marie-Christine Rufener" userId="2d6664cfb518d05c" providerId="LiveId" clId="{946B3BF8-DE9F-57F9-A118-BDE1986E26EE}" dt="2026-08-13T20:58:55.154" v="8306" actId="20577"/>
           <ac:spMkLst>
@@ -3625,14 +3164,6 @@
             <ac:spMk id="82" creationId="{6060ABEC-73ED-7CE5-CF60-B381789D9398}"/>
           </ac:spMkLst>
         </pc:spChg>
-        <pc:spChg chg="add del mod">
-          <ac:chgData name="Marie-Christine Rufener" userId="2d6664cfb518d05c" providerId="LiveId" clId="{946B3BF8-DE9F-57F9-A118-BDE1986E26EE}" dt="2026-08-13T19:25:38.806" v="7951" actId="478"/>
-          <ac:spMkLst>
-            <pc:docMk/>
-            <pc:sldMk cId="2042279389" sldId="278"/>
-            <ac:spMk id="83" creationId="{A6E15466-1B67-1BD2-B0AF-41131720A618}"/>
-          </ac:spMkLst>
-        </pc:spChg>
         <pc:spChg chg="add mod topLvl">
           <ac:chgData name="Marie-Christine Rufener" userId="2d6664cfb518d05c" providerId="LiveId" clId="{946B3BF8-DE9F-57F9-A118-BDE1986E26EE}" dt="2026-08-13T19:21:47.259" v="7943" actId="165"/>
           <ac:spMkLst>
@@ -3649,14 +3180,6 @@
             <ac:spMk id="88" creationId="{37DE60EF-DBEC-A0E4-C5EB-675811E59275}"/>
           </ac:spMkLst>
         </pc:spChg>
-        <pc:spChg chg="add del mod">
-          <ac:chgData name="Marie-Christine Rufener" userId="2d6664cfb518d05c" providerId="LiveId" clId="{946B3BF8-DE9F-57F9-A118-BDE1986E26EE}" dt="2026-08-13T22:33:37.166" v="8318" actId="478"/>
-          <ac:spMkLst>
-            <pc:docMk/>
-            <pc:sldMk cId="2042279389" sldId="278"/>
-            <ac:spMk id="90" creationId="{E59FAD9A-877E-DC35-1C7C-AF635902418E}"/>
-          </ac:spMkLst>
-        </pc:spChg>
         <pc:spChg chg="add mod">
           <ac:chgData name="Marie-Christine Rufener" userId="2d6664cfb518d05c" providerId="LiveId" clId="{946B3BF8-DE9F-57F9-A118-BDE1986E26EE}" dt="2026-08-13T18:59:59.990" v="7332" actId="1076"/>
           <ac:spMkLst>
@@ -3673,14 +3196,6 @@
             <ac:spMk id="92" creationId="{0AB14D9B-A5EE-BDCB-3F30-2BF1D61BB629}"/>
           </ac:spMkLst>
         </pc:spChg>
-        <pc:spChg chg="add del mod">
-          <ac:chgData name="Marie-Christine Rufener" userId="2d6664cfb518d05c" providerId="LiveId" clId="{946B3BF8-DE9F-57F9-A118-BDE1986E26EE}" dt="2026-08-13T19:25:43.396" v="7954" actId="478"/>
-          <ac:spMkLst>
-            <pc:docMk/>
-            <pc:sldMk cId="2042279389" sldId="278"/>
-            <ac:spMk id="93" creationId="{4932F0EC-1510-6652-FBB6-DF32B9EAF8DE}"/>
-          </ac:spMkLst>
-        </pc:spChg>
         <pc:spChg chg="add mod topLvl">
           <ac:chgData name="Marie-Christine Rufener" userId="2d6664cfb518d05c" providerId="LiveId" clId="{946B3BF8-DE9F-57F9-A118-BDE1986E26EE}" dt="2026-08-13T20:59:02.642" v="8309" actId="20577"/>
           <ac:spMkLst>
@@ -3697,14 +3212,6 @@
             <ac:spMk id="95" creationId="{489CAFC3-9C9F-BDE5-9A35-DF3EEF73D734}"/>
           </ac:spMkLst>
         </pc:spChg>
-        <pc:spChg chg="add del mod">
-          <ac:chgData name="Marie-Christine Rufener" userId="2d6664cfb518d05c" providerId="LiveId" clId="{946B3BF8-DE9F-57F9-A118-BDE1986E26EE}" dt="2026-08-13T19:25:42.784" v="7953" actId="478"/>
-          <ac:spMkLst>
-            <pc:docMk/>
-            <pc:sldMk cId="2042279389" sldId="278"/>
-            <ac:spMk id="96" creationId="{88D48407-BB3C-C96F-E74B-3D35302641CF}"/>
-          </ac:spMkLst>
-        </pc:spChg>
         <pc:spChg chg="add mod">
           <ac:chgData name="Marie-Christine Rufener" userId="2d6664cfb518d05c" providerId="LiveId" clId="{946B3BF8-DE9F-57F9-A118-BDE1986E26EE}" dt="2026-08-13T18:59:59.990" v="7332" actId="1076"/>
           <ac:spMkLst>
@@ -3809,22 +3316,6 @@
             <ac:spMk id="133" creationId="{AA031E09-6AE9-6D81-7952-28AA031AF0AF}"/>
           </ac:spMkLst>
         </pc:spChg>
-        <pc:grpChg chg="mod">
-          <ac:chgData name="Marie-Christine Rufener" userId="2d6664cfb518d05c" providerId="LiveId" clId="{946B3BF8-DE9F-57F9-A118-BDE1986E26EE}" dt="2026-08-13T18:31:49.603" v="6508" actId="1076"/>
-          <ac:grpSpMkLst>
-            <pc:docMk/>
-            <pc:sldMk cId="2042279389" sldId="278"/>
-            <ac:grpSpMk id="4" creationId="{3FF0628B-175B-54A2-C591-BE3FFE9EA729}"/>
-          </ac:grpSpMkLst>
-        </pc:grpChg>
-        <pc:grpChg chg="add">
-          <ac:chgData name="Marie-Christine Rufener" userId="2d6664cfb518d05c" providerId="LiveId" clId="{946B3BF8-DE9F-57F9-A118-BDE1986E26EE}" dt="2026-08-13T19:12:03.980" v="7942" actId="164"/>
-          <ac:grpSpMkLst>
-            <pc:docMk/>
-            <pc:sldMk cId="2042279389" sldId="278"/>
-            <ac:grpSpMk id="128" creationId="{EFCFFFA1-BCA4-AEF0-8F74-CE96A18DB73C}"/>
-          </ac:grpSpMkLst>
-        </pc:grpChg>
         <pc:grpChg chg="add">
           <ac:chgData name="Marie-Christine Rufener" userId="2d6664cfb518d05c" providerId="LiveId" clId="{946B3BF8-DE9F-57F9-A118-BDE1986E26EE}" dt="2026-08-13T19:26:16.267" v="7963" actId="164"/>
           <ac:grpSpMkLst>
@@ -3833,22 +3324,6 @@
             <ac:grpSpMk id="134" creationId="{B98AEEA3-6210-257C-1AFD-78510948E0ED}"/>
           </ac:grpSpMkLst>
         </pc:grpChg>
-        <pc:picChg chg="add del mod">
-          <ac:chgData name="Marie-Christine Rufener" userId="2d6664cfb518d05c" providerId="LiveId" clId="{946B3BF8-DE9F-57F9-A118-BDE1986E26EE}" dt="2026-08-13T19:11:53.497" v="7941" actId="478"/>
-          <ac:picMkLst>
-            <pc:docMk/>
-            <pc:sldMk cId="2042279389" sldId="278"/>
-            <ac:picMk id="2" creationId="{F94597DF-7475-3B0C-551B-C92307440EB3}"/>
-          </ac:picMkLst>
-        </pc:picChg>
-        <pc:picChg chg="add">
-          <ac:chgData name="Marie-Christine Rufener" userId="2d6664cfb518d05c" providerId="LiveId" clId="{946B3BF8-DE9F-57F9-A118-BDE1986E26EE}" dt="2026-08-13T18:31:39.982" v="6505"/>
-          <ac:picMkLst>
-            <pc:docMk/>
-            <pc:sldMk cId="2042279389" sldId="278"/>
-            <ac:picMk id="3" creationId="{F08D9E68-8306-82A7-B217-3948F74CBB09}"/>
-          </ac:picMkLst>
-        </pc:picChg>
         <pc:cxnChg chg="mod">
           <ac:chgData name="Marie-Christine Rufener" userId="2d6664cfb518d05c" providerId="LiveId" clId="{946B3BF8-DE9F-57F9-A118-BDE1986E26EE}" dt="2026-08-13T19:05:17.671" v="7736" actId="14100"/>
           <ac:cxnSpMkLst>
@@ -3913,22 +3388,6 @@
             <ac:cxnSpMk id="34" creationId="{E7CBF6FE-4D10-4042-993E-F065E3C72A35}"/>
           </ac:cxnSpMkLst>
         </pc:cxnChg>
-        <pc:cxnChg chg="del mod">
-          <ac:chgData name="Marie-Christine Rufener" userId="2d6664cfb518d05c" providerId="LiveId" clId="{946B3BF8-DE9F-57F9-A118-BDE1986E26EE}" dt="2026-08-13T18:57:46.764" v="7204" actId="478"/>
-          <ac:cxnSpMkLst>
-            <pc:docMk/>
-            <pc:sldMk cId="2042279389" sldId="278"/>
-            <ac:cxnSpMk id="35" creationId="{61AE140E-D6C5-9B8F-276E-9CF7A2D311C8}"/>
-          </ac:cxnSpMkLst>
-        </pc:cxnChg>
-        <pc:cxnChg chg="add del mod">
-          <ac:chgData name="Marie-Christine Rufener" userId="2d6664cfb518d05c" providerId="LiveId" clId="{946B3BF8-DE9F-57F9-A118-BDE1986E26EE}" dt="2026-08-13T18:55:11.743" v="6933" actId="478"/>
-          <ac:cxnSpMkLst>
-            <pc:docMk/>
-            <pc:sldMk cId="2042279389" sldId="278"/>
-            <ac:cxnSpMk id="43" creationId="{E13020FC-C39B-006C-08AB-2F510E8AB637}"/>
-          </ac:cxnSpMkLst>
-        </pc:cxnChg>
         <pc:cxnChg chg="add mod">
           <ac:chgData name="Marie-Christine Rufener" userId="2d6664cfb518d05c" providerId="LiveId" clId="{946B3BF8-DE9F-57F9-A118-BDE1986E26EE}" dt="2026-08-13T19:00:16.887" v="7350" actId="14100"/>
           <ac:cxnSpMkLst>
@@ -3953,14 +3412,6 @@
             <ac:cxnSpMk id="62" creationId="{E6BA1FE7-5709-C734-D867-71731C7BBE8A}"/>
           </ac:cxnSpMkLst>
         </pc:cxnChg>
-        <pc:cxnChg chg="del">
-          <ac:chgData name="Marie-Christine Rufener" userId="2d6664cfb518d05c" providerId="LiveId" clId="{946B3BF8-DE9F-57F9-A118-BDE1986E26EE}" dt="2026-08-13T18:57:48.685" v="7205" actId="478"/>
-          <ac:cxnSpMkLst>
-            <pc:docMk/>
-            <pc:sldMk cId="2042279389" sldId="278"/>
-            <ac:cxnSpMk id="64" creationId="{2B899F36-F66D-CAC3-B557-1DEA8CD00A41}"/>
-          </ac:cxnSpMkLst>
-        </pc:cxnChg>
         <pc:cxnChg chg="add mod">
           <ac:chgData name="Marie-Christine Rufener" userId="2d6664cfb518d05c" providerId="LiveId" clId="{946B3BF8-DE9F-57F9-A118-BDE1986E26EE}" dt="2026-08-13T19:01:46.080" v="7467" actId="14100"/>
           <ac:cxnSpMkLst>
@@ -3993,28 +3444,12 @@
             <ac:cxnSpMk id="84" creationId="{A6C90B54-2A14-30E5-FE66-A92B8BE623C3}"/>
           </ac:cxnSpMkLst>
         </pc:cxnChg>
-        <pc:cxnChg chg="del">
-          <ac:chgData name="Marie-Christine Rufener" userId="2d6664cfb518d05c" providerId="LiveId" clId="{946B3BF8-DE9F-57F9-A118-BDE1986E26EE}" dt="2026-08-13T19:04:28.184" v="7561" actId="478"/>
-          <ac:cxnSpMkLst>
-            <pc:docMk/>
-            <pc:sldMk cId="2042279389" sldId="278"/>
-            <ac:cxnSpMk id="89" creationId="{B3B20307-52BD-37EF-073D-3D340448F36E}"/>
-          </ac:cxnSpMkLst>
-        </pc:cxnChg>
         <pc:cxnChg chg="add mod">
           <ac:chgData name="Marie-Christine Rufener" userId="2d6664cfb518d05c" providerId="LiveId" clId="{946B3BF8-DE9F-57F9-A118-BDE1986E26EE}" dt="2026-08-13T18:59:59.990" v="7332" actId="1076"/>
           <ac:cxnSpMkLst>
             <pc:docMk/>
             <pc:sldMk cId="2042279389" sldId="278"/>
             <ac:cxnSpMk id="97" creationId="{EF653445-0272-0F5E-6C22-61DFB3D3FA4C}"/>
-          </ac:cxnSpMkLst>
-        </pc:cxnChg>
-        <pc:cxnChg chg="del">
-          <ac:chgData name="Marie-Christine Rufener" userId="2d6664cfb518d05c" providerId="LiveId" clId="{946B3BF8-DE9F-57F9-A118-BDE1986E26EE}" dt="2026-08-13T19:04:28.184" v="7561" actId="478"/>
-          <ac:cxnSpMkLst>
-            <pc:docMk/>
-            <pc:sldMk cId="2042279389" sldId="278"/>
-            <ac:cxnSpMk id="102" creationId="{B9B22E59-A96D-CC43-3901-34884F283C85}"/>
           </ac:cxnSpMkLst>
         </pc:cxnChg>
         <pc:cxnChg chg="add mod">
@@ -4104,30 +3539,6 @@
             <ac:spMk id="7" creationId="{17E0E52A-5511-60C4-3A87-2D617510757B}"/>
           </ac:spMkLst>
         </pc:spChg>
-        <pc:spChg chg="del mod topLvl">
-          <ac:chgData name="Marie-Christine Rufener" userId="2d6664cfb518d05c" providerId="LiveId" clId="{946B3BF8-DE9F-57F9-A118-BDE1986E26EE}" dt="2026-08-13T19:35:31.310" v="8198" actId="478"/>
-          <ac:spMkLst>
-            <pc:docMk/>
-            <pc:sldMk cId="2837058567" sldId="279"/>
-            <ac:spMk id="8" creationId="{0DF4BD54-B962-C2CA-37F4-ACCBC52E4DC8}"/>
-          </ac:spMkLst>
-        </pc:spChg>
-        <pc:spChg chg="del mod">
-          <ac:chgData name="Marie-Christine Rufener" userId="2d6664cfb518d05c" providerId="LiveId" clId="{946B3BF8-DE9F-57F9-A118-BDE1986E26EE}" dt="2026-08-13T19:33:19.687" v="8115" actId="478"/>
-          <ac:spMkLst>
-            <pc:docMk/>
-            <pc:sldMk cId="2837058567" sldId="279"/>
-            <ac:spMk id="9" creationId="{307F7CF4-2B4E-5B74-88AB-8CD3CB53D680}"/>
-          </ac:spMkLst>
-        </pc:spChg>
-        <pc:spChg chg="del">
-          <ac:chgData name="Marie-Christine Rufener" userId="2d6664cfb518d05c" providerId="LiveId" clId="{946B3BF8-DE9F-57F9-A118-BDE1986E26EE}" dt="2026-08-13T19:33:19.687" v="8115" actId="478"/>
-          <ac:spMkLst>
-            <pc:docMk/>
-            <pc:sldMk cId="2837058567" sldId="279"/>
-            <ac:spMk id="10" creationId="{19824816-4569-345E-C302-77F2AF582FE1}"/>
-          </ac:spMkLst>
-        </pc:spChg>
         <pc:spChg chg="mod topLvl">
           <ac:chgData name="Marie-Christine Rufener" userId="2d6664cfb518d05c" providerId="LiveId" clId="{946B3BF8-DE9F-57F9-A118-BDE1986E26EE}" dt="2026-08-13T19:36:56.041" v="8299" actId="20577"/>
           <ac:spMkLst>
@@ -4184,14 +3595,6 @@
             <ac:spMk id="36" creationId="{3FCECC40-3AC6-18C8-83C0-9DD6F5795172}"/>
           </ac:spMkLst>
         </pc:spChg>
-        <pc:spChg chg="add del mod">
-          <ac:chgData name="Marie-Christine Rufener" userId="2d6664cfb518d05c" providerId="LiveId" clId="{946B3BF8-DE9F-57F9-A118-BDE1986E26EE}" dt="2026-08-13T19:32:10.448" v="8100" actId="478"/>
-          <ac:spMkLst>
-            <pc:docMk/>
-            <pc:sldMk cId="2837058567" sldId="279"/>
-            <ac:spMk id="39" creationId="{82AF7643-5712-E411-077B-4D82254CD337}"/>
-          </ac:spMkLst>
-        </pc:spChg>
         <pc:spChg chg="add mod">
           <ac:chgData name="Marie-Christine Rufener" userId="2d6664cfb518d05c" providerId="LiveId" clId="{946B3BF8-DE9F-57F9-A118-BDE1986E26EE}" dt="2026-08-13T19:36:56.041" v="8299" actId="20577"/>
           <ac:spMkLst>
@@ -4224,14 +3627,6 @@
             <ac:spMk id="43" creationId="{9F62DD17-6281-8B9E-0CAE-9B532E7BA26B}"/>
           </ac:spMkLst>
         </pc:spChg>
-        <pc:grpChg chg="mod">
-          <ac:chgData name="Marie-Christine Rufener" userId="2d6664cfb518d05c" providerId="LiveId" clId="{946B3BF8-DE9F-57F9-A118-BDE1986E26EE}" dt="2026-08-13T19:27:44.901" v="7971" actId="1076"/>
-          <ac:grpSpMkLst>
-            <pc:docMk/>
-            <pc:sldMk cId="2837058567" sldId="279"/>
-            <ac:grpSpMk id="4" creationId="{116F068D-8F6D-E7C0-A290-F990CFB1895E}"/>
-          </ac:grpSpMkLst>
-        </pc:grpChg>
         <pc:grpChg chg="add">
           <ac:chgData name="Marie-Christine Rufener" userId="2d6664cfb518d05c" providerId="LiveId" clId="{946B3BF8-DE9F-57F9-A118-BDE1986E26EE}" dt="2026-08-13T19:36:48.691" v="8294" actId="164"/>
           <ac:grpSpMkLst>
@@ -4240,22 +3635,6 @@
             <ac:grpSpMk id="44" creationId="{94B61B87-446F-C5BF-81BE-32EC33058134}"/>
           </ac:grpSpMkLst>
         </pc:grpChg>
-        <pc:picChg chg="add del mod">
-          <ac:chgData name="Marie-Christine Rufener" userId="2d6664cfb518d05c" providerId="LiveId" clId="{946B3BF8-DE9F-57F9-A118-BDE1986E26EE}" dt="2026-08-13T19:36:41.345" v="8292" actId="478"/>
-          <ac:picMkLst>
-            <pc:docMk/>
-            <pc:sldMk cId="2837058567" sldId="279"/>
-            <ac:picMk id="2" creationId="{BBED1FBF-C9D6-3C0B-E6BD-91FD8211616F}"/>
-          </ac:picMkLst>
-        </pc:picChg>
-        <pc:picChg chg="add mod">
-          <ac:chgData name="Marie-Christine Rufener" userId="2d6664cfb518d05c" providerId="LiveId" clId="{946B3BF8-DE9F-57F9-A118-BDE1986E26EE}" dt="2026-08-13T19:27:33.611" v="7967"/>
-          <ac:picMkLst>
-            <pc:docMk/>
-            <pc:sldMk cId="2837058567" sldId="279"/>
-            <ac:picMk id="3" creationId="{C4D1CF19-6EAB-CFF2-B4BA-B8C20A4FA2B2}"/>
-          </ac:picMkLst>
-        </pc:picChg>
       </pc:sldChg>
       <pc:sldChg chg="addSp delSp modSp new mod ord">
         <pc:chgData name="Marie-Christine Rufener" userId="2d6664cfb518d05c" providerId="LiveId" clId="{946B3BF8-DE9F-57F9-A118-BDE1986E26EE}" dt="2026-08-14T15:19:08.899" v="8943" actId="164"/>
@@ -4271,22 +3650,6 @@
             <ac:spMk id="32" creationId="{0A2BC88F-3C6D-065B-B01C-D2416EF5E913}"/>
           </ac:spMkLst>
         </pc:spChg>
-        <pc:spChg chg="add del mod">
-          <ac:chgData name="Marie-Christine Rufener" userId="2d6664cfb518d05c" providerId="LiveId" clId="{946B3BF8-DE9F-57F9-A118-BDE1986E26EE}" dt="2026-08-14T14:56:28.949" v="8477"/>
-          <ac:spMkLst>
-            <pc:docMk/>
-            <pc:sldMk cId="1995668596" sldId="280"/>
-            <ac:spMk id="33" creationId="{312954F0-B4C6-DA1D-2092-209805A8A258}"/>
-          </ac:spMkLst>
-        </pc:spChg>
-        <pc:spChg chg="add del mod">
-          <ac:chgData name="Marie-Christine Rufener" userId="2d6664cfb518d05c" providerId="LiveId" clId="{946B3BF8-DE9F-57F9-A118-BDE1986E26EE}" dt="2026-08-14T14:56:29.484" v="8479"/>
-          <ac:spMkLst>
-            <pc:docMk/>
-            <pc:sldMk cId="1995668596" sldId="280"/>
-            <ac:spMk id="34" creationId="{0412D6FD-CE74-E74B-80C5-1F25EC6A917C}"/>
-          </ac:spMkLst>
-        </pc:spChg>
         <pc:spChg chg="add mod">
           <ac:chgData name="Marie-Christine Rufener" userId="2d6664cfb518d05c" providerId="LiveId" clId="{946B3BF8-DE9F-57F9-A118-BDE1986E26EE}" dt="2026-08-14T15:16:18.499" v="8929" actId="1076"/>
           <ac:spMkLst>
@@ -4352,38 +3715,6 @@
           </ac:spMkLst>
         </pc:spChg>
         <pc:spChg chg="add del mod">
-          <ac:chgData name="Marie-Christine Rufener" userId="2d6664cfb518d05c" providerId="LiveId" clId="{946B3BF8-DE9F-57F9-A118-BDE1986E26EE}" dt="2026-08-14T15:12:56.367" v="8899" actId="478"/>
-          <ac:spMkLst>
-            <pc:docMk/>
-            <pc:sldMk cId="1995668596" sldId="280"/>
-            <ac:spMk id="62" creationId="{697E6FD5-ED94-F458-836F-3C8DA883E059}"/>
-          </ac:spMkLst>
-        </pc:spChg>
-        <pc:spChg chg="add del mod">
-          <ac:chgData name="Marie-Christine Rufener" userId="2d6664cfb518d05c" providerId="LiveId" clId="{946B3BF8-DE9F-57F9-A118-BDE1986E26EE}" dt="2026-08-14T15:12:56.367" v="8899" actId="478"/>
-          <ac:spMkLst>
-            <pc:docMk/>
-            <pc:sldMk cId="1995668596" sldId="280"/>
-            <ac:spMk id="63" creationId="{D1882152-2B79-EF7D-2553-9C092DBF04B8}"/>
-          </ac:spMkLst>
-        </pc:spChg>
-        <pc:spChg chg="add del mod">
-          <ac:chgData name="Marie-Christine Rufener" userId="2d6664cfb518d05c" providerId="LiveId" clId="{946B3BF8-DE9F-57F9-A118-BDE1986E26EE}" dt="2026-08-14T15:12:56.367" v="8899" actId="478"/>
-          <ac:spMkLst>
-            <pc:docMk/>
-            <pc:sldMk cId="1995668596" sldId="280"/>
-            <ac:spMk id="64" creationId="{D052F601-B5FB-30AB-7CFE-F10864F61C9F}"/>
-          </ac:spMkLst>
-        </pc:spChg>
-        <pc:spChg chg="add del mod">
-          <ac:chgData name="Marie-Christine Rufener" userId="2d6664cfb518d05c" providerId="LiveId" clId="{946B3BF8-DE9F-57F9-A118-BDE1986E26EE}" dt="2026-08-14T15:12:56.367" v="8899" actId="478"/>
-          <ac:spMkLst>
-            <pc:docMk/>
-            <pc:sldMk cId="1995668596" sldId="280"/>
-            <ac:spMk id="65" creationId="{7D5C3A7C-FEA5-8A19-400E-190CE1AAA0B3}"/>
-          </ac:spMkLst>
-        </pc:spChg>
-        <pc:spChg chg="add del mod">
           <ac:chgData name="Marie-Christine Rufener" userId="2d6664cfb518d05c" providerId="LiveId" clId="{946B3BF8-DE9F-57F9-A118-BDE1986E26EE}" dt="2026-08-14T15:12:52.274" v="8898" actId="1035"/>
           <ac:spMkLst>
             <pc:docMk/>
@@ -4431,30 +3762,6 @@
             <ac:grpSpMk id="71" creationId="{6432A2B9-4612-825E-20AF-D20CD8E7C201}"/>
           </ac:grpSpMkLst>
         </pc:grpChg>
-        <pc:picChg chg="add del mod">
-          <ac:chgData name="Marie-Christine Rufener" userId="2d6664cfb518d05c" providerId="LiveId" clId="{946B3BF8-DE9F-57F9-A118-BDE1986E26EE}" dt="2026-08-14T14:45:26.930" v="8325" actId="478"/>
-          <ac:picMkLst>
-            <pc:docMk/>
-            <pc:sldMk cId="1995668596" sldId="280"/>
-            <ac:picMk id="3" creationId="{778CADFD-413F-FE58-6FEE-FEDDB4DB0F82}"/>
-          </ac:picMkLst>
-        </pc:picChg>
-        <pc:picChg chg="add del mod">
-          <ac:chgData name="Marie-Christine Rufener" userId="2d6664cfb518d05c" providerId="LiveId" clId="{946B3BF8-DE9F-57F9-A118-BDE1986E26EE}" dt="2026-08-14T14:49:05.871" v="8332" actId="478"/>
-          <ac:picMkLst>
-            <pc:docMk/>
-            <pc:sldMk cId="1995668596" sldId="280"/>
-            <ac:picMk id="5" creationId="{B2080E59-8348-5D04-003E-380C0417E09A}"/>
-          </ac:picMkLst>
-        </pc:picChg>
-        <pc:picChg chg="add del mod">
-          <ac:chgData name="Marie-Christine Rufener" userId="2d6664cfb518d05c" providerId="LiveId" clId="{946B3BF8-DE9F-57F9-A118-BDE1986E26EE}" dt="2026-08-14T14:49:19.956" v="8340" actId="478"/>
-          <ac:picMkLst>
-            <pc:docMk/>
-            <pc:sldMk cId="1995668596" sldId="280"/>
-            <ac:picMk id="7" creationId="{4A7DBCC3-7723-4604-2E33-6F410127158A}"/>
-          </ac:picMkLst>
-        </pc:picChg>
         <pc:picChg chg="add mod modCrop">
           <ac:chgData name="Marie-Christine Rufener" userId="2d6664cfb518d05c" providerId="LiveId" clId="{946B3BF8-DE9F-57F9-A118-BDE1986E26EE}" dt="2026-08-14T14:51:24.790" v="8360" actId="732"/>
           <ac:picMkLst>
@@ -4535,14 +3842,6 @@
             <ac:cxnSpMk id="30" creationId="{CB39B40C-4576-1F00-C3DF-2B126298368E}"/>
           </ac:cxnSpMkLst>
         </pc:cxnChg>
-        <pc:cxnChg chg="add del mod">
-          <ac:chgData name="Marie-Christine Rufener" userId="2d6664cfb518d05c" providerId="LiveId" clId="{946B3BF8-DE9F-57F9-A118-BDE1986E26EE}" dt="2026-08-14T14:59:21.131" v="8513" actId="478"/>
-          <ac:cxnSpMkLst>
-            <pc:docMk/>
-            <pc:sldMk cId="1995668596" sldId="280"/>
-            <ac:cxnSpMk id="36" creationId="{14DE7B2C-C92F-88F7-632D-FFD14F1CF6BF}"/>
-          </ac:cxnSpMkLst>
-        </pc:cxnChg>
         <pc:cxnChg chg="add mod">
           <ac:chgData name="Marie-Christine Rufener" userId="2d6664cfb518d05c" providerId="LiveId" clId="{946B3BF8-DE9F-57F9-A118-BDE1986E26EE}" dt="2026-08-14T15:07:48.293" v="8678" actId="1035"/>
           <ac:cxnSpMkLst>
@@ -4589,6 +3888,229 @@
             <pc:docMk/>
             <pc:sldMk cId="1995668596" sldId="280"/>
             <ac:cxnSpMk id="58" creationId="{1D47C2BE-97C7-5AAD-C7D9-0CAF8BFB3FB2}"/>
+          </ac:cxnSpMkLst>
+        </pc:cxnChg>
+      </pc:sldChg>
+      <pc:sldChg chg="addSp modSp new mod">
+        <pc:chgData name="Marie-Christine Rufener" userId="2d6664cfb518d05c" providerId="LiveId" clId="{946B3BF8-DE9F-57F9-A118-BDE1986E26EE}" dt="2026-08-17T10:21:21.622" v="9022" actId="207"/>
+        <pc:sldMkLst>
+          <pc:docMk/>
+          <pc:sldMk cId="1317523250" sldId="281"/>
+        </pc:sldMkLst>
+        <pc:spChg chg="mod">
+          <ac:chgData name="Marie-Christine Rufener" userId="2d6664cfb518d05c" providerId="LiveId" clId="{946B3BF8-DE9F-57F9-A118-BDE1986E26EE}" dt="2026-08-17T10:19:57.029" v="9010" actId="208"/>
+          <ac:spMkLst>
+            <pc:docMk/>
+            <pc:sldMk cId="1317523250" sldId="281"/>
+            <ac:spMk id="3" creationId="{84C77B4B-DACB-D99B-5AC4-E95AFA528631}"/>
+          </ac:spMkLst>
+        </pc:spChg>
+        <pc:spChg chg="mod">
+          <ac:chgData name="Marie-Christine Rufener" userId="2d6664cfb518d05c" providerId="LiveId" clId="{946B3BF8-DE9F-57F9-A118-BDE1986E26EE}" dt="2026-08-17T10:20:08.596" v="9011" actId="208"/>
+          <ac:spMkLst>
+            <pc:docMk/>
+            <pc:sldMk cId="1317523250" sldId="281"/>
+            <ac:spMk id="4" creationId="{8DD5AC06-2F31-D577-C14A-E8554411C5B3}"/>
+          </ac:spMkLst>
+        </pc:spChg>
+        <pc:spChg chg="mod">
+          <ac:chgData name="Marie-Christine Rufener" userId="2d6664cfb518d05c" providerId="LiveId" clId="{946B3BF8-DE9F-57F9-A118-BDE1986E26EE}" dt="2026-08-17T10:20:48.308" v="9017" actId="207"/>
+          <ac:spMkLst>
+            <pc:docMk/>
+            <pc:sldMk cId="1317523250" sldId="281"/>
+            <ac:spMk id="5" creationId="{43351753-AD4D-40D0-EC54-3F2BB4D4BEAB}"/>
+          </ac:spMkLst>
+        </pc:spChg>
+        <pc:spChg chg="mod">
+          <ac:chgData name="Marie-Christine Rufener" userId="2d6664cfb518d05c" providerId="LiveId" clId="{946B3BF8-DE9F-57F9-A118-BDE1986E26EE}" dt="2026-08-17T10:21:21.622" v="9022" actId="207"/>
+          <ac:spMkLst>
+            <pc:docMk/>
+            <pc:sldMk cId="1317523250" sldId="281"/>
+            <ac:spMk id="6" creationId="{7D05AC4F-F224-B3CE-5DDC-D1B9027B7FE9}"/>
+          </ac:spMkLst>
+        </pc:spChg>
+        <pc:spChg chg="mod">
+          <ac:chgData name="Marie-Christine Rufener" userId="2d6664cfb518d05c" providerId="LiveId" clId="{946B3BF8-DE9F-57F9-A118-BDE1986E26EE}" dt="2026-08-17T10:21:21.622" v="9022" actId="207"/>
+          <ac:spMkLst>
+            <pc:docMk/>
+            <pc:sldMk cId="1317523250" sldId="281"/>
+            <ac:spMk id="7" creationId="{B6D32CF6-5EFA-BFE8-6B76-C0E5F196C8C8}"/>
+          </ac:spMkLst>
+        </pc:spChg>
+        <pc:spChg chg="mod">
+          <ac:chgData name="Marie-Christine Rufener" userId="2d6664cfb518d05c" providerId="LiveId" clId="{946B3BF8-DE9F-57F9-A118-BDE1986E26EE}" dt="2026-08-17T10:21:21.622" v="9022" actId="207"/>
+          <ac:spMkLst>
+            <pc:docMk/>
+            <pc:sldMk cId="1317523250" sldId="281"/>
+            <ac:spMk id="8" creationId="{DC2A6A2F-5FE8-CCCE-16EC-55315E8BDB99}"/>
+          </ac:spMkLst>
+        </pc:spChg>
+        <pc:spChg chg="mod">
+          <ac:chgData name="Marie-Christine Rufener" userId="2d6664cfb518d05c" providerId="LiveId" clId="{946B3BF8-DE9F-57F9-A118-BDE1986E26EE}" dt="2026-08-17T10:20:39.948" v="9016" actId="207"/>
+          <ac:spMkLst>
+            <pc:docMk/>
+            <pc:sldMk cId="1317523250" sldId="281"/>
+            <ac:spMk id="9" creationId="{FBDB5BFE-7B32-3E11-AD68-74179BCF9BD9}"/>
+          </ac:spMkLst>
+        </pc:spChg>
+        <pc:spChg chg="mod">
+          <ac:chgData name="Marie-Christine Rufener" userId="2d6664cfb518d05c" providerId="LiveId" clId="{946B3BF8-DE9F-57F9-A118-BDE1986E26EE}" dt="2026-08-17T10:20:52.353" v="9018" actId="207"/>
+          <ac:spMkLst>
+            <pc:docMk/>
+            <pc:sldMk cId="1317523250" sldId="281"/>
+            <ac:spMk id="10" creationId="{F67DCFCD-DB56-82ED-EAF1-E8064FF91158}"/>
+          </ac:spMkLst>
+        </pc:spChg>
+        <pc:spChg chg="mod">
+          <ac:chgData name="Marie-Christine Rufener" userId="2d6664cfb518d05c" providerId="LiveId" clId="{946B3BF8-DE9F-57F9-A118-BDE1986E26EE}" dt="2026-08-17T10:20:56.134" v="9019" actId="207"/>
+          <ac:spMkLst>
+            <pc:docMk/>
+            <pc:sldMk cId="1317523250" sldId="281"/>
+            <ac:spMk id="11" creationId="{DE667C5F-BB38-4DDC-F74C-2CF56EC1B52E}"/>
+          </ac:spMkLst>
+        </pc:spChg>
+        <pc:spChg chg="mod">
+          <ac:chgData name="Marie-Christine Rufener" userId="2d6664cfb518d05c" providerId="LiveId" clId="{946B3BF8-DE9F-57F9-A118-BDE1986E26EE}" dt="2026-08-17T10:20:39.948" v="9016" actId="207"/>
+          <ac:spMkLst>
+            <pc:docMk/>
+            <pc:sldMk cId="1317523250" sldId="281"/>
+            <ac:spMk id="12" creationId="{FAF868EC-8F60-07D6-6C1A-BEEF2B3FF3BC}"/>
+          </ac:spMkLst>
+        </pc:spChg>
+        <pc:spChg chg="mod">
+          <ac:chgData name="Marie-Christine Rufener" userId="2d6664cfb518d05c" providerId="LiveId" clId="{946B3BF8-DE9F-57F9-A118-BDE1986E26EE}" dt="2026-08-17T10:20:39.948" v="9016" actId="207"/>
+          <ac:spMkLst>
+            <pc:docMk/>
+            <pc:sldMk cId="1317523250" sldId="281"/>
+            <ac:spMk id="13" creationId="{D9DCE77E-E66B-DCD9-564B-FA210D740687}"/>
+          </ac:spMkLst>
+        </pc:spChg>
+        <pc:spChg chg="mod">
+          <ac:chgData name="Marie-Christine Rufener" userId="2d6664cfb518d05c" providerId="LiveId" clId="{946B3BF8-DE9F-57F9-A118-BDE1986E26EE}" dt="2026-08-17T10:21:21.622" v="9022" actId="207"/>
+          <ac:spMkLst>
+            <pc:docMk/>
+            <pc:sldMk cId="1317523250" sldId="281"/>
+            <ac:spMk id="16" creationId="{17DD91F4-C93E-1F19-7D6D-76168928FDBB}"/>
+          </ac:spMkLst>
+        </pc:spChg>
+        <pc:spChg chg="mod">
+          <ac:chgData name="Marie-Christine Rufener" userId="2d6664cfb518d05c" providerId="LiveId" clId="{946B3BF8-DE9F-57F9-A118-BDE1986E26EE}" dt="2026-08-17T10:21:21.622" v="9022" actId="207"/>
+          <ac:spMkLst>
+            <pc:docMk/>
+            <pc:sldMk cId="1317523250" sldId="281"/>
+            <ac:spMk id="17" creationId="{9ABC8DE1-6494-1DE1-DC2B-DA8750B45B17}"/>
+          </ac:spMkLst>
+        </pc:spChg>
+        <pc:spChg chg="mod">
+          <ac:chgData name="Marie-Christine Rufener" userId="2d6664cfb518d05c" providerId="LiveId" clId="{946B3BF8-DE9F-57F9-A118-BDE1986E26EE}" dt="2026-08-17T10:21:21.622" v="9022" actId="207"/>
+          <ac:spMkLst>
+            <pc:docMk/>
+            <pc:sldMk cId="1317523250" sldId="281"/>
+            <ac:spMk id="18" creationId="{8B3F84EB-EAB0-4FDB-B0F8-0D53F47A325E}"/>
+          </ac:spMkLst>
+        </pc:spChg>
+        <pc:spChg chg="mod">
+          <ac:chgData name="Marie-Christine Rufener" userId="2d6664cfb518d05c" providerId="LiveId" clId="{946B3BF8-DE9F-57F9-A118-BDE1986E26EE}" dt="2026-08-17T10:20:39.948" v="9016" actId="207"/>
+          <ac:spMkLst>
+            <pc:docMk/>
+            <pc:sldMk cId="1317523250" sldId="281"/>
+            <ac:spMk id="19" creationId="{75EDB5F0-0E1B-D224-717C-82A056C8CEAF}"/>
+          </ac:spMkLst>
+        </pc:spChg>
+        <pc:spChg chg="mod">
+          <ac:chgData name="Marie-Christine Rufener" userId="2d6664cfb518d05c" providerId="LiveId" clId="{946B3BF8-DE9F-57F9-A118-BDE1986E26EE}" dt="2026-08-17T10:20:39.948" v="9016" actId="207"/>
+          <ac:spMkLst>
+            <pc:docMk/>
+            <pc:sldMk cId="1317523250" sldId="281"/>
+            <ac:spMk id="20" creationId="{C4599016-5625-BEC0-8109-4C43C857BB19}"/>
+          </ac:spMkLst>
+        </pc:spChg>
+        <pc:spChg chg="mod">
+          <ac:chgData name="Marie-Christine Rufener" userId="2d6664cfb518d05c" providerId="LiveId" clId="{946B3BF8-DE9F-57F9-A118-BDE1986E26EE}" dt="2026-08-17T10:20:39.948" v="9016" actId="207"/>
+          <ac:spMkLst>
+            <pc:docMk/>
+            <pc:sldMk cId="1317523250" sldId="281"/>
+            <ac:spMk id="21" creationId="{D3D39D18-F239-752D-F61F-7069BE45694C}"/>
+          </ac:spMkLst>
+        </pc:spChg>
+        <pc:spChg chg="mod">
+          <ac:chgData name="Marie-Christine Rufener" userId="2d6664cfb518d05c" providerId="LiveId" clId="{946B3BF8-DE9F-57F9-A118-BDE1986E26EE}" dt="2026-08-17T10:19:50.234" v="9009" actId="208"/>
+          <ac:spMkLst>
+            <pc:docMk/>
+            <pc:sldMk cId="1317523250" sldId="281"/>
+            <ac:spMk id="22" creationId="{FF6157BC-9CC0-C162-593D-CB5055334B17}"/>
+          </ac:spMkLst>
+        </pc:spChg>
+        <pc:spChg chg="mod">
+          <ac:chgData name="Marie-Christine Rufener" userId="2d6664cfb518d05c" providerId="LiveId" clId="{946B3BF8-DE9F-57F9-A118-BDE1986E26EE}" dt="2026-08-17T10:21:21.622" v="9022" actId="207"/>
+          <ac:spMkLst>
+            <pc:docMk/>
+            <pc:sldMk cId="1317523250" sldId="281"/>
+            <ac:spMk id="23" creationId="{B4F284ED-1763-E996-707C-F4FB0EFA1243}"/>
+          </ac:spMkLst>
+        </pc:spChg>
+        <pc:spChg chg="mod">
+          <ac:chgData name="Marie-Christine Rufener" userId="2d6664cfb518d05c" providerId="LiveId" clId="{946B3BF8-DE9F-57F9-A118-BDE1986E26EE}" dt="2026-08-17T10:21:21.622" v="9022" actId="207"/>
+          <ac:spMkLst>
+            <pc:docMk/>
+            <pc:sldMk cId="1317523250" sldId="281"/>
+            <ac:spMk id="24" creationId="{0719CD0C-0C2B-BF30-ACFF-F9E94DE516DE}"/>
+          </ac:spMkLst>
+        </pc:spChg>
+        <pc:spChg chg="mod">
+          <ac:chgData name="Marie-Christine Rufener" userId="2d6664cfb518d05c" providerId="LiveId" clId="{946B3BF8-DE9F-57F9-A118-BDE1986E26EE}" dt="2026-08-17T10:21:21.622" v="9022" actId="207"/>
+          <ac:spMkLst>
+            <pc:docMk/>
+            <pc:sldMk cId="1317523250" sldId="281"/>
+            <ac:spMk id="25" creationId="{4302A502-26FE-1226-6EBA-1AFC84F796ED}"/>
+          </ac:spMkLst>
+        </pc:spChg>
+        <pc:spChg chg="mod">
+          <ac:chgData name="Marie-Christine Rufener" userId="2d6664cfb518d05c" providerId="LiveId" clId="{946B3BF8-DE9F-57F9-A118-BDE1986E26EE}" dt="2026-08-17T10:20:39.948" v="9016" actId="207"/>
+          <ac:spMkLst>
+            <pc:docMk/>
+            <pc:sldMk cId="1317523250" sldId="281"/>
+            <ac:spMk id="26" creationId="{AD2FD21C-CA75-DC27-17FF-130F80407E2D}"/>
+          </ac:spMkLst>
+        </pc:spChg>
+        <pc:spChg chg="mod">
+          <ac:chgData name="Marie-Christine Rufener" userId="2d6664cfb518d05c" providerId="LiveId" clId="{946B3BF8-DE9F-57F9-A118-BDE1986E26EE}" dt="2026-08-17T10:20:39.948" v="9016" actId="207"/>
+          <ac:spMkLst>
+            <pc:docMk/>
+            <pc:sldMk cId="1317523250" sldId="281"/>
+            <ac:spMk id="27" creationId="{068A16A8-520E-8568-5144-6DC0A35EFD77}"/>
+          </ac:spMkLst>
+        </pc:spChg>
+        <pc:spChg chg="mod">
+          <ac:chgData name="Marie-Christine Rufener" userId="2d6664cfb518d05c" providerId="LiveId" clId="{946B3BF8-DE9F-57F9-A118-BDE1986E26EE}" dt="2026-08-17T10:20:39.948" v="9016" actId="207"/>
+          <ac:spMkLst>
+            <pc:docMk/>
+            <pc:sldMk cId="1317523250" sldId="281"/>
+            <ac:spMk id="28" creationId="{A363D7A0-E6D6-5E3F-6FB1-106D74F7F6A7}"/>
+          </ac:spMkLst>
+        </pc:spChg>
+        <pc:grpChg chg="mod">
+          <ac:chgData name="Marie-Christine Rufener" userId="2d6664cfb518d05c" providerId="LiveId" clId="{946B3BF8-DE9F-57F9-A118-BDE1986E26EE}" dt="2026-08-17T10:19:09.132" v="9003" actId="1076"/>
+          <ac:grpSpMkLst>
+            <pc:docMk/>
+            <pc:sldMk cId="1317523250" sldId="281"/>
+            <ac:grpSpMk id="2" creationId="{77938A7D-FB3C-C450-051A-093FA01F5955}"/>
+          </ac:grpSpMkLst>
+        </pc:grpChg>
+        <pc:cxnChg chg="mod">
+          <ac:chgData name="Marie-Christine Rufener" userId="2d6664cfb518d05c" providerId="LiveId" clId="{946B3BF8-DE9F-57F9-A118-BDE1986E26EE}" dt="2026-08-17T10:20:20.343" v="9013" actId="692"/>
+          <ac:cxnSpMkLst>
+            <pc:docMk/>
+            <pc:sldMk cId="1317523250" sldId="281"/>
+            <ac:cxnSpMk id="14" creationId="{899A360D-4814-DD02-8FB2-6979B9947F07}"/>
+          </ac:cxnSpMkLst>
+        </pc:cxnChg>
+        <pc:cxnChg chg="mod">
+          <ac:chgData name="Marie-Christine Rufener" userId="2d6664cfb518d05c" providerId="LiveId" clId="{946B3BF8-DE9F-57F9-A118-BDE1986E26EE}" dt="2026-08-17T10:20:20.343" v="9013" actId="692"/>
+          <ac:cxnSpMkLst>
+            <pc:docMk/>
+            <pc:sldMk cId="1317523250" sldId="281"/>
+            <ac:cxnSpMk id="15" creationId="{922A6003-142C-4B10-7490-97E0604702D6}"/>
           </ac:cxnSpMkLst>
         </pc:cxnChg>
       </pc:sldChg>
@@ -34309,6 +33831,4431 @@
 </p:sld>
 </file>
 
+<file path=ppt/slides/slide20.xml><?xml version="1.0" encoding="utf-8"?>
+<p:sld xmlns:a="http://schemas.openxmlformats.org/drawingml/2006/main" xmlns:r="http://schemas.openxmlformats.org/officeDocument/2006/relationships" xmlns:p="http://schemas.openxmlformats.org/presentationml/2006/main">
+  <p:cSld>
+    <p:spTree>
+      <p:nvGrpSpPr>
+        <p:cNvPr id="1" name=""/>
+        <p:cNvGrpSpPr/>
+        <p:nvPr/>
+      </p:nvGrpSpPr>
+      <p:grpSpPr>
+        <a:xfrm>
+          <a:off x="0" y="0"/>
+          <a:ext cx="0" cy="0"/>
+          <a:chOff x="0" y="0"/>
+          <a:chExt cx="0" cy="0"/>
+        </a:xfrm>
+      </p:grpSpPr>
+      <p:grpSp>
+        <p:nvGrpSpPr>
+          <p:cNvPr id="2" name="Group 1">
+            <a:extLst>
+              <a:ext uri="{FF2B5EF4-FFF2-40B4-BE49-F238E27FC236}">
+                <a16:creationId xmlns:a16="http://schemas.microsoft.com/office/drawing/2014/main" id="{77938A7D-FB3C-C450-051A-093FA01F5955}"/>
+              </a:ext>
+            </a:extLst>
+          </p:cNvPr>
+          <p:cNvGrpSpPr/>
+          <p:nvPr/>
+        </p:nvGrpSpPr>
+        <p:grpSpPr>
+          <a:xfrm>
+            <a:off x="84666" y="1232221"/>
+            <a:ext cx="11798305" cy="4549527"/>
+            <a:chOff x="84666" y="1232221"/>
+            <a:chExt cx="11798305" cy="4549527"/>
+          </a:xfrm>
+        </p:grpSpPr>
+        <p:sp>
+          <p:nvSpPr>
+            <p:cNvPr id="3" name="Rectangle 2">
+              <a:extLst>
+                <a:ext uri="{FF2B5EF4-FFF2-40B4-BE49-F238E27FC236}">
+                  <a16:creationId xmlns:a16="http://schemas.microsoft.com/office/drawing/2014/main" id="{84C77B4B-DACB-D99B-5AC4-E95AFA528631}"/>
+                </a:ext>
+              </a:extLst>
+            </p:cNvPr>
+            <p:cNvSpPr/>
+            <p:nvPr/>
+          </p:nvSpPr>
+          <p:spPr>
+            <a:xfrm>
+              <a:off x="4204129" y="1854159"/>
+              <a:ext cx="3441272" cy="3927589"/>
+            </a:xfrm>
+            <a:custGeom>
+              <a:avLst/>
+              <a:gdLst>
+                <a:gd name="csX0" fmla="*/ 0 w 3441272"/>
+                <a:gd name="csY0" fmla="*/ 0 h 3927589"/>
+                <a:gd name="csX1" fmla="*/ 757080 w 3441272"/>
+                <a:gd name="csY1" fmla="*/ 0 h 3927589"/>
+                <a:gd name="csX2" fmla="*/ 1479747 w 3441272"/>
+                <a:gd name="csY2" fmla="*/ 0 h 3927589"/>
+                <a:gd name="csX3" fmla="*/ 2168001 w 3441272"/>
+                <a:gd name="csY3" fmla="*/ 0 h 3927589"/>
+                <a:gd name="csX4" fmla="*/ 3441272 w 3441272"/>
+                <a:gd name="csY4" fmla="*/ 0 h 3927589"/>
+                <a:gd name="csX5" fmla="*/ 3441272 w 3441272"/>
+                <a:gd name="csY5" fmla="*/ 733150 h 3927589"/>
+                <a:gd name="csX6" fmla="*/ 3441272 w 3441272"/>
+                <a:gd name="csY6" fmla="*/ 1427024 h 3927589"/>
+                <a:gd name="csX7" fmla="*/ 3441272 w 3441272"/>
+                <a:gd name="csY7" fmla="*/ 2003070 h 3927589"/>
+                <a:gd name="csX8" fmla="*/ 3441272 w 3441272"/>
+                <a:gd name="csY8" fmla="*/ 2696944 h 3927589"/>
+                <a:gd name="csX9" fmla="*/ 3441272 w 3441272"/>
+                <a:gd name="csY9" fmla="*/ 3233715 h 3927589"/>
+                <a:gd name="csX10" fmla="*/ 3441272 w 3441272"/>
+                <a:gd name="csY10" fmla="*/ 3927589 h 3927589"/>
+                <a:gd name="csX11" fmla="*/ 2821843 w 3441272"/>
+                <a:gd name="csY11" fmla="*/ 3927589 h 3927589"/>
+                <a:gd name="csX12" fmla="*/ 2064763 w 3441272"/>
+                <a:gd name="csY12" fmla="*/ 3927589 h 3927589"/>
+                <a:gd name="csX13" fmla="*/ 1410922 w 3441272"/>
+                <a:gd name="csY13" fmla="*/ 3927589 h 3927589"/>
+                <a:gd name="csX14" fmla="*/ 653842 w 3441272"/>
+                <a:gd name="csY14" fmla="*/ 3927589 h 3927589"/>
+                <a:gd name="csX15" fmla="*/ 0 w 3441272"/>
+                <a:gd name="csY15" fmla="*/ 3927589 h 3927589"/>
+                <a:gd name="csX16" fmla="*/ 0 w 3441272"/>
+                <a:gd name="csY16" fmla="*/ 3390819 h 3927589"/>
+                <a:gd name="csX17" fmla="*/ 0 w 3441272"/>
+                <a:gd name="csY17" fmla="*/ 2696944 h 3927589"/>
+                <a:gd name="csX18" fmla="*/ 0 w 3441272"/>
+                <a:gd name="csY18" fmla="*/ 2160174 h 3927589"/>
+                <a:gd name="csX19" fmla="*/ 0 w 3441272"/>
+                <a:gd name="csY19" fmla="*/ 1623403 h 3927589"/>
+                <a:gd name="csX20" fmla="*/ 0 w 3441272"/>
+                <a:gd name="csY20" fmla="*/ 890254 h 3927589"/>
+                <a:gd name="csX21" fmla="*/ 0 w 3441272"/>
+                <a:gd name="csY21" fmla="*/ 0 h 3927589"/>
+              </a:gdLst>
+              <a:ahLst/>
+              <a:cxnLst>
+                <a:cxn ang="0">
+                  <a:pos x="csX0" y="csY0"/>
+                </a:cxn>
+                <a:cxn ang="0">
+                  <a:pos x="csX1" y="csY1"/>
+                </a:cxn>
+                <a:cxn ang="0">
+                  <a:pos x="csX2" y="csY2"/>
+                </a:cxn>
+                <a:cxn ang="0">
+                  <a:pos x="csX3" y="csY3"/>
+                </a:cxn>
+                <a:cxn ang="0">
+                  <a:pos x="csX4" y="csY4"/>
+                </a:cxn>
+                <a:cxn ang="0">
+                  <a:pos x="csX5" y="csY5"/>
+                </a:cxn>
+                <a:cxn ang="0">
+                  <a:pos x="csX6" y="csY6"/>
+                </a:cxn>
+                <a:cxn ang="0">
+                  <a:pos x="csX7" y="csY7"/>
+                </a:cxn>
+                <a:cxn ang="0">
+                  <a:pos x="csX8" y="csY8"/>
+                </a:cxn>
+                <a:cxn ang="0">
+                  <a:pos x="csX9" y="csY9"/>
+                </a:cxn>
+                <a:cxn ang="0">
+                  <a:pos x="csX10" y="csY10"/>
+                </a:cxn>
+                <a:cxn ang="0">
+                  <a:pos x="csX11" y="csY11"/>
+                </a:cxn>
+                <a:cxn ang="0">
+                  <a:pos x="csX12" y="csY12"/>
+                </a:cxn>
+                <a:cxn ang="0">
+                  <a:pos x="csX13" y="csY13"/>
+                </a:cxn>
+                <a:cxn ang="0">
+                  <a:pos x="csX14" y="csY14"/>
+                </a:cxn>
+                <a:cxn ang="0">
+                  <a:pos x="csX15" y="csY15"/>
+                </a:cxn>
+                <a:cxn ang="0">
+                  <a:pos x="csX16" y="csY16"/>
+                </a:cxn>
+                <a:cxn ang="0">
+                  <a:pos x="csX17" y="csY17"/>
+                </a:cxn>
+                <a:cxn ang="0">
+                  <a:pos x="csX18" y="csY18"/>
+                </a:cxn>
+                <a:cxn ang="0">
+                  <a:pos x="csX19" y="csY19"/>
+                </a:cxn>
+                <a:cxn ang="0">
+                  <a:pos x="csX20" y="csY20"/>
+                </a:cxn>
+                <a:cxn ang="0">
+                  <a:pos x="csX21" y="csY21"/>
+                </a:cxn>
+              </a:cxnLst>
+              <a:rect l="l" t="t" r="r" b="b"/>
+              <a:pathLst>
+                <a:path w="3441272" h="3927589" fill="none" extrusionOk="0">
+                  <a:moveTo>
+                    <a:pt x="0" y="0"/>
+                  </a:moveTo>
+                  <a:cubicBezTo>
+                    <a:pt x="280613" y="-20693"/>
+                    <a:pt x="444858" y="-34149"/>
+                    <a:pt x="757080" y="0"/>
+                  </a:cubicBezTo>
+                  <a:cubicBezTo>
+                    <a:pt x="1069302" y="34149"/>
+                    <a:pt x="1266919" y="34743"/>
+                    <a:pt x="1479747" y="0"/>
+                  </a:cubicBezTo>
+                  <a:cubicBezTo>
+                    <a:pt x="1692575" y="-34743"/>
+                    <a:pt x="1952416" y="31297"/>
+                    <a:pt x="2168001" y="0"/>
+                  </a:cubicBezTo>
+                  <a:cubicBezTo>
+                    <a:pt x="2383586" y="-31297"/>
+                    <a:pt x="2905197" y="-55431"/>
+                    <a:pt x="3441272" y="0"/>
+                  </a:cubicBezTo>
+                  <a:cubicBezTo>
+                    <a:pt x="3406908" y="297016"/>
+                    <a:pt x="3454541" y="420619"/>
+                    <a:pt x="3441272" y="733150"/>
+                  </a:cubicBezTo>
+                  <a:cubicBezTo>
+                    <a:pt x="3428004" y="1045681"/>
+                    <a:pt x="3420090" y="1211603"/>
+                    <a:pt x="3441272" y="1427024"/>
+                  </a:cubicBezTo>
+                  <a:cubicBezTo>
+                    <a:pt x="3462454" y="1642445"/>
+                    <a:pt x="3424755" y="1788387"/>
+                    <a:pt x="3441272" y="2003070"/>
+                  </a:cubicBezTo>
+                  <a:cubicBezTo>
+                    <a:pt x="3457789" y="2217753"/>
+                    <a:pt x="3420340" y="2535380"/>
+                    <a:pt x="3441272" y="2696944"/>
+                  </a:cubicBezTo>
+                  <a:cubicBezTo>
+                    <a:pt x="3462204" y="2858508"/>
+                    <a:pt x="3451218" y="2989624"/>
+                    <a:pt x="3441272" y="3233715"/>
+                  </a:cubicBezTo>
+                  <a:cubicBezTo>
+                    <a:pt x="3431326" y="3477806"/>
+                    <a:pt x="3441574" y="3658449"/>
+                    <a:pt x="3441272" y="3927589"/>
+                  </a:cubicBezTo>
+                  <a:cubicBezTo>
+                    <a:pt x="3279005" y="3938243"/>
+                    <a:pt x="3107631" y="3918142"/>
+                    <a:pt x="2821843" y="3927589"/>
+                  </a:cubicBezTo>
+                  <a:cubicBezTo>
+                    <a:pt x="2536055" y="3937036"/>
+                    <a:pt x="2262249" y="3899282"/>
+                    <a:pt x="2064763" y="3927589"/>
+                  </a:cubicBezTo>
+                  <a:cubicBezTo>
+                    <a:pt x="1867277" y="3955896"/>
+                    <a:pt x="1641715" y="3905217"/>
+                    <a:pt x="1410922" y="3927589"/>
+                  </a:cubicBezTo>
+                  <a:cubicBezTo>
+                    <a:pt x="1180129" y="3949961"/>
+                    <a:pt x="932581" y="3911199"/>
+                    <a:pt x="653842" y="3927589"/>
+                  </a:cubicBezTo>
+                  <a:cubicBezTo>
+                    <a:pt x="375103" y="3943979"/>
+                    <a:pt x="174395" y="3912300"/>
+                    <a:pt x="0" y="3927589"/>
+                  </a:cubicBezTo>
+                  <a:cubicBezTo>
+                    <a:pt x="-7717" y="3665960"/>
+                    <a:pt x="26538" y="3612442"/>
+                    <a:pt x="0" y="3390819"/>
+                  </a:cubicBezTo>
+                  <a:cubicBezTo>
+                    <a:pt x="-26538" y="3169196"/>
+                    <a:pt x="23134" y="3038651"/>
+                    <a:pt x="0" y="2696944"/>
+                  </a:cubicBezTo>
+                  <a:cubicBezTo>
+                    <a:pt x="-23134" y="2355237"/>
+                    <a:pt x="-11433" y="2302087"/>
+                    <a:pt x="0" y="2160174"/>
+                  </a:cubicBezTo>
+                  <a:cubicBezTo>
+                    <a:pt x="11433" y="2018261"/>
+                    <a:pt x="-1546" y="1767255"/>
+                    <a:pt x="0" y="1623403"/>
+                  </a:cubicBezTo>
+                  <a:cubicBezTo>
+                    <a:pt x="1546" y="1479551"/>
+                    <a:pt x="387" y="1117109"/>
+                    <a:pt x="0" y="890254"/>
+                  </a:cubicBezTo>
+                  <a:cubicBezTo>
+                    <a:pt x="-387" y="663399"/>
+                    <a:pt x="7988" y="198223"/>
+                    <a:pt x="0" y="0"/>
+                  </a:cubicBezTo>
+                  <a:close/>
+                </a:path>
+                <a:path w="3441272" h="3927589" stroke="0" extrusionOk="0">
+                  <a:moveTo>
+                    <a:pt x="0" y="0"/>
+                  </a:moveTo>
+                  <a:cubicBezTo>
+                    <a:pt x="146364" y="-23341"/>
+                    <a:pt x="405733" y="15449"/>
+                    <a:pt x="653842" y="0"/>
+                  </a:cubicBezTo>
+                  <a:cubicBezTo>
+                    <a:pt x="901951" y="-15449"/>
+                    <a:pt x="1110618" y="27320"/>
+                    <a:pt x="1238858" y="0"/>
+                  </a:cubicBezTo>
+                  <a:cubicBezTo>
+                    <a:pt x="1367098" y="-27320"/>
+                    <a:pt x="1737423" y="24431"/>
+                    <a:pt x="1995938" y="0"/>
+                  </a:cubicBezTo>
+                  <a:cubicBezTo>
+                    <a:pt x="2254453" y="-24431"/>
+                    <a:pt x="2359857" y="-487"/>
+                    <a:pt x="2649779" y="0"/>
+                  </a:cubicBezTo>
+                  <a:cubicBezTo>
+                    <a:pt x="2939701" y="487"/>
+                    <a:pt x="3155327" y="21406"/>
+                    <a:pt x="3441272" y="0"/>
+                  </a:cubicBezTo>
+                  <a:cubicBezTo>
+                    <a:pt x="3464004" y="359526"/>
+                    <a:pt x="3411509" y="481154"/>
+                    <a:pt x="3441272" y="733150"/>
+                  </a:cubicBezTo>
+                  <a:cubicBezTo>
+                    <a:pt x="3471036" y="985146"/>
+                    <a:pt x="3442313" y="1125532"/>
+                    <a:pt x="3441272" y="1387748"/>
+                  </a:cubicBezTo>
+                  <a:cubicBezTo>
+                    <a:pt x="3440231" y="1649964"/>
+                    <a:pt x="3408598" y="1787482"/>
+                    <a:pt x="3441272" y="2042346"/>
+                  </a:cubicBezTo>
+                  <a:cubicBezTo>
+                    <a:pt x="3473946" y="2297210"/>
+                    <a:pt x="3412690" y="2471246"/>
+                    <a:pt x="3441272" y="2618393"/>
+                  </a:cubicBezTo>
+                  <a:cubicBezTo>
+                    <a:pt x="3469854" y="2765540"/>
+                    <a:pt x="3460967" y="2911244"/>
+                    <a:pt x="3441272" y="3194439"/>
+                  </a:cubicBezTo>
+                  <a:cubicBezTo>
+                    <a:pt x="3421577" y="3477634"/>
+                    <a:pt x="3455594" y="3745314"/>
+                    <a:pt x="3441272" y="3927589"/>
+                  </a:cubicBezTo>
+                  <a:cubicBezTo>
+                    <a:pt x="3133311" y="3957498"/>
+                    <a:pt x="2913075" y="3935429"/>
+                    <a:pt x="2718605" y="3927589"/>
+                  </a:cubicBezTo>
+                  <a:cubicBezTo>
+                    <a:pt x="2524135" y="3919749"/>
+                    <a:pt x="2138320" y="3962231"/>
+                    <a:pt x="1961525" y="3927589"/>
+                  </a:cubicBezTo>
+                  <a:cubicBezTo>
+                    <a:pt x="1784730" y="3892947"/>
+                    <a:pt x="1503436" y="3953186"/>
+                    <a:pt x="1204445" y="3927589"/>
+                  </a:cubicBezTo>
+                  <a:cubicBezTo>
+                    <a:pt x="905454" y="3901992"/>
+                    <a:pt x="550974" y="3919536"/>
+                    <a:pt x="0" y="3927589"/>
+                  </a:cubicBezTo>
+                  <a:cubicBezTo>
+                    <a:pt x="-32406" y="3709136"/>
+                    <a:pt x="-18472" y="3474623"/>
+                    <a:pt x="0" y="3272991"/>
+                  </a:cubicBezTo>
+                  <a:cubicBezTo>
+                    <a:pt x="18472" y="3071359"/>
+                    <a:pt x="15353" y="2933680"/>
+                    <a:pt x="0" y="2657669"/>
+                  </a:cubicBezTo>
+                  <a:cubicBezTo>
+                    <a:pt x="-15353" y="2381658"/>
+                    <a:pt x="1327" y="2286880"/>
+                    <a:pt x="0" y="2120898"/>
+                  </a:cubicBezTo>
+                  <a:cubicBezTo>
+                    <a:pt x="-1327" y="1954916"/>
+                    <a:pt x="-10216" y="1798661"/>
+                    <a:pt x="0" y="1544852"/>
+                  </a:cubicBezTo>
+                  <a:cubicBezTo>
+                    <a:pt x="10216" y="1291043"/>
+                    <a:pt x="8637" y="1151766"/>
+                    <a:pt x="0" y="968805"/>
+                  </a:cubicBezTo>
+                  <a:cubicBezTo>
+                    <a:pt x="-8637" y="785844"/>
+                    <a:pt x="13936" y="357038"/>
+                    <a:pt x="0" y="0"/>
+                  </a:cubicBezTo>
+                  <a:close/>
+                </a:path>
+              </a:pathLst>
+            </a:custGeom>
+            <a:solidFill>
+              <a:srgbClr val="567768">
+                <a:alpha val="47843"/>
+              </a:srgbClr>
+            </a:solidFill>
+            <a:ln>
+              <a:solidFill>
+                <a:srgbClr val="567768"/>
+              </a:solidFill>
+              <a:extLst>
+                <a:ext uri="{C807C97D-BFC1-408E-A445-0C87EB9F89A2}">
+                  <ask:lineSketchStyleProps xmlns:ask="http://schemas.microsoft.com/office/drawing/2018/sketchyshapes" sd="1219033472">
+                    <a:prstGeom prst="rect">
+                      <a:avLst/>
+                    </a:prstGeom>
+                    <ask:type>
+                      <ask:lineSketchFreehand/>
+                    </ask:type>
+                  </ask:lineSketchStyleProps>
+                </a:ext>
+              </a:extLst>
+            </a:ln>
+          </p:spPr>
+          <p:style>
+            <a:lnRef idx="2">
+              <a:schemeClr val="accent1">
+                <a:shade val="15000"/>
+              </a:schemeClr>
+            </a:lnRef>
+            <a:fillRef idx="1">
+              <a:schemeClr val="accent1"/>
+            </a:fillRef>
+            <a:effectRef idx="0">
+              <a:schemeClr val="accent1"/>
+            </a:effectRef>
+            <a:fontRef idx="minor">
+              <a:schemeClr val="lt1"/>
+            </a:fontRef>
+          </p:style>
+          <p:txBody>
+            <a:bodyPr rtlCol="0" anchor="ctr"/>
+            <a:lstStyle/>
+            <a:p>
+              <a:pPr algn="ctr"/>
+              <a:endParaRPr lang="en-US"/>
+            </a:p>
+          </p:txBody>
+        </p:sp>
+        <p:sp>
+          <p:nvSpPr>
+            <p:cNvPr id="4" name="Rectangle 3">
+              <a:extLst>
+                <a:ext uri="{FF2B5EF4-FFF2-40B4-BE49-F238E27FC236}">
+                  <a16:creationId xmlns:a16="http://schemas.microsoft.com/office/drawing/2014/main" id="{8DD5AC06-2F31-D577-C14A-E8554411C5B3}"/>
+                </a:ext>
+              </a:extLst>
+            </p:cNvPr>
+            <p:cNvSpPr/>
+            <p:nvPr/>
+          </p:nvSpPr>
+          <p:spPr>
+            <a:xfrm>
+              <a:off x="106262" y="1846678"/>
+              <a:ext cx="3441272" cy="3927589"/>
+            </a:xfrm>
+            <a:custGeom>
+              <a:avLst/>
+              <a:gdLst>
+                <a:gd name="csX0" fmla="*/ 0 w 3441272"/>
+                <a:gd name="csY0" fmla="*/ 0 h 3927589"/>
+                <a:gd name="csX1" fmla="*/ 757080 w 3441272"/>
+                <a:gd name="csY1" fmla="*/ 0 h 3927589"/>
+                <a:gd name="csX2" fmla="*/ 1479747 w 3441272"/>
+                <a:gd name="csY2" fmla="*/ 0 h 3927589"/>
+                <a:gd name="csX3" fmla="*/ 2168001 w 3441272"/>
+                <a:gd name="csY3" fmla="*/ 0 h 3927589"/>
+                <a:gd name="csX4" fmla="*/ 3441272 w 3441272"/>
+                <a:gd name="csY4" fmla="*/ 0 h 3927589"/>
+                <a:gd name="csX5" fmla="*/ 3441272 w 3441272"/>
+                <a:gd name="csY5" fmla="*/ 733150 h 3927589"/>
+                <a:gd name="csX6" fmla="*/ 3441272 w 3441272"/>
+                <a:gd name="csY6" fmla="*/ 1427024 h 3927589"/>
+                <a:gd name="csX7" fmla="*/ 3441272 w 3441272"/>
+                <a:gd name="csY7" fmla="*/ 2003070 h 3927589"/>
+                <a:gd name="csX8" fmla="*/ 3441272 w 3441272"/>
+                <a:gd name="csY8" fmla="*/ 2696944 h 3927589"/>
+                <a:gd name="csX9" fmla="*/ 3441272 w 3441272"/>
+                <a:gd name="csY9" fmla="*/ 3233715 h 3927589"/>
+                <a:gd name="csX10" fmla="*/ 3441272 w 3441272"/>
+                <a:gd name="csY10" fmla="*/ 3927589 h 3927589"/>
+                <a:gd name="csX11" fmla="*/ 2821843 w 3441272"/>
+                <a:gd name="csY11" fmla="*/ 3927589 h 3927589"/>
+                <a:gd name="csX12" fmla="*/ 2064763 w 3441272"/>
+                <a:gd name="csY12" fmla="*/ 3927589 h 3927589"/>
+                <a:gd name="csX13" fmla="*/ 1410922 w 3441272"/>
+                <a:gd name="csY13" fmla="*/ 3927589 h 3927589"/>
+                <a:gd name="csX14" fmla="*/ 653842 w 3441272"/>
+                <a:gd name="csY14" fmla="*/ 3927589 h 3927589"/>
+                <a:gd name="csX15" fmla="*/ 0 w 3441272"/>
+                <a:gd name="csY15" fmla="*/ 3927589 h 3927589"/>
+                <a:gd name="csX16" fmla="*/ 0 w 3441272"/>
+                <a:gd name="csY16" fmla="*/ 3390819 h 3927589"/>
+                <a:gd name="csX17" fmla="*/ 0 w 3441272"/>
+                <a:gd name="csY17" fmla="*/ 2696944 h 3927589"/>
+                <a:gd name="csX18" fmla="*/ 0 w 3441272"/>
+                <a:gd name="csY18" fmla="*/ 2160174 h 3927589"/>
+                <a:gd name="csX19" fmla="*/ 0 w 3441272"/>
+                <a:gd name="csY19" fmla="*/ 1623403 h 3927589"/>
+                <a:gd name="csX20" fmla="*/ 0 w 3441272"/>
+                <a:gd name="csY20" fmla="*/ 890254 h 3927589"/>
+                <a:gd name="csX21" fmla="*/ 0 w 3441272"/>
+                <a:gd name="csY21" fmla="*/ 0 h 3927589"/>
+              </a:gdLst>
+              <a:ahLst/>
+              <a:cxnLst>
+                <a:cxn ang="0">
+                  <a:pos x="csX0" y="csY0"/>
+                </a:cxn>
+                <a:cxn ang="0">
+                  <a:pos x="csX1" y="csY1"/>
+                </a:cxn>
+                <a:cxn ang="0">
+                  <a:pos x="csX2" y="csY2"/>
+                </a:cxn>
+                <a:cxn ang="0">
+                  <a:pos x="csX3" y="csY3"/>
+                </a:cxn>
+                <a:cxn ang="0">
+                  <a:pos x="csX4" y="csY4"/>
+                </a:cxn>
+                <a:cxn ang="0">
+                  <a:pos x="csX5" y="csY5"/>
+                </a:cxn>
+                <a:cxn ang="0">
+                  <a:pos x="csX6" y="csY6"/>
+                </a:cxn>
+                <a:cxn ang="0">
+                  <a:pos x="csX7" y="csY7"/>
+                </a:cxn>
+                <a:cxn ang="0">
+                  <a:pos x="csX8" y="csY8"/>
+                </a:cxn>
+                <a:cxn ang="0">
+                  <a:pos x="csX9" y="csY9"/>
+                </a:cxn>
+                <a:cxn ang="0">
+                  <a:pos x="csX10" y="csY10"/>
+                </a:cxn>
+                <a:cxn ang="0">
+                  <a:pos x="csX11" y="csY11"/>
+                </a:cxn>
+                <a:cxn ang="0">
+                  <a:pos x="csX12" y="csY12"/>
+                </a:cxn>
+                <a:cxn ang="0">
+                  <a:pos x="csX13" y="csY13"/>
+                </a:cxn>
+                <a:cxn ang="0">
+                  <a:pos x="csX14" y="csY14"/>
+                </a:cxn>
+                <a:cxn ang="0">
+                  <a:pos x="csX15" y="csY15"/>
+                </a:cxn>
+                <a:cxn ang="0">
+                  <a:pos x="csX16" y="csY16"/>
+                </a:cxn>
+                <a:cxn ang="0">
+                  <a:pos x="csX17" y="csY17"/>
+                </a:cxn>
+                <a:cxn ang="0">
+                  <a:pos x="csX18" y="csY18"/>
+                </a:cxn>
+                <a:cxn ang="0">
+                  <a:pos x="csX19" y="csY19"/>
+                </a:cxn>
+                <a:cxn ang="0">
+                  <a:pos x="csX20" y="csY20"/>
+                </a:cxn>
+                <a:cxn ang="0">
+                  <a:pos x="csX21" y="csY21"/>
+                </a:cxn>
+              </a:cxnLst>
+              <a:rect l="l" t="t" r="r" b="b"/>
+              <a:pathLst>
+                <a:path w="3441272" h="3927589" fill="none" extrusionOk="0">
+                  <a:moveTo>
+                    <a:pt x="0" y="0"/>
+                  </a:moveTo>
+                  <a:cubicBezTo>
+                    <a:pt x="280613" y="-20693"/>
+                    <a:pt x="444858" y="-34149"/>
+                    <a:pt x="757080" y="0"/>
+                  </a:cubicBezTo>
+                  <a:cubicBezTo>
+                    <a:pt x="1069302" y="34149"/>
+                    <a:pt x="1266919" y="34743"/>
+                    <a:pt x="1479747" y="0"/>
+                  </a:cubicBezTo>
+                  <a:cubicBezTo>
+                    <a:pt x="1692575" y="-34743"/>
+                    <a:pt x="1952416" y="31297"/>
+                    <a:pt x="2168001" y="0"/>
+                  </a:cubicBezTo>
+                  <a:cubicBezTo>
+                    <a:pt x="2383586" y="-31297"/>
+                    <a:pt x="2905197" y="-55431"/>
+                    <a:pt x="3441272" y="0"/>
+                  </a:cubicBezTo>
+                  <a:cubicBezTo>
+                    <a:pt x="3406908" y="297016"/>
+                    <a:pt x="3454541" y="420619"/>
+                    <a:pt x="3441272" y="733150"/>
+                  </a:cubicBezTo>
+                  <a:cubicBezTo>
+                    <a:pt x="3428004" y="1045681"/>
+                    <a:pt x="3420090" y="1211603"/>
+                    <a:pt x="3441272" y="1427024"/>
+                  </a:cubicBezTo>
+                  <a:cubicBezTo>
+                    <a:pt x="3462454" y="1642445"/>
+                    <a:pt x="3424755" y="1788387"/>
+                    <a:pt x="3441272" y="2003070"/>
+                  </a:cubicBezTo>
+                  <a:cubicBezTo>
+                    <a:pt x="3457789" y="2217753"/>
+                    <a:pt x="3420340" y="2535380"/>
+                    <a:pt x="3441272" y="2696944"/>
+                  </a:cubicBezTo>
+                  <a:cubicBezTo>
+                    <a:pt x="3462204" y="2858508"/>
+                    <a:pt x="3451218" y="2989624"/>
+                    <a:pt x="3441272" y="3233715"/>
+                  </a:cubicBezTo>
+                  <a:cubicBezTo>
+                    <a:pt x="3431326" y="3477806"/>
+                    <a:pt x="3441574" y="3658449"/>
+                    <a:pt x="3441272" y="3927589"/>
+                  </a:cubicBezTo>
+                  <a:cubicBezTo>
+                    <a:pt x="3279005" y="3938243"/>
+                    <a:pt x="3107631" y="3918142"/>
+                    <a:pt x="2821843" y="3927589"/>
+                  </a:cubicBezTo>
+                  <a:cubicBezTo>
+                    <a:pt x="2536055" y="3937036"/>
+                    <a:pt x="2262249" y="3899282"/>
+                    <a:pt x="2064763" y="3927589"/>
+                  </a:cubicBezTo>
+                  <a:cubicBezTo>
+                    <a:pt x="1867277" y="3955896"/>
+                    <a:pt x="1641715" y="3905217"/>
+                    <a:pt x="1410922" y="3927589"/>
+                  </a:cubicBezTo>
+                  <a:cubicBezTo>
+                    <a:pt x="1180129" y="3949961"/>
+                    <a:pt x="932581" y="3911199"/>
+                    <a:pt x="653842" y="3927589"/>
+                  </a:cubicBezTo>
+                  <a:cubicBezTo>
+                    <a:pt x="375103" y="3943979"/>
+                    <a:pt x="174395" y="3912300"/>
+                    <a:pt x="0" y="3927589"/>
+                  </a:cubicBezTo>
+                  <a:cubicBezTo>
+                    <a:pt x="-7717" y="3665960"/>
+                    <a:pt x="26538" y="3612442"/>
+                    <a:pt x="0" y="3390819"/>
+                  </a:cubicBezTo>
+                  <a:cubicBezTo>
+                    <a:pt x="-26538" y="3169196"/>
+                    <a:pt x="23134" y="3038651"/>
+                    <a:pt x="0" y="2696944"/>
+                  </a:cubicBezTo>
+                  <a:cubicBezTo>
+                    <a:pt x="-23134" y="2355237"/>
+                    <a:pt x="-11433" y="2302087"/>
+                    <a:pt x="0" y="2160174"/>
+                  </a:cubicBezTo>
+                  <a:cubicBezTo>
+                    <a:pt x="11433" y="2018261"/>
+                    <a:pt x="-1546" y="1767255"/>
+                    <a:pt x="0" y="1623403"/>
+                  </a:cubicBezTo>
+                  <a:cubicBezTo>
+                    <a:pt x="1546" y="1479551"/>
+                    <a:pt x="387" y="1117109"/>
+                    <a:pt x="0" y="890254"/>
+                  </a:cubicBezTo>
+                  <a:cubicBezTo>
+                    <a:pt x="-387" y="663399"/>
+                    <a:pt x="7988" y="198223"/>
+                    <a:pt x="0" y="0"/>
+                  </a:cubicBezTo>
+                  <a:close/>
+                </a:path>
+                <a:path w="3441272" h="3927589" stroke="0" extrusionOk="0">
+                  <a:moveTo>
+                    <a:pt x="0" y="0"/>
+                  </a:moveTo>
+                  <a:cubicBezTo>
+                    <a:pt x="146364" y="-23341"/>
+                    <a:pt x="405733" y="15449"/>
+                    <a:pt x="653842" y="0"/>
+                  </a:cubicBezTo>
+                  <a:cubicBezTo>
+                    <a:pt x="901951" y="-15449"/>
+                    <a:pt x="1110618" y="27320"/>
+                    <a:pt x="1238858" y="0"/>
+                  </a:cubicBezTo>
+                  <a:cubicBezTo>
+                    <a:pt x="1367098" y="-27320"/>
+                    <a:pt x="1737423" y="24431"/>
+                    <a:pt x="1995938" y="0"/>
+                  </a:cubicBezTo>
+                  <a:cubicBezTo>
+                    <a:pt x="2254453" y="-24431"/>
+                    <a:pt x="2359857" y="-487"/>
+                    <a:pt x="2649779" y="0"/>
+                  </a:cubicBezTo>
+                  <a:cubicBezTo>
+                    <a:pt x="2939701" y="487"/>
+                    <a:pt x="3155327" y="21406"/>
+                    <a:pt x="3441272" y="0"/>
+                  </a:cubicBezTo>
+                  <a:cubicBezTo>
+                    <a:pt x="3464004" y="359526"/>
+                    <a:pt x="3411509" y="481154"/>
+                    <a:pt x="3441272" y="733150"/>
+                  </a:cubicBezTo>
+                  <a:cubicBezTo>
+                    <a:pt x="3471036" y="985146"/>
+                    <a:pt x="3442313" y="1125532"/>
+                    <a:pt x="3441272" y="1387748"/>
+                  </a:cubicBezTo>
+                  <a:cubicBezTo>
+                    <a:pt x="3440231" y="1649964"/>
+                    <a:pt x="3408598" y="1787482"/>
+                    <a:pt x="3441272" y="2042346"/>
+                  </a:cubicBezTo>
+                  <a:cubicBezTo>
+                    <a:pt x="3473946" y="2297210"/>
+                    <a:pt x="3412690" y="2471246"/>
+                    <a:pt x="3441272" y="2618393"/>
+                  </a:cubicBezTo>
+                  <a:cubicBezTo>
+                    <a:pt x="3469854" y="2765540"/>
+                    <a:pt x="3460967" y="2911244"/>
+                    <a:pt x="3441272" y="3194439"/>
+                  </a:cubicBezTo>
+                  <a:cubicBezTo>
+                    <a:pt x="3421577" y="3477634"/>
+                    <a:pt x="3455594" y="3745314"/>
+                    <a:pt x="3441272" y="3927589"/>
+                  </a:cubicBezTo>
+                  <a:cubicBezTo>
+                    <a:pt x="3133311" y="3957498"/>
+                    <a:pt x="2913075" y="3935429"/>
+                    <a:pt x="2718605" y="3927589"/>
+                  </a:cubicBezTo>
+                  <a:cubicBezTo>
+                    <a:pt x="2524135" y="3919749"/>
+                    <a:pt x="2138320" y="3962231"/>
+                    <a:pt x="1961525" y="3927589"/>
+                  </a:cubicBezTo>
+                  <a:cubicBezTo>
+                    <a:pt x="1784730" y="3892947"/>
+                    <a:pt x="1503436" y="3953186"/>
+                    <a:pt x="1204445" y="3927589"/>
+                  </a:cubicBezTo>
+                  <a:cubicBezTo>
+                    <a:pt x="905454" y="3901992"/>
+                    <a:pt x="550974" y="3919536"/>
+                    <a:pt x="0" y="3927589"/>
+                  </a:cubicBezTo>
+                  <a:cubicBezTo>
+                    <a:pt x="-32406" y="3709136"/>
+                    <a:pt x="-18472" y="3474623"/>
+                    <a:pt x="0" y="3272991"/>
+                  </a:cubicBezTo>
+                  <a:cubicBezTo>
+                    <a:pt x="18472" y="3071359"/>
+                    <a:pt x="15353" y="2933680"/>
+                    <a:pt x="0" y="2657669"/>
+                  </a:cubicBezTo>
+                  <a:cubicBezTo>
+                    <a:pt x="-15353" y="2381658"/>
+                    <a:pt x="1327" y="2286880"/>
+                    <a:pt x="0" y="2120898"/>
+                  </a:cubicBezTo>
+                  <a:cubicBezTo>
+                    <a:pt x="-1327" y="1954916"/>
+                    <a:pt x="-10216" y="1798661"/>
+                    <a:pt x="0" y="1544852"/>
+                  </a:cubicBezTo>
+                  <a:cubicBezTo>
+                    <a:pt x="10216" y="1291043"/>
+                    <a:pt x="8637" y="1151766"/>
+                    <a:pt x="0" y="968805"/>
+                  </a:cubicBezTo>
+                  <a:cubicBezTo>
+                    <a:pt x="-8637" y="785844"/>
+                    <a:pt x="13936" y="357038"/>
+                    <a:pt x="0" y="0"/>
+                  </a:cubicBezTo>
+                  <a:close/>
+                </a:path>
+              </a:pathLst>
+            </a:custGeom>
+            <a:solidFill>
+              <a:srgbClr val="E1795D">
+                <a:alpha val="47843"/>
+              </a:srgbClr>
+            </a:solidFill>
+            <a:ln>
+              <a:solidFill>
+                <a:srgbClr val="E1795D"/>
+              </a:solidFill>
+              <a:extLst>
+                <a:ext uri="{C807C97D-BFC1-408E-A445-0C87EB9F89A2}">
+                  <ask:lineSketchStyleProps xmlns:ask="http://schemas.microsoft.com/office/drawing/2018/sketchyshapes" sd="1219033472">
+                    <a:prstGeom prst="rect">
+                      <a:avLst/>
+                    </a:prstGeom>
+                    <ask:type>
+                      <ask:lineSketchFreehand/>
+                    </ask:type>
+                  </ask:lineSketchStyleProps>
+                </a:ext>
+              </a:extLst>
+            </a:ln>
+          </p:spPr>
+          <p:style>
+            <a:lnRef idx="2">
+              <a:schemeClr val="accent1">
+                <a:shade val="15000"/>
+              </a:schemeClr>
+            </a:lnRef>
+            <a:fillRef idx="1">
+              <a:schemeClr val="accent1"/>
+            </a:fillRef>
+            <a:effectRef idx="0">
+              <a:schemeClr val="accent1"/>
+            </a:effectRef>
+            <a:fontRef idx="minor">
+              <a:schemeClr val="lt1"/>
+            </a:fontRef>
+          </p:style>
+          <p:txBody>
+            <a:bodyPr rtlCol="0" anchor="ctr"/>
+            <a:lstStyle/>
+            <a:p>
+              <a:pPr algn="ctr"/>
+              <a:endParaRPr lang="en-US"/>
+            </a:p>
+          </p:txBody>
+        </p:sp>
+        <p:sp>
+          <p:nvSpPr>
+            <p:cNvPr id="5" name="TextBox 4">
+              <a:extLst>
+                <a:ext uri="{FF2B5EF4-FFF2-40B4-BE49-F238E27FC236}">
+                  <a16:creationId xmlns:a16="http://schemas.microsoft.com/office/drawing/2014/main" id="{43351753-AD4D-40D0-EC54-3F2BB4D4BEAB}"/>
+                </a:ext>
+              </a:extLst>
+            </p:cNvPr>
+            <p:cNvSpPr txBox="1"/>
+            <p:nvPr/>
+          </p:nvSpPr>
+          <p:spPr>
+            <a:xfrm>
+              <a:off x="84666" y="1232221"/>
+              <a:ext cx="3420536" cy="430887"/>
+            </a:xfrm>
+            <a:prstGeom prst="rect">
+              <a:avLst/>
+            </a:prstGeom>
+            <a:noFill/>
+          </p:spPr>
+          <p:txBody>
+            <a:bodyPr wrap="square" rtlCol="0">
+              <a:spAutoFit/>
+            </a:bodyPr>
+            <a:lstStyle/>
+            <a:p>
+              <a:pPr algn="ctr"/>
+              <a:r>
+                <a:rPr lang="en-US" sz="2200" b="1" dirty="0">
+                  <a:solidFill>
+                    <a:srgbClr val="E1795D"/>
+                  </a:solidFill>
+                  <a:latin typeface="Aptos ExtraBold" panose="020B0004020202020204" pitchFamily="34" charset="0"/>
+                </a:rPr>
+                <a:t>DADOS CONTÍNUOS</a:t>
+              </a:r>
+            </a:p>
+          </p:txBody>
+        </p:sp>
+        <mc:AlternateContent xmlns:mc="http://schemas.openxmlformats.org/markup-compatibility/2006">
+          <mc:Choice xmlns:a14="http://schemas.microsoft.com/office/drawing/2010/main" Requires="a14">
+            <p:sp>
+              <p:nvSpPr>
+                <p:cNvPr id="6" name="TextBox 5">
+                  <a:extLst>
+                    <a:ext uri="{FF2B5EF4-FFF2-40B4-BE49-F238E27FC236}">
+                      <a16:creationId xmlns:a16="http://schemas.microsoft.com/office/drawing/2014/main" id="{7D05AC4F-F224-B3CE-5DDC-D1B9027B7FE9}"/>
+                    </a:ext>
+                  </a:extLst>
+                </p:cNvPr>
+                <p:cNvSpPr txBox="1"/>
+                <p:nvPr/>
+              </p:nvSpPr>
+              <p:spPr>
+                <a:xfrm>
+                  <a:off x="525247" y="2619519"/>
+                  <a:ext cx="2480102" cy="338554"/>
+                </a:xfrm>
+                <a:prstGeom prst="rect">
+                  <a:avLst/>
+                </a:prstGeom>
+                <a:noFill/>
+              </p:spPr>
+              <p:txBody>
+                <a:bodyPr wrap="none" lIns="0" tIns="0" rIns="0" bIns="0" rtlCol="0">
+                  <a:spAutoFit/>
+                </a:bodyPr>
+                <a:lstStyle/>
+                <a:p>
+                  <a:pPr/>
+                  <a14:m>
+                    <m:oMathPara xmlns:m="http://schemas.openxmlformats.org/officeDocument/2006/math">
+                      <m:oMathParaPr>
+                        <m:jc m:val="centerGroup"/>
+                      </m:oMathParaPr>
+                      <m:oMath xmlns:m="http://schemas.openxmlformats.org/officeDocument/2006/math">
+                        <m:sSub>
+                          <m:sSubPr>
+                            <m:ctrlPr>
+                              <a:rPr lang="en-US" sz="2200" i="1" smtClean="0">
+                                <a:solidFill>
+                                  <a:schemeClr val="bg2">
+                                    <a:lumMod val="25000"/>
+                                  </a:schemeClr>
+                                </a:solidFill>
+                                <a:latin typeface="Cambria Math" panose="02040503050406030204" pitchFamily="18" charset="0"/>
+                              </a:rPr>
+                            </m:ctrlPr>
+                          </m:sSubPr>
+                          <m:e>
+                            <m:r>
+                              <a:rPr lang="en-US" sz="2200" b="0" i="1" smtClean="0">
+                                <a:solidFill>
+                                  <a:schemeClr val="bg2">
+                                    <a:lumMod val="25000"/>
+                                  </a:schemeClr>
+                                </a:solidFill>
+                                <a:latin typeface="Cambria Math" panose="02040503050406030204" pitchFamily="18" charset="0"/>
+                              </a:rPr>
+                              <m:t>𝑌</m:t>
+                            </m:r>
+                          </m:e>
+                          <m:sub>
+                            <m:r>
+                              <a:rPr lang="en-US" sz="2200" b="0" i="1" smtClean="0">
+                                <a:solidFill>
+                                  <a:schemeClr val="bg2">
+                                    <a:lumMod val="25000"/>
+                                  </a:schemeClr>
+                                </a:solidFill>
+                                <a:latin typeface="Cambria Math" panose="02040503050406030204" pitchFamily="18" charset="0"/>
+                              </a:rPr>
+                              <m:t>𝑖</m:t>
+                            </m:r>
+                          </m:sub>
+                        </m:sSub>
+                        <m:r>
+                          <a:rPr lang="en-US" sz="2200" b="0" i="1" smtClean="0">
+                            <a:solidFill>
+                              <a:schemeClr val="bg2">
+                                <a:lumMod val="25000"/>
+                              </a:schemeClr>
+                            </a:solidFill>
+                            <a:latin typeface="Cambria Math" panose="02040503050406030204" pitchFamily="18" charset="0"/>
+                          </a:rPr>
+                          <m:t> ~ </m:t>
+                        </m:r>
+                        <m:r>
+                          <a:rPr lang="en-US" sz="2200" b="0" i="1" smtClean="0">
+                            <a:solidFill>
+                              <a:schemeClr val="bg2">
+                                <a:lumMod val="25000"/>
+                              </a:schemeClr>
+                            </a:solidFill>
+                            <a:latin typeface="Cambria Math" panose="02040503050406030204" pitchFamily="18" charset="0"/>
+                          </a:rPr>
+                          <m:t>𝑁𝑜𝑟𝑚𝑎𝑙</m:t>
+                        </m:r>
+                        <m:d>
+                          <m:dPr>
+                            <m:ctrlPr>
+                              <a:rPr lang="en-US" sz="2200" b="0" i="1" smtClean="0">
+                                <a:solidFill>
+                                  <a:schemeClr val="bg2">
+                                    <a:lumMod val="25000"/>
+                                  </a:schemeClr>
+                                </a:solidFill>
+                                <a:latin typeface="Cambria Math" panose="02040503050406030204" pitchFamily="18" charset="0"/>
+                              </a:rPr>
+                            </m:ctrlPr>
+                          </m:dPr>
+                          <m:e>
+                            <m:sSub>
+                              <m:sSubPr>
+                                <m:ctrlPr>
+                                  <a:rPr lang="en-US" sz="2200" b="0" i="1" smtClean="0">
+                                    <a:solidFill>
+                                      <a:schemeClr val="bg2">
+                                        <a:lumMod val="25000"/>
+                                      </a:schemeClr>
+                                    </a:solidFill>
+                                    <a:latin typeface="Cambria Math" panose="02040503050406030204" pitchFamily="18" charset="0"/>
+                                  </a:rPr>
+                                </m:ctrlPr>
+                              </m:sSubPr>
+                              <m:e>
+                                <m:r>
+                                  <a:rPr lang="en-US" sz="2200" b="0" i="1" smtClean="0">
+                                    <a:solidFill>
+                                      <a:schemeClr val="bg2">
+                                        <a:lumMod val="25000"/>
+                                      </a:schemeClr>
+                                    </a:solidFill>
+                                    <a:latin typeface="Cambria Math" panose="02040503050406030204" pitchFamily="18" charset="0"/>
+                                  </a:rPr>
+                                  <m:t>𝜇</m:t>
+                                </m:r>
+                              </m:e>
+                              <m:sub>
+                                <m:r>
+                                  <a:rPr lang="en-US" sz="2200" b="0" i="1" smtClean="0">
+                                    <a:solidFill>
+                                      <a:schemeClr val="bg2">
+                                        <a:lumMod val="25000"/>
+                                      </a:schemeClr>
+                                    </a:solidFill>
+                                    <a:latin typeface="Cambria Math" panose="02040503050406030204" pitchFamily="18" charset="0"/>
+                                  </a:rPr>
+                                  <m:t>𝑖</m:t>
+                                </m:r>
+                              </m:sub>
+                            </m:sSub>
+                            <m:r>
+                              <a:rPr lang="en-US" sz="2200" b="0" i="1" smtClean="0">
+                                <a:solidFill>
+                                  <a:schemeClr val="bg2">
+                                    <a:lumMod val="25000"/>
+                                  </a:schemeClr>
+                                </a:solidFill>
+                                <a:latin typeface="Cambria Math" panose="02040503050406030204" pitchFamily="18" charset="0"/>
+                              </a:rPr>
+                              <m:t>, </m:t>
+                            </m:r>
+                            <m:sSup>
+                              <m:sSupPr>
+                                <m:ctrlPr>
+                                  <a:rPr lang="en-US" sz="2200" b="0" i="1" smtClean="0">
+                                    <a:solidFill>
+                                      <a:schemeClr val="bg2">
+                                        <a:lumMod val="25000"/>
+                                      </a:schemeClr>
+                                    </a:solidFill>
+                                    <a:latin typeface="Cambria Math" panose="02040503050406030204" pitchFamily="18" charset="0"/>
+                                  </a:rPr>
+                                </m:ctrlPr>
+                              </m:sSupPr>
+                              <m:e>
+                                <m:r>
+                                  <a:rPr lang="en-US" sz="2200" b="0" i="1" smtClean="0">
+                                    <a:solidFill>
+                                      <a:schemeClr val="bg2">
+                                        <a:lumMod val="25000"/>
+                                      </a:schemeClr>
+                                    </a:solidFill>
+                                    <a:latin typeface="Cambria Math" panose="02040503050406030204" pitchFamily="18" charset="0"/>
+                                  </a:rPr>
+                                  <m:t>𝜎</m:t>
+                                </m:r>
+                              </m:e>
+                              <m:sup>
+                                <m:r>
+                                  <a:rPr lang="en-US" sz="2200" b="0" i="1" smtClean="0">
+                                    <a:solidFill>
+                                      <a:schemeClr val="bg2">
+                                        <a:lumMod val="25000"/>
+                                      </a:schemeClr>
+                                    </a:solidFill>
+                                    <a:latin typeface="Cambria Math" panose="02040503050406030204" pitchFamily="18" charset="0"/>
+                                  </a:rPr>
+                                  <m:t>2</m:t>
+                                </m:r>
+                              </m:sup>
+                            </m:sSup>
+                          </m:e>
+                        </m:d>
+                      </m:oMath>
+                    </m:oMathPara>
+                  </a14:m>
+                  <a:endParaRPr lang="en-US" sz="2200" b="0" dirty="0">
+                    <a:solidFill>
+                      <a:schemeClr val="bg2">
+                        <a:lumMod val="25000"/>
+                      </a:schemeClr>
+                    </a:solidFill>
+                  </a:endParaRPr>
+                </a:p>
+              </p:txBody>
+            </p:sp>
+          </mc:Choice>
+          <mc:Fallback>
+            <p:sp>
+              <p:nvSpPr>
+                <p:cNvPr id="6" name="TextBox 5">
+                  <a:extLst>
+                    <a:ext uri="{FF2B5EF4-FFF2-40B4-BE49-F238E27FC236}">
+                      <a16:creationId xmlns:a16="http://schemas.microsoft.com/office/drawing/2014/main" id="{7D05AC4F-F224-B3CE-5DDC-D1B9027B7FE9}"/>
+                    </a:ext>
+                  </a:extLst>
+                </p:cNvPr>
+                <p:cNvSpPr txBox="1">
+                  <a:spLocks noRot="1" noChangeAspect="1" noMove="1" noResize="1" noEditPoints="1" noAdjustHandles="1" noChangeArrowheads="1" noChangeShapeType="1" noTextEdit="1"/>
+                </p:cNvSpPr>
+                <p:nvPr/>
+              </p:nvSpPr>
+              <p:spPr>
+                <a:xfrm>
+                  <a:off x="525247" y="2619519"/>
+                  <a:ext cx="2480102" cy="338554"/>
+                </a:xfrm>
+                <a:prstGeom prst="rect">
+                  <a:avLst/>
+                </a:prstGeom>
+                <a:blipFill>
+                  <a:blip r:embed="rId2"/>
+                  <a:stretch>
+                    <a:fillRect l="-2551" t="-7407" b="-40741"/>
+                  </a:stretch>
+                </a:blipFill>
+              </p:spPr>
+              <p:txBody>
+                <a:bodyPr/>
+                <a:lstStyle/>
+                <a:p>
+                  <a:r>
+                    <a:rPr lang="en-US">
+                      <a:noFill/>
+                    </a:rPr>
+                    <a:t> </a:t>
+                  </a:r>
+                </a:p>
+              </p:txBody>
+            </p:sp>
+          </mc:Fallback>
+        </mc:AlternateContent>
+        <mc:AlternateContent xmlns:mc="http://schemas.openxmlformats.org/markup-compatibility/2006">
+          <mc:Choice xmlns:a14="http://schemas.microsoft.com/office/drawing/2010/main" Requires="a14">
+            <p:sp>
+              <p:nvSpPr>
+                <p:cNvPr id="7" name="TextBox 6">
+                  <a:extLst>
+                    <a:ext uri="{FF2B5EF4-FFF2-40B4-BE49-F238E27FC236}">
+                      <a16:creationId xmlns:a16="http://schemas.microsoft.com/office/drawing/2014/main" id="{B6D32CF6-5EFA-BFE8-6B76-C0E5F196C8C8}"/>
+                    </a:ext>
+                  </a:extLst>
+                </p:cNvPr>
+                <p:cNvSpPr txBox="1"/>
+                <p:nvPr/>
+              </p:nvSpPr>
+              <p:spPr>
+                <a:xfrm>
+                  <a:off x="805032" y="3976818"/>
+                  <a:ext cx="1861022" cy="338554"/>
+                </a:xfrm>
+                <a:prstGeom prst="rect">
+                  <a:avLst/>
+                </a:prstGeom>
+                <a:noFill/>
+              </p:spPr>
+              <p:txBody>
+                <a:bodyPr wrap="none" lIns="0" tIns="0" rIns="0" bIns="0" rtlCol="0">
+                  <a:spAutoFit/>
+                </a:bodyPr>
+                <a:lstStyle/>
+                <a:p>
+                  <a:pPr/>
+                  <a14:m>
+                    <m:oMathPara xmlns:m="http://schemas.openxmlformats.org/officeDocument/2006/math">
+                      <m:oMathParaPr>
+                        <m:jc m:val="centerGroup"/>
+                      </m:oMathParaPr>
+                      <m:oMath xmlns:m="http://schemas.openxmlformats.org/officeDocument/2006/math">
+                        <m:sSub>
+                          <m:sSubPr>
+                            <m:ctrlPr>
+                              <a:rPr lang="en-US" sz="2200" i="1" smtClean="0">
+                                <a:solidFill>
+                                  <a:schemeClr val="bg2">
+                                    <a:lumMod val="25000"/>
+                                  </a:schemeClr>
+                                </a:solidFill>
+                                <a:latin typeface="Cambria Math" panose="02040503050406030204" pitchFamily="18" charset="0"/>
+                              </a:rPr>
+                            </m:ctrlPr>
+                          </m:sSubPr>
+                          <m:e>
+                            <m:r>
+                              <a:rPr lang="en-US" sz="2200" i="1">
+                                <a:solidFill>
+                                  <a:schemeClr val="bg2">
+                                    <a:lumMod val="25000"/>
+                                  </a:schemeClr>
+                                </a:solidFill>
+                                <a:latin typeface="Cambria Math" panose="02040503050406030204" pitchFamily="18" charset="0"/>
+                              </a:rPr>
+                              <m:t>𝜂</m:t>
+                            </m:r>
+                          </m:e>
+                          <m:sub>
+                            <m:r>
+                              <a:rPr lang="en-US" sz="2200" i="1">
+                                <a:solidFill>
+                                  <a:schemeClr val="bg2">
+                                    <a:lumMod val="25000"/>
+                                  </a:schemeClr>
+                                </a:solidFill>
+                                <a:latin typeface="Cambria Math" panose="02040503050406030204" pitchFamily="18" charset="0"/>
+                              </a:rPr>
+                              <m:t>𝑖</m:t>
+                            </m:r>
+                          </m:sub>
+                        </m:sSub>
+                        <m:r>
+                          <a:rPr lang="en-US" sz="2200" b="0" i="1" smtClean="0">
+                            <a:solidFill>
+                              <a:schemeClr val="bg2">
+                                <a:lumMod val="25000"/>
+                              </a:schemeClr>
+                            </a:solidFill>
+                            <a:latin typeface="Cambria Math" panose="02040503050406030204" pitchFamily="18" charset="0"/>
+                          </a:rPr>
+                          <m:t>= </m:t>
+                        </m:r>
+                        <m:sSub>
+                          <m:sSubPr>
+                            <m:ctrlPr>
+                              <a:rPr lang="en-US" sz="2200" b="0" i="1" smtClean="0">
+                                <a:solidFill>
+                                  <a:schemeClr val="bg2">
+                                    <a:lumMod val="25000"/>
+                                  </a:schemeClr>
+                                </a:solidFill>
+                                <a:latin typeface="Cambria Math" panose="02040503050406030204" pitchFamily="18" charset="0"/>
+                              </a:rPr>
+                            </m:ctrlPr>
+                          </m:sSubPr>
+                          <m:e>
+                            <m:r>
+                              <a:rPr lang="en-US" sz="2200" b="0" i="1" smtClean="0">
+                                <a:solidFill>
+                                  <a:schemeClr val="bg2">
+                                    <a:lumMod val="25000"/>
+                                  </a:schemeClr>
+                                </a:solidFill>
+                                <a:latin typeface="Cambria Math" panose="02040503050406030204" pitchFamily="18" charset="0"/>
+                              </a:rPr>
+                              <m:t>𝛽</m:t>
+                            </m:r>
+                          </m:e>
+                          <m:sub>
+                            <m:r>
+                              <a:rPr lang="en-US" sz="2200" b="0" i="1" smtClean="0">
+                                <a:solidFill>
+                                  <a:schemeClr val="bg2">
+                                    <a:lumMod val="25000"/>
+                                  </a:schemeClr>
+                                </a:solidFill>
+                                <a:latin typeface="Cambria Math" panose="02040503050406030204" pitchFamily="18" charset="0"/>
+                              </a:rPr>
+                              <m:t>0</m:t>
+                            </m:r>
+                          </m:sub>
+                        </m:sSub>
+                        <m:r>
+                          <a:rPr lang="en-US" sz="2200" b="0" i="1" smtClean="0">
+                            <a:solidFill>
+                              <a:schemeClr val="bg2">
+                                <a:lumMod val="25000"/>
+                              </a:schemeClr>
+                            </a:solidFill>
+                            <a:latin typeface="Cambria Math" panose="02040503050406030204" pitchFamily="18" charset="0"/>
+                          </a:rPr>
+                          <m:t>+</m:t>
+                        </m:r>
+                        <m:sSub>
+                          <m:sSubPr>
+                            <m:ctrlPr>
+                              <a:rPr lang="en-US" sz="2200" b="0" i="1" smtClean="0">
+                                <a:solidFill>
+                                  <a:schemeClr val="bg2">
+                                    <a:lumMod val="25000"/>
+                                  </a:schemeClr>
+                                </a:solidFill>
+                                <a:latin typeface="Cambria Math" panose="02040503050406030204" pitchFamily="18" charset="0"/>
+                              </a:rPr>
+                            </m:ctrlPr>
+                          </m:sSubPr>
+                          <m:e>
+                            <m:r>
+                              <a:rPr lang="en-US" sz="2200" b="0" i="1" smtClean="0">
+                                <a:solidFill>
+                                  <a:schemeClr val="bg2">
+                                    <a:lumMod val="25000"/>
+                                  </a:schemeClr>
+                                </a:solidFill>
+                                <a:latin typeface="Cambria Math" panose="02040503050406030204" pitchFamily="18" charset="0"/>
+                              </a:rPr>
+                              <m:t>𝛽</m:t>
+                            </m:r>
+                          </m:e>
+                          <m:sub>
+                            <m:r>
+                              <a:rPr lang="en-US" sz="2200" b="0" i="1" smtClean="0">
+                                <a:solidFill>
+                                  <a:schemeClr val="bg2">
+                                    <a:lumMod val="25000"/>
+                                  </a:schemeClr>
+                                </a:solidFill>
+                                <a:latin typeface="Cambria Math" panose="02040503050406030204" pitchFamily="18" charset="0"/>
+                              </a:rPr>
+                              <m:t>1</m:t>
+                            </m:r>
+                          </m:sub>
+                        </m:sSub>
+                        <m:sSub>
+                          <m:sSubPr>
+                            <m:ctrlPr>
+                              <a:rPr lang="en-US" sz="2200" b="0" i="1" smtClean="0">
+                                <a:solidFill>
+                                  <a:schemeClr val="bg2">
+                                    <a:lumMod val="25000"/>
+                                  </a:schemeClr>
+                                </a:solidFill>
+                                <a:latin typeface="Cambria Math" panose="02040503050406030204" pitchFamily="18" charset="0"/>
+                              </a:rPr>
+                            </m:ctrlPr>
+                          </m:sSubPr>
+                          <m:e>
+                            <m:r>
+                              <a:rPr lang="en-US" sz="2200" b="0" i="1" smtClean="0">
+                                <a:solidFill>
+                                  <a:schemeClr val="bg2">
+                                    <a:lumMod val="25000"/>
+                                  </a:schemeClr>
+                                </a:solidFill>
+                                <a:latin typeface="Cambria Math" panose="02040503050406030204" pitchFamily="18" charset="0"/>
+                              </a:rPr>
+                              <m:t>𝑥</m:t>
+                            </m:r>
+                          </m:e>
+                          <m:sub>
+                            <m:r>
+                              <a:rPr lang="en-US" sz="2200" b="0" i="1" smtClean="0">
+                                <a:solidFill>
+                                  <a:schemeClr val="bg2">
+                                    <a:lumMod val="25000"/>
+                                  </a:schemeClr>
+                                </a:solidFill>
+                                <a:latin typeface="Cambria Math" panose="02040503050406030204" pitchFamily="18" charset="0"/>
+                              </a:rPr>
+                              <m:t>𝑖</m:t>
+                            </m:r>
+                          </m:sub>
+                        </m:sSub>
+                      </m:oMath>
+                    </m:oMathPara>
+                  </a14:m>
+                  <a:endParaRPr lang="en-US" sz="2200" b="0" dirty="0">
+                    <a:solidFill>
+                      <a:schemeClr val="bg2">
+                        <a:lumMod val="25000"/>
+                      </a:schemeClr>
+                    </a:solidFill>
+                  </a:endParaRPr>
+                </a:p>
+              </p:txBody>
+            </p:sp>
+          </mc:Choice>
+          <mc:Fallback>
+            <p:sp>
+              <p:nvSpPr>
+                <p:cNvPr id="7" name="TextBox 6">
+                  <a:extLst>
+                    <a:ext uri="{FF2B5EF4-FFF2-40B4-BE49-F238E27FC236}">
+                      <a16:creationId xmlns:a16="http://schemas.microsoft.com/office/drawing/2014/main" id="{B6D32CF6-5EFA-BFE8-6B76-C0E5F196C8C8}"/>
+                    </a:ext>
+                  </a:extLst>
+                </p:cNvPr>
+                <p:cNvSpPr txBox="1">
+                  <a:spLocks noRot="1" noChangeAspect="1" noMove="1" noResize="1" noEditPoints="1" noAdjustHandles="1" noChangeArrowheads="1" noChangeShapeType="1" noTextEdit="1"/>
+                </p:cNvSpPr>
+                <p:nvPr/>
+              </p:nvSpPr>
+              <p:spPr>
+                <a:xfrm>
+                  <a:off x="805032" y="3976818"/>
+                  <a:ext cx="1861022" cy="338554"/>
+                </a:xfrm>
+                <a:prstGeom prst="rect">
+                  <a:avLst/>
+                </a:prstGeom>
+                <a:blipFill>
+                  <a:blip r:embed="rId3"/>
+                  <a:stretch>
+                    <a:fillRect l="-3401" t="-7143" r="-1361" b="-35714"/>
+                  </a:stretch>
+                </a:blipFill>
+              </p:spPr>
+              <p:txBody>
+                <a:bodyPr/>
+                <a:lstStyle/>
+                <a:p>
+                  <a:r>
+                    <a:rPr lang="en-US">
+                      <a:noFill/>
+                    </a:rPr>
+                    <a:t> </a:t>
+                  </a:r>
+                </a:p>
+              </p:txBody>
+            </p:sp>
+          </mc:Fallback>
+        </mc:AlternateContent>
+        <mc:AlternateContent xmlns:mc="http://schemas.openxmlformats.org/markup-compatibility/2006">
+          <mc:Choice xmlns:a14="http://schemas.microsoft.com/office/drawing/2010/main" Requires="a14">
+            <p:sp>
+              <p:nvSpPr>
+                <p:cNvPr id="8" name="TextBox 7">
+                  <a:extLst>
+                    <a:ext uri="{FF2B5EF4-FFF2-40B4-BE49-F238E27FC236}">
+                      <a16:creationId xmlns:a16="http://schemas.microsoft.com/office/drawing/2014/main" id="{DC2A6A2F-5FE8-CCCE-16EC-55315E8BDB99}"/>
+                    </a:ext>
+                  </a:extLst>
+                </p:cNvPr>
+                <p:cNvSpPr txBox="1"/>
+                <p:nvPr/>
+              </p:nvSpPr>
+              <p:spPr>
+                <a:xfrm>
+                  <a:off x="1208440" y="5179108"/>
+                  <a:ext cx="950004" cy="371640"/>
+                </a:xfrm>
+                <a:prstGeom prst="rect">
+                  <a:avLst/>
+                </a:prstGeom>
+                <a:noFill/>
+              </p:spPr>
+              <p:txBody>
+                <a:bodyPr wrap="none" lIns="0" tIns="0" rIns="0" bIns="0" rtlCol="0">
+                  <a:spAutoFit/>
+                </a:bodyPr>
+                <a:lstStyle/>
+                <a:p>
+                  <a:pPr/>
+                  <a14:m>
+                    <m:oMathPara xmlns:m="http://schemas.openxmlformats.org/officeDocument/2006/math">
+                      <m:oMathParaPr>
+                        <m:jc m:val="centerGroup"/>
+                      </m:oMathParaPr>
+                      <m:oMath xmlns:m="http://schemas.openxmlformats.org/officeDocument/2006/math">
+                        <m:sSub>
+                          <m:sSubPr>
+                            <m:ctrlPr>
+                              <a:rPr lang="en-US" sz="2200" i="1" smtClean="0">
+                                <a:solidFill>
+                                  <a:schemeClr val="bg2">
+                                    <a:lumMod val="25000"/>
+                                  </a:schemeClr>
+                                </a:solidFill>
+                                <a:latin typeface="Cambria Math" panose="02040503050406030204" pitchFamily="18" charset="0"/>
+                              </a:rPr>
+                            </m:ctrlPr>
+                          </m:sSubPr>
+                          <m:e>
+                            <m:sSub>
+                              <m:sSubPr>
+                                <m:ctrlPr>
+                                  <a:rPr lang="en-US" sz="2200" b="0" i="1" smtClean="0">
+                                    <a:solidFill>
+                                      <a:schemeClr val="bg2">
+                                        <a:lumMod val="25000"/>
+                                      </a:schemeClr>
+                                    </a:solidFill>
+                                    <a:latin typeface="Cambria Math" panose="02040503050406030204" pitchFamily="18" charset="0"/>
+                                  </a:rPr>
+                                </m:ctrlPr>
+                              </m:sSubPr>
+                              <m:e>
+                                <m:r>
+                                  <a:rPr lang="en-US" sz="2200" b="0" i="1" smtClean="0">
+                                    <a:solidFill>
+                                      <a:schemeClr val="bg2">
+                                        <a:lumMod val="25000"/>
+                                      </a:schemeClr>
+                                    </a:solidFill>
+                                    <a:latin typeface="Cambria Math" panose="02040503050406030204" pitchFamily="18" charset="0"/>
+                                  </a:rPr>
+                                  <m:t>𝜂</m:t>
+                                </m:r>
+                              </m:e>
+                              <m:sub>
+                                <m:r>
+                                  <a:rPr lang="en-US" sz="2200" b="0" i="1" smtClean="0">
+                                    <a:solidFill>
+                                      <a:schemeClr val="bg2">
+                                        <a:lumMod val="25000"/>
+                                      </a:schemeClr>
+                                    </a:solidFill>
+                                    <a:latin typeface="Cambria Math" panose="02040503050406030204" pitchFamily="18" charset="0"/>
+                                  </a:rPr>
+                                  <m:t>𝑖</m:t>
+                                </m:r>
+                              </m:sub>
+                            </m:sSub>
+                          </m:e>
+                          <m:sub>
+                            <m:r>
+                              <a:rPr lang="en-US" sz="2200" b="0" i="1" smtClean="0">
+                                <a:solidFill>
+                                  <a:schemeClr val="bg2">
+                                    <a:lumMod val="25000"/>
+                                  </a:schemeClr>
+                                </a:solidFill>
+                                <a:latin typeface="Cambria Math" panose="02040503050406030204" pitchFamily="18" charset="0"/>
+                              </a:rPr>
+                              <m:t> </m:t>
+                            </m:r>
+                          </m:sub>
+                        </m:sSub>
+                        <m:r>
+                          <a:rPr lang="en-US" sz="2200" b="0" i="1" smtClean="0">
+                            <a:solidFill>
+                              <a:schemeClr val="bg2">
+                                <a:lumMod val="25000"/>
+                              </a:schemeClr>
+                            </a:solidFill>
+                            <a:latin typeface="Cambria Math" panose="02040503050406030204" pitchFamily="18" charset="0"/>
+                          </a:rPr>
+                          <m:t>=</m:t>
+                        </m:r>
+                        <m:sSub>
+                          <m:sSubPr>
+                            <m:ctrlPr>
+                              <a:rPr lang="en-US" sz="2200" i="1">
+                                <a:solidFill>
+                                  <a:schemeClr val="bg2">
+                                    <a:lumMod val="25000"/>
+                                  </a:schemeClr>
+                                </a:solidFill>
+                                <a:latin typeface="Cambria Math" panose="02040503050406030204" pitchFamily="18" charset="0"/>
+                              </a:rPr>
+                            </m:ctrlPr>
+                          </m:sSubPr>
+                          <m:e>
+                            <m:r>
+                              <a:rPr lang="en-US" sz="2200" b="0" i="1" smtClean="0">
+                                <a:solidFill>
+                                  <a:schemeClr val="bg2">
+                                    <a:lumMod val="25000"/>
+                                  </a:schemeClr>
+                                </a:solidFill>
+                                <a:latin typeface="Cambria Math" panose="02040503050406030204" pitchFamily="18" charset="0"/>
+                              </a:rPr>
+                              <m:t> </m:t>
+                            </m:r>
+                            <m:r>
+                              <a:rPr lang="en-US" sz="2200" i="1" smtClean="0">
+                                <a:solidFill>
+                                  <a:schemeClr val="bg2">
+                                    <a:lumMod val="25000"/>
+                                  </a:schemeClr>
+                                </a:solidFill>
+                                <a:latin typeface="Cambria Math" panose="02040503050406030204" pitchFamily="18" charset="0"/>
+                              </a:rPr>
+                              <m:t>𝜇</m:t>
+                            </m:r>
+                          </m:e>
+                          <m:sub>
+                            <m:r>
+                              <a:rPr lang="en-US" sz="2200" i="1">
+                                <a:solidFill>
+                                  <a:schemeClr val="bg2">
+                                    <a:lumMod val="25000"/>
+                                  </a:schemeClr>
+                                </a:solidFill>
+                                <a:latin typeface="Cambria Math" panose="02040503050406030204" pitchFamily="18" charset="0"/>
+                              </a:rPr>
+                              <m:t>𝑖</m:t>
+                            </m:r>
+                          </m:sub>
+                        </m:sSub>
+                      </m:oMath>
+                    </m:oMathPara>
+                  </a14:m>
+                  <a:endParaRPr lang="en-US" sz="2200" b="0" dirty="0">
+                    <a:solidFill>
+                      <a:schemeClr val="bg2">
+                        <a:lumMod val="25000"/>
+                      </a:schemeClr>
+                    </a:solidFill>
+                  </a:endParaRPr>
+                </a:p>
+              </p:txBody>
+            </p:sp>
+          </mc:Choice>
+          <mc:Fallback>
+            <p:sp>
+              <p:nvSpPr>
+                <p:cNvPr id="8" name="TextBox 7">
+                  <a:extLst>
+                    <a:ext uri="{FF2B5EF4-FFF2-40B4-BE49-F238E27FC236}">
+                      <a16:creationId xmlns:a16="http://schemas.microsoft.com/office/drawing/2014/main" id="{DC2A6A2F-5FE8-CCCE-16EC-55315E8BDB99}"/>
+                    </a:ext>
+                  </a:extLst>
+                </p:cNvPr>
+                <p:cNvSpPr txBox="1">
+                  <a:spLocks noRot="1" noChangeAspect="1" noMove="1" noResize="1" noEditPoints="1" noAdjustHandles="1" noChangeArrowheads="1" noChangeShapeType="1" noTextEdit="1"/>
+                </p:cNvSpPr>
+                <p:nvPr/>
+              </p:nvSpPr>
+              <p:spPr>
+                <a:xfrm>
+                  <a:off x="1208440" y="5179108"/>
+                  <a:ext cx="950004" cy="371640"/>
+                </a:xfrm>
+                <a:prstGeom prst="rect">
+                  <a:avLst/>
+                </a:prstGeom>
+                <a:blipFill>
+                  <a:blip r:embed="rId4"/>
+                  <a:stretch>
+                    <a:fillRect l="-8000" t="-6667" r="-4000" b="-36667"/>
+                  </a:stretch>
+                </a:blipFill>
+              </p:spPr>
+              <p:txBody>
+                <a:bodyPr/>
+                <a:lstStyle/>
+                <a:p>
+                  <a:r>
+                    <a:rPr lang="en-US">
+                      <a:noFill/>
+                    </a:rPr>
+                    <a:t> </a:t>
+                  </a:r>
+                </a:p>
+              </p:txBody>
+            </p:sp>
+          </mc:Fallback>
+        </mc:AlternateContent>
+        <p:sp>
+          <p:nvSpPr>
+            <p:cNvPr id="9" name="TextBox 8">
+              <a:extLst>
+                <a:ext uri="{FF2B5EF4-FFF2-40B4-BE49-F238E27FC236}">
+                  <a16:creationId xmlns:a16="http://schemas.microsoft.com/office/drawing/2014/main" id="{FBDB5BFE-7B32-3E11-AD68-74179BCF9BD9}"/>
+                </a:ext>
+              </a:extLst>
+            </p:cNvPr>
+            <p:cNvSpPr txBox="1"/>
+            <p:nvPr/>
+          </p:nvSpPr>
+          <p:spPr>
+            <a:xfrm>
+              <a:off x="338506" y="2117613"/>
+              <a:ext cx="2777067" cy="400110"/>
+            </a:xfrm>
+            <a:prstGeom prst="rect">
+              <a:avLst/>
+            </a:prstGeom>
+            <a:noFill/>
+          </p:spPr>
+          <p:txBody>
+            <a:bodyPr wrap="square" rtlCol="0">
+              <a:spAutoFit/>
+            </a:bodyPr>
+            <a:lstStyle/>
+            <a:p>
+              <a:pPr algn="ctr"/>
+              <a:r>
+                <a:rPr lang="en-US" sz="2000" b="1" dirty="0" err="1">
+                  <a:solidFill>
+                    <a:schemeClr val="tx1">
+                      <a:lumMod val="85000"/>
+                      <a:lumOff val="15000"/>
+                    </a:schemeClr>
+                  </a:solidFill>
+                </a:rPr>
+                <a:t>Parte</a:t>
+              </a:r>
+              <a:r>
+                <a:rPr lang="en-US" sz="2000" b="1" dirty="0">
+                  <a:solidFill>
+                    <a:schemeClr val="tx1">
+                      <a:lumMod val="85000"/>
+                      <a:lumOff val="15000"/>
+                    </a:schemeClr>
+                  </a:solidFill>
+                </a:rPr>
+                <a:t> </a:t>
+              </a:r>
+              <a:r>
+                <a:rPr lang="en-US" sz="2000" b="1" dirty="0" err="1">
+                  <a:solidFill>
+                    <a:schemeClr val="tx1">
+                      <a:lumMod val="85000"/>
+                      <a:lumOff val="15000"/>
+                    </a:schemeClr>
+                  </a:solidFill>
+                </a:rPr>
+                <a:t>estocástica</a:t>
+              </a:r>
+              <a:endParaRPr lang="en-US" sz="2000" b="1" dirty="0">
+                <a:solidFill>
+                  <a:schemeClr val="tx1">
+                    <a:lumMod val="85000"/>
+                    <a:lumOff val="15000"/>
+                  </a:schemeClr>
+                </a:solidFill>
+              </a:endParaRPr>
+            </a:p>
+          </p:txBody>
+        </p:sp>
+        <p:sp>
+          <p:nvSpPr>
+            <p:cNvPr id="10" name="TextBox 9">
+              <a:extLst>
+                <a:ext uri="{FF2B5EF4-FFF2-40B4-BE49-F238E27FC236}">
+                  <a16:creationId xmlns:a16="http://schemas.microsoft.com/office/drawing/2014/main" id="{F67DCFCD-DB56-82ED-EAF1-E8064FF91158}"/>
+                </a:ext>
+              </a:extLst>
+            </p:cNvPr>
+            <p:cNvSpPr txBox="1"/>
+            <p:nvPr/>
+          </p:nvSpPr>
+          <p:spPr>
+            <a:xfrm>
+              <a:off x="4224865" y="1232221"/>
+              <a:ext cx="3420536" cy="430887"/>
+            </a:xfrm>
+            <a:prstGeom prst="rect">
+              <a:avLst/>
+            </a:prstGeom>
+            <a:noFill/>
+          </p:spPr>
+          <p:txBody>
+            <a:bodyPr wrap="square" rtlCol="0">
+              <a:spAutoFit/>
+            </a:bodyPr>
+            <a:lstStyle/>
+            <a:p>
+              <a:pPr algn="ctr"/>
+              <a:r>
+                <a:rPr lang="en-US" sz="2200" b="1" dirty="0">
+                  <a:solidFill>
+                    <a:srgbClr val="567768"/>
+                  </a:solidFill>
+                  <a:latin typeface="Aptos ExtraBold" panose="020B0004020202020204" pitchFamily="34" charset="0"/>
+                </a:rPr>
+                <a:t>DADOS DISCRETOS</a:t>
+              </a:r>
+            </a:p>
+          </p:txBody>
+        </p:sp>
+        <p:sp>
+          <p:nvSpPr>
+            <p:cNvPr id="11" name="TextBox 10">
+              <a:extLst>
+                <a:ext uri="{FF2B5EF4-FFF2-40B4-BE49-F238E27FC236}">
+                  <a16:creationId xmlns:a16="http://schemas.microsoft.com/office/drawing/2014/main" id="{DE667C5F-BB38-4DDC-F74C-2CF56EC1B52E}"/>
+                </a:ext>
+              </a:extLst>
+            </p:cNvPr>
+            <p:cNvSpPr txBox="1"/>
+            <p:nvPr/>
+          </p:nvSpPr>
+          <p:spPr>
+            <a:xfrm>
+              <a:off x="8322732" y="1232221"/>
+              <a:ext cx="3462868" cy="430887"/>
+            </a:xfrm>
+            <a:prstGeom prst="rect">
+              <a:avLst/>
+            </a:prstGeom>
+            <a:noFill/>
+          </p:spPr>
+          <p:txBody>
+            <a:bodyPr wrap="square" rtlCol="0">
+              <a:spAutoFit/>
+            </a:bodyPr>
+            <a:lstStyle/>
+            <a:p>
+              <a:pPr algn="ctr"/>
+              <a:r>
+                <a:rPr lang="en-US" sz="2200" b="1" dirty="0">
+                  <a:solidFill>
+                    <a:srgbClr val="467C9D"/>
+                  </a:solidFill>
+                  <a:latin typeface="Aptos ExtraBold" panose="020B0004020202020204" pitchFamily="34" charset="0"/>
+                </a:rPr>
+                <a:t>DADOS BINÁRIOS</a:t>
+              </a:r>
+            </a:p>
+          </p:txBody>
+        </p:sp>
+        <p:sp>
+          <p:nvSpPr>
+            <p:cNvPr id="12" name="TextBox 11">
+              <a:extLst>
+                <a:ext uri="{FF2B5EF4-FFF2-40B4-BE49-F238E27FC236}">
+                  <a16:creationId xmlns:a16="http://schemas.microsoft.com/office/drawing/2014/main" id="{FAF868EC-8F60-07D6-6C1A-BEEF2B3FF3BC}"/>
+                </a:ext>
+              </a:extLst>
+            </p:cNvPr>
+            <p:cNvSpPr txBox="1"/>
+            <p:nvPr/>
+          </p:nvSpPr>
+          <p:spPr>
+            <a:xfrm>
+              <a:off x="376765" y="3497104"/>
+              <a:ext cx="2777067" cy="400110"/>
+            </a:xfrm>
+            <a:prstGeom prst="rect">
+              <a:avLst/>
+            </a:prstGeom>
+            <a:noFill/>
+          </p:spPr>
+          <p:txBody>
+            <a:bodyPr wrap="square" rtlCol="0">
+              <a:spAutoFit/>
+            </a:bodyPr>
+            <a:lstStyle/>
+            <a:p>
+              <a:pPr algn="ctr"/>
+              <a:r>
+                <a:rPr lang="en-US" sz="2000" b="1" dirty="0" err="1">
+                  <a:solidFill>
+                    <a:schemeClr val="tx1">
+                      <a:lumMod val="85000"/>
+                      <a:lumOff val="15000"/>
+                    </a:schemeClr>
+                  </a:solidFill>
+                </a:rPr>
+                <a:t>Parte</a:t>
+              </a:r>
+              <a:r>
+                <a:rPr lang="en-US" sz="2000" b="1" dirty="0">
+                  <a:solidFill>
+                    <a:schemeClr val="tx1">
+                      <a:lumMod val="85000"/>
+                      <a:lumOff val="15000"/>
+                    </a:schemeClr>
+                  </a:solidFill>
+                </a:rPr>
+                <a:t> </a:t>
+              </a:r>
+              <a:r>
+                <a:rPr lang="en-US" sz="2000" b="1" dirty="0" err="1">
+                  <a:solidFill>
+                    <a:schemeClr val="tx1">
+                      <a:lumMod val="85000"/>
+                      <a:lumOff val="15000"/>
+                    </a:schemeClr>
+                  </a:solidFill>
+                </a:rPr>
+                <a:t>determinística</a:t>
+              </a:r>
+              <a:endParaRPr lang="en-US" sz="2000" b="1" dirty="0">
+                <a:solidFill>
+                  <a:schemeClr val="tx1">
+                    <a:lumMod val="85000"/>
+                    <a:lumOff val="15000"/>
+                  </a:schemeClr>
+                </a:solidFill>
+              </a:endParaRPr>
+            </a:p>
+          </p:txBody>
+        </p:sp>
+        <p:sp>
+          <p:nvSpPr>
+            <p:cNvPr id="13" name="TextBox 12">
+              <a:extLst>
+                <a:ext uri="{FF2B5EF4-FFF2-40B4-BE49-F238E27FC236}">
+                  <a16:creationId xmlns:a16="http://schemas.microsoft.com/office/drawing/2014/main" id="{D9DCE77E-E66B-DCD9-564B-FA210D740687}"/>
+                </a:ext>
+              </a:extLst>
+            </p:cNvPr>
+            <p:cNvSpPr txBox="1"/>
+            <p:nvPr/>
+          </p:nvSpPr>
+          <p:spPr>
+            <a:xfrm>
+              <a:off x="299114" y="4754264"/>
+              <a:ext cx="2777067" cy="400110"/>
+            </a:xfrm>
+            <a:prstGeom prst="rect">
+              <a:avLst/>
+            </a:prstGeom>
+            <a:noFill/>
+          </p:spPr>
+          <p:txBody>
+            <a:bodyPr wrap="square" rtlCol="0">
+              <a:spAutoFit/>
+            </a:bodyPr>
+            <a:lstStyle/>
+            <a:p>
+              <a:pPr algn="ctr"/>
+              <a:r>
+                <a:rPr lang="en-US" sz="2000" b="1" dirty="0" err="1">
+                  <a:solidFill>
+                    <a:schemeClr val="tx1">
+                      <a:lumMod val="85000"/>
+                      <a:lumOff val="15000"/>
+                    </a:schemeClr>
+                  </a:solidFill>
+                </a:rPr>
+                <a:t>Função</a:t>
+              </a:r>
+              <a:r>
+                <a:rPr lang="en-US" sz="2000" b="1" dirty="0">
+                  <a:solidFill>
+                    <a:schemeClr val="tx1">
+                      <a:lumMod val="85000"/>
+                      <a:lumOff val="15000"/>
+                    </a:schemeClr>
+                  </a:solidFill>
+                </a:rPr>
+                <a:t> de </a:t>
+              </a:r>
+              <a:r>
+                <a:rPr lang="en-US" sz="2000" b="1" dirty="0" err="1">
+                  <a:solidFill>
+                    <a:schemeClr val="tx1">
+                      <a:lumMod val="85000"/>
+                      <a:lumOff val="15000"/>
+                    </a:schemeClr>
+                  </a:solidFill>
+                </a:rPr>
+                <a:t>ligação</a:t>
+              </a:r>
+              <a:endParaRPr lang="en-US" sz="2000" b="1" dirty="0">
+                <a:solidFill>
+                  <a:schemeClr val="tx1">
+                    <a:lumMod val="85000"/>
+                    <a:lumOff val="15000"/>
+                  </a:schemeClr>
+                </a:solidFill>
+              </a:endParaRPr>
+            </a:p>
+          </p:txBody>
+        </p:sp>
+        <p:cxnSp>
+          <p:nvCxnSpPr>
+            <p:cNvPr id="14" name="Straight Connector 13">
+              <a:extLst>
+                <a:ext uri="{FF2B5EF4-FFF2-40B4-BE49-F238E27FC236}">
+                  <a16:creationId xmlns:a16="http://schemas.microsoft.com/office/drawing/2014/main" id="{899A360D-4814-DD02-8FB2-6979B9947F07}"/>
+                </a:ext>
+              </a:extLst>
+            </p:cNvPr>
+            <p:cNvCxnSpPr>
+              <a:cxnSpLocks/>
+            </p:cNvCxnSpPr>
+            <p:nvPr/>
+          </p:nvCxnSpPr>
+          <p:spPr>
+            <a:xfrm>
+              <a:off x="3843866" y="1846680"/>
+              <a:ext cx="0" cy="3927588"/>
+            </a:xfrm>
+            <a:prstGeom prst="line">
+              <a:avLst/>
+            </a:prstGeom>
+            <a:ln w="22225">
+              <a:solidFill>
+                <a:schemeClr val="bg1">
+                  <a:lumMod val="65000"/>
+                </a:schemeClr>
+              </a:solidFill>
+            </a:ln>
+          </p:spPr>
+          <p:style>
+            <a:lnRef idx="2">
+              <a:schemeClr val="accent1"/>
+            </a:lnRef>
+            <a:fillRef idx="0">
+              <a:schemeClr val="accent1"/>
+            </a:fillRef>
+            <a:effectRef idx="1">
+              <a:schemeClr val="accent1"/>
+            </a:effectRef>
+            <a:fontRef idx="minor">
+              <a:schemeClr val="tx1"/>
+            </a:fontRef>
+          </p:style>
+        </p:cxnSp>
+        <p:cxnSp>
+          <p:nvCxnSpPr>
+            <p:cNvPr id="15" name="Straight Connector 14">
+              <a:extLst>
+                <a:ext uri="{FF2B5EF4-FFF2-40B4-BE49-F238E27FC236}">
+                  <a16:creationId xmlns:a16="http://schemas.microsoft.com/office/drawing/2014/main" id="{922A6003-142C-4B10-7490-97E0604702D6}"/>
+                </a:ext>
+              </a:extLst>
+            </p:cNvPr>
+            <p:cNvCxnSpPr>
+              <a:cxnSpLocks/>
+            </p:cNvCxnSpPr>
+            <p:nvPr/>
+          </p:nvCxnSpPr>
+          <p:spPr>
+            <a:xfrm>
+              <a:off x="8026399" y="1846680"/>
+              <a:ext cx="0" cy="3927588"/>
+            </a:xfrm>
+            <a:prstGeom prst="line">
+              <a:avLst/>
+            </a:prstGeom>
+            <a:ln w="22225">
+              <a:solidFill>
+                <a:schemeClr val="bg1">
+                  <a:lumMod val="65000"/>
+                </a:schemeClr>
+              </a:solidFill>
+            </a:ln>
+          </p:spPr>
+          <p:style>
+            <a:lnRef idx="2">
+              <a:schemeClr val="accent1"/>
+            </a:lnRef>
+            <a:fillRef idx="0">
+              <a:schemeClr val="accent1"/>
+            </a:fillRef>
+            <a:effectRef idx="1">
+              <a:schemeClr val="accent1"/>
+            </a:effectRef>
+            <a:fontRef idx="minor">
+              <a:schemeClr val="tx1"/>
+            </a:fontRef>
+          </p:style>
+        </p:cxnSp>
+        <mc:AlternateContent xmlns:mc="http://schemas.openxmlformats.org/markup-compatibility/2006">
+          <mc:Choice xmlns:a14="http://schemas.microsoft.com/office/drawing/2010/main" Requires="a14">
+            <p:sp>
+              <p:nvSpPr>
+                <p:cNvPr id="16" name="TextBox 15">
+                  <a:extLst>
+                    <a:ext uri="{FF2B5EF4-FFF2-40B4-BE49-F238E27FC236}">
+                      <a16:creationId xmlns:a16="http://schemas.microsoft.com/office/drawing/2014/main" id="{17DD91F4-C93E-1F19-7D6D-76168928FDBB}"/>
+                    </a:ext>
+                  </a:extLst>
+                </p:cNvPr>
+                <p:cNvSpPr txBox="1"/>
+                <p:nvPr/>
+              </p:nvSpPr>
+              <p:spPr>
+                <a:xfrm>
+                  <a:off x="4904691" y="2618060"/>
+                  <a:ext cx="2060884" cy="338554"/>
+                </a:xfrm>
+                <a:prstGeom prst="rect">
+                  <a:avLst/>
+                </a:prstGeom>
+                <a:noFill/>
+              </p:spPr>
+              <p:txBody>
+                <a:bodyPr wrap="none" lIns="0" tIns="0" rIns="0" bIns="0" rtlCol="0">
+                  <a:spAutoFit/>
+                </a:bodyPr>
+                <a:lstStyle/>
+                <a:p>
+                  <a:pPr/>
+                  <a14:m>
+                    <m:oMathPara xmlns:m="http://schemas.openxmlformats.org/officeDocument/2006/math">
+                      <m:oMathParaPr>
+                        <m:jc m:val="centerGroup"/>
+                      </m:oMathParaPr>
+                      <m:oMath xmlns:m="http://schemas.openxmlformats.org/officeDocument/2006/math">
+                        <m:sSub>
+                          <m:sSubPr>
+                            <m:ctrlPr>
+                              <a:rPr lang="en-US" sz="2200" i="1" smtClean="0">
+                                <a:solidFill>
+                                  <a:schemeClr val="bg2">
+                                    <a:lumMod val="25000"/>
+                                  </a:schemeClr>
+                                </a:solidFill>
+                                <a:latin typeface="Cambria Math" panose="02040503050406030204" pitchFamily="18" charset="0"/>
+                              </a:rPr>
+                            </m:ctrlPr>
+                          </m:sSubPr>
+                          <m:e>
+                            <m:r>
+                              <a:rPr lang="en-US" sz="2200" b="0" i="1" smtClean="0">
+                                <a:solidFill>
+                                  <a:schemeClr val="bg2">
+                                    <a:lumMod val="25000"/>
+                                  </a:schemeClr>
+                                </a:solidFill>
+                                <a:latin typeface="Cambria Math" panose="02040503050406030204" pitchFamily="18" charset="0"/>
+                              </a:rPr>
+                              <m:t>𝑌</m:t>
+                            </m:r>
+                          </m:e>
+                          <m:sub>
+                            <m:r>
+                              <a:rPr lang="en-US" sz="2200" b="0" i="1" smtClean="0">
+                                <a:solidFill>
+                                  <a:schemeClr val="bg2">
+                                    <a:lumMod val="25000"/>
+                                  </a:schemeClr>
+                                </a:solidFill>
+                                <a:latin typeface="Cambria Math" panose="02040503050406030204" pitchFamily="18" charset="0"/>
+                              </a:rPr>
+                              <m:t>𝑖</m:t>
+                            </m:r>
+                          </m:sub>
+                        </m:sSub>
+                        <m:r>
+                          <a:rPr lang="en-US" sz="2200" b="0" i="1" smtClean="0">
+                            <a:solidFill>
+                              <a:schemeClr val="bg2">
+                                <a:lumMod val="25000"/>
+                              </a:schemeClr>
+                            </a:solidFill>
+                            <a:latin typeface="Cambria Math" panose="02040503050406030204" pitchFamily="18" charset="0"/>
+                          </a:rPr>
+                          <m:t> ~ </m:t>
+                        </m:r>
+                        <m:r>
+                          <a:rPr lang="en-US" sz="2200" b="0" i="1" smtClean="0">
+                            <a:solidFill>
+                              <a:schemeClr val="bg2">
+                                <a:lumMod val="25000"/>
+                              </a:schemeClr>
+                            </a:solidFill>
+                            <a:latin typeface="Cambria Math" panose="02040503050406030204" pitchFamily="18" charset="0"/>
+                          </a:rPr>
+                          <m:t>𝑃𝑜𝑖𝑠𝑠𝑜𝑛</m:t>
+                        </m:r>
+                        <m:d>
+                          <m:dPr>
+                            <m:ctrlPr>
+                              <a:rPr lang="en-US" sz="2200" b="0" i="1" smtClean="0">
+                                <a:solidFill>
+                                  <a:schemeClr val="bg2">
+                                    <a:lumMod val="25000"/>
+                                  </a:schemeClr>
+                                </a:solidFill>
+                                <a:latin typeface="Cambria Math" panose="02040503050406030204" pitchFamily="18" charset="0"/>
+                              </a:rPr>
+                            </m:ctrlPr>
+                          </m:dPr>
+                          <m:e>
+                            <m:sSub>
+                              <m:sSubPr>
+                                <m:ctrlPr>
+                                  <a:rPr lang="en-US" sz="2200" b="0" i="1" smtClean="0">
+                                    <a:solidFill>
+                                      <a:schemeClr val="bg2">
+                                        <a:lumMod val="25000"/>
+                                      </a:schemeClr>
+                                    </a:solidFill>
+                                    <a:latin typeface="Cambria Math" panose="02040503050406030204" pitchFamily="18" charset="0"/>
+                                  </a:rPr>
+                                </m:ctrlPr>
+                              </m:sSubPr>
+                              <m:e>
+                                <m:r>
+                                  <a:rPr lang="en-US" sz="2200" b="0" i="1" smtClean="0">
+                                    <a:solidFill>
+                                      <a:schemeClr val="bg2">
+                                        <a:lumMod val="25000"/>
+                                      </a:schemeClr>
+                                    </a:solidFill>
+                                    <a:latin typeface="Cambria Math" panose="02040503050406030204" pitchFamily="18" charset="0"/>
+                                  </a:rPr>
+                                  <m:t>𝜆</m:t>
+                                </m:r>
+                              </m:e>
+                              <m:sub>
+                                <m:r>
+                                  <a:rPr lang="en-US" sz="2200" b="0" i="1" smtClean="0">
+                                    <a:solidFill>
+                                      <a:schemeClr val="bg2">
+                                        <a:lumMod val="25000"/>
+                                      </a:schemeClr>
+                                    </a:solidFill>
+                                    <a:latin typeface="Cambria Math" panose="02040503050406030204" pitchFamily="18" charset="0"/>
+                                  </a:rPr>
+                                  <m:t>𝑖</m:t>
+                                </m:r>
+                              </m:sub>
+                            </m:sSub>
+                          </m:e>
+                        </m:d>
+                      </m:oMath>
+                    </m:oMathPara>
+                  </a14:m>
+                  <a:endParaRPr lang="en-US" sz="2200" b="0" dirty="0">
+                    <a:solidFill>
+                      <a:schemeClr val="bg2">
+                        <a:lumMod val="25000"/>
+                      </a:schemeClr>
+                    </a:solidFill>
+                  </a:endParaRPr>
+                </a:p>
+              </p:txBody>
+            </p:sp>
+          </mc:Choice>
+          <mc:Fallback>
+            <p:sp>
+              <p:nvSpPr>
+                <p:cNvPr id="16" name="TextBox 15">
+                  <a:extLst>
+                    <a:ext uri="{FF2B5EF4-FFF2-40B4-BE49-F238E27FC236}">
+                      <a16:creationId xmlns:a16="http://schemas.microsoft.com/office/drawing/2014/main" id="{17DD91F4-C93E-1F19-7D6D-76168928FDBB}"/>
+                    </a:ext>
+                  </a:extLst>
+                </p:cNvPr>
+                <p:cNvSpPr txBox="1">
+                  <a:spLocks noRot="1" noChangeAspect="1" noMove="1" noResize="1" noEditPoints="1" noAdjustHandles="1" noChangeArrowheads="1" noChangeShapeType="1" noTextEdit="1"/>
+                </p:cNvSpPr>
+                <p:nvPr/>
+              </p:nvSpPr>
+              <p:spPr>
+                <a:xfrm>
+                  <a:off x="4904691" y="2618060"/>
+                  <a:ext cx="2060884" cy="338554"/>
+                </a:xfrm>
+                <a:prstGeom prst="rect">
+                  <a:avLst/>
+                </a:prstGeom>
+                <a:blipFill>
+                  <a:blip r:embed="rId5"/>
+                  <a:stretch>
+                    <a:fillRect l="-3067" t="-7143" b="-35714"/>
+                  </a:stretch>
+                </a:blipFill>
+              </p:spPr>
+              <p:txBody>
+                <a:bodyPr/>
+                <a:lstStyle/>
+                <a:p>
+                  <a:r>
+                    <a:rPr lang="en-US">
+                      <a:noFill/>
+                    </a:rPr>
+                    <a:t> </a:t>
+                  </a:r>
+                </a:p>
+              </p:txBody>
+            </p:sp>
+          </mc:Fallback>
+        </mc:AlternateContent>
+        <mc:AlternateContent xmlns:mc="http://schemas.openxmlformats.org/markup-compatibility/2006">
+          <mc:Choice xmlns:a14="http://schemas.microsoft.com/office/drawing/2010/main" Requires="a14">
+            <p:sp>
+              <p:nvSpPr>
+                <p:cNvPr id="17" name="TextBox 16">
+                  <a:extLst>
+                    <a:ext uri="{FF2B5EF4-FFF2-40B4-BE49-F238E27FC236}">
+                      <a16:creationId xmlns:a16="http://schemas.microsoft.com/office/drawing/2014/main" id="{9ABC8DE1-6494-1DE1-DC2B-DA8750B45B17}"/>
+                    </a:ext>
+                  </a:extLst>
+                </p:cNvPr>
+                <p:cNvSpPr txBox="1"/>
+                <p:nvPr/>
+              </p:nvSpPr>
+              <p:spPr>
+                <a:xfrm>
+                  <a:off x="5000427" y="3942952"/>
+                  <a:ext cx="1861022" cy="338554"/>
+                </a:xfrm>
+                <a:prstGeom prst="rect">
+                  <a:avLst/>
+                </a:prstGeom>
+                <a:noFill/>
+              </p:spPr>
+              <p:txBody>
+                <a:bodyPr wrap="none" lIns="0" tIns="0" rIns="0" bIns="0" rtlCol="0">
+                  <a:spAutoFit/>
+                </a:bodyPr>
+                <a:lstStyle/>
+                <a:p>
+                  <a:pPr/>
+                  <a14:m>
+                    <m:oMathPara xmlns:m="http://schemas.openxmlformats.org/officeDocument/2006/math">
+                      <m:oMathParaPr>
+                        <m:jc m:val="centerGroup"/>
+                      </m:oMathParaPr>
+                      <m:oMath xmlns:m="http://schemas.openxmlformats.org/officeDocument/2006/math">
+                        <m:sSub>
+                          <m:sSubPr>
+                            <m:ctrlPr>
+                              <a:rPr lang="en-US" sz="2200" i="1" smtClean="0">
+                                <a:solidFill>
+                                  <a:schemeClr val="bg2">
+                                    <a:lumMod val="25000"/>
+                                  </a:schemeClr>
+                                </a:solidFill>
+                                <a:latin typeface="Cambria Math" panose="02040503050406030204" pitchFamily="18" charset="0"/>
+                              </a:rPr>
+                            </m:ctrlPr>
+                          </m:sSubPr>
+                          <m:e>
+                            <m:r>
+                              <a:rPr lang="en-US" sz="2200" i="1">
+                                <a:solidFill>
+                                  <a:schemeClr val="bg2">
+                                    <a:lumMod val="25000"/>
+                                  </a:schemeClr>
+                                </a:solidFill>
+                                <a:latin typeface="Cambria Math" panose="02040503050406030204" pitchFamily="18" charset="0"/>
+                              </a:rPr>
+                              <m:t>𝜂</m:t>
+                            </m:r>
+                          </m:e>
+                          <m:sub>
+                            <m:r>
+                              <a:rPr lang="en-US" sz="2200" i="1">
+                                <a:solidFill>
+                                  <a:schemeClr val="bg2">
+                                    <a:lumMod val="25000"/>
+                                  </a:schemeClr>
+                                </a:solidFill>
+                                <a:latin typeface="Cambria Math" panose="02040503050406030204" pitchFamily="18" charset="0"/>
+                              </a:rPr>
+                              <m:t>𝑖</m:t>
+                            </m:r>
+                          </m:sub>
+                        </m:sSub>
+                        <m:r>
+                          <a:rPr lang="en-US" sz="2200" b="0" i="1" smtClean="0">
+                            <a:solidFill>
+                              <a:schemeClr val="bg2">
+                                <a:lumMod val="25000"/>
+                              </a:schemeClr>
+                            </a:solidFill>
+                            <a:latin typeface="Cambria Math" panose="02040503050406030204" pitchFamily="18" charset="0"/>
+                          </a:rPr>
+                          <m:t>= </m:t>
+                        </m:r>
+                        <m:sSub>
+                          <m:sSubPr>
+                            <m:ctrlPr>
+                              <a:rPr lang="en-US" sz="2200" b="0" i="1" smtClean="0">
+                                <a:solidFill>
+                                  <a:schemeClr val="bg2">
+                                    <a:lumMod val="25000"/>
+                                  </a:schemeClr>
+                                </a:solidFill>
+                                <a:latin typeface="Cambria Math" panose="02040503050406030204" pitchFamily="18" charset="0"/>
+                              </a:rPr>
+                            </m:ctrlPr>
+                          </m:sSubPr>
+                          <m:e>
+                            <m:r>
+                              <a:rPr lang="en-US" sz="2200" b="0" i="1" smtClean="0">
+                                <a:solidFill>
+                                  <a:schemeClr val="bg2">
+                                    <a:lumMod val="25000"/>
+                                  </a:schemeClr>
+                                </a:solidFill>
+                                <a:latin typeface="Cambria Math" panose="02040503050406030204" pitchFamily="18" charset="0"/>
+                              </a:rPr>
+                              <m:t>𝛽</m:t>
+                            </m:r>
+                          </m:e>
+                          <m:sub>
+                            <m:r>
+                              <a:rPr lang="en-US" sz="2200" b="0" i="1" smtClean="0">
+                                <a:solidFill>
+                                  <a:schemeClr val="bg2">
+                                    <a:lumMod val="25000"/>
+                                  </a:schemeClr>
+                                </a:solidFill>
+                                <a:latin typeface="Cambria Math" panose="02040503050406030204" pitchFamily="18" charset="0"/>
+                              </a:rPr>
+                              <m:t>0</m:t>
+                            </m:r>
+                          </m:sub>
+                        </m:sSub>
+                        <m:r>
+                          <a:rPr lang="en-US" sz="2200" b="0" i="1" smtClean="0">
+                            <a:solidFill>
+                              <a:schemeClr val="bg2">
+                                <a:lumMod val="25000"/>
+                              </a:schemeClr>
+                            </a:solidFill>
+                            <a:latin typeface="Cambria Math" panose="02040503050406030204" pitchFamily="18" charset="0"/>
+                          </a:rPr>
+                          <m:t>+</m:t>
+                        </m:r>
+                        <m:sSub>
+                          <m:sSubPr>
+                            <m:ctrlPr>
+                              <a:rPr lang="en-US" sz="2200" b="0" i="1" smtClean="0">
+                                <a:solidFill>
+                                  <a:schemeClr val="bg2">
+                                    <a:lumMod val="25000"/>
+                                  </a:schemeClr>
+                                </a:solidFill>
+                                <a:latin typeface="Cambria Math" panose="02040503050406030204" pitchFamily="18" charset="0"/>
+                              </a:rPr>
+                            </m:ctrlPr>
+                          </m:sSubPr>
+                          <m:e>
+                            <m:r>
+                              <a:rPr lang="en-US" sz="2200" b="0" i="1" smtClean="0">
+                                <a:solidFill>
+                                  <a:schemeClr val="bg2">
+                                    <a:lumMod val="25000"/>
+                                  </a:schemeClr>
+                                </a:solidFill>
+                                <a:latin typeface="Cambria Math" panose="02040503050406030204" pitchFamily="18" charset="0"/>
+                              </a:rPr>
+                              <m:t>𝛽</m:t>
+                            </m:r>
+                          </m:e>
+                          <m:sub>
+                            <m:r>
+                              <a:rPr lang="en-US" sz="2200" b="0" i="1" smtClean="0">
+                                <a:solidFill>
+                                  <a:schemeClr val="bg2">
+                                    <a:lumMod val="25000"/>
+                                  </a:schemeClr>
+                                </a:solidFill>
+                                <a:latin typeface="Cambria Math" panose="02040503050406030204" pitchFamily="18" charset="0"/>
+                              </a:rPr>
+                              <m:t>1</m:t>
+                            </m:r>
+                          </m:sub>
+                        </m:sSub>
+                        <m:sSub>
+                          <m:sSubPr>
+                            <m:ctrlPr>
+                              <a:rPr lang="en-US" sz="2200" b="0" i="1" smtClean="0">
+                                <a:solidFill>
+                                  <a:schemeClr val="bg2">
+                                    <a:lumMod val="25000"/>
+                                  </a:schemeClr>
+                                </a:solidFill>
+                                <a:latin typeface="Cambria Math" panose="02040503050406030204" pitchFamily="18" charset="0"/>
+                              </a:rPr>
+                            </m:ctrlPr>
+                          </m:sSubPr>
+                          <m:e>
+                            <m:r>
+                              <a:rPr lang="en-US" sz="2200" b="0" i="1" smtClean="0">
+                                <a:solidFill>
+                                  <a:schemeClr val="bg2">
+                                    <a:lumMod val="25000"/>
+                                  </a:schemeClr>
+                                </a:solidFill>
+                                <a:latin typeface="Cambria Math" panose="02040503050406030204" pitchFamily="18" charset="0"/>
+                              </a:rPr>
+                              <m:t>𝑥</m:t>
+                            </m:r>
+                          </m:e>
+                          <m:sub>
+                            <m:r>
+                              <a:rPr lang="en-US" sz="2200" b="0" i="1" smtClean="0">
+                                <a:solidFill>
+                                  <a:schemeClr val="bg2">
+                                    <a:lumMod val="25000"/>
+                                  </a:schemeClr>
+                                </a:solidFill>
+                                <a:latin typeface="Cambria Math" panose="02040503050406030204" pitchFamily="18" charset="0"/>
+                              </a:rPr>
+                              <m:t>𝑖</m:t>
+                            </m:r>
+                          </m:sub>
+                        </m:sSub>
+                      </m:oMath>
+                    </m:oMathPara>
+                  </a14:m>
+                  <a:endParaRPr lang="en-US" sz="2200" b="0" dirty="0">
+                    <a:solidFill>
+                      <a:schemeClr val="bg2">
+                        <a:lumMod val="25000"/>
+                      </a:schemeClr>
+                    </a:solidFill>
+                  </a:endParaRPr>
+                </a:p>
+              </p:txBody>
+            </p:sp>
+          </mc:Choice>
+          <mc:Fallback>
+            <p:sp>
+              <p:nvSpPr>
+                <p:cNvPr id="17" name="TextBox 16">
+                  <a:extLst>
+                    <a:ext uri="{FF2B5EF4-FFF2-40B4-BE49-F238E27FC236}">
+                      <a16:creationId xmlns:a16="http://schemas.microsoft.com/office/drawing/2014/main" id="{9ABC8DE1-6494-1DE1-DC2B-DA8750B45B17}"/>
+                    </a:ext>
+                  </a:extLst>
+                </p:cNvPr>
+                <p:cNvSpPr txBox="1">
+                  <a:spLocks noRot="1" noChangeAspect="1" noMove="1" noResize="1" noEditPoints="1" noAdjustHandles="1" noChangeArrowheads="1" noChangeShapeType="1" noTextEdit="1"/>
+                </p:cNvSpPr>
+                <p:nvPr/>
+              </p:nvSpPr>
+              <p:spPr>
+                <a:xfrm>
+                  <a:off x="5000427" y="3942952"/>
+                  <a:ext cx="1861022" cy="338554"/>
+                </a:xfrm>
+                <a:prstGeom prst="rect">
+                  <a:avLst/>
+                </a:prstGeom>
+                <a:blipFill>
+                  <a:blip r:embed="rId6"/>
+                  <a:stretch>
+                    <a:fillRect l="-3378" t="-11111" r="-676" b="-37037"/>
+                  </a:stretch>
+                </a:blipFill>
+              </p:spPr>
+              <p:txBody>
+                <a:bodyPr/>
+                <a:lstStyle/>
+                <a:p>
+                  <a:r>
+                    <a:rPr lang="en-US">
+                      <a:noFill/>
+                    </a:rPr>
+                    <a:t> </a:t>
+                  </a:r>
+                </a:p>
+              </p:txBody>
+            </p:sp>
+          </mc:Fallback>
+        </mc:AlternateContent>
+        <mc:AlternateContent xmlns:mc="http://schemas.openxmlformats.org/markup-compatibility/2006">
+          <mc:Choice xmlns:a14="http://schemas.microsoft.com/office/drawing/2010/main" Requires="a14">
+            <p:sp>
+              <p:nvSpPr>
+                <p:cNvPr id="18" name="TextBox 17">
+                  <a:extLst>
+                    <a:ext uri="{FF2B5EF4-FFF2-40B4-BE49-F238E27FC236}">
+                      <a16:creationId xmlns:a16="http://schemas.microsoft.com/office/drawing/2014/main" id="{8B3F84EB-EAB0-4FDB-B0F8-0D53F47A325E}"/>
+                    </a:ext>
+                  </a:extLst>
+                </p:cNvPr>
+                <p:cNvSpPr txBox="1"/>
+                <p:nvPr/>
+              </p:nvSpPr>
+              <p:spPr>
+                <a:xfrm>
+                  <a:off x="5113302" y="5154374"/>
+                  <a:ext cx="1618264" cy="371640"/>
+                </a:xfrm>
+                <a:prstGeom prst="rect">
+                  <a:avLst/>
+                </a:prstGeom>
+                <a:noFill/>
+              </p:spPr>
+              <p:txBody>
+                <a:bodyPr wrap="none" lIns="0" tIns="0" rIns="0" bIns="0" rtlCol="0">
+                  <a:spAutoFit/>
+                </a:bodyPr>
+                <a:lstStyle/>
+                <a:p>
+                  <a:pPr/>
+                  <a14:m>
+                    <m:oMathPara xmlns:m="http://schemas.openxmlformats.org/officeDocument/2006/math">
+                      <m:oMathParaPr>
+                        <m:jc m:val="centerGroup"/>
+                      </m:oMathParaPr>
+                      <m:oMath xmlns:m="http://schemas.openxmlformats.org/officeDocument/2006/math">
+                        <m:sSub>
+                          <m:sSubPr>
+                            <m:ctrlPr>
+                              <a:rPr lang="en-US" sz="2200" i="1" smtClean="0">
+                                <a:solidFill>
+                                  <a:schemeClr val="bg2">
+                                    <a:lumMod val="25000"/>
+                                  </a:schemeClr>
+                                </a:solidFill>
+                                <a:latin typeface="Cambria Math" panose="02040503050406030204" pitchFamily="18" charset="0"/>
+                              </a:rPr>
+                            </m:ctrlPr>
+                          </m:sSubPr>
+                          <m:e>
+                            <m:sSub>
+                              <m:sSubPr>
+                                <m:ctrlPr>
+                                  <a:rPr lang="en-US" sz="2200" b="0" i="1" smtClean="0">
+                                    <a:solidFill>
+                                      <a:schemeClr val="bg2">
+                                        <a:lumMod val="25000"/>
+                                      </a:schemeClr>
+                                    </a:solidFill>
+                                    <a:latin typeface="Cambria Math" panose="02040503050406030204" pitchFamily="18" charset="0"/>
+                                  </a:rPr>
+                                </m:ctrlPr>
+                              </m:sSubPr>
+                              <m:e>
+                                <m:r>
+                                  <a:rPr lang="en-US" sz="2200" b="0" i="1" smtClean="0">
+                                    <a:solidFill>
+                                      <a:schemeClr val="bg2">
+                                        <a:lumMod val="25000"/>
+                                      </a:schemeClr>
+                                    </a:solidFill>
+                                    <a:latin typeface="Cambria Math" panose="02040503050406030204" pitchFamily="18" charset="0"/>
+                                  </a:rPr>
+                                  <m:t>𝜂</m:t>
+                                </m:r>
+                              </m:e>
+                              <m:sub>
+                                <m:r>
+                                  <a:rPr lang="en-US" sz="2200" b="0" i="1" smtClean="0">
+                                    <a:solidFill>
+                                      <a:schemeClr val="bg2">
+                                        <a:lumMod val="25000"/>
+                                      </a:schemeClr>
+                                    </a:solidFill>
+                                    <a:latin typeface="Cambria Math" panose="02040503050406030204" pitchFamily="18" charset="0"/>
+                                  </a:rPr>
+                                  <m:t>𝑖</m:t>
+                                </m:r>
+                              </m:sub>
+                            </m:sSub>
+                          </m:e>
+                          <m:sub>
+                            <m:r>
+                              <a:rPr lang="en-US" sz="2200" b="0" i="1" smtClean="0">
+                                <a:solidFill>
+                                  <a:schemeClr val="bg2">
+                                    <a:lumMod val="25000"/>
+                                  </a:schemeClr>
+                                </a:solidFill>
+                                <a:latin typeface="Cambria Math" panose="02040503050406030204" pitchFamily="18" charset="0"/>
+                              </a:rPr>
+                              <m:t> </m:t>
+                            </m:r>
+                          </m:sub>
+                        </m:sSub>
+                        <m:r>
+                          <a:rPr lang="en-US" sz="2200" b="0" i="1" smtClean="0">
+                            <a:solidFill>
+                              <a:schemeClr val="bg2">
+                                <a:lumMod val="25000"/>
+                              </a:schemeClr>
+                            </a:solidFill>
+                            <a:latin typeface="Cambria Math" panose="02040503050406030204" pitchFamily="18" charset="0"/>
+                          </a:rPr>
+                          <m:t>= </m:t>
+                        </m:r>
+                        <m:r>
+                          <m:rPr>
+                            <m:sty m:val="p"/>
+                          </m:rPr>
+                          <a:rPr lang="en-US" sz="2200" b="0" i="0" smtClean="0">
+                            <a:solidFill>
+                              <a:schemeClr val="bg2">
+                                <a:lumMod val="25000"/>
+                              </a:schemeClr>
+                            </a:solidFill>
+                            <a:latin typeface="Cambria Math" panose="02040503050406030204" pitchFamily="18" charset="0"/>
+                          </a:rPr>
+                          <m:t>log</m:t>
+                        </m:r>
+                        <m:r>
+                          <a:rPr lang="en-US" sz="2200" b="0" i="1" smtClean="0">
+                            <a:solidFill>
+                              <a:schemeClr val="bg2">
+                                <a:lumMod val="25000"/>
+                              </a:schemeClr>
+                            </a:solidFill>
+                            <a:latin typeface="Cambria Math" panose="02040503050406030204" pitchFamily="18" charset="0"/>
+                          </a:rPr>
+                          <m:t>⁡(</m:t>
+                        </m:r>
+                        <m:sSub>
+                          <m:sSubPr>
+                            <m:ctrlPr>
+                              <a:rPr lang="en-US" sz="2200" b="0" i="1" smtClean="0">
+                                <a:solidFill>
+                                  <a:schemeClr val="bg2">
+                                    <a:lumMod val="25000"/>
+                                  </a:schemeClr>
+                                </a:solidFill>
+                                <a:latin typeface="Cambria Math" panose="02040503050406030204" pitchFamily="18" charset="0"/>
+                              </a:rPr>
+                            </m:ctrlPr>
+                          </m:sSubPr>
+                          <m:e>
+                            <m:r>
+                              <a:rPr lang="en-US" sz="2200" b="0" i="1" smtClean="0">
+                                <a:solidFill>
+                                  <a:schemeClr val="bg2">
+                                    <a:lumMod val="25000"/>
+                                  </a:schemeClr>
+                                </a:solidFill>
+                                <a:latin typeface="Cambria Math" panose="02040503050406030204" pitchFamily="18" charset="0"/>
+                              </a:rPr>
+                              <m:t>𝜆</m:t>
+                            </m:r>
+                          </m:e>
+                          <m:sub>
+                            <m:r>
+                              <a:rPr lang="en-US" sz="2200" b="0" i="1" smtClean="0">
+                                <a:solidFill>
+                                  <a:schemeClr val="bg2">
+                                    <a:lumMod val="25000"/>
+                                  </a:schemeClr>
+                                </a:solidFill>
+                                <a:latin typeface="Cambria Math" panose="02040503050406030204" pitchFamily="18" charset="0"/>
+                              </a:rPr>
+                              <m:t>𝑖</m:t>
+                            </m:r>
+                          </m:sub>
+                        </m:sSub>
+                        <m:r>
+                          <a:rPr lang="en-US" sz="2200" b="0" i="1" smtClean="0">
+                            <a:solidFill>
+                              <a:schemeClr val="bg2">
+                                <a:lumMod val="25000"/>
+                              </a:schemeClr>
+                            </a:solidFill>
+                            <a:latin typeface="Cambria Math" panose="02040503050406030204" pitchFamily="18" charset="0"/>
+                          </a:rPr>
+                          <m:t>)</m:t>
+                        </m:r>
+                      </m:oMath>
+                    </m:oMathPara>
+                  </a14:m>
+                  <a:endParaRPr lang="en-US" sz="2200" b="0" dirty="0">
+                    <a:solidFill>
+                      <a:schemeClr val="bg2">
+                        <a:lumMod val="25000"/>
+                      </a:schemeClr>
+                    </a:solidFill>
+                  </a:endParaRPr>
+                </a:p>
+              </p:txBody>
+            </p:sp>
+          </mc:Choice>
+          <mc:Fallback>
+            <p:sp>
+              <p:nvSpPr>
+                <p:cNvPr id="18" name="TextBox 17">
+                  <a:extLst>
+                    <a:ext uri="{FF2B5EF4-FFF2-40B4-BE49-F238E27FC236}">
+                      <a16:creationId xmlns:a16="http://schemas.microsoft.com/office/drawing/2014/main" id="{8B3F84EB-EAB0-4FDB-B0F8-0D53F47A325E}"/>
+                    </a:ext>
+                  </a:extLst>
+                </p:cNvPr>
+                <p:cNvSpPr txBox="1">
+                  <a:spLocks noRot="1" noChangeAspect="1" noMove="1" noResize="1" noEditPoints="1" noAdjustHandles="1" noChangeArrowheads="1" noChangeShapeType="1" noTextEdit="1"/>
+                </p:cNvSpPr>
+                <p:nvPr/>
+              </p:nvSpPr>
+              <p:spPr>
+                <a:xfrm>
+                  <a:off x="5113302" y="5154374"/>
+                  <a:ext cx="1618264" cy="371640"/>
+                </a:xfrm>
+                <a:prstGeom prst="rect">
+                  <a:avLst/>
+                </a:prstGeom>
+                <a:blipFill>
+                  <a:blip r:embed="rId7"/>
+                  <a:stretch>
+                    <a:fillRect l="-3906" t="-6897" r="-7031" b="-41379"/>
+                  </a:stretch>
+                </a:blipFill>
+              </p:spPr>
+              <p:txBody>
+                <a:bodyPr/>
+                <a:lstStyle/>
+                <a:p>
+                  <a:r>
+                    <a:rPr lang="en-US">
+                      <a:noFill/>
+                    </a:rPr>
+                    <a:t> </a:t>
+                  </a:r>
+                </a:p>
+              </p:txBody>
+            </p:sp>
+          </mc:Fallback>
+        </mc:AlternateContent>
+        <p:sp>
+          <p:nvSpPr>
+            <p:cNvPr id="19" name="TextBox 18">
+              <a:extLst>
+                <a:ext uri="{FF2B5EF4-FFF2-40B4-BE49-F238E27FC236}">
+                  <a16:creationId xmlns:a16="http://schemas.microsoft.com/office/drawing/2014/main" id="{75EDB5F0-0E1B-D224-717C-82A056C8CEAF}"/>
+                </a:ext>
+              </a:extLst>
+            </p:cNvPr>
+            <p:cNvSpPr txBox="1"/>
+            <p:nvPr/>
+          </p:nvSpPr>
+          <p:spPr>
+            <a:xfrm>
+              <a:off x="4533901" y="2083747"/>
+              <a:ext cx="2777067" cy="400110"/>
+            </a:xfrm>
+            <a:prstGeom prst="rect">
+              <a:avLst/>
+            </a:prstGeom>
+            <a:noFill/>
+          </p:spPr>
+          <p:txBody>
+            <a:bodyPr wrap="square" rtlCol="0">
+              <a:spAutoFit/>
+            </a:bodyPr>
+            <a:lstStyle/>
+            <a:p>
+              <a:pPr algn="ctr"/>
+              <a:r>
+                <a:rPr lang="en-US" sz="2000" b="1" dirty="0" err="1">
+                  <a:solidFill>
+                    <a:schemeClr val="tx1">
+                      <a:lumMod val="85000"/>
+                      <a:lumOff val="15000"/>
+                    </a:schemeClr>
+                  </a:solidFill>
+                </a:rPr>
+                <a:t>Parte</a:t>
+              </a:r>
+              <a:r>
+                <a:rPr lang="en-US" sz="2000" b="1" dirty="0">
+                  <a:solidFill>
+                    <a:schemeClr val="tx1">
+                      <a:lumMod val="85000"/>
+                      <a:lumOff val="15000"/>
+                    </a:schemeClr>
+                  </a:solidFill>
+                </a:rPr>
+                <a:t> </a:t>
+              </a:r>
+              <a:r>
+                <a:rPr lang="en-US" sz="2000" b="1" dirty="0" err="1">
+                  <a:solidFill>
+                    <a:schemeClr val="tx1">
+                      <a:lumMod val="85000"/>
+                      <a:lumOff val="15000"/>
+                    </a:schemeClr>
+                  </a:solidFill>
+                </a:rPr>
+                <a:t>estocástica</a:t>
+              </a:r>
+              <a:endParaRPr lang="en-US" sz="2000" b="1" dirty="0">
+                <a:solidFill>
+                  <a:schemeClr val="tx1">
+                    <a:lumMod val="85000"/>
+                    <a:lumOff val="15000"/>
+                  </a:schemeClr>
+                </a:solidFill>
+              </a:endParaRPr>
+            </a:p>
+          </p:txBody>
+        </p:sp>
+        <p:sp>
+          <p:nvSpPr>
+            <p:cNvPr id="20" name="TextBox 19">
+              <a:extLst>
+                <a:ext uri="{FF2B5EF4-FFF2-40B4-BE49-F238E27FC236}">
+                  <a16:creationId xmlns:a16="http://schemas.microsoft.com/office/drawing/2014/main" id="{C4599016-5625-BEC0-8109-4C43C857BB19}"/>
+                </a:ext>
+              </a:extLst>
+            </p:cNvPr>
+            <p:cNvSpPr txBox="1"/>
+            <p:nvPr/>
+          </p:nvSpPr>
+          <p:spPr>
+            <a:xfrm>
+              <a:off x="4572160" y="3463238"/>
+              <a:ext cx="2777067" cy="400110"/>
+            </a:xfrm>
+            <a:prstGeom prst="rect">
+              <a:avLst/>
+            </a:prstGeom>
+            <a:noFill/>
+          </p:spPr>
+          <p:txBody>
+            <a:bodyPr wrap="square" rtlCol="0">
+              <a:spAutoFit/>
+            </a:bodyPr>
+            <a:lstStyle/>
+            <a:p>
+              <a:pPr algn="ctr"/>
+              <a:r>
+                <a:rPr lang="en-US" sz="2000" b="1" dirty="0" err="1">
+                  <a:solidFill>
+                    <a:schemeClr val="tx1">
+                      <a:lumMod val="85000"/>
+                      <a:lumOff val="15000"/>
+                    </a:schemeClr>
+                  </a:solidFill>
+                </a:rPr>
+                <a:t>Parte</a:t>
+              </a:r>
+              <a:r>
+                <a:rPr lang="en-US" sz="2000" b="1" dirty="0">
+                  <a:solidFill>
+                    <a:schemeClr val="tx1">
+                      <a:lumMod val="85000"/>
+                      <a:lumOff val="15000"/>
+                    </a:schemeClr>
+                  </a:solidFill>
+                </a:rPr>
+                <a:t> </a:t>
+              </a:r>
+              <a:r>
+                <a:rPr lang="en-US" sz="2000" b="1" dirty="0" err="1">
+                  <a:solidFill>
+                    <a:schemeClr val="tx1">
+                      <a:lumMod val="85000"/>
+                      <a:lumOff val="15000"/>
+                    </a:schemeClr>
+                  </a:solidFill>
+                </a:rPr>
+                <a:t>determinística</a:t>
+              </a:r>
+              <a:endParaRPr lang="en-US" sz="2000" b="1" dirty="0">
+                <a:solidFill>
+                  <a:schemeClr val="tx1">
+                    <a:lumMod val="85000"/>
+                    <a:lumOff val="15000"/>
+                  </a:schemeClr>
+                </a:solidFill>
+              </a:endParaRPr>
+            </a:p>
+          </p:txBody>
+        </p:sp>
+        <p:sp>
+          <p:nvSpPr>
+            <p:cNvPr id="21" name="TextBox 20">
+              <a:extLst>
+                <a:ext uri="{FF2B5EF4-FFF2-40B4-BE49-F238E27FC236}">
+                  <a16:creationId xmlns:a16="http://schemas.microsoft.com/office/drawing/2014/main" id="{D3D39D18-F239-752D-F61F-7069BE45694C}"/>
+                </a:ext>
+              </a:extLst>
+            </p:cNvPr>
+            <p:cNvSpPr txBox="1"/>
+            <p:nvPr/>
+          </p:nvSpPr>
+          <p:spPr>
+            <a:xfrm>
+              <a:off x="4494509" y="4720398"/>
+              <a:ext cx="2777067" cy="400110"/>
+            </a:xfrm>
+            <a:prstGeom prst="rect">
+              <a:avLst/>
+            </a:prstGeom>
+            <a:noFill/>
+          </p:spPr>
+          <p:txBody>
+            <a:bodyPr wrap="square" rtlCol="0">
+              <a:spAutoFit/>
+            </a:bodyPr>
+            <a:lstStyle/>
+            <a:p>
+              <a:pPr algn="ctr"/>
+              <a:r>
+                <a:rPr lang="en-US" sz="2000" b="1" dirty="0" err="1">
+                  <a:solidFill>
+                    <a:schemeClr val="tx1">
+                      <a:lumMod val="85000"/>
+                      <a:lumOff val="15000"/>
+                    </a:schemeClr>
+                  </a:solidFill>
+                </a:rPr>
+                <a:t>Função</a:t>
+              </a:r>
+              <a:r>
+                <a:rPr lang="en-US" sz="2000" b="1" dirty="0">
+                  <a:solidFill>
+                    <a:schemeClr val="tx1">
+                      <a:lumMod val="85000"/>
+                      <a:lumOff val="15000"/>
+                    </a:schemeClr>
+                  </a:solidFill>
+                </a:rPr>
+                <a:t> de </a:t>
+              </a:r>
+              <a:r>
+                <a:rPr lang="en-US" sz="2000" b="1" dirty="0" err="1">
+                  <a:solidFill>
+                    <a:schemeClr val="tx1">
+                      <a:lumMod val="85000"/>
+                      <a:lumOff val="15000"/>
+                    </a:schemeClr>
+                  </a:solidFill>
+                </a:rPr>
+                <a:t>ligação</a:t>
+              </a:r>
+              <a:endParaRPr lang="en-US" sz="2000" b="1" dirty="0">
+                <a:solidFill>
+                  <a:schemeClr val="tx1">
+                    <a:lumMod val="85000"/>
+                    <a:lumOff val="15000"/>
+                  </a:schemeClr>
+                </a:solidFill>
+              </a:endParaRPr>
+            </a:p>
+          </p:txBody>
+        </p:sp>
+        <p:sp>
+          <p:nvSpPr>
+            <p:cNvPr id="22" name="Rectangle 21">
+              <a:extLst>
+                <a:ext uri="{FF2B5EF4-FFF2-40B4-BE49-F238E27FC236}">
+                  <a16:creationId xmlns:a16="http://schemas.microsoft.com/office/drawing/2014/main" id="{FF6157BC-9CC0-C162-593D-CB5055334B17}"/>
+                </a:ext>
+              </a:extLst>
+            </p:cNvPr>
+            <p:cNvSpPr/>
+            <p:nvPr/>
+          </p:nvSpPr>
+          <p:spPr>
+            <a:xfrm>
+              <a:off x="8441699" y="1854159"/>
+              <a:ext cx="3441272" cy="3927589"/>
+            </a:xfrm>
+            <a:custGeom>
+              <a:avLst/>
+              <a:gdLst>
+                <a:gd name="csX0" fmla="*/ 0 w 3441272"/>
+                <a:gd name="csY0" fmla="*/ 0 h 3927589"/>
+                <a:gd name="csX1" fmla="*/ 757080 w 3441272"/>
+                <a:gd name="csY1" fmla="*/ 0 h 3927589"/>
+                <a:gd name="csX2" fmla="*/ 1479747 w 3441272"/>
+                <a:gd name="csY2" fmla="*/ 0 h 3927589"/>
+                <a:gd name="csX3" fmla="*/ 2168001 w 3441272"/>
+                <a:gd name="csY3" fmla="*/ 0 h 3927589"/>
+                <a:gd name="csX4" fmla="*/ 3441272 w 3441272"/>
+                <a:gd name="csY4" fmla="*/ 0 h 3927589"/>
+                <a:gd name="csX5" fmla="*/ 3441272 w 3441272"/>
+                <a:gd name="csY5" fmla="*/ 733150 h 3927589"/>
+                <a:gd name="csX6" fmla="*/ 3441272 w 3441272"/>
+                <a:gd name="csY6" fmla="*/ 1427024 h 3927589"/>
+                <a:gd name="csX7" fmla="*/ 3441272 w 3441272"/>
+                <a:gd name="csY7" fmla="*/ 2003070 h 3927589"/>
+                <a:gd name="csX8" fmla="*/ 3441272 w 3441272"/>
+                <a:gd name="csY8" fmla="*/ 2696944 h 3927589"/>
+                <a:gd name="csX9" fmla="*/ 3441272 w 3441272"/>
+                <a:gd name="csY9" fmla="*/ 3233715 h 3927589"/>
+                <a:gd name="csX10" fmla="*/ 3441272 w 3441272"/>
+                <a:gd name="csY10" fmla="*/ 3927589 h 3927589"/>
+                <a:gd name="csX11" fmla="*/ 2821843 w 3441272"/>
+                <a:gd name="csY11" fmla="*/ 3927589 h 3927589"/>
+                <a:gd name="csX12" fmla="*/ 2064763 w 3441272"/>
+                <a:gd name="csY12" fmla="*/ 3927589 h 3927589"/>
+                <a:gd name="csX13" fmla="*/ 1410922 w 3441272"/>
+                <a:gd name="csY13" fmla="*/ 3927589 h 3927589"/>
+                <a:gd name="csX14" fmla="*/ 653842 w 3441272"/>
+                <a:gd name="csY14" fmla="*/ 3927589 h 3927589"/>
+                <a:gd name="csX15" fmla="*/ 0 w 3441272"/>
+                <a:gd name="csY15" fmla="*/ 3927589 h 3927589"/>
+                <a:gd name="csX16" fmla="*/ 0 w 3441272"/>
+                <a:gd name="csY16" fmla="*/ 3390819 h 3927589"/>
+                <a:gd name="csX17" fmla="*/ 0 w 3441272"/>
+                <a:gd name="csY17" fmla="*/ 2696944 h 3927589"/>
+                <a:gd name="csX18" fmla="*/ 0 w 3441272"/>
+                <a:gd name="csY18" fmla="*/ 2160174 h 3927589"/>
+                <a:gd name="csX19" fmla="*/ 0 w 3441272"/>
+                <a:gd name="csY19" fmla="*/ 1623403 h 3927589"/>
+                <a:gd name="csX20" fmla="*/ 0 w 3441272"/>
+                <a:gd name="csY20" fmla="*/ 890254 h 3927589"/>
+                <a:gd name="csX21" fmla="*/ 0 w 3441272"/>
+                <a:gd name="csY21" fmla="*/ 0 h 3927589"/>
+              </a:gdLst>
+              <a:ahLst/>
+              <a:cxnLst>
+                <a:cxn ang="0">
+                  <a:pos x="csX0" y="csY0"/>
+                </a:cxn>
+                <a:cxn ang="0">
+                  <a:pos x="csX1" y="csY1"/>
+                </a:cxn>
+                <a:cxn ang="0">
+                  <a:pos x="csX2" y="csY2"/>
+                </a:cxn>
+                <a:cxn ang="0">
+                  <a:pos x="csX3" y="csY3"/>
+                </a:cxn>
+                <a:cxn ang="0">
+                  <a:pos x="csX4" y="csY4"/>
+                </a:cxn>
+                <a:cxn ang="0">
+                  <a:pos x="csX5" y="csY5"/>
+                </a:cxn>
+                <a:cxn ang="0">
+                  <a:pos x="csX6" y="csY6"/>
+                </a:cxn>
+                <a:cxn ang="0">
+                  <a:pos x="csX7" y="csY7"/>
+                </a:cxn>
+                <a:cxn ang="0">
+                  <a:pos x="csX8" y="csY8"/>
+                </a:cxn>
+                <a:cxn ang="0">
+                  <a:pos x="csX9" y="csY9"/>
+                </a:cxn>
+                <a:cxn ang="0">
+                  <a:pos x="csX10" y="csY10"/>
+                </a:cxn>
+                <a:cxn ang="0">
+                  <a:pos x="csX11" y="csY11"/>
+                </a:cxn>
+                <a:cxn ang="0">
+                  <a:pos x="csX12" y="csY12"/>
+                </a:cxn>
+                <a:cxn ang="0">
+                  <a:pos x="csX13" y="csY13"/>
+                </a:cxn>
+                <a:cxn ang="0">
+                  <a:pos x="csX14" y="csY14"/>
+                </a:cxn>
+                <a:cxn ang="0">
+                  <a:pos x="csX15" y="csY15"/>
+                </a:cxn>
+                <a:cxn ang="0">
+                  <a:pos x="csX16" y="csY16"/>
+                </a:cxn>
+                <a:cxn ang="0">
+                  <a:pos x="csX17" y="csY17"/>
+                </a:cxn>
+                <a:cxn ang="0">
+                  <a:pos x="csX18" y="csY18"/>
+                </a:cxn>
+                <a:cxn ang="0">
+                  <a:pos x="csX19" y="csY19"/>
+                </a:cxn>
+                <a:cxn ang="0">
+                  <a:pos x="csX20" y="csY20"/>
+                </a:cxn>
+                <a:cxn ang="0">
+                  <a:pos x="csX21" y="csY21"/>
+                </a:cxn>
+              </a:cxnLst>
+              <a:rect l="l" t="t" r="r" b="b"/>
+              <a:pathLst>
+                <a:path w="3441272" h="3927589" fill="none" extrusionOk="0">
+                  <a:moveTo>
+                    <a:pt x="0" y="0"/>
+                  </a:moveTo>
+                  <a:cubicBezTo>
+                    <a:pt x="280613" y="-20693"/>
+                    <a:pt x="444858" y="-34149"/>
+                    <a:pt x="757080" y="0"/>
+                  </a:cubicBezTo>
+                  <a:cubicBezTo>
+                    <a:pt x="1069302" y="34149"/>
+                    <a:pt x="1266919" y="34743"/>
+                    <a:pt x="1479747" y="0"/>
+                  </a:cubicBezTo>
+                  <a:cubicBezTo>
+                    <a:pt x="1692575" y="-34743"/>
+                    <a:pt x="1952416" y="31297"/>
+                    <a:pt x="2168001" y="0"/>
+                  </a:cubicBezTo>
+                  <a:cubicBezTo>
+                    <a:pt x="2383586" y="-31297"/>
+                    <a:pt x="2905197" y="-55431"/>
+                    <a:pt x="3441272" y="0"/>
+                  </a:cubicBezTo>
+                  <a:cubicBezTo>
+                    <a:pt x="3406908" y="297016"/>
+                    <a:pt x="3454541" y="420619"/>
+                    <a:pt x="3441272" y="733150"/>
+                  </a:cubicBezTo>
+                  <a:cubicBezTo>
+                    <a:pt x="3428004" y="1045681"/>
+                    <a:pt x="3420090" y="1211603"/>
+                    <a:pt x="3441272" y="1427024"/>
+                  </a:cubicBezTo>
+                  <a:cubicBezTo>
+                    <a:pt x="3462454" y="1642445"/>
+                    <a:pt x="3424755" y="1788387"/>
+                    <a:pt x="3441272" y="2003070"/>
+                  </a:cubicBezTo>
+                  <a:cubicBezTo>
+                    <a:pt x="3457789" y="2217753"/>
+                    <a:pt x="3420340" y="2535380"/>
+                    <a:pt x="3441272" y="2696944"/>
+                  </a:cubicBezTo>
+                  <a:cubicBezTo>
+                    <a:pt x="3462204" y="2858508"/>
+                    <a:pt x="3451218" y="2989624"/>
+                    <a:pt x="3441272" y="3233715"/>
+                  </a:cubicBezTo>
+                  <a:cubicBezTo>
+                    <a:pt x="3431326" y="3477806"/>
+                    <a:pt x="3441574" y="3658449"/>
+                    <a:pt x="3441272" y="3927589"/>
+                  </a:cubicBezTo>
+                  <a:cubicBezTo>
+                    <a:pt x="3279005" y="3938243"/>
+                    <a:pt x="3107631" y="3918142"/>
+                    <a:pt x="2821843" y="3927589"/>
+                  </a:cubicBezTo>
+                  <a:cubicBezTo>
+                    <a:pt x="2536055" y="3937036"/>
+                    <a:pt x="2262249" y="3899282"/>
+                    <a:pt x="2064763" y="3927589"/>
+                  </a:cubicBezTo>
+                  <a:cubicBezTo>
+                    <a:pt x="1867277" y="3955896"/>
+                    <a:pt x="1641715" y="3905217"/>
+                    <a:pt x="1410922" y="3927589"/>
+                  </a:cubicBezTo>
+                  <a:cubicBezTo>
+                    <a:pt x="1180129" y="3949961"/>
+                    <a:pt x="932581" y="3911199"/>
+                    <a:pt x="653842" y="3927589"/>
+                  </a:cubicBezTo>
+                  <a:cubicBezTo>
+                    <a:pt x="375103" y="3943979"/>
+                    <a:pt x="174395" y="3912300"/>
+                    <a:pt x="0" y="3927589"/>
+                  </a:cubicBezTo>
+                  <a:cubicBezTo>
+                    <a:pt x="-7717" y="3665960"/>
+                    <a:pt x="26538" y="3612442"/>
+                    <a:pt x="0" y="3390819"/>
+                  </a:cubicBezTo>
+                  <a:cubicBezTo>
+                    <a:pt x="-26538" y="3169196"/>
+                    <a:pt x="23134" y="3038651"/>
+                    <a:pt x="0" y="2696944"/>
+                  </a:cubicBezTo>
+                  <a:cubicBezTo>
+                    <a:pt x="-23134" y="2355237"/>
+                    <a:pt x="-11433" y="2302087"/>
+                    <a:pt x="0" y="2160174"/>
+                  </a:cubicBezTo>
+                  <a:cubicBezTo>
+                    <a:pt x="11433" y="2018261"/>
+                    <a:pt x="-1546" y="1767255"/>
+                    <a:pt x="0" y="1623403"/>
+                  </a:cubicBezTo>
+                  <a:cubicBezTo>
+                    <a:pt x="1546" y="1479551"/>
+                    <a:pt x="387" y="1117109"/>
+                    <a:pt x="0" y="890254"/>
+                  </a:cubicBezTo>
+                  <a:cubicBezTo>
+                    <a:pt x="-387" y="663399"/>
+                    <a:pt x="7988" y="198223"/>
+                    <a:pt x="0" y="0"/>
+                  </a:cubicBezTo>
+                  <a:close/>
+                </a:path>
+                <a:path w="3441272" h="3927589" stroke="0" extrusionOk="0">
+                  <a:moveTo>
+                    <a:pt x="0" y="0"/>
+                  </a:moveTo>
+                  <a:cubicBezTo>
+                    <a:pt x="146364" y="-23341"/>
+                    <a:pt x="405733" y="15449"/>
+                    <a:pt x="653842" y="0"/>
+                  </a:cubicBezTo>
+                  <a:cubicBezTo>
+                    <a:pt x="901951" y="-15449"/>
+                    <a:pt x="1110618" y="27320"/>
+                    <a:pt x="1238858" y="0"/>
+                  </a:cubicBezTo>
+                  <a:cubicBezTo>
+                    <a:pt x="1367098" y="-27320"/>
+                    <a:pt x="1737423" y="24431"/>
+                    <a:pt x="1995938" y="0"/>
+                  </a:cubicBezTo>
+                  <a:cubicBezTo>
+                    <a:pt x="2254453" y="-24431"/>
+                    <a:pt x="2359857" y="-487"/>
+                    <a:pt x="2649779" y="0"/>
+                  </a:cubicBezTo>
+                  <a:cubicBezTo>
+                    <a:pt x="2939701" y="487"/>
+                    <a:pt x="3155327" y="21406"/>
+                    <a:pt x="3441272" y="0"/>
+                  </a:cubicBezTo>
+                  <a:cubicBezTo>
+                    <a:pt x="3464004" y="359526"/>
+                    <a:pt x="3411509" y="481154"/>
+                    <a:pt x="3441272" y="733150"/>
+                  </a:cubicBezTo>
+                  <a:cubicBezTo>
+                    <a:pt x="3471036" y="985146"/>
+                    <a:pt x="3442313" y="1125532"/>
+                    <a:pt x="3441272" y="1387748"/>
+                  </a:cubicBezTo>
+                  <a:cubicBezTo>
+                    <a:pt x="3440231" y="1649964"/>
+                    <a:pt x="3408598" y="1787482"/>
+                    <a:pt x="3441272" y="2042346"/>
+                  </a:cubicBezTo>
+                  <a:cubicBezTo>
+                    <a:pt x="3473946" y="2297210"/>
+                    <a:pt x="3412690" y="2471246"/>
+                    <a:pt x="3441272" y="2618393"/>
+                  </a:cubicBezTo>
+                  <a:cubicBezTo>
+                    <a:pt x="3469854" y="2765540"/>
+                    <a:pt x="3460967" y="2911244"/>
+                    <a:pt x="3441272" y="3194439"/>
+                  </a:cubicBezTo>
+                  <a:cubicBezTo>
+                    <a:pt x="3421577" y="3477634"/>
+                    <a:pt x="3455594" y="3745314"/>
+                    <a:pt x="3441272" y="3927589"/>
+                  </a:cubicBezTo>
+                  <a:cubicBezTo>
+                    <a:pt x="3133311" y="3957498"/>
+                    <a:pt x="2913075" y="3935429"/>
+                    <a:pt x="2718605" y="3927589"/>
+                  </a:cubicBezTo>
+                  <a:cubicBezTo>
+                    <a:pt x="2524135" y="3919749"/>
+                    <a:pt x="2138320" y="3962231"/>
+                    <a:pt x="1961525" y="3927589"/>
+                  </a:cubicBezTo>
+                  <a:cubicBezTo>
+                    <a:pt x="1784730" y="3892947"/>
+                    <a:pt x="1503436" y="3953186"/>
+                    <a:pt x="1204445" y="3927589"/>
+                  </a:cubicBezTo>
+                  <a:cubicBezTo>
+                    <a:pt x="905454" y="3901992"/>
+                    <a:pt x="550974" y="3919536"/>
+                    <a:pt x="0" y="3927589"/>
+                  </a:cubicBezTo>
+                  <a:cubicBezTo>
+                    <a:pt x="-32406" y="3709136"/>
+                    <a:pt x="-18472" y="3474623"/>
+                    <a:pt x="0" y="3272991"/>
+                  </a:cubicBezTo>
+                  <a:cubicBezTo>
+                    <a:pt x="18472" y="3071359"/>
+                    <a:pt x="15353" y="2933680"/>
+                    <a:pt x="0" y="2657669"/>
+                  </a:cubicBezTo>
+                  <a:cubicBezTo>
+                    <a:pt x="-15353" y="2381658"/>
+                    <a:pt x="1327" y="2286880"/>
+                    <a:pt x="0" y="2120898"/>
+                  </a:cubicBezTo>
+                  <a:cubicBezTo>
+                    <a:pt x="-1327" y="1954916"/>
+                    <a:pt x="-10216" y="1798661"/>
+                    <a:pt x="0" y="1544852"/>
+                  </a:cubicBezTo>
+                  <a:cubicBezTo>
+                    <a:pt x="10216" y="1291043"/>
+                    <a:pt x="8637" y="1151766"/>
+                    <a:pt x="0" y="968805"/>
+                  </a:cubicBezTo>
+                  <a:cubicBezTo>
+                    <a:pt x="-8637" y="785844"/>
+                    <a:pt x="13936" y="357038"/>
+                    <a:pt x="0" y="0"/>
+                  </a:cubicBezTo>
+                  <a:close/>
+                </a:path>
+              </a:pathLst>
+            </a:custGeom>
+            <a:solidFill>
+              <a:srgbClr val="467C9D">
+                <a:alpha val="34902"/>
+              </a:srgbClr>
+            </a:solidFill>
+            <a:ln>
+              <a:solidFill>
+                <a:srgbClr val="467C9D"/>
+              </a:solidFill>
+              <a:extLst>
+                <a:ext uri="{C807C97D-BFC1-408E-A445-0C87EB9F89A2}">
+                  <ask:lineSketchStyleProps xmlns:ask="http://schemas.microsoft.com/office/drawing/2018/sketchyshapes" sd="1219033472">
+                    <a:prstGeom prst="rect">
+                      <a:avLst/>
+                    </a:prstGeom>
+                    <ask:type>
+                      <ask:lineSketchFreehand/>
+                    </ask:type>
+                  </ask:lineSketchStyleProps>
+                </a:ext>
+              </a:extLst>
+            </a:ln>
+          </p:spPr>
+          <p:style>
+            <a:lnRef idx="2">
+              <a:schemeClr val="accent1">
+                <a:shade val="15000"/>
+              </a:schemeClr>
+            </a:lnRef>
+            <a:fillRef idx="1">
+              <a:schemeClr val="accent1"/>
+            </a:fillRef>
+            <a:effectRef idx="0">
+              <a:schemeClr val="accent1"/>
+            </a:effectRef>
+            <a:fontRef idx="minor">
+              <a:schemeClr val="lt1"/>
+            </a:fontRef>
+          </p:style>
+          <p:txBody>
+            <a:bodyPr rtlCol="0" anchor="ctr"/>
+            <a:lstStyle/>
+            <a:p>
+              <a:pPr algn="ctr"/>
+              <a:endParaRPr lang="en-US"/>
+            </a:p>
+          </p:txBody>
+        </p:sp>
+        <mc:AlternateContent xmlns:mc="http://schemas.openxmlformats.org/markup-compatibility/2006">
+          <mc:Choice xmlns:a14="http://schemas.microsoft.com/office/drawing/2010/main" Requires="a14">
+            <p:sp>
+              <p:nvSpPr>
+                <p:cNvPr id="23" name="TextBox 22">
+                  <a:extLst>
+                    <a:ext uri="{FF2B5EF4-FFF2-40B4-BE49-F238E27FC236}">
+                      <a16:creationId xmlns:a16="http://schemas.microsoft.com/office/drawing/2014/main" id="{B4F284ED-1763-E996-707C-F4FB0EFA1243}"/>
+                    </a:ext>
+                  </a:extLst>
+                </p:cNvPr>
+                <p:cNvSpPr txBox="1"/>
+                <p:nvPr/>
+              </p:nvSpPr>
+              <p:spPr>
+                <a:xfrm>
+                  <a:off x="8977352" y="2614952"/>
+                  <a:ext cx="2560381" cy="338554"/>
+                </a:xfrm>
+                <a:prstGeom prst="rect">
+                  <a:avLst/>
+                </a:prstGeom>
+                <a:noFill/>
+              </p:spPr>
+              <p:txBody>
+                <a:bodyPr wrap="none" lIns="0" tIns="0" rIns="0" bIns="0" rtlCol="0">
+                  <a:spAutoFit/>
+                </a:bodyPr>
+                <a:lstStyle/>
+                <a:p>
+                  <a:pPr/>
+                  <a14:m>
+                    <m:oMathPara xmlns:m="http://schemas.openxmlformats.org/officeDocument/2006/math">
+                      <m:oMathParaPr>
+                        <m:jc m:val="centerGroup"/>
+                      </m:oMathParaPr>
+                      <m:oMath xmlns:m="http://schemas.openxmlformats.org/officeDocument/2006/math">
+                        <m:sSub>
+                          <m:sSubPr>
+                            <m:ctrlPr>
+                              <a:rPr lang="en-US" sz="2200" i="1" smtClean="0">
+                                <a:solidFill>
+                                  <a:schemeClr val="bg2">
+                                    <a:lumMod val="25000"/>
+                                  </a:schemeClr>
+                                </a:solidFill>
+                                <a:latin typeface="Cambria Math" panose="02040503050406030204" pitchFamily="18" charset="0"/>
+                              </a:rPr>
+                            </m:ctrlPr>
+                          </m:sSubPr>
+                          <m:e>
+                            <m:r>
+                              <a:rPr lang="en-US" sz="2200" b="0" i="1" smtClean="0">
+                                <a:solidFill>
+                                  <a:schemeClr val="bg2">
+                                    <a:lumMod val="25000"/>
+                                  </a:schemeClr>
+                                </a:solidFill>
+                                <a:latin typeface="Cambria Math" panose="02040503050406030204" pitchFamily="18" charset="0"/>
+                              </a:rPr>
+                              <m:t>𝑌</m:t>
+                            </m:r>
+                          </m:e>
+                          <m:sub>
+                            <m:r>
+                              <a:rPr lang="en-US" sz="2200" b="0" i="1" smtClean="0">
+                                <a:solidFill>
+                                  <a:schemeClr val="bg2">
+                                    <a:lumMod val="25000"/>
+                                  </a:schemeClr>
+                                </a:solidFill>
+                                <a:latin typeface="Cambria Math" panose="02040503050406030204" pitchFamily="18" charset="0"/>
+                              </a:rPr>
+                              <m:t>𝑖</m:t>
+                            </m:r>
+                          </m:sub>
+                        </m:sSub>
+                        <m:r>
+                          <a:rPr lang="en-US" sz="2200" b="0" i="1" smtClean="0">
+                            <a:solidFill>
+                              <a:schemeClr val="bg2">
+                                <a:lumMod val="25000"/>
+                              </a:schemeClr>
+                            </a:solidFill>
+                            <a:latin typeface="Cambria Math" panose="02040503050406030204" pitchFamily="18" charset="0"/>
+                          </a:rPr>
+                          <m:t> ~ </m:t>
+                        </m:r>
+                        <m:r>
+                          <a:rPr lang="en-US" sz="2200" b="0" i="1" smtClean="0">
+                            <a:solidFill>
+                              <a:schemeClr val="bg2">
+                                <a:lumMod val="25000"/>
+                              </a:schemeClr>
+                            </a:solidFill>
+                            <a:latin typeface="Cambria Math" panose="02040503050406030204" pitchFamily="18" charset="0"/>
+                          </a:rPr>
+                          <m:t>𝐵𝑖𝑛𝑜𝑚𝑖𝑎𝑙</m:t>
+                        </m:r>
+                        <m:d>
+                          <m:dPr>
+                            <m:ctrlPr>
+                              <a:rPr lang="en-US" sz="2200" b="0" i="1" smtClean="0">
+                                <a:solidFill>
+                                  <a:schemeClr val="bg2">
+                                    <a:lumMod val="25000"/>
+                                  </a:schemeClr>
+                                </a:solidFill>
+                                <a:latin typeface="Cambria Math" panose="02040503050406030204" pitchFamily="18" charset="0"/>
+                              </a:rPr>
+                            </m:ctrlPr>
+                          </m:dPr>
+                          <m:e>
+                            <m:sSub>
+                              <m:sSubPr>
+                                <m:ctrlPr>
+                                  <a:rPr lang="en-US" sz="2200" b="0" i="1" smtClean="0">
+                                    <a:solidFill>
+                                      <a:schemeClr val="bg2">
+                                        <a:lumMod val="25000"/>
+                                      </a:schemeClr>
+                                    </a:solidFill>
+                                    <a:latin typeface="Cambria Math" panose="02040503050406030204" pitchFamily="18" charset="0"/>
+                                  </a:rPr>
+                                </m:ctrlPr>
+                              </m:sSubPr>
+                              <m:e>
+                                <m:r>
+                                  <a:rPr lang="en-US" sz="2200" b="0" i="1" smtClean="0">
+                                    <a:solidFill>
+                                      <a:schemeClr val="bg2">
+                                        <a:lumMod val="25000"/>
+                                      </a:schemeClr>
+                                    </a:solidFill>
+                                    <a:latin typeface="Cambria Math" panose="02040503050406030204" pitchFamily="18" charset="0"/>
+                                  </a:rPr>
+                                  <m:t>𝑝</m:t>
+                                </m:r>
+                              </m:e>
+                              <m:sub>
+                                <m:r>
+                                  <a:rPr lang="en-US" sz="2200" b="0" i="1" smtClean="0">
+                                    <a:solidFill>
+                                      <a:schemeClr val="bg2">
+                                        <a:lumMod val="25000"/>
+                                      </a:schemeClr>
+                                    </a:solidFill>
+                                    <a:latin typeface="Cambria Math" panose="02040503050406030204" pitchFamily="18" charset="0"/>
+                                  </a:rPr>
+                                  <m:t>𝑖</m:t>
+                                </m:r>
+                              </m:sub>
+                            </m:sSub>
+                            <m:r>
+                              <a:rPr lang="en-US" sz="2200" b="0" i="1" smtClean="0">
+                                <a:solidFill>
+                                  <a:schemeClr val="bg2">
+                                    <a:lumMod val="25000"/>
+                                  </a:schemeClr>
+                                </a:solidFill>
+                                <a:latin typeface="Cambria Math" panose="02040503050406030204" pitchFamily="18" charset="0"/>
+                              </a:rPr>
+                              <m:t>, </m:t>
+                            </m:r>
+                            <m:r>
+                              <a:rPr lang="en-US" sz="2200" b="0" i="1" smtClean="0">
+                                <a:solidFill>
+                                  <a:schemeClr val="bg2">
+                                    <a:lumMod val="25000"/>
+                                  </a:schemeClr>
+                                </a:solidFill>
+                                <a:latin typeface="Cambria Math" panose="02040503050406030204" pitchFamily="18" charset="0"/>
+                              </a:rPr>
+                              <m:t>𝑁</m:t>
+                            </m:r>
+                          </m:e>
+                        </m:d>
+                      </m:oMath>
+                    </m:oMathPara>
+                  </a14:m>
+                  <a:endParaRPr lang="en-US" sz="2200" b="0" dirty="0">
+                    <a:solidFill>
+                      <a:schemeClr val="bg2">
+                        <a:lumMod val="25000"/>
+                      </a:schemeClr>
+                    </a:solidFill>
+                  </a:endParaRPr>
+                </a:p>
+              </p:txBody>
+            </p:sp>
+          </mc:Choice>
+          <mc:Fallback>
+            <p:sp>
+              <p:nvSpPr>
+                <p:cNvPr id="23" name="TextBox 22">
+                  <a:extLst>
+                    <a:ext uri="{FF2B5EF4-FFF2-40B4-BE49-F238E27FC236}">
+                      <a16:creationId xmlns:a16="http://schemas.microsoft.com/office/drawing/2014/main" id="{B4F284ED-1763-E996-707C-F4FB0EFA1243}"/>
+                    </a:ext>
+                  </a:extLst>
+                </p:cNvPr>
+                <p:cNvSpPr txBox="1">
+                  <a:spLocks noRot="1" noChangeAspect="1" noMove="1" noResize="1" noEditPoints="1" noAdjustHandles="1" noChangeArrowheads="1" noChangeShapeType="1" noTextEdit="1"/>
+                </p:cNvSpPr>
+                <p:nvPr/>
+              </p:nvSpPr>
+              <p:spPr>
+                <a:xfrm>
+                  <a:off x="8977352" y="2614952"/>
+                  <a:ext cx="2560381" cy="338554"/>
+                </a:xfrm>
+                <a:prstGeom prst="rect">
+                  <a:avLst/>
+                </a:prstGeom>
+                <a:blipFill>
+                  <a:blip r:embed="rId8"/>
+                  <a:stretch>
+                    <a:fillRect l="-2475" t="-7143" b="-32143"/>
+                  </a:stretch>
+                </a:blipFill>
+              </p:spPr>
+              <p:txBody>
+                <a:bodyPr/>
+                <a:lstStyle/>
+                <a:p>
+                  <a:r>
+                    <a:rPr lang="en-US">
+                      <a:noFill/>
+                    </a:rPr>
+                    <a:t> </a:t>
+                  </a:r>
+                </a:p>
+              </p:txBody>
+            </p:sp>
+          </mc:Fallback>
+        </mc:AlternateContent>
+        <mc:AlternateContent xmlns:mc="http://schemas.openxmlformats.org/markup-compatibility/2006">
+          <mc:Choice xmlns:a14="http://schemas.microsoft.com/office/drawing/2010/main" Requires="a14">
+            <p:sp>
+              <p:nvSpPr>
+                <p:cNvPr id="24" name="TextBox 23">
+                  <a:extLst>
+                    <a:ext uri="{FF2B5EF4-FFF2-40B4-BE49-F238E27FC236}">
+                      <a16:creationId xmlns:a16="http://schemas.microsoft.com/office/drawing/2014/main" id="{0719CD0C-0C2B-BF30-ACFF-F9E94DE516DE}"/>
+                    </a:ext>
+                  </a:extLst>
+                </p:cNvPr>
+                <p:cNvSpPr txBox="1"/>
+                <p:nvPr/>
+              </p:nvSpPr>
+              <p:spPr>
+                <a:xfrm>
+                  <a:off x="9182959" y="3905977"/>
+                  <a:ext cx="1861022" cy="338554"/>
+                </a:xfrm>
+                <a:prstGeom prst="rect">
+                  <a:avLst/>
+                </a:prstGeom>
+                <a:noFill/>
+              </p:spPr>
+              <p:txBody>
+                <a:bodyPr wrap="none" lIns="0" tIns="0" rIns="0" bIns="0" rtlCol="0">
+                  <a:spAutoFit/>
+                </a:bodyPr>
+                <a:lstStyle/>
+                <a:p>
+                  <a:pPr/>
+                  <a14:m>
+                    <m:oMathPara xmlns:m="http://schemas.openxmlformats.org/officeDocument/2006/math">
+                      <m:oMathParaPr>
+                        <m:jc m:val="centerGroup"/>
+                      </m:oMathParaPr>
+                      <m:oMath xmlns:m="http://schemas.openxmlformats.org/officeDocument/2006/math">
+                        <m:sSub>
+                          <m:sSubPr>
+                            <m:ctrlPr>
+                              <a:rPr lang="en-US" sz="2200" i="1" smtClean="0">
+                                <a:solidFill>
+                                  <a:schemeClr val="bg2">
+                                    <a:lumMod val="25000"/>
+                                  </a:schemeClr>
+                                </a:solidFill>
+                                <a:latin typeface="Cambria Math" panose="02040503050406030204" pitchFamily="18" charset="0"/>
+                              </a:rPr>
+                            </m:ctrlPr>
+                          </m:sSubPr>
+                          <m:e>
+                            <m:r>
+                              <a:rPr lang="en-US" sz="2200" i="1">
+                                <a:solidFill>
+                                  <a:schemeClr val="bg2">
+                                    <a:lumMod val="25000"/>
+                                  </a:schemeClr>
+                                </a:solidFill>
+                                <a:latin typeface="Cambria Math" panose="02040503050406030204" pitchFamily="18" charset="0"/>
+                              </a:rPr>
+                              <m:t>𝜂</m:t>
+                            </m:r>
+                          </m:e>
+                          <m:sub>
+                            <m:r>
+                              <a:rPr lang="en-US" sz="2200" i="1">
+                                <a:solidFill>
+                                  <a:schemeClr val="bg2">
+                                    <a:lumMod val="25000"/>
+                                  </a:schemeClr>
+                                </a:solidFill>
+                                <a:latin typeface="Cambria Math" panose="02040503050406030204" pitchFamily="18" charset="0"/>
+                              </a:rPr>
+                              <m:t>𝑖</m:t>
+                            </m:r>
+                          </m:sub>
+                        </m:sSub>
+                        <m:r>
+                          <a:rPr lang="en-US" sz="2200" b="0" i="1" smtClean="0">
+                            <a:solidFill>
+                              <a:schemeClr val="bg2">
+                                <a:lumMod val="25000"/>
+                              </a:schemeClr>
+                            </a:solidFill>
+                            <a:latin typeface="Cambria Math" panose="02040503050406030204" pitchFamily="18" charset="0"/>
+                          </a:rPr>
+                          <m:t>= </m:t>
+                        </m:r>
+                        <m:sSub>
+                          <m:sSubPr>
+                            <m:ctrlPr>
+                              <a:rPr lang="en-US" sz="2200" b="0" i="1" smtClean="0">
+                                <a:solidFill>
+                                  <a:schemeClr val="bg2">
+                                    <a:lumMod val="25000"/>
+                                  </a:schemeClr>
+                                </a:solidFill>
+                                <a:latin typeface="Cambria Math" panose="02040503050406030204" pitchFamily="18" charset="0"/>
+                              </a:rPr>
+                            </m:ctrlPr>
+                          </m:sSubPr>
+                          <m:e>
+                            <m:r>
+                              <a:rPr lang="en-US" sz="2200" b="0" i="1" smtClean="0">
+                                <a:solidFill>
+                                  <a:schemeClr val="bg2">
+                                    <a:lumMod val="25000"/>
+                                  </a:schemeClr>
+                                </a:solidFill>
+                                <a:latin typeface="Cambria Math" panose="02040503050406030204" pitchFamily="18" charset="0"/>
+                              </a:rPr>
+                              <m:t>𝛽</m:t>
+                            </m:r>
+                          </m:e>
+                          <m:sub>
+                            <m:r>
+                              <a:rPr lang="en-US" sz="2200" b="0" i="1" smtClean="0">
+                                <a:solidFill>
+                                  <a:schemeClr val="bg2">
+                                    <a:lumMod val="25000"/>
+                                  </a:schemeClr>
+                                </a:solidFill>
+                                <a:latin typeface="Cambria Math" panose="02040503050406030204" pitchFamily="18" charset="0"/>
+                              </a:rPr>
+                              <m:t>0</m:t>
+                            </m:r>
+                          </m:sub>
+                        </m:sSub>
+                        <m:r>
+                          <a:rPr lang="en-US" sz="2200" b="0" i="1" smtClean="0">
+                            <a:solidFill>
+                              <a:schemeClr val="bg2">
+                                <a:lumMod val="25000"/>
+                              </a:schemeClr>
+                            </a:solidFill>
+                            <a:latin typeface="Cambria Math" panose="02040503050406030204" pitchFamily="18" charset="0"/>
+                          </a:rPr>
+                          <m:t>+</m:t>
+                        </m:r>
+                        <m:sSub>
+                          <m:sSubPr>
+                            <m:ctrlPr>
+                              <a:rPr lang="en-US" sz="2200" b="0" i="1" smtClean="0">
+                                <a:solidFill>
+                                  <a:schemeClr val="bg2">
+                                    <a:lumMod val="25000"/>
+                                  </a:schemeClr>
+                                </a:solidFill>
+                                <a:latin typeface="Cambria Math" panose="02040503050406030204" pitchFamily="18" charset="0"/>
+                              </a:rPr>
+                            </m:ctrlPr>
+                          </m:sSubPr>
+                          <m:e>
+                            <m:r>
+                              <a:rPr lang="en-US" sz="2200" b="0" i="1" smtClean="0">
+                                <a:solidFill>
+                                  <a:schemeClr val="bg2">
+                                    <a:lumMod val="25000"/>
+                                  </a:schemeClr>
+                                </a:solidFill>
+                                <a:latin typeface="Cambria Math" panose="02040503050406030204" pitchFamily="18" charset="0"/>
+                              </a:rPr>
+                              <m:t>𝛽</m:t>
+                            </m:r>
+                          </m:e>
+                          <m:sub>
+                            <m:r>
+                              <a:rPr lang="en-US" sz="2200" b="0" i="1" smtClean="0">
+                                <a:solidFill>
+                                  <a:schemeClr val="bg2">
+                                    <a:lumMod val="25000"/>
+                                  </a:schemeClr>
+                                </a:solidFill>
+                                <a:latin typeface="Cambria Math" panose="02040503050406030204" pitchFamily="18" charset="0"/>
+                              </a:rPr>
+                              <m:t>1</m:t>
+                            </m:r>
+                          </m:sub>
+                        </m:sSub>
+                        <m:sSub>
+                          <m:sSubPr>
+                            <m:ctrlPr>
+                              <a:rPr lang="en-US" sz="2200" b="0" i="1" smtClean="0">
+                                <a:solidFill>
+                                  <a:schemeClr val="bg2">
+                                    <a:lumMod val="25000"/>
+                                  </a:schemeClr>
+                                </a:solidFill>
+                                <a:latin typeface="Cambria Math" panose="02040503050406030204" pitchFamily="18" charset="0"/>
+                              </a:rPr>
+                            </m:ctrlPr>
+                          </m:sSubPr>
+                          <m:e>
+                            <m:r>
+                              <a:rPr lang="en-US" sz="2200" b="0" i="1" smtClean="0">
+                                <a:solidFill>
+                                  <a:schemeClr val="bg2">
+                                    <a:lumMod val="25000"/>
+                                  </a:schemeClr>
+                                </a:solidFill>
+                                <a:latin typeface="Cambria Math" panose="02040503050406030204" pitchFamily="18" charset="0"/>
+                              </a:rPr>
+                              <m:t>𝑥</m:t>
+                            </m:r>
+                          </m:e>
+                          <m:sub>
+                            <m:r>
+                              <a:rPr lang="en-US" sz="2200" b="0" i="1" smtClean="0">
+                                <a:solidFill>
+                                  <a:schemeClr val="bg2">
+                                    <a:lumMod val="25000"/>
+                                  </a:schemeClr>
+                                </a:solidFill>
+                                <a:latin typeface="Cambria Math" panose="02040503050406030204" pitchFamily="18" charset="0"/>
+                              </a:rPr>
+                              <m:t>𝑖</m:t>
+                            </m:r>
+                          </m:sub>
+                        </m:sSub>
+                      </m:oMath>
+                    </m:oMathPara>
+                  </a14:m>
+                  <a:endParaRPr lang="en-US" sz="2200" b="0" dirty="0">
+                    <a:solidFill>
+                      <a:schemeClr val="bg2">
+                        <a:lumMod val="25000"/>
+                      </a:schemeClr>
+                    </a:solidFill>
+                  </a:endParaRPr>
+                </a:p>
+              </p:txBody>
+            </p:sp>
+          </mc:Choice>
+          <mc:Fallback>
+            <p:sp>
+              <p:nvSpPr>
+                <p:cNvPr id="24" name="TextBox 23">
+                  <a:extLst>
+                    <a:ext uri="{FF2B5EF4-FFF2-40B4-BE49-F238E27FC236}">
+                      <a16:creationId xmlns:a16="http://schemas.microsoft.com/office/drawing/2014/main" id="{0719CD0C-0C2B-BF30-ACFF-F9E94DE516DE}"/>
+                    </a:ext>
+                  </a:extLst>
+                </p:cNvPr>
+                <p:cNvSpPr txBox="1">
+                  <a:spLocks noRot="1" noChangeAspect="1" noMove="1" noResize="1" noEditPoints="1" noAdjustHandles="1" noChangeArrowheads="1" noChangeShapeType="1" noTextEdit="1"/>
+                </p:cNvSpPr>
+                <p:nvPr/>
+              </p:nvSpPr>
+              <p:spPr>
+                <a:xfrm>
+                  <a:off x="9182959" y="3905977"/>
+                  <a:ext cx="1861022" cy="338554"/>
+                </a:xfrm>
+                <a:prstGeom prst="rect">
+                  <a:avLst/>
+                </a:prstGeom>
+                <a:blipFill>
+                  <a:blip r:embed="rId9"/>
+                  <a:stretch>
+                    <a:fillRect l="-2703" t="-10714" r="-1351" b="-32143"/>
+                  </a:stretch>
+                </a:blipFill>
+              </p:spPr>
+              <p:txBody>
+                <a:bodyPr/>
+                <a:lstStyle/>
+                <a:p>
+                  <a:r>
+                    <a:rPr lang="en-US">
+                      <a:noFill/>
+                    </a:rPr>
+                    <a:t> </a:t>
+                  </a:r>
+                </a:p>
+              </p:txBody>
+            </p:sp>
+          </mc:Fallback>
+        </mc:AlternateContent>
+        <mc:AlternateContent xmlns:mc="http://schemas.openxmlformats.org/markup-compatibility/2006">
+          <mc:Choice xmlns:a14="http://schemas.microsoft.com/office/drawing/2010/main" Requires="a14">
+            <p:sp>
+              <p:nvSpPr>
+                <p:cNvPr id="25" name="TextBox 24">
+                  <a:extLst>
+                    <a:ext uri="{FF2B5EF4-FFF2-40B4-BE49-F238E27FC236}">
+                      <a16:creationId xmlns:a16="http://schemas.microsoft.com/office/drawing/2014/main" id="{4302A502-26FE-1226-6EBA-1AFC84F796ED}"/>
+                    </a:ext>
+                  </a:extLst>
+                </p:cNvPr>
+                <p:cNvSpPr txBox="1"/>
+                <p:nvPr/>
+              </p:nvSpPr>
+              <p:spPr>
+                <a:xfrm>
+                  <a:off x="9250534" y="5155916"/>
+                  <a:ext cx="1795235" cy="371640"/>
+                </a:xfrm>
+                <a:prstGeom prst="rect">
+                  <a:avLst/>
+                </a:prstGeom>
+                <a:noFill/>
+              </p:spPr>
+              <p:txBody>
+                <a:bodyPr wrap="none" lIns="0" tIns="0" rIns="0" bIns="0" rtlCol="0">
+                  <a:spAutoFit/>
+                </a:bodyPr>
+                <a:lstStyle/>
+                <a:p>
+                  <a:pPr/>
+                  <a14:m>
+                    <m:oMathPara xmlns:m="http://schemas.openxmlformats.org/officeDocument/2006/math">
+                      <m:oMathParaPr>
+                        <m:jc m:val="centerGroup"/>
+                      </m:oMathParaPr>
+                      <m:oMath xmlns:m="http://schemas.openxmlformats.org/officeDocument/2006/math">
+                        <m:sSub>
+                          <m:sSubPr>
+                            <m:ctrlPr>
+                              <a:rPr lang="en-US" sz="2200" i="1" smtClean="0">
+                                <a:solidFill>
+                                  <a:schemeClr val="bg2">
+                                    <a:lumMod val="25000"/>
+                                  </a:schemeClr>
+                                </a:solidFill>
+                                <a:latin typeface="Cambria Math" panose="02040503050406030204" pitchFamily="18" charset="0"/>
+                              </a:rPr>
+                            </m:ctrlPr>
+                          </m:sSubPr>
+                          <m:e>
+                            <m:sSub>
+                              <m:sSubPr>
+                                <m:ctrlPr>
+                                  <a:rPr lang="en-US" sz="2200" b="0" i="1" smtClean="0">
+                                    <a:solidFill>
+                                      <a:schemeClr val="bg2">
+                                        <a:lumMod val="25000"/>
+                                      </a:schemeClr>
+                                    </a:solidFill>
+                                    <a:latin typeface="Cambria Math" panose="02040503050406030204" pitchFamily="18" charset="0"/>
+                                  </a:rPr>
+                                </m:ctrlPr>
+                              </m:sSubPr>
+                              <m:e>
+                                <m:r>
+                                  <a:rPr lang="en-US" sz="2200" b="0" i="1" smtClean="0">
+                                    <a:solidFill>
+                                      <a:schemeClr val="bg2">
+                                        <a:lumMod val="25000"/>
+                                      </a:schemeClr>
+                                    </a:solidFill>
+                                    <a:latin typeface="Cambria Math" panose="02040503050406030204" pitchFamily="18" charset="0"/>
+                                  </a:rPr>
+                                  <m:t>𝜂</m:t>
+                                </m:r>
+                              </m:e>
+                              <m:sub>
+                                <m:r>
+                                  <a:rPr lang="en-US" sz="2200" b="0" i="1" smtClean="0">
+                                    <a:solidFill>
+                                      <a:schemeClr val="bg2">
+                                        <a:lumMod val="25000"/>
+                                      </a:schemeClr>
+                                    </a:solidFill>
+                                    <a:latin typeface="Cambria Math" panose="02040503050406030204" pitchFamily="18" charset="0"/>
+                                  </a:rPr>
+                                  <m:t>𝑖</m:t>
+                                </m:r>
+                              </m:sub>
+                            </m:sSub>
+                          </m:e>
+                          <m:sub>
+                            <m:r>
+                              <a:rPr lang="en-US" sz="2200" b="0" i="1" smtClean="0">
+                                <a:solidFill>
+                                  <a:schemeClr val="bg2">
+                                    <a:lumMod val="25000"/>
+                                  </a:schemeClr>
+                                </a:solidFill>
+                                <a:latin typeface="Cambria Math" panose="02040503050406030204" pitchFamily="18" charset="0"/>
+                              </a:rPr>
+                              <m:t> </m:t>
+                            </m:r>
+                          </m:sub>
+                        </m:sSub>
+                        <m:r>
+                          <a:rPr lang="en-US" sz="2200" b="0" i="1" smtClean="0">
+                            <a:solidFill>
+                              <a:schemeClr val="bg2">
+                                <a:lumMod val="25000"/>
+                              </a:schemeClr>
+                            </a:solidFill>
+                            <a:latin typeface="Cambria Math" panose="02040503050406030204" pitchFamily="18" charset="0"/>
+                          </a:rPr>
+                          <m:t>= </m:t>
+                        </m:r>
+                        <m:r>
+                          <m:rPr>
+                            <m:sty m:val="p"/>
+                          </m:rPr>
+                          <a:rPr lang="en-US" sz="2200" b="0" i="0" smtClean="0">
+                            <a:solidFill>
+                              <a:schemeClr val="bg2">
+                                <a:lumMod val="25000"/>
+                              </a:schemeClr>
+                            </a:solidFill>
+                            <a:latin typeface="Cambria Math" panose="02040503050406030204" pitchFamily="18" charset="0"/>
+                          </a:rPr>
+                          <m:t>logit</m:t>
+                        </m:r>
+                        <m:r>
+                          <a:rPr lang="en-US" sz="2200" b="0" i="1" smtClean="0">
+                            <a:solidFill>
+                              <a:schemeClr val="bg2">
+                                <a:lumMod val="25000"/>
+                              </a:schemeClr>
+                            </a:solidFill>
+                            <a:latin typeface="Cambria Math" panose="02040503050406030204" pitchFamily="18" charset="0"/>
+                          </a:rPr>
+                          <m:t>⁡(</m:t>
+                        </m:r>
+                        <m:sSub>
+                          <m:sSubPr>
+                            <m:ctrlPr>
+                              <a:rPr lang="en-US" sz="2200" b="0" i="1" smtClean="0">
+                                <a:solidFill>
+                                  <a:schemeClr val="bg2">
+                                    <a:lumMod val="25000"/>
+                                  </a:schemeClr>
+                                </a:solidFill>
+                                <a:latin typeface="Cambria Math" panose="02040503050406030204" pitchFamily="18" charset="0"/>
+                              </a:rPr>
+                            </m:ctrlPr>
+                          </m:sSubPr>
+                          <m:e>
+                            <m:r>
+                              <a:rPr lang="en-US" sz="2200" b="0" i="1" smtClean="0">
+                                <a:solidFill>
+                                  <a:schemeClr val="bg2">
+                                    <a:lumMod val="25000"/>
+                                  </a:schemeClr>
+                                </a:solidFill>
+                                <a:latin typeface="Cambria Math" panose="02040503050406030204" pitchFamily="18" charset="0"/>
+                              </a:rPr>
+                              <m:t>𝑝</m:t>
+                            </m:r>
+                          </m:e>
+                          <m:sub>
+                            <m:r>
+                              <a:rPr lang="en-US" sz="2200" b="0" i="1" smtClean="0">
+                                <a:solidFill>
+                                  <a:schemeClr val="bg2">
+                                    <a:lumMod val="25000"/>
+                                  </a:schemeClr>
+                                </a:solidFill>
+                                <a:latin typeface="Cambria Math" panose="02040503050406030204" pitchFamily="18" charset="0"/>
+                              </a:rPr>
+                              <m:t>𝑖</m:t>
+                            </m:r>
+                          </m:sub>
+                        </m:sSub>
+                        <m:r>
+                          <a:rPr lang="en-US" sz="2200" b="0" i="1" smtClean="0">
+                            <a:solidFill>
+                              <a:schemeClr val="bg2">
+                                <a:lumMod val="25000"/>
+                              </a:schemeClr>
+                            </a:solidFill>
+                            <a:latin typeface="Cambria Math" panose="02040503050406030204" pitchFamily="18" charset="0"/>
+                          </a:rPr>
+                          <m:t>)</m:t>
+                        </m:r>
+                      </m:oMath>
+                    </m:oMathPara>
+                  </a14:m>
+                  <a:endParaRPr lang="en-US" sz="2200" b="0" dirty="0">
+                    <a:solidFill>
+                      <a:schemeClr val="bg2">
+                        <a:lumMod val="25000"/>
+                      </a:schemeClr>
+                    </a:solidFill>
+                  </a:endParaRPr>
+                </a:p>
+              </p:txBody>
+            </p:sp>
+          </mc:Choice>
+          <mc:Fallback>
+            <p:sp>
+              <p:nvSpPr>
+                <p:cNvPr id="25" name="TextBox 24">
+                  <a:extLst>
+                    <a:ext uri="{FF2B5EF4-FFF2-40B4-BE49-F238E27FC236}">
+                      <a16:creationId xmlns:a16="http://schemas.microsoft.com/office/drawing/2014/main" id="{4302A502-26FE-1226-6EBA-1AFC84F796ED}"/>
+                    </a:ext>
+                  </a:extLst>
+                </p:cNvPr>
+                <p:cNvSpPr txBox="1">
+                  <a:spLocks noRot="1" noChangeAspect="1" noMove="1" noResize="1" noEditPoints="1" noAdjustHandles="1" noChangeArrowheads="1" noChangeShapeType="1" noTextEdit="1"/>
+                </p:cNvSpPr>
+                <p:nvPr/>
+              </p:nvSpPr>
+              <p:spPr>
+                <a:xfrm>
+                  <a:off x="9250534" y="5155916"/>
+                  <a:ext cx="1795235" cy="371640"/>
+                </a:xfrm>
+                <a:prstGeom prst="rect">
+                  <a:avLst/>
+                </a:prstGeom>
+                <a:blipFill>
+                  <a:blip r:embed="rId10"/>
+                  <a:stretch>
+                    <a:fillRect l="-3521" t="-6667" r="-5634" b="-36667"/>
+                  </a:stretch>
+                </a:blipFill>
+              </p:spPr>
+              <p:txBody>
+                <a:bodyPr/>
+                <a:lstStyle/>
+                <a:p>
+                  <a:r>
+                    <a:rPr lang="en-US">
+                      <a:noFill/>
+                    </a:rPr>
+                    <a:t> </a:t>
+                  </a:r>
+                </a:p>
+              </p:txBody>
+            </p:sp>
+          </mc:Fallback>
+        </mc:AlternateContent>
+        <p:sp>
+          <p:nvSpPr>
+            <p:cNvPr id="26" name="TextBox 25">
+              <a:extLst>
+                <a:ext uri="{FF2B5EF4-FFF2-40B4-BE49-F238E27FC236}">
+                  <a16:creationId xmlns:a16="http://schemas.microsoft.com/office/drawing/2014/main" id="{AD2FD21C-CA75-DC27-17FF-130F80407E2D}"/>
+                </a:ext>
+              </a:extLst>
+            </p:cNvPr>
+            <p:cNvSpPr txBox="1"/>
+            <p:nvPr/>
+          </p:nvSpPr>
+          <p:spPr>
+            <a:xfrm>
+              <a:off x="8716433" y="2046772"/>
+              <a:ext cx="2777067" cy="400110"/>
+            </a:xfrm>
+            <a:prstGeom prst="rect">
+              <a:avLst/>
+            </a:prstGeom>
+            <a:noFill/>
+          </p:spPr>
+          <p:txBody>
+            <a:bodyPr wrap="square" rtlCol="0">
+              <a:spAutoFit/>
+            </a:bodyPr>
+            <a:lstStyle/>
+            <a:p>
+              <a:pPr algn="ctr"/>
+              <a:r>
+                <a:rPr lang="en-US" sz="2000" b="1" dirty="0" err="1">
+                  <a:solidFill>
+                    <a:schemeClr val="tx1">
+                      <a:lumMod val="85000"/>
+                      <a:lumOff val="15000"/>
+                    </a:schemeClr>
+                  </a:solidFill>
+                </a:rPr>
+                <a:t>Parte</a:t>
+              </a:r>
+              <a:r>
+                <a:rPr lang="en-US" sz="2000" b="1" dirty="0">
+                  <a:solidFill>
+                    <a:schemeClr val="tx1">
+                      <a:lumMod val="85000"/>
+                      <a:lumOff val="15000"/>
+                    </a:schemeClr>
+                  </a:solidFill>
+                </a:rPr>
+                <a:t> </a:t>
+              </a:r>
+              <a:r>
+                <a:rPr lang="en-US" sz="2000" b="1" dirty="0" err="1">
+                  <a:solidFill>
+                    <a:schemeClr val="tx1">
+                      <a:lumMod val="85000"/>
+                      <a:lumOff val="15000"/>
+                    </a:schemeClr>
+                  </a:solidFill>
+                </a:rPr>
+                <a:t>estocástica</a:t>
+              </a:r>
+              <a:endParaRPr lang="en-US" sz="2000" b="1" dirty="0">
+                <a:solidFill>
+                  <a:schemeClr val="tx1">
+                    <a:lumMod val="85000"/>
+                    <a:lumOff val="15000"/>
+                  </a:schemeClr>
+                </a:solidFill>
+              </a:endParaRPr>
+            </a:p>
+          </p:txBody>
+        </p:sp>
+        <p:sp>
+          <p:nvSpPr>
+            <p:cNvPr id="27" name="TextBox 26">
+              <a:extLst>
+                <a:ext uri="{FF2B5EF4-FFF2-40B4-BE49-F238E27FC236}">
+                  <a16:creationId xmlns:a16="http://schemas.microsoft.com/office/drawing/2014/main" id="{068A16A8-520E-8568-5144-6DC0A35EFD77}"/>
+                </a:ext>
+              </a:extLst>
+            </p:cNvPr>
+            <p:cNvSpPr txBox="1"/>
+            <p:nvPr/>
+          </p:nvSpPr>
+          <p:spPr>
+            <a:xfrm>
+              <a:off x="8754692" y="3426263"/>
+              <a:ext cx="2777067" cy="400110"/>
+            </a:xfrm>
+            <a:prstGeom prst="rect">
+              <a:avLst/>
+            </a:prstGeom>
+            <a:noFill/>
+          </p:spPr>
+          <p:txBody>
+            <a:bodyPr wrap="square" rtlCol="0">
+              <a:spAutoFit/>
+            </a:bodyPr>
+            <a:lstStyle/>
+            <a:p>
+              <a:pPr algn="ctr"/>
+              <a:r>
+                <a:rPr lang="en-US" sz="2000" b="1" dirty="0" err="1">
+                  <a:solidFill>
+                    <a:schemeClr val="tx1">
+                      <a:lumMod val="85000"/>
+                      <a:lumOff val="15000"/>
+                    </a:schemeClr>
+                  </a:solidFill>
+                </a:rPr>
+                <a:t>Parte</a:t>
+              </a:r>
+              <a:r>
+                <a:rPr lang="en-US" sz="2000" b="1" dirty="0">
+                  <a:solidFill>
+                    <a:schemeClr val="tx1">
+                      <a:lumMod val="85000"/>
+                      <a:lumOff val="15000"/>
+                    </a:schemeClr>
+                  </a:solidFill>
+                </a:rPr>
+                <a:t> </a:t>
+              </a:r>
+              <a:r>
+                <a:rPr lang="en-US" sz="2000" b="1" dirty="0" err="1">
+                  <a:solidFill>
+                    <a:schemeClr val="tx1">
+                      <a:lumMod val="85000"/>
+                      <a:lumOff val="15000"/>
+                    </a:schemeClr>
+                  </a:solidFill>
+                </a:rPr>
+                <a:t>determinística</a:t>
+              </a:r>
+              <a:endParaRPr lang="en-US" sz="2000" b="1" dirty="0">
+                <a:solidFill>
+                  <a:schemeClr val="tx1">
+                    <a:lumMod val="85000"/>
+                    <a:lumOff val="15000"/>
+                  </a:schemeClr>
+                </a:solidFill>
+              </a:endParaRPr>
+            </a:p>
+          </p:txBody>
+        </p:sp>
+        <p:sp>
+          <p:nvSpPr>
+            <p:cNvPr id="28" name="TextBox 27">
+              <a:extLst>
+                <a:ext uri="{FF2B5EF4-FFF2-40B4-BE49-F238E27FC236}">
+                  <a16:creationId xmlns:a16="http://schemas.microsoft.com/office/drawing/2014/main" id="{A363D7A0-E6D6-5E3F-6FB1-106D74F7F6A7}"/>
+                </a:ext>
+              </a:extLst>
+            </p:cNvPr>
+            <p:cNvSpPr txBox="1"/>
+            <p:nvPr/>
+          </p:nvSpPr>
+          <p:spPr>
+            <a:xfrm>
+              <a:off x="8677041" y="4683423"/>
+              <a:ext cx="2777067" cy="400110"/>
+            </a:xfrm>
+            <a:prstGeom prst="rect">
+              <a:avLst/>
+            </a:prstGeom>
+            <a:noFill/>
+          </p:spPr>
+          <p:txBody>
+            <a:bodyPr wrap="square" rtlCol="0">
+              <a:spAutoFit/>
+            </a:bodyPr>
+            <a:lstStyle/>
+            <a:p>
+              <a:pPr algn="ctr"/>
+              <a:r>
+                <a:rPr lang="en-US" sz="2000" b="1" dirty="0" err="1">
+                  <a:solidFill>
+                    <a:schemeClr val="tx1">
+                      <a:lumMod val="85000"/>
+                      <a:lumOff val="15000"/>
+                    </a:schemeClr>
+                  </a:solidFill>
+                </a:rPr>
+                <a:t>Função</a:t>
+              </a:r>
+              <a:r>
+                <a:rPr lang="en-US" sz="2000" b="1" dirty="0">
+                  <a:solidFill>
+                    <a:schemeClr val="tx1">
+                      <a:lumMod val="85000"/>
+                      <a:lumOff val="15000"/>
+                    </a:schemeClr>
+                  </a:solidFill>
+                </a:rPr>
+                <a:t> de </a:t>
+              </a:r>
+              <a:r>
+                <a:rPr lang="en-US" sz="2000" b="1" dirty="0" err="1">
+                  <a:solidFill>
+                    <a:schemeClr val="tx1">
+                      <a:lumMod val="85000"/>
+                      <a:lumOff val="15000"/>
+                    </a:schemeClr>
+                  </a:solidFill>
+                </a:rPr>
+                <a:t>ligação</a:t>
+              </a:r>
+              <a:endParaRPr lang="en-US" sz="2000" b="1" dirty="0">
+                <a:solidFill>
+                  <a:schemeClr val="tx1">
+                    <a:lumMod val="85000"/>
+                    <a:lumOff val="15000"/>
+                  </a:schemeClr>
+                </a:solidFill>
+              </a:endParaRPr>
+            </a:p>
+          </p:txBody>
+        </p:sp>
+      </p:grpSp>
+    </p:spTree>
+    <p:extLst>
+      <p:ext uri="{BB962C8B-B14F-4D97-AF65-F5344CB8AC3E}">
+        <p14:creationId xmlns:p14="http://schemas.microsoft.com/office/powerpoint/2010/main" val="1317523250"/>
+      </p:ext>
+    </p:extLst>
+  </p:cSld>
+  <p:clrMapOvr>
+    <a:masterClrMapping/>
+  </p:clrMapOvr>
+</p:sld>
+</file>
+
 <file path=ppt/slides/slide3.xml><?xml version="1.0" encoding="utf-8"?>
 <p:sld xmlns:a="http://schemas.openxmlformats.org/drawingml/2006/main" xmlns:r="http://schemas.openxmlformats.org/officeDocument/2006/relationships" xmlns:p="http://schemas.openxmlformats.org/presentationml/2006/main">
   <p:cSld>

--- a/Figuras/Figuras_prep.pptx
+++ b/Figuras/Figuras_prep.pptx
@@ -144,7 +144,7 @@
   <pc:docChgLst>
     <pc:chgData name="Marie-Christine Rufener" userId="2d6664cfb518d05c" providerId="LiveId" clId="{946B3BF8-DE9F-57F9-A118-BDE1986E26EE}"/>
     <pc:docChg chg="undo redo custSel addSld delSld modSld sldOrd">
-      <pc:chgData name="Marie-Christine Rufener" userId="2d6664cfb518d05c" providerId="LiveId" clId="{946B3BF8-DE9F-57F9-A118-BDE1986E26EE}" dt="2026-08-17T10:21:21.622" v="9022" actId="207"/>
+      <pc:chgData name="Marie-Christine Rufener" userId="2d6664cfb518d05c" providerId="LiveId" clId="{946B3BF8-DE9F-57F9-A118-BDE1986E26EE}" dt="2026-08-17T22:14:54.401" v="9128" actId="164"/>
       <pc:docMkLst>
         <pc:docMk/>
       </pc:docMkLst>
@@ -3891,14 +3891,14 @@
           </ac:cxnSpMkLst>
         </pc:cxnChg>
       </pc:sldChg>
-      <pc:sldChg chg="addSp modSp new mod">
-        <pc:chgData name="Marie-Christine Rufener" userId="2d6664cfb518d05c" providerId="LiveId" clId="{946B3BF8-DE9F-57F9-A118-BDE1986E26EE}" dt="2026-08-17T10:21:21.622" v="9022" actId="207"/>
+      <pc:sldChg chg="addSp delSp modSp new mod">
+        <pc:chgData name="Marie-Christine Rufener" userId="2d6664cfb518d05c" providerId="LiveId" clId="{946B3BF8-DE9F-57F9-A118-BDE1986E26EE}" dt="2026-08-17T22:14:54.401" v="9128" actId="164"/>
         <pc:sldMkLst>
           <pc:docMk/>
           <pc:sldMk cId="1317523250" sldId="281"/>
         </pc:sldMkLst>
-        <pc:spChg chg="mod">
-          <ac:chgData name="Marie-Christine Rufener" userId="2d6664cfb518d05c" providerId="LiveId" clId="{946B3BF8-DE9F-57F9-A118-BDE1986E26EE}" dt="2026-08-17T10:19:57.029" v="9010" actId="208"/>
+        <pc:spChg chg="mod topLvl">
+          <ac:chgData name="Marie-Christine Rufener" userId="2d6664cfb518d05c" providerId="LiveId" clId="{946B3BF8-DE9F-57F9-A118-BDE1986E26EE}" dt="2026-08-17T22:13:38.026" v="9025" actId="165"/>
           <ac:spMkLst>
             <pc:docMk/>
             <pc:sldMk cId="1317523250" sldId="281"/>
@@ -3906,7 +3906,7 @@
           </ac:spMkLst>
         </pc:spChg>
         <pc:spChg chg="mod">
-          <ac:chgData name="Marie-Christine Rufener" userId="2d6664cfb518d05c" providerId="LiveId" clId="{946B3BF8-DE9F-57F9-A118-BDE1986E26EE}" dt="2026-08-17T10:20:08.596" v="9011" actId="208"/>
+          <ac:chgData name="Marie-Christine Rufener" userId="2d6664cfb518d05c" providerId="LiveId" clId="{946B3BF8-DE9F-57F9-A118-BDE1986E26EE}" dt="2026-08-17T22:13:59.178" v="9059" actId="1037"/>
           <ac:spMkLst>
             <pc:docMk/>
             <pc:sldMk cId="1317523250" sldId="281"/>
@@ -3914,7 +3914,7 @@
           </ac:spMkLst>
         </pc:spChg>
         <pc:spChg chg="mod">
-          <ac:chgData name="Marie-Christine Rufener" userId="2d6664cfb518d05c" providerId="LiveId" clId="{946B3BF8-DE9F-57F9-A118-BDE1986E26EE}" dt="2026-08-17T10:20:48.308" v="9017" actId="207"/>
+          <ac:chgData name="Marie-Christine Rufener" userId="2d6664cfb518d05c" providerId="LiveId" clId="{946B3BF8-DE9F-57F9-A118-BDE1986E26EE}" dt="2026-08-17T22:14:45.787" v="9127" actId="1035"/>
           <ac:spMkLst>
             <pc:docMk/>
             <pc:sldMk cId="1317523250" sldId="281"/>
@@ -3922,7 +3922,7 @@
           </ac:spMkLst>
         </pc:spChg>
         <pc:spChg chg="mod">
-          <ac:chgData name="Marie-Christine Rufener" userId="2d6664cfb518d05c" providerId="LiveId" clId="{946B3BF8-DE9F-57F9-A118-BDE1986E26EE}" dt="2026-08-17T10:21:21.622" v="9022" actId="207"/>
+          <ac:chgData name="Marie-Christine Rufener" userId="2d6664cfb518d05c" providerId="LiveId" clId="{946B3BF8-DE9F-57F9-A118-BDE1986E26EE}" dt="2026-08-17T22:13:59.178" v="9059" actId="1037"/>
           <ac:spMkLst>
             <pc:docMk/>
             <pc:sldMk cId="1317523250" sldId="281"/>
@@ -3930,23 +3930,23 @@
           </ac:spMkLst>
         </pc:spChg>
         <pc:spChg chg="mod">
-          <ac:chgData name="Marie-Christine Rufener" userId="2d6664cfb518d05c" providerId="LiveId" clId="{946B3BF8-DE9F-57F9-A118-BDE1986E26EE}" dt="2026-08-17T10:21:21.622" v="9022" actId="207"/>
+          <ac:chgData name="Marie-Christine Rufener" userId="2d6664cfb518d05c" providerId="LiveId" clId="{946B3BF8-DE9F-57F9-A118-BDE1986E26EE}" dt="2026-08-17T22:13:59.178" v="9059" actId="1037"/>
           <ac:spMkLst>
             <pc:docMk/>
             <pc:sldMk cId="1317523250" sldId="281"/>
             <ac:spMk id="7" creationId="{B6D32CF6-5EFA-BFE8-6B76-C0E5F196C8C8}"/>
           </ac:spMkLst>
         </pc:spChg>
-        <pc:spChg chg="mod">
-          <ac:chgData name="Marie-Christine Rufener" userId="2d6664cfb518d05c" providerId="LiveId" clId="{946B3BF8-DE9F-57F9-A118-BDE1986E26EE}" dt="2026-08-17T10:21:21.622" v="9022" actId="207"/>
+        <pc:spChg chg="mod topLvl">
+          <ac:chgData name="Marie-Christine Rufener" userId="2d6664cfb518d05c" providerId="LiveId" clId="{946B3BF8-DE9F-57F9-A118-BDE1986E26EE}" dt="2026-08-17T22:13:59.178" v="9059" actId="1037"/>
           <ac:spMkLst>
             <pc:docMk/>
             <pc:sldMk cId="1317523250" sldId="281"/>
             <ac:spMk id="8" creationId="{DC2A6A2F-5FE8-CCCE-16EC-55315E8BDB99}"/>
           </ac:spMkLst>
         </pc:spChg>
-        <pc:spChg chg="mod">
-          <ac:chgData name="Marie-Christine Rufener" userId="2d6664cfb518d05c" providerId="LiveId" clId="{946B3BF8-DE9F-57F9-A118-BDE1986E26EE}" dt="2026-08-17T10:20:39.948" v="9016" actId="207"/>
+        <pc:spChg chg="mod topLvl">
+          <ac:chgData name="Marie-Christine Rufener" userId="2d6664cfb518d05c" providerId="LiveId" clId="{946B3BF8-DE9F-57F9-A118-BDE1986E26EE}" dt="2026-08-17T22:13:59.178" v="9059" actId="1037"/>
           <ac:spMkLst>
             <pc:docMk/>
             <pc:sldMk cId="1317523250" sldId="281"/>
@@ -3954,15 +3954,15 @@
           </ac:spMkLst>
         </pc:spChg>
         <pc:spChg chg="mod">
-          <ac:chgData name="Marie-Christine Rufener" userId="2d6664cfb518d05c" providerId="LiveId" clId="{946B3BF8-DE9F-57F9-A118-BDE1986E26EE}" dt="2026-08-17T10:20:52.353" v="9018" actId="207"/>
+          <ac:chgData name="Marie-Christine Rufener" userId="2d6664cfb518d05c" providerId="LiveId" clId="{946B3BF8-DE9F-57F9-A118-BDE1986E26EE}" dt="2026-08-17T22:14:45.787" v="9127" actId="1035"/>
           <ac:spMkLst>
             <pc:docMk/>
             <pc:sldMk cId="1317523250" sldId="281"/>
             <ac:spMk id="10" creationId="{F67DCFCD-DB56-82ED-EAF1-E8064FF91158}"/>
           </ac:spMkLst>
         </pc:spChg>
-        <pc:spChg chg="mod">
-          <ac:chgData name="Marie-Christine Rufener" userId="2d6664cfb518d05c" providerId="LiveId" clId="{946B3BF8-DE9F-57F9-A118-BDE1986E26EE}" dt="2026-08-17T10:20:56.134" v="9019" actId="207"/>
+        <pc:spChg chg="mod topLvl">
+          <ac:chgData name="Marie-Christine Rufener" userId="2d6664cfb518d05c" providerId="LiveId" clId="{946B3BF8-DE9F-57F9-A118-BDE1986E26EE}" dt="2026-08-17T22:14:45.787" v="9127" actId="1035"/>
           <ac:spMkLst>
             <pc:docMk/>
             <pc:sldMk cId="1317523250" sldId="281"/>
@@ -3970,7 +3970,7 @@
           </ac:spMkLst>
         </pc:spChg>
         <pc:spChg chg="mod">
-          <ac:chgData name="Marie-Christine Rufener" userId="2d6664cfb518d05c" providerId="LiveId" clId="{946B3BF8-DE9F-57F9-A118-BDE1986E26EE}" dt="2026-08-17T10:20:39.948" v="9016" actId="207"/>
+          <ac:chgData name="Marie-Christine Rufener" userId="2d6664cfb518d05c" providerId="LiveId" clId="{946B3BF8-DE9F-57F9-A118-BDE1986E26EE}" dt="2026-08-17T22:13:59.178" v="9059" actId="1037"/>
           <ac:spMkLst>
             <pc:docMk/>
             <pc:sldMk cId="1317523250" sldId="281"/>
@@ -3978,7 +3978,7 @@
           </ac:spMkLst>
         </pc:spChg>
         <pc:spChg chg="mod">
-          <ac:chgData name="Marie-Christine Rufener" userId="2d6664cfb518d05c" providerId="LiveId" clId="{946B3BF8-DE9F-57F9-A118-BDE1986E26EE}" dt="2026-08-17T10:20:39.948" v="9016" actId="207"/>
+          <ac:chgData name="Marie-Christine Rufener" userId="2d6664cfb518d05c" providerId="LiveId" clId="{946B3BF8-DE9F-57F9-A118-BDE1986E26EE}" dt="2026-08-17T22:13:59.178" v="9059" actId="1037"/>
           <ac:spMkLst>
             <pc:docMk/>
             <pc:sldMk cId="1317523250" sldId="281"/>
@@ -3993,16 +3993,16 @@
             <ac:spMk id="16" creationId="{17DD91F4-C93E-1F19-7D6D-76168928FDBB}"/>
           </ac:spMkLst>
         </pc:spChg>
-        <pc:spChg chg="mod">
-          <ac:chgData name="Marie-Christine Rufener" userId="2d6664cfb518d05c" providerId="LiveId" clId="{946B3BF8-DE9F-57F9-A118-BDE1986E26EE}" dt="2026-08-17T10:21:21.622" v="9022" actId="207"/>
+        <pc:spChg chg="mod topLvl">
+          <ac:chgData name="Marie-Christine Rufener" userId="2d6664cfb518d05c" providerId="LiveId" clId="{946B3BF8-DE9F-57F9-A118-BDE1986E26EE}" dt="2026-08-17T22:13:38.026" v="9025" actId="165"/>
           <ac:spMkLst>
             <pc:docMk/>
             <pc:sldMk cId="1317523250" sldId="281"/>
             <ac:spMk id="17" creationId="{9ABC8DE1-6494-1DE1-DC2B-DA8750B45B17}"/>
           </ac:spMkLst>
         </pc:spChg>
-        <pc:spChg chg="mod">
-          <ac:chgData name="Marie-Christine Rufener" userId="2d6664cfb518d05c" providerId="LiveId" clId="{946B3BF8-DE9F-57F9-A118-BDE1986E26EE}" dt="2026-08-17T10:21:21.622" v="9022" actId="207"/>
+        <pc:spChg chg="mod topLvl">
+          <ac:chgData name="Marie-Christine Rufener" userId="2d6664cfb518d05c" providerId="LiveId" clId="{946B3BF8-DE9F-57F9-A118-BDE1986E26EE}" dt="2026-08-17T22:13:38.026" v="9025" actId="165"/>
           <ac:spMkLst>
             <pc:docMk/>
             <pc:sldMk cId="1317523250" sldId="281"/>
@@ -4017,8 +4017,8 @@
             <ac:spMk id="19" creationId="{75EDB5F0-0E1B-D224-717C-82A056C8CEAF}"/>
           </ac:spMkLst>
         </pc:spChg>
-        <pc:spChg chg="mod">
-          <ac:chgData name="Marie-Christine Rufener" userId="2d6664cfb518d05c" providerId="LiveId" clId="{946B3BF8-DE9F-57F9-A118-BDE1986E26EE}" dt="2026-08-17T10:20:39.948" v="9016" actId="207"/>
+        <pc:spChg chg="mod topLvl">
+          <ac:chgData name="Marie-Christine Rufener" userId="2d6664cfb518d05c" providerId="LiveId" clId="{946B3BF8-DE9F-57F9-A118-BDE1986E26EE}" dt="2026-08-17T22:13:38.026" v="9025" actId="165"/>
           <ac:spMkLst>
             <pc:docMk/>
             <pc:sldMk cId="1317523250" sldId="281"/>
@@ -4033,8 +4033,8 @@
             <ac:spMk id="21" creationId="{D3D39D18-F239-752D-F61F-7069BE45694C}"/>
           </ac:spMkLst>
         </pc:spChg>
-        <pc:spChg chg="mod">
-          <ac:chgData name="Marie-Christine Rufener" userId="2d6664cfb518d05c" providerId="LiveId" clId="{946B3BF8-DE9F-57F9-A118-BDE1986E26EE}" dt="2026-08-17T10:19:50.234" v="9009" actId="208"/>
+        <pc:spChg chg="mod topLvl">
+          <ac:chgData name="Marie-Christine Rufener" userId="2d6664cfb518d05c" providerId="LiveId" clId="{946B3BF8-DE9F-57F9-A118-BDE1986E26EE}" dt="2026-08-17T22:14:33.332" v="9105" actId="1038"/>
           <ac:spMkLst>
             <pc:docMk/>
             <pc:sldMk cId="1317523250" sldId="281"/>
@@ -4042,7 +4042,7 @@
           </ac:spMkLst>
         </pc:spChg>
         <pc:spChg chg="mod">
-          <ac:chgData name="Marie-Christine Rufener" userId="2d6664cfb518d05c" providerId="LiveId" clId="{946B3BF8-DE9F-57F9-A118-BDE1986E26EE}" dt="2026-08-17T10:21:21.622" v="9022" actId="207"/>
+          <ac:chgData name="Marie-Christine Rufener" userId="2d6664cfb518d05c" providerId="LiveId" clId="{946B3BF8-DE9F-57F9-A118-BDE1986E26EE}" dt="2026-08-17T22:14:33.332" v="9105" actId="1038"/>
           <ac:spMkLst>
             <pc:docMk/>
             <pc:sldMk cId="1317523250" sldId="281"/>
@@ -4050,7 +4050,7 @@
           </ac:spMkLst>
         </pc:spChg>
         <pc:spChg chg="mod">
-          <ac:chgData name="Marie-Christine Rufener" userId="2d6664cfb518d05c" providerId="LiveId" clId="{946B3BF8-DE9F-57F9-A118-BDE1986E26EE}" dt="2026-08-17T10:21:21.622" v="9022" actId="207"/>
+          <ac:chgData name="Marie-Christine Rufener" userId="2d6664cfb518d05c" providerId="LiveId" clId="{946B3BF8-DE9F-57F9-A118-BDE1986E26EE}" dt="2026-08-17T22:14:33.332" v="9105" actId="1038"/>
           <ac:spMkLst>
             <pc:docMk/>
             <pc:sldMk cId="1317523250" sldId="281"/>
@@ -4058,15 +4058,15 @@
           </ac:spMkLst>
         </pc:spChg>
         <pc:spChg chg="mod">
-          <ac:chgData name="Marie-Christine Rufener" userId="2d6664cfb518d05c" providerId="LiveId" clId="{946B3BF8-DE9F-57F9-A118-BDE1986E26EE}" dt="2026-08-17T10:21:21.622" v="9022" actId="207"/>
+          <ac:chgData name="Marie-Christine Rufener" userId="2d6664cfb518d05c" providerId="LiveId" clId="{946B3BF8-DE9F-57F9-A118-BDE1986E26EE}" dt="2026-08-17T22:14:33.332" v="9105" actId="1038"/>
           <ac:spMkLst>
             <pc:docMk/>
             <pc:sldMk cId="1317523250" sldId="281"/>
             <ac:spMk id="25" creationId="{4302A502-26FE-1226-6EBA-1AFC84F796ED}"/>
           </ac:spMkLst>
         </pc:spChg>
-        <pc:spChg chg="mod">
-          <ac:chgData name="Marie-Christine Rufener" userId="2d6664cfb518d05c" providerId="LiveId" clId="{946B3BF8-DE9F-57F9-A118-BDE1986E26EE}" dt="2026-08-17T10:20:39.948" v="9016" actId="207"/>
+        <pc:spChg chg="mod topLvl">
+          <ac:chgData name="Marie-Christine Rufener" userId="2d6664cfb518d05c" providerId="LiveId" clId="{946B3BF8-DE9F-57F9-A118-BDE1986E26EE}" dt="2026-08-17T22:14:33.332" v="9105" actId="1038"/>
           <ac:spMkLst>
             <pc:docMk/>
             <pc:sldMk cId="1317523250" sldId="281"/>
@@ -4074,31 +4074,47 @@
           </ac:spMkLst>
         </pc:spChg>
         <pc:spChg chg="mod">
-          <ac:chgData name="Marie-Christine Rufener" userId="2d6664cfb518d05c" providerId="LiveId" clId="{946B3BF8-DE9F-57F9-A118-BDE1986E26EE}" dt="2026-08-17T10:20:39.948" v="9016" actId="207"/>
+          <ac:chgData name="Marie-Christine Rufener" userId="2d6664cfb518d05c" providerId="LiveId" clId="{946B3BF8-DE9F-57F9-A118-BDE1986E26EE}" dt="2026-08-17T22:14:33.332" v="9105" actId="1038"/>
           <ac:spMkLst>
             <pc:docMk/>
             <pc:sldMk cId="1317523250" sldId="281"/>
             <ac:spMk id="27" creationId="{068A16A8-520E-8568-5144-6DC0A35EFD77}"/>
           </ac:spMkLst>
         </pc:spChg>
-        <pc:spChg chg="mod">
-          <ac:chgData name="Marie-Christine Rufener" userId="2d6664cfb518d05c" providerId="LiveId" clId="{946B3BF8-DE9F-57F9-A118-BDE1986E26EE}" dt="2026-08-17T10:20:39.948" v="9016" actId="207"/>
+        <pc:spChg chg="mod topLvl">
+          <ac:chgData name="Marie-Christine Rufener" userId="2d6664cfb518d05c" providerId="LiveId" clId="{946B3BF8-DE9F-57F9-A118-BDE1986E26EE}" dt="2026-08-17T22:14:33.332" v="9105" actId="1038"/>
           <ac:spMkLst>
             <pc:docMk/>
             <pc:sldMk cId="1317523250" sldId="281"/>
             <ac:spMk id="28" creationId="{A363D7A0-E6D6-5E3F-6FB1-106D74F7F6A7}"/>
           </ac:spMkLst>
         </pc:spChg>
+        <pc:spChg chg="add del mod">
+          <ac:chgData name="Marie-Christine Rufener" userId="2d6664cfb518d05c" providerId="LiveId" clId="{946B3BF8-DE9F-57F9-A118-BDE1986E26EE}" dt="2026-08-17T22:14:39.941" v="9119" actId="478"/>
+          <ac:spMkLst>
+            <pc:docMk/>
+            <pc:sldMk cId="1317523250" sldId="281"/>
+            <ac:spMk id="29" creationId="{80CE45B7-9935-6ABB-A762-EC37C1E2BCC5}"/>
+          </ac:spMkLst>
+        </pc:spChg>
         <pc:grpChg chg="mod">
-          <ac:chgData name="Marie-Christine Rufener" userId="2d6664cfb518d05c" providerId="LiveId" clId="{946B3BF8-DE9F-57F9-A118-BDE1986E26EE}" dt="2026-08-17T10:19:09.132" v="9003" actId="1076"/>
+          <ac:chgData name="Marie-Christine Rufener" userId="2d6664cfb518d05c" providerId="LiveId" clId="{946B3BF8-DE9F-57F9-A118-BDE1986E26EE}" dt="2026-08-17T10:21:38.757" v="9024" actId="1076"/>
           <ac:grpSpMkLst>
             <pc:docMk/>
             <pc:sldMk cId="1317523250" sldId="281"/>
             <ac:grpSpMk id="2" creationId="{77938A7D-FB3C-C450-051A-093FA01F5955}"/>
           </ac:grpSpMkLst>
         </pc:grpChg>
+        <pc:grpChg chg="add">
+          <ac:chgData name="Marie-Christine Rufener" userId="2d6664cfb518d05c" providerId="LiveId" clId="{946B3BF8-DE9F-57F9-A118-BDE1986E26EE}" dt="2026-08-17T22:14:54.401" v="9128" actId="164"/>
+          <ac:grpSpMkLst>
+            <pc:docMk/>
+            <pc:sldMk cId="1317523250" sldId="281"/>
+            <ac:grpSpMk id="30" creationId="{95F4C916-1E30-0A15-DB5F-8B5B6D741FF0}"/>
+          </ac:grpSpMkLst>
+        </pc:grpChg>
         <pc:cxnChg chg="mod">
-          <ac:chgData name="Marie-Christine Rufener" userId="2d6664cfb518d05c" providerId="LiveId" clId="{946B3BF8-DE9F-57F9-A118-BDE1986E26EE}" dt="2026-08-17T10:20:20.343" v="9013" actId="692"/>
+          <ac:chgData name="Marie-Christine Rufener" userId="2d6664cfb518d05c" providerId="LiveId" clId="{946B3BF8-DE9F-57F9-A118-BDE1986E26EE}" dt="2026-08-17T22:14:03.042" v="9068" actId="1037"/>
           <ac:cxnSpMkLst>
             <pc:docMk/>
             <pc:sldMk cId="1317523250" sldId="281"/>
@@ -4106,7 +4122,7 @@
           </ac:cxnSpMkLst>
         </pc:cxnChg>
         <pc:cxnChg chg="mod">
-          <ac:chgData name="Marie-Christine Rufener" userId="2d6664cfb518d05c" providerId="LiveId" clId="{946B3BF8-DE9F-57F9-A118-BDE1986E26EE}" dt="2026-08-17T10:20:20.343" v="9013" actId="692"/>
+          <ac:chgData name="Marie-Christine Rufener" userId="2d6664cfb518d05c" providerId="LiveId" clId="{946B3BF8-DE9F-57F9-A118-BDE1986E26EE}" dt="2026-08-17T22:14:38.396" v="9118" actId="1037"/>
           <ac:cxnSpMkLst>
             <pc:docMk/>
             <pc:sldMk cId="1317523250" sldId="281"/>
@@ -33850,10 +33866,10 @@
       </p:grpSpPr>
       <p:grpSp>
         <p:nvGrpSpPr>
-          <p:cNvPr id="2" name="Group 1">
+          <p:cNvPr id="30" name="Group 29">
             <a:extLst>
               <a:ext uri="{FF2B5EF4-FFF2-40B4-BE49-F238E27FC236}">
-                <a16:creationId xmlns:a16="http://schemas.microsoft.com/office/drawing/2014/main" id="{77938A7D-FB3C-C450-051A-093FA01F5955}"/>
+                <a16:creationId xmlns:a16="http://schemas.microsoft.com/office/drawing/2014/main" id="{95F4C916-1E30-0A15-DB5F-8B5B6D741FF0}"/>
               </a:ext>
             </a:extLst>
           </p:cNvPr>
@@ -33862,10 +33878,10 @@
         </p:nvGrpSpPr>
         <p:grpSpPr>
           <a:xfrm>
-            <a:off x="84666" y="1232221"/>
-            <a:ext cx="11798305" cy="4549527"/>
-            <a:chOff x="84666" y="1232221"/>
-            <a:chExt cx="11798305" cy="4549527"/>
+            <a:off x="-803618" y="1023213"/>
+            <a:ext cx="13496488" cy="4758535"/>
+            <a:chOff x="-803618" y="1023213"/>
+            <a:chExt cx="13496488" cy="4758535"/>
           </a:xfrm>
         </p:grpSpPr>
         <p:sp>
@@ -34290,7 +34306,7 @@
           </p:nvSpPr>
           <p:spPr>
             <a:xfrm>
-              <a:off x="106262" y="1846678"/>
+              <a:off x="-782022" y="1846678"/>
               <a:ext cx="3441272" cy="3927589"/>
             </a:xfrm>
             <a:custGeom>
@@ -34698,7 +34714,7 @@
           </p:nvSpPr>
           <p:spPr>
             <a:xfrm>
-              <a:off x="84666" y="1232221"/>
+              <a:off x="-803618" y="1023213"/>
               <a:ext cx="3420536" cy="430887"/>
             </a:xfrm>
             <a:prstGeom prst="rect">
@@ -34741,7 +34757,7 @@
               </p:nvSpPr>
               <p:spPr>
                 <a:xfrm>
-                  <a:off x="525247" y="2619519"/>
+                  <a:off x="-363037" y="2619519"/>
                   <a:ext cx="2480102" cy="338554"/>
                 </a:xfrm>
                 <a:prstGeom prst="rect">
@@ -34962,7 +34978,7 @@
               </p:nvSpPr>
               <p:spPr>
                 <a:xfrm>
-                  <a:off x="525247" y="2619519"/>
+                  <a:off x="-363037" y="2619519"/>
                   <a:ext cx="2480102" cy="338554"/>
                 </a:xfrm>
                 <a:prstGeom prst="rect">
@@ -35006,7 +35022,7 @@
               </p:nvSpPr>
               <p:spPr>
                 <a:xfrm>
-                  <a:off x="805032" y="3976818"/>
+                  <a:off x="-83252" y="3976818"/>
                   <a:ext cx="1861022" cy="338554"/>
                 </a:xfrm>
                 <a:prstGeom prst="rect">
@@ -35240,7 +35256,7 @@
               </p:nvSpPr>
               <p:spPr>
                 <a:xfrm>
-                  <a:off x="805032" y="3976818"/>
+                  <a:off x="-83252" y="3976818"/>
                   <a:ext cx="1861022" cy="338554"/>
                 </a:xfrm>
                 <a:prstGeom prst="rect">
@@ -35249,7 +35265,7 @@
                 <a:blipFill>
                   <a:blip r:embed="rId3"/>
                   <a:stretch>
-                    <a:fillRect l="-3401" t="-7143" r="-1361" b="-35714"/>
+                    <a:fillRect l="-3378" t="-7143" r="-676" b="-35714"/>
                   </a:stretch>
                 </a:blipFill>
               </p:spPr>
@@ -35284,7 +35300,7 @@
               </p:nvSpPr>
               <p:spPr>
                 <a:xfrm>
-                  <a:off x="1208440" y="5179108"/>
+                  <a:off x="320156" y="5179108"/>
                   <a:ext cx="950004" cy="371640"/>
                 </a:xfrm>
                 <a:prstGeom prst="rect">
@@ -35467,7 +35483,7 @@
               </p:nvSpPr>
               <p:spPr>
                 <a:xfrm>
-                  <a:off x="1208440" y="5179108"/>
+                  <a:off x="320156" y="5179108"/>
                   <a:ext cx="950004" cy="371640"/>
                 </a:xfrm>
                 <a:prstGeom prst="rect">
@@ -35476,7 +35492,7 @@
                 <a:blipFill>
                   <a:blip r:embed="rId4"/>
                   <a:stretch>
-                    <a:fillRect l="-8000" t="-6667" r="-4000" b="-36667"/>
+                    <a:fillRect l="-6667" t="-6667" r="-4000" b="-36667"/>
                   </a:stretch>
                 </a:blipFill>
               </p:spPr>
@@ -35509,7 +35525,7 @@
           </p:nvSpPr>
           <p:spPr>
             <a:xfrm>
-              <a:off x="338506" y="2117613"/>
+              <a:off x="-549778" y="2117613"/>
               <a:ext cx="2777067" cy="400110"/>
             </a:xfrm>
             <a:prstGeom prst="rect">
@@ -35582,7 +35598,7 @@
           </p:nvSpPr>
           <p:spPr>
             <a:xfrm>
-              <a:off x="4224865" y="1232221"/>
+              <a:off x="4224865" y="1023213"/>
               <a:ext cx="3420536" cy="430887"/>
             </a:xfrm>
             <a:prstGeom prst="rect">
@@ -35623,7 +35639,7 @@
           </p:nvSpPr>
           <p:spPr>
             <a:xfrm>
-              <a:off x="8322732" y="1232221"/>
+              <a:off x="9132631" y="1023213"/>
               <a:ext cx="3462868" cy="430887"/>
             </a:xfrm>
             <a:prstGeom prst="rect">
@@ -35664,7 +35680,7 @@
           </p:nvSpPr>
           <p:spPr>
             <a:xfrm>
-              <a:off x="376765" y="3497104"/>
+              <a:off x="-511519" y="3497104"/>
               <a:ext cx="2777067" cy="400110"/>
             </a:xfrm>
             <a:prstGeom prst="rect">
@@ -35737,7 +35753,7 @@
           </p:nvSpPr>
           <p:spPr>
             <a:xfrm>
-              <a:off x="299114" y="4754264"/>
+              <a:off x="-589170" y="4754264"/>
               <a:ext cx="2777067" cy="400110"/>
             </a:xfrm>
             <a:prstGeom prst="rect">
@@ -35812,7 +35828,7 @@
           </p:nvCxnSpPr>
           <p:spPr>
             <a:xfrm>
-              <a:off x="3843866" y="1846680"/>
+              <a:off x="3425855" y="1846680"/>
               <a:ext cx="0" cy="3927588"/>
             </a:xfrm>
             <a:prstGeom prst="line">
@@ -35857,7 +35873,7 @@
           </p:nvCxnSpPr>
           <p:spPr>
             <a:xfrm>
-              <a:off x="8026399" y="1846680"/>
+              <a:off x="8444411" y="1846680"/>
               <a:ext cx="0" cy="3927588"/>
             </a:xfrm>
             <a:prstGeom prst="line">
@@ -36863,7 +36879,7 @@
           </p:nvSpPr>
           <p:spPr>
             <a:xfrm>
-              <a:off x="8441699" y="1854159"/>
+              <a:off x="9251598" y="1854159"/>
               <a:ext cx="3441272" cy="3927589"/>
             </a:xfrm>
             <a:custGeom>
@@ -37273,7 +37289,7 @@
               </p:nvSpPr>
               <p:spPr>
                 <a:xfrm>
-                  <a:off x="8977352" y="2614952"/>
+                  <a:off x="9787251" y="2614952"/>
                   <a:ext cx="2560381" cy="338554"/>
                 </a:xfrm>
                 <a:prstGeom prst="rect">
@@ -37465,7 +37481,7 @@
               </p:nvSpPr>
               <p:spPr>
                 <a:xfrm>
-                  <a:off x="8977352" y="2614952"/>
+                  <a:off x="9787251" y="2614952"/>
                   <a:ext cx="2560381" cy="338554"/>
                 </a:xfrm>
                 <a:prstGeom prst="rect">
@@ -37474,7 +37490,7 @@
                 <a:blipFill>
                   <a:blip r:embed="rId8"/>
                   <a:stretch>
-                    <a:fillRect l="-2475" t="-7143" b="-32143"/>
+                    <a:fillRect l="-1970" t="-7143" b="-32143"/>
                   </a:stretch>
                 </a:blipFill>
               </p:spPr>
@@ -37509,7 +37525,7 @@
               </p:nvSpPr>
               <p:spPr>
                 <a:xfrm>
-                  <a:off x="9182959" y="3905977"/>
+                  <a:off x="9992858" y="3905977"/>
                   <a:ext cx="1861022" cy="338554"/>
                 </a:xfrm>
                 <a:prstGeom prst="rect">
@@ -37743,7 +37759,7 @@
               </p:nvSpPr>
               <p:spPr>
                 <a:xfrm>
-                  <a:off x="9182959" y="3905977"/>
+                  <a:off x="9992858" y="3905977"/>
                   <a:ext cx="1861022" cy="338554"/>
                 </a:xfrm>
                 <a:prstGeom prst="rect">
@@ -37752,7 +37768,7 @@
                 <a:blipFill>
                   <a:blip r:embed="rId9"/>
                   <a:stretch>
-                    <a:fillRect l="-2703" t="-10714" r="-1351" b="-32143"/>
+                    <a:fillRect l="-3378" t="-10714" r="-1351" b="-32143"/>
                   </a:stretch>
                 </a:blipFill>
               </p:spPr>
@@ -37787,7 +37803,7 @@
               </p:nvSpPr>
               <p:spPr>
                 <a:xfrm>
-                  <a:off x="9250534" y="5155916"/>
+                  <a:off x="10060433" y="5155916"/>
                   <a:ext cx="1795235" cy="371640"/>
                 </a:xfrm>
                 <a:prstGeom prst="rect">
@@ -37995,7 +38011,7 @@
               </p:nvSpPr>
               <p:spPr>
                 <a:xfrm>
-                  <a:off x="9250534" y="5155916"/>
+                  <a:off x="10060433" y="5155916"/>
                   <a:ext cx="1795235" cy="371640"/>
                 </a:xfrm>
                 <a:prstGeom prst="rect">
@@ -38037,7 +38053,7 @@
           </p:nvSpPr>
           <p:spPr>
             <a:xfrm>
-              <a:off x="8716433" y="2046772"/>
+              <a:off x="9526332" y="2046772"/>
               <a:ext cx="2777067" cy="400110"/>
             </a:xfrm>
             <a:prstGeom prst="rect">
@@ -38110,7 +38126,7 @@
           </p:nvSpPr>
           <p:spPr>
             <a:xfrm>
-              <a:off x="8754692" y="3426263"/>
+              <a:off x="9564591" y="3426263"/>
               <a:ext cx="2777067" cy="400110"/>
             </a:xfrm>
             <a:prstGeom prst="rect">
@@ -38183,7 +38199,7 @@
           </p:nvSpPr>
           <p:spPr>
             <a:xfrm>
-              <a:off x="8677041" y="4683423"/>
+              <a:off x="9486940" y="4683423"/>
               <a:ext cx="2777067" cy="400110"/>
             </a:xfrm>
             <a:prstGeom prst="rect">

--- a/Figuras/Figuras_prep.pptx
+++ b/Figuras/Figuras_prep.pptx
@@ -25,6 +25,10 @@
     <p:sldId id="276" r:id="rId19"/>
     <p:sldId id="277" r:id="rId20"/>
     <p:sldId id="281" r:id="rId21"/>
+    <p:sldId id="282" r:id="rId22"/>
+    <p:sldId id="283" r:id="rId23"/>
+    <p:sldId id="284" r:id="rId24"/>
+    <p:sldId id="285" r:id="rId25"/>
   </p:sldIdLst>
   <p:sldSz cx="12192000" cy="6858000"/>
   <p:notesSz cx="6858000" cy="9144000"/>
@@ -134,7 +138,7 @@
 <file path=ppt/revisionInfo.xml><?xml version="1.0" encoding="utf-8"?>
 <p1510:revInfo xmlns:a="http://schemas.openxmlformats.org/drawingml/2006/main" xmlns:r="http://schemas.openxmlformats.org/officeDocument/2006/relationships" xmlns:p1510="http://schemas.microsoft.com/office/powerpoint/2015/10/main">
   <p1510:revLst>
-    <p1510:client id="{E8589E22-55F0-D245-B7BA-3FB71ADCAD28}" v="549" dt="2026-08-17T10:21:21.622"/>
+    <p1510:client id="{E8589E22-55F0-D245-B7BA-3FB71ADCAD28}" v="21" dt="2026-08-22T10:10:13.162"/>
   </p1510:revLst>
 </p1510:revInfo>
 </file>
@@ -144,7 +148,7 @@
   <pc:docChgLst>
     <pc:chgData name="Marie-Christine Rufener" userId="2d6664cfb518d05c" providerId="LiveId" clId="{946B3BF8-DE9F-57F9-A118-BDE1986E26EE}"/>
     <pc:docChg chg="undo redo custSel addSld delSld modSld sldOrd">
-      <pc:chgData name="Marie-Christine Rufener" userId="2d6664cfb518d05c" providerId="LiveId" clId="{946B3BF8-DE9F-57F9-A118-BDE1986E26EE}" dt="2026-08-17T22:14:54.401" v="9128" actId="164"/>
+      <pc:chgData name="Marie-Christine Rufener" userId="2d6664cfb518d05c" providerId="LiveId" clId="{946B3BF8-DE9F-57F9-A118-BDE1986E26EE}" dt="2026-08-22T10:10:31.425" v="9178" actId="1076"/>
       <pc:docMkLst>
         <pc:docMk/>
       </pc:docMkLst>
@@ -4089,22 +4093,6 @@
             <ac:spMk id="28" creationId="{A363D7A0-E6D6-5E3F-6FB1-106D74F7F6A7}"/>
           </ac:spMkLst>
         </pc:spChg>
-        <pc:spChg chg="add del mod">
-          <ac:chgData name="Marie-Christine Rufener" userId="2d6664cfb518d05c" providerId="LiveId" clId="{946B3BF8-DE9F-57F9-A118-BDE1986E26EE}" dt="2026-08-17T22:14:39.941" v="9119" actId="478"/>
-          <ac:spMkLst>
-            <pc:docMk/>
-            <pc:sldMk cId="1317523250" sldId="281"/>
-            <ac:spMk id="29" creationId="{80CE45B7-9935-6ABB-A762-EC37C1E2BCC5}"/>
-          </ac:spMkLst>
-        </pc:spChg>
-        <pc:grpChg chg="mod">
-          <ac:chgData name="Marie-Christine Rufener" userId="2d6664cfb518d05c" providerId="LiveId" clId="{946B3BF8-DE9F-57F9-A118-BDE1986E26EE}" dt="2026-08-17T10:21:38.757" v="9024" actId="1076"/>
-          <ac:grpSpMkLst>
-            <pc:docMk/>
-            <pc:sldMk cId="1317523250" sldId="281"/>
-            <ac:grpSpMk id="2" creationId="{77938A7D-FB3C-C450-051A-093FA01F5955}"/>
-          </ac:grpSpMkLst>
-        </pc:grpChg>
         <pc:grpChg chg="add">
           <ac:chgData name="Marie-Christine Rufener" userId="2d6664cfb518d05c" providerId="LiveId" clId="{946B3BF8-DE9F-57F9-A118-BDE1986E26EE}" dt="2026-08-17T22:14:54.401" v="9128" actId="164"/>
           <ac:grpSpMkLst>
@@ -4129,6 +4117,114 @@
             <ac:cxnSpMk id="15" creationId="{922A6003-142C-4B10-7490-97E0604702D6}"/>
           </ac:cxnSpMkLst>
         </pc:cxnChg>
+      </pc:sldChg>
+      <pc:sldChg chg="addSp delSp modSp new mod setBg">
+        <pc:chgData name="Marie-Christine Rufener" userId="2d6664cfb518d05c" providerId="LiveId" clId="{946B3BF8-DE9F-57F9-A118-BDE1986E26EE}" dt="2026-08-22T10:03:03.570" v="9139" actId="732"/>
+        <pc:sldMkLst>
+          <pc:docMk/>
+          <pc:sldMk cId="2196613137" sldId="282"/>
+        </pc:sldMkLst>
+        <pc:spChg chg="add del">
+          <ac:chgData name="Marie-Christine Rufener" userId="2d6664cfb518d05c" providerId="LiveId" clId="{946B3BF8-DE9F-57F9-A118-BDE1986E26EE}" dt="2026-08-22T10:02:45.288" v="9135" actId="26606"/>
+          <ac:spMkLst>
+            <pc:docMk/>
+            <pc:sldMk cId="2196613137" sldId="282"/>
+            <ac:spMk id="1031" creationId="{5D9FC6AC-4A12-4825-8ABE-0732B8EF4D16}"/>
+          </ac:spMkLst>
+        </pc:spChg>
+        <pc:picChg chg="add mod">
+          <ac:chgData name="Marie-Christine Rufener" userId="2d6664cfb518d05c" providerId="LiveId" clId="{946B3BF8-DE9F-57F9-A118-BDE1986E26EE}" dt="2026-08-22T10:03:03.570" v="9139" actId="732"/>
+          <ac:picMkLst>
+            <pc:docMk/>
+            <pc:sldMk cId="2196613137" sldId="282"/>
+            <ac:picMk id="1026" creationId="{8E9DC94A-3FF6-F4C0-0F38-5E1511D95ED6}"/>
+          </ac:picMkLst>
+        </pc:picChg>
+      </pc:sldChg>
+      <pc:sldChg chg="addSp modSp add">
+        <pc:chgData name="Marie-Christine Rufener" userId="2d6664cfb518d05c" providerId="LiveId" clId="{946B3BF8-DE9F-57F9-A118-BDE1986E26EE}" dt="2026-08-22T10:04:21.544" v="9141" actId="1076"/>
+        <pc:sldMkLst>
+          <pc:docMk/>
+          <pc:sldMk cId="1975754424" sldId="283"/>
+        </pc:sldMkLst>
+        <pc:picChg chg="add mod">
+          <ac:chgData name="Marie-Christine Rufener" userId="2d6664cfb518d05c" providerId="LiveId" clId="{946B3BF8-DE9F-57F9-A118-BDE1986E26EE}" dt="2026-08-22T10:04:21.544" v="9141" actId="1076"/>
+          <ac:picMkLst>
+            <pc:docMk/>
+            <pc:sldMk cId="1975754424" sldId="283"/>
+            <ac:picMk id="2050" creationId="{239F9DE5-55BA-774F-73A8-800A0C1CA630}"/>
+          </ac:picMkLst>
+        </pc:picChg>
+      </pc:sldChg>
+      <pc:sldChg chg="addSp delSp modSp add mod">
+        <pc:chgData name="Marie-Christine Rufener" userId="2d6664cfb518d05c" providerId="LiveId" clId="{946B3BF8-DE9F-57F9-A118-BDE1986E26EE}" dt="2026-08-22T10:10:31.425" v="9178" actId="1076"/>
+        <pc:sldMkLst>
+          <pc:docMk/>
+          <pc:sldMk cId="3962258064" sldId="284"/>
+        </pc:sldMkLst>
+        <pc:spChg chg="add mod">
+          <ac:chgData name="Marie-Christine Rufener" userId="2d6664cfb518d05c" providerId="LiveId" clId="{946B3BF8-DE9F-57F9-A118-BDE1986E26EE}" dt="2026-08-22T10:09:08.968" v="9163" actId="1036"/>
+          <ac:spMkLst>
+            <pc:docMk/>
+            <pc:sldMk cId="3962258064" sldId="284"/>
+            <ac:spMk id="4" creationId="{0D3BD8A8-6919-2EA8-2378-57451C8684EE}"/>
+          </ac:spMkLst>
+        </pc:spChg>
+        <pc:grpChg chg="add mod">
+          <ac:chgData name="Marie-Christine Rufener" userId="2d6664cfb518d05c" providerId="LiveId" clId="{946B3BF8-DE9F-57F9-A118-BDE1986E26EE}" dt="2026-08-22T10:10:16.296" v="9177" actId="1076"/>
+          <ac:grpSpMkLst>
+            <pc:docMk/>
+            <pc:sldMk cId="3962258064" sldId="284"/>
+            <ac:grpSpMk id="5" creationId="{6579B60F-34F7-F1FA-F016-0D4D356A9214}"/>
+          </ac:grpSpMkLst>
+        </pc:grpChg>
+        <pc:picChg chg="add mod">
+          <ac:chgData name="Marie-Christine Rufener" userId="2d6664cfb518d05c" providerId="LiveId" clId="{946B3BF8-DE9F-57F9-A118-BDE1986E26EE}" dt="2026-08-22T10:10:31.425" v="9178" actId="1076"/>
+          <ac:picMkLst>
+            <pc:docMk/>
+            <pc:sldMk cId="3962258064" sldId="284"/>
+            <ac:picMk id="2" creationId="{B3FAAE97-4673-0181-2C11-49A4B43CA8FE}"/>
+          </ac:picMkLst>
+        </pc:picChg>
+        <pc:picChg chg="add mod modCrop">
+          <ac:chgData name="Marie-Christine Rufener" userId="2d6664cfb518d05c" providerId="LiveId" clId="{946B3BF8-DE9F-57F9-A118-BDE1986E26EE}" dt="2026-08-22T10:09:27.469" v="9165" actId="732"/>
+          <ac:picMkLst>
+            <pc:docMk/>
+            <pc:sldMk cId="3962258064" sldId="284"/>
+            <ac:picMk id="3" creationId="{9F79A26B-FA51-47FD-26B4-8D6C746012D5}"/>
+          </ac:picMkLst>
+        </pc:picChg>
+        <pc:picChg chg="add mod modCrop">
+          <ac:chgData name="Marie-Christine Rufener" userId="2d6664cfb518d05c" providerId="LiveId" clId="{946B3BF8-DE9F-57F9-A118-BDE1986E26EE}" dt="2026-08-22T10:09:59.783" v="9172" actId="1076"/>
+          <ac:picMkLst>
+            <pc:docMk/>
+            <pc:sldMk cId="3962258064" sldId="284"/>
+            <ac:picMk id="6" creationId="{B68B9E57-02E6-CFA7-FCD2-45DE31B0FF1F}"/>
+          </ac:picMkLst>
+        </pc:picChg>
+        <pc:picChg chg="add mod">
+          <ac:chgData name="Marie-Christine Rufener" userId="2d6664cfb518d05c" providerId="LiveId" clId="{946B3BF8-DE9F-57F9-A118-BDE1986E26EE}" dt="2026-08-22T10:10:13.162" v="9176" actId="1076"/>
+          <ac:picMkLst>
+            <pc:docMk/>
+            <pc:sldMk cId="3962258064" sldId="284"/>
+            <ac:picMk id="7" creationId="{76FD31FE-3C38-5E34-241A-3DC409B34221}"/>
+          </ac:picMkLst>
+        </pc:picChg>
+        <pc:picChg chg="add del mod">
+          <ac:chgData name="Marie-Christine Rufener" userId="2d6664cfb518d05c" providerId="LiveId" clId="{946B3BF8-DE9F-57F9-A118-BDE1986E26EE}" dt="2026-08-22T10:06:05.591" v="9145" actId="478"/>
+          <ac:picMkLst>
+            <pc:docMk/>
+            <pc:sldMk cId="3962258064" sldId="284"/>
+            <ac:picMk id="3074" creationId="{1AFCAB7C-4062-3C45-D84F-B811402893B8}"/>
+          </ac:picMkLst>
+        </pc:picChg>
+      </pc:sldChg>
+      <pc:sldChg chg="add">
+        <pc:chgData name="Marie-Christine Rufener" userId="2d6664cfb518d05c" providerId="LiveId" clId="{946B3BF8-DE9F-57F9-A118-BDE1986E26EE}" dt="2026-08-22T10:01:09.405" v="9132"/>
+        <pc:sldMkLst>
+          <pc:docMk/>
+          <pc:sldMk cId="2176431548" sldId="285"/>
+        </pc:sldMkLst>
       </pc:sldChg>
     </pc:docChg>
   </pc:docChgLst>
@@ -4284,7 +4380,7 @@
           <a:p>
             <a:fld id="{A24C7027-DE3B-0D4D-B218-F2412BF8B166}" type="datetimeFigureOut">
               <a:rPr lang="en-US" smtClean="0"/>
-              <a:t>8/13/26</a:t>
+              <a:t>8/22/26</a:t>
             </a:fld>
             <a:endParaRPr lang="en-US"/>
           </a:p>
@@ -4484,7 +4580,7 @@
           <a:p>
             <a:fld id="{A24C7027-DE3B-0D4D-B218-F2412BF8B166}" type="datetimeFigureOut">
               <a:rPr lang="en-US" smtClean="0"/>
-              <a:t>8/13/26</a:t>
+              <a:t>8/22/26</a:t>
             </a:fld>
             <a:endParaRPr lang="en-US"/>
           </a:p>
@@ -4694,7 +4790,7 @@
           <a:p>
             <a:fld id="{A24C7027-DE3B-0D4D-B218-F2412BF8B166}" type="datetimeFigureOut">
               <a:rPr lang="en-US" smtClean="0"/>
-              <a:t>8/13/26</a:t>
+              <a:t>8/22/26</a:t>
             </a:fld>
             <a:endParaRPr lang="en-US"/>
           </a:p>
@@ -4894,7 +4990,7 @@
           <a:p>
             <a:fld id="{A24C7027-DE3B-0D4D-B218-F2412BF8B166}" type="datetimeFigureOut">
               <a:rPr lang="en-US" smtClean="0"/>
-              <a:t>8/13/26</a:t>
+              <a:t>8/22/26</a:t>
             </a:fld>
             <a:endParaRPr lang="en-US"/>
           </a:p>
@@ -5170,7 +5266,7 @@
           <a:p>
             <a:fld id="{A24C7027-DE3B-0D4D-B218-F2412BF8B166}" type="datetimeFigureOut">
               <a:rPr lang="en-US" smtClean="0"/>
-              <a:t>8/13/26</a:t>
+              <a:t>8/22/26</a:t>
             </a:fld>
             <a:endParaRPr lang="en-US"/>
           </a:p>
@@ -5438,7 +5534,7 @@
           <a:p>
             <a:fld id="{A24C7027-DE3B-0D4D-B218-F2412BF8B166}" type="datetimeFigureOut">
               <a:rPr lang="en-US" smtClean="0"/>
-              <a:t>8/13/26</a:t>
+              <a:t>8/22/26</a:t>
             </a:fld>
             <a:endParaRPr lang="en-US"/>
           </a:p>
@@ -5853,7 +5949,7 @@
           <a:p>
             <a:fld id="{A24C7027-DE3B-0D4D-B218-F2412BF8B166}" type="datetimeFigureOut">
               <a:rPr lang="en-US" smtClean="0"/>
-              <a:t>8/13/26</a:t>
+              <a:t>8/22/26</a:t>
             </a:fld>
             <a:endParaRPr lang="en-US"/>
           </a:p>
@@ -5995,7 +6091,7 @@
           <a:p>
             <a:fld id="{A24C7027-DE3B-0D4D-B218-F2412BF8B166}" type="datetimeFigureOut">
               <a:rPr lang="en-US" smtClean="0"/>
-              <a:t>8/13/26</a:t>
+              <a:t>8/22/26</a:t>
             </a:fld>
             <a:endParaRPr lang="en-US"/>
           </a:p>
@@ -6108,7 +6204,7 @@
           <a:p>
             <a:fld id="{A24C7027-DE3B-0D4D-B218-F2412BF8B166}" type="datetimeFigureOut">
               <a:rPr lang="en-US" smtClean="0"/>
-              <a:t>8/13/26</a:t>
+              <a:t>8/22/26</a:t>
             </a:fld>
             <a:endParaRPr lang="en-US"/>
           </a:p>
@@ -6421,7 +6517,7 @@
           <a:p>
             <a:fld id="{A24C7027-DE3B-0D4D-B218-F2412BF8B166}" type="datetimeFigureOut">
               <a:rPr lang="en-US" smtClean="0"/>
-              <a:t>8/13/26</a:t>
+              <a:t>8/22/26</a:t>
             </a:fld>
             <a:endParaRPr lang="en-US"/>
           </a:p>
@@ -6710,7 +6806,7 @@
           <a:p>
             <a:fld id="{A24C7027-DE3B-0D4D-B218-F2412BF8B166}" type="datetimeFigureOut">
               <a:rPr lang="en-US" smtClean="0"/>
-              <a:t>8/13/26</a:t>
+              <a:t>8/22/26</a:t>
             </a:fld>
             <a:endParaRPr lang="en-US"/>
           </a:p>
@@ -6953,7 +7049,7 @@
           <a:p>
             <a:fld id="{A24C7027-DE3B-0D4D-B218-F2412BF8B166}" type="datetimeFigureOut">
               <a:rPr lang="en-US" smtClean="0"/>
-              <a:t>8/13/26</a:t>
+              <a:t>8/22/26</a:t>
             </a:fld>
             <a:endParaRPr lang="en-US"/>
           </a:p>
@@ -10458,8 +10554,8 @@
             </a:p>
           </p:txBody>
         </p:sp>
-        <mc:AlternateContent xmlns:mc="http://schemas.openxmlformats.org/markup-compatibility/2006">
-          <mc:Choice xmlns:a14="http://schemas.microsoft.com/office/drawing/2010/main" Requires="a14">
+        <mc:AlternateContent xmlns:mc="http://schemas.openxmlformats.org/markup-compatibility/2006" xmlns:a14="http://schemas.microsoft.com/office/drawing/2010/main">
+          <mc:Choice Requires="a14">
             <p:sp>
               <p:nvSpPr>
                 <p:cNvPr id="11" name="TextBox 10">
@@ -10746,7 +10842,7 @@
               </p:txBody>
             </p:sp>
           </mc:Choice>
-          <mc:Fallback>
+          <mc:Fallback xmlns="">
             <p:sp>
               <p:nvSpPr>
                 <p:cNvPr id="11" name="TextBox 10">
@@ -12340,8 +12436,8 @@
               </a:fontRef>
             </p:style>
           </p:cxnSp>
-          <mc:AlternateContent xmlns:mc="http://schemas.openxmlformats.org/markup-compatibility/2006">
-            <mc:Choice xmlns:a14="http://schemas.microsoft.com/office/drawing/2010/main" Requires="a14">
+          <mc:AlternateContent xmlns:mc="http://schemas.openxmlformats.org/markup-compatibility/2006" xmlns:a14="http://schemas.microsoft.com/office/drawing/2010/main">
+            <mc:Choice Requires="a14">
               <p:sp>
                 <p:nvSpPr>
                   <p:cNvPr id="32" name="TextBox 31">
@@ -12370,6 +12466,7 @@
                   </a:bodyPr>
                   <a:lstStyle/>
                   <a:p>
+                    <a:pPr/>
                     <a14:m>
                       <m:oMathPara xmlns:m="http://schemas.openxmlformats.org/officeDocument/2006/math">
                         <m:oMathParaPr>
@@ -12403,7 +12500,7 @@
                 </p:txBody>
               </p:sp>
             </mc:Choice>
-            <mc:Fallback>
+            <mc:Fallback xmlns="">
               <p:sp>
                 <p:nvSpPr>
                   <p:cNvPr id="32" name="TextBox 31">
@@ -12500,8 +12597,8 @@
               </a:p>
             </p:txBody>
           </p:sp>
-          <mc:AlternateContent xmlns:mc="http://schemas.openxmlformats.org/markup-compatibility/2006">
-            <mc:Choice xmlns:a14="http://schemas.microsoft.com/office/drawing/2010/main" Requires="a14">
+          <mc:AlternateContent xmlns:mc="http://schemas.openxmlformats.org/markup-compatibility/2006" xmlns:a14="http://schemas.microsoft.com/office/drawing/2010/main">
+            <mc:Choice Requires="a14">
               <p:sp>
                 <p:nvSpPr>
                   <p:cNvPr id="37" name="TextBox 36">
@@ -12530,6 +12627,7 @@
                   </a:bodyPr>
                   <a:lstStyle/>
                   <a:p>
+                    <a:pPr/>
                     <a14:m>
                       <m:oMathPara xmlns:m="http://schemas.openxmlformats.org/officeDocument/2006/math">
                         <m:oMathParaPr>
@@ -12589,7 +12687,7 @@
                 </p:txBody>
               </p:sp>
             </mc:Choice>
-            <mc:Fallback>
+            <mc:Fallback xmlns="">
               <p:sp>
                 <p:nvSpPr>
                   <p:cNvPr id="37" name="TextBox 36">
@@ -12634,8 +12732,8 @@
               </p:sp>
             </mc:Fallback>
           </mc:AlternateContent>
-          <mc:AlternateContent xmlns:mc="http://schemas.openxmlformats.org/markup-compatibility/2006">
-            <mc:Choice xmlns:a14="http://schemas.microsoft.com/office/drawing/2010/main" Requires="a14">
+          <mc:AlternateContent xmlns:mc="http://schemas.openxmlformats.org/markup-compatibility/2006" xmlns:a14="http://schemas.microsoft.com/office/drawing/2010/main">
+            <mc:Choice Requires="a14">
               <p:sp>
                 <p:nvSpPr>
                   <p:cNvPr id="38" name="TextBox 37">
@@ -12664,6 +12762,7 @@
                   </a:bodyPr>
                   <a:lstStyle/>
                   <a:p>
+                    <a:pPr/>
                     <a14:m>
                       <m:oMathPara xmlns:m="http://schemas.openxmlformats.org/officeDocument/2006/math">
                         <m:oMathParaPr>
@@ -12726,7 +12825,7 @@
                 </p:txBody>
               </p:sp>
             </mc:Choice>
-            <mc:Fallback>
+            <mc:Fallback xmlns="">
               <p:sp>
                 <p:nvSpPr>
                   <p:cNvPr id="38" name="TextBox 37">
@@ -12771,8 +12870,8 @@
               </p:sp>
             </mc:Fallback>
           </mc:AlternateContent>
-          <mc:AlternateContent xmlns:mc="http://schemas.openxmlformats.org/markup-compatibility/2006">
-            <mc:Choice xmlns:a14="http://schemas.microsoft.com/office/drawing/2010/main" Requires="a14">
+          <mc:AlternateContent xmlns:mc="http://schemas.openxmlformats.org/markup-compatibility/2006" xmlns:a14="http://schemas.microsoft.com/office/drawing/2010/main">
+            <mc:Choice Requires="a14">
               <p:sp>
                 <p:nvSpPr>
                   <p:cNvPr id="39" name="TextBox 38">
@@ -12801,6 +12900,7 @@
                   </a:bodyPr>
                   <a:lstStyle/>
                   <a:p>
+                    <a:pPr/>
                     <a14:m>
                       <m:oMathPara xmlns:m="http://schemas.openxmlformats.org/officeDocument/2006/math">
                         <m:oMathParaPr>
@@ -12863,7 +12963,7 @@
                 </p:txBody>
               </p:sp>
             </mc:Choice>
-            <mc:Fallback>
+            <mc:Fallback xmlns="">
               <p:sp>
                 <p:nvSpPr>
                   <p:cNvPr id="39" name="TextBox 38">
@@ -12908,8 +13008,8 @@
               </p:sp>
             </mc:Fallback>
           </mc:AlternateContent>
-          <mc:AlternateContent xmlns:mc="http://schemas.openxmlformats.org/markup-compatibility/2006">
-            <mc:Choice xmlns:a14="http://schemas.microsoft.com/office/drawing/2010/main" Requires="a14">
+          <mc:AlternateContent xmlns:mc="http://schemas.openxmlformats.org/markup-compatibility/2006" xmlns:a14="http://schemas.microsoft.com/office/drawing/2010/main">
+            <mc:Choice Requires="a14">
               <p:sp>
                 <p:nvSpPr>
                   <p:cNvPr id="40" name="TextBox 39">
@@ -12938,6 +13038,7 @@
                   </a:bodyPr>
                   <a:lstStyle/>
                   <a:p>
+                    <a:pPr/>
                     <a14:m>
                       <m:oMathPara xmlns:m="http://schemas.openxmlformats.org/officeDocument/2006/math">
                         <m:oMathParaPr>
@@ -13000,7 +13101,7 @@
                 </p:txBody>
               </p:sp>
             </mc:Choice>
-            <mc:Fallback>
+            <mc:Fallback xmlns="">
               <p:sp>
                 <p:nvSpPr>
                   <p:cNvPr id="40" name="TextBox 39">
@@ -13045,8 +13146,8 @@
               </p:sp>
             </mc:Fallback>
           </mc:AlternateContent>
-          <mc:AlternateContent xmlns:mc="http://schemas.openxmlformats.org/markup-compatibility/2006">
-            <mc:Choice xmlns:a14="http://schemas.microsoft.com/office/drawing/2010/main" Requires="a14">
+          <mc:AlternateContent xmlns:mc="http://schemas.openxmlformats.org/markup-compatibility/2006" xmlns:a14="http://schemas.microsoft.com/office/drawing/2010/main">
+            <mc:Choice Requires="a14">
               <p:sp>
                 <p:nvSpPr>
                   <p:cNvPr id="41" name="TextBox 40">
@@ -13075,6 +13176,7 @@
                   </a:bodyPr>
                   <a:lstStyle/>
                   <a:p>
+                    <a:pPr/>
                     <a14:m>
                       <m:oMathPara xmlns:m="http://schemas.openxmlformats.org/officeDocument/2006/math">
                         <m:oMathParaPr>
@@ -13137,7 +13239,7 @@
                 </p:txBody>
               </p:sp>
             </mc:Choice>
-            <mc:Fallback>
+            <mc:Fallback xmlns="">
               <p:sp>
                 <p:nvSpPr>
                   <p:cNvPr id="41" name="TextBox 40">
@@ -13454,8 +13556,8 @@
               </a:fontRef>
             </p:style>
           </p:cxnSp>
-          <mc:AlternateContent xmlns:mc="http://schemas.openxmlformats.org/markup-compatibility/2006">
-            <mc:Choice xmlns:a14="http://schemas.microsoft.com/office/drawing/2010/main" Requires="a14">
+          <mc:AlternateContent xmlns:mc="http://schemas.openxmlformats.org/markup-compatibility/2006" xmlns:a14="http://schemas.microsoft.com/office/drawing/2010/main">
+            <mc:Choice Requires="a14">
               <p:sp>
                 <p:nvSpPr>
                   <p:cNvPr id="60" name="TextBox 59">
@@ -13484,6 +13586,7 @@
                   </a:bodyPr>
                   <a:lstStyle/>
                   <a:p>
+                    <a:pPr/>
                     <a14:m>
                       <m:oMathPara xmlns:m="http://schemas.openxmlformats.org/officeDocument/2006/math">
                         <m:oMathParaPr>
@@ -13562,7 +13665,7 @@
                 </p:txBody>
               </p:sp>
             </mc:Choice>
-            <mc:Fallback>
+            <mc:Fallback xmlns="">
               <p:sp>
                 <p:nvSpPr>
                   <p:cNvPr id="60" name="TextBox 59">
@@ -13607,8 +13710,8 @@
               </p:sp>
             </mc:Fallback>
           </mc:AlternateContent>
-          <mc:AlternateContent xmlns:mc="http://schemas.openxmlformats.org/markup-compatibility/2006">
-            <mc:Choice xmlns:a14="http://schemas.microsoft.com/office/drawing/2010/main" Requires="a14">
+          <mc:AlternateContent xmlns:mc="http://schemas.openxmlformats.org/markup-compatibility/2006" xmlns:a14="http://schemas.microsoft.com/office/drawing/2010/main">
+            <mc:Choice Requires="a14">
               <p:sp>
                 <p:nvSpPr>
                   <p:cNvPr id="61" name="TextBox 60">
@@ -13637,6 +13740,7 @@
                   </a:bodyPr>
                   <a:lstStyle/>
                   <a:p>
+                    <a:pPr/>
                     <a14:m>
                       <m:oMathPara xmlns:m="http://schemas.openxmlformats.org/officeDocument/2006/math">
                         <m:oMathParaPr>
@@ -13673,7 +13777,7 @@
                 </p:txBody>
               </p:sp>
             </mc:Choice>
-            <mc:Fallback>
+            <mc:Fallback xmlns="">
               <p:sp>
                 <p:nvSpPr>
                   <p:cNvPr id="61" name="TextBox 60">
@@ -16508,8 +16612,8 @@
             </a:p>
           </p:txBody>
         </p:sp>
-        <mc:AlternateContent xmlns:mc="http://schemas.openxmlformats.org/markup-compatibility/2006">
-          <mc:Choice xmlns:a14="http://schemas.microsoft.com/office/drawing/2010/main" Requires="a14">
+        <mc:AlternateContent xmlns:mc="http://schemas.openxmlformats.org/markup-compatibility/2006" xmlns:a14="http://schemas.microsoft.com/office/drawing/2010/main">
+          <mc:Choice Requires="a14">
             <p:sp>
               <p:nvSpPr>
                 <p:cNvPr id="6" name="TextBox 5">
@@ -16578,7 +16682,7 @@
               </p:txBody>
             </p:sp>
           </mc:Choice>
-          <mc:Fallback>
+          <mc:Fallback xmlns="">
             <p:sp>
               <p:nvSpPr>
                 <p:cNvPr id="6" name="TextBox 5">
@@ -16739,8 +16843,8 @@
             </a:p>
           </p:txBody>
         </p:sp>
-        <mc:AlternateContent xmlns:mc="http://schemas.openxmlformats.org/markup-compatibility/2006">
-          <mc:Choice xmlns:a14="http://schemas.microsoft.com/office/drawing/2010/main" Requires="a14">
+        <mc:AlternateContent xmlns:mc="http://schemas.openxmlformats.org/markup-compatibility/2006" xmlns:a14="http://schemas.microsoft.com/office/drawing/2010/main">
+          <mc:Choice Requires="a14">
             <p:sp>
               <p:nvSpPr>
                 <p:cNvPr id="9" name="TextBox 8">
@@ -16812,7 +16916,7 @@
               </p:txBody>
             </p:sp>
           </mc:Choice>
-          <mc:Fallback>
+          <mc:Fallback xmlns="">
             <p:sp>
               <p:nvSpPr>
                 <p:cNvPr id="9" name="TextBox 8">
@@ -16915,8 +17019,8 @@
             </a:p>
           </p:txBody>
         </p:sp>
-        <mc:AlternateContent xmlns:mc="http://schemas.openxmlformats.org/markup-compatibility/2006">
-          <mc:Choice xmlns:a14="http://schemas.microsoft.com/office/drawing/2010/main" Requires="a14">
+        <mc:AlternateContent xmlns:mc="http://schemas.openxmlformats.org/markup-compatibility/2006" xmlns:a14="http://schemas.microsoft.com/office/drawing/2010/main">
+          <mc:Choice Requires="a14">
             <p:sp>
               <p:nvSpPr>
                 <p:cNvPr id="12" name="TextBox 11">
@@ -16988,7 +17092,7 @@
               </p:txBody>
             </p:sp>
           </mc:Choice>
-          <mc:Fallback>
+          <mc:Fallback xmlns="">
             <p:sp>
               <p:nvSpPr>
                 <p:cNvPr id="12" name="TextBox 11">
@@ -17207,8 +17311,8 @@
             </a:p>
           </p:txBody>
         </p:sp>
-        <mc:AlternateContent xmlns:mc="http://schemas.openxmlformats.org/markup-compatibility/2006">
-          <mc:Choice xmlns:a14="http://schemas.microsoft.com/office/drawing/2010/main" Requires="a14">
+        <mc:AlternateContent xmlns:mc="http://schemas.openxmlformats.org/markup-compatibility/2006" xmlns:a14="http://schemas.microsoft.com/office/drawing/2010/main">
+          <mc:Choice Requires="a14">
             <p:sp>
               <p:nvSpPr>
                 <p:cNvPr id="18" name="TextBox 17">
@@ -17280,7 +17384,7 @@
               </p:txBody>
             </p:sp>
           </mc:Choice>
-          <mc:Fallback>
+          <mc:Fallback xmlns="">
             <p:sp>
               <p:nvSpPr>
                 <p:cNvPr id="18" name="TextBox 17">
@@ -17325,8 +17429,8 @@
             </p:sp>
           </mc:Fallback>
         </mc:AlternateContent>
-        <mc:AlternateContent xmlns:mc="http://schemas.openxmlformats.org/markup-compatibility/2006">
-          <mc:Choice xmlns:a14="http://schemas.microsoft.com/office/drawing/2010/main" Requires="a14">
+        <mc:AlternateContent xmlns:mc="http://schemas.openxmlformats.org/markup-compatibility/2006" xmlns:a14="http://schemas.microsoft.com/office/drawing/2010/main">
+          <mc:Choice Requires="a14">
             <p:sp>
               <p:nvSpPr>
                 <p:cNvPr id="20" name="TextBox 19">
@@ -17398,7 +17502,7 @@
               </p:txBody>
             </p:sp>
           </mc:Choice>
-          <mc:Fallback>
+          <mc:Fallback xmlns="">
             <p:sp>
               <p:nvSpPr>
                 <p:cNvPr id="20" name="TextBox 19">
@@ -17443,8 +17547,8 @@
             </p:sp>
           </mc:Fallback>
         </mc:AlternateContent>
-        <mc:AlternateContent xmlns:mc="http://schemas.openxmlformats.org/markup-compatibility/2006">
-          <mc:Choice xmlns:a14="http://schemas.microsoft.com/office/drawing/2010/main" Requires="a14">
+        <mc:AlternateContent xmlns:mc="http://schemas.openxmlformats.org/markup-compatibility/2006" xmlns:a14="http://schemas.microsoft.com/office/drawing/2010/main">
+          <mc:Choice Requires="a14">
             <p:sp>
               <p:nvSpPr>
                 <p:cNvPr id="21" name="TextBox 20">
@@ -17516,7 +17620,7 @@
               </p:txBody>
             </p:sp>
           </mc:Choice>
-          <mc:Fallback>
+          <mc:Fallback xmlns="">
             <p:sp>
               <p:nvSpPr>
                 <p:cNvPr id="21" name="TextBox 20">
@@ -18023,8 +18127,8 @@
             </a:fontRef>
           </p:style>
         </p:cxnSp>
-        <mc:AlternateContent xmlns:mc="http://schemas.openxmlformats.org/markup-compatibility/2006">
-          <mc:Choice xmlns:a14="http://schemas.microsoft.com/office/drawing/2010/main" Requires="a14">
+        <mc:AlternateContent xmlns:mc="http://schemas.openxmlformats.org/markup-compatibility/2006" xmlns:a14="http://schemas.microsoft.com/office/drawing/2010/main">
+          <mc:Choice Requires="a14">
             <p:sp>
               <p:nvSpPr>
                 <p:cNvPr id="36" name="TextBox 35">
@@ -18112,7 +18216,7 @@
               </p:txBody>
             </p:sp>
           </mc:Choice>
-          <mc:Fallback>
+          <mc:Fallback xmlns="">
             <p:sp>
               <p:nvSpPr>
                 <p:cNvPr id="36" name="TextBox 35">
@@ -18157,8 +18261,8 @@
             </p:sp>
           </mc:Fallback>
         </mc:AlternateContent>
-        <mc:AlternateContent xmlns:mc="http://schemas.openxmlformats.org/markup-compatibility/2006">
-          <mc:Choice xmlns:a14="http://schemas.microsoft.com/office/drawing/2010/main" Requires="a14">
+        <mc:AlternateContent xmlns:mc="http://schemas.openxmlformats.org/markup-compatibility/2006" xmlns:a14="http://schemas.microsoft.com/office/drawing/2010/main">
+          <mc:Choice Requires="a14">
             <p:sp>
               <p:nvSpPr>
                 <p:cNvPr id="37" name="TextBox 36">
@@ -18218,7 +18322,7 @@
               </p:txBody>
             </p:sp>
           </mc:Choice>
-          <mc:Fallback>
+          <mc:Fallback xmlns="">
             <p:sp>
               <p:nvSpPr>
                 <p:cNvPr id="37" name="TextBox 36">
@@ -18263,8 +18367,8 @@
             </p:sp>
           </mc:Fallback>
         </mc:AlternateContent>
-        <mc:AlternateContent xmlns:mc="http://schemas.openxmlformats.org/markup-compatibility/2006">
-          <mc:Choice xmlns:a14="http://schemas.microsoft.com/office/drawing/2010/main" Requires="a14">
+        <mc:AlternateContent xmlns:mc="http://schemas.openxmlformats.org/markup-compatibility/2006" xmlns:a14="http://schemas.microsoft.com/office/drawing/2010/main">
+          <mc:Choice Requires="a14">
             <p:sp>
               <p:nvSpPr>
                 <p:cNvPr id="39" name="TextBox 38">
@@ -18401,7 +18505,7 @@
               </p:txBody>
             </p:sp>
           </mc:Choice>
-          <mc:Fallback>
+          <mc:Fallback xmlns="">
             <p:sp>
               <p:nvSpPr>
                 <p:cNvPr id="39" name="TextBox 38">
@@ -18446,8 +18550,8 @@
             </p:sp>
           </mc:Fallback>
         </mc:AlternateContent>
-        <mc:AlternateContent xmlns:mc="http://schemas.openxmlformats.org/markup-compatibility/2006">
-          <mc:Choice xmlns:a14="http://schemas.microsoft.com/office/drawing/2010/main" Requires="a14">
+        <mc:AlternateContent xmlns:mc="http://schemas.openxmlformats.org/markup-compatibility/2006" xmlns:a14="http://schemas.microsoft.com/office/drawing/2010/main">
+          <mc:Choice Requires="a14">
             <p:sp>
               <p:nvSpPr>
                 <p:cNvPr id="40" name="TextBox 39">
@@ -18519,7 +18623,7 @@
               </p:txBody>
             </p:sp>
           </mc:Choice>
-          <mc:Fallback>
+          <mc:Fallback xmlns="">
             <p:sp>
               <p:nvSpPr>
                 <p:cNvPr id="40" name="TextBox 39">
@@ -18726,8 +18830,8 @@
             </a:fontRef>
           </p:style>
         </p:cxnSp>
-        <mc:AlternateContent xmlns:mc="http://schemas.openxmlformats.org/markup-compatibility/2006">
-          <mc:Choice xmlns:a14="http://schemas.microsoft.com/office/drawing/2010/main" Requires="a14">
+        <mc:AlternateContent xmlns:mc="http://schemas.openxmlformats.org/markup-compatibility/2006" xmlns:a14="http://schemas.microsoft.com/office/drawing/2010/main">
+          <mc:Choice Requires="a14">
             <p:sp>
               <p:nvSpPr>
                 <p:cNvPr id="48" name="TextBox 47">
@@ -18802,7 +18906,7 @@
               </p:txBody>
             </p:sp>
           </mc:Choice>
-          <mc:Fallback>
+          <mc:Fallback xmlns="">
             <p:sp>
               <p:nvSpPr>
                 <p:cNvPr id="48" name="TextBox 47">
@@ -18847,8 +18951,8 @@
             </p:sp>
           </mc:Fallback>
         </mc:AlternateContent>
-        <mc:AlternateContent xmlns:mc="http://schemas.openxmlformats.org/markup-compatibility/2006">
-          <mc:Choice xmlns:a14="http://schemas.microsoft.com/office/drawing/2010/main" Requires="a14">
+        <mc:AlternateContent xmlns:mc="http://schemas.openxmlformats.org/markup-compatibility/2006" xmlns:a14="http://schemas.microsoft.com/office/drawing/2010/main">
+          <mc:Choice Requires="a14">
             <p:sp>
               <p:nvSpPr>
                 <p:cNvPr id="49" name="TextBox 48">
@@ -18923,7 +19027,7 @@
               </p:txBody>
             </p:sp>
           </mc:Choice>
-          <mc:Fallback>
+          <mc:Fallback xmlns="">
             <p:sp>
               <p:nvSpPr>
                 <p:cNvPr id="49" name="TextBox 48">
@@ -19130,8 +19234,8 @@
             </a:p>
           </p:txBody>
         </p:sp>
-        <mc:AlternateContent xmlns:mc="http://schemas.openxmlformats.org/markup-compatibility/2006">
-          <mc:Choice xmlns:a14="http://schemas.microsoft.com/office/drawing/2010/main" Requires="a14">
+        <mc:AlternateContent xmlns:mc="http://schemas.openxmlformats.org/markup-compatibility/2006" xmlns:a14="http://schemas.microsoft.com/office/drawing/2010/main">
+          <mc:Choice Requires="a14">
             <p:sp>
               <p:nvSpPr>
                 <p:cNvPr id="58" name="TextBox 57">
@@ -19203,7 +19307,7 @@
               </p:txBody>
             </p:sp>
           </mc:Choice>
-          <mc:Fallback>
+          <mc:Fallback xmlns="">
             <p:sp>
               <p:nvSpPr>
                 <p:cNvPr id="58" name="TextBox 57">
@@ -19248,8 +19352,8 @@
             </p:sp>
           </mc:Fallback>
         </mc:AlternateContent>
-        <mc:AlternateContent xmlns:mc="http://schemas.openxmlformats.org/markup-compatibility/2006">
-          <mc:Choice xmlns:a14="http://schemas.microsoft.com/office/drawing/2010/main" Requires="a14">
+        <mc:AlternateContent xmlns:mc="http://schemas.openxmlformats.org/markup-compatibility/2006" xmlns:a14="http://schemas.microsoft.com/office/drawing/2010/main">
+          <mc:Choice Requires="a14">
             <p:sp>
               <p:nvSpPr>
                 <p:cNvPr id="59" name="TextBox 58">
@@ -19321,7 +19425,7 @@
               </p:txBody>
             </p:sp>
           </mc:Choice>
-          <mc:Fallback>
+          <mc:Fallback xmlns="">
             <p:sp>
               <p:nvSpPr>
                 <p:cNvPr id="59" name="TextBox 58">
@@ -19562,8 +19666,8 @@
             </a:p>
           </p:txBody>
         </p:sp>
-        <mc:AlternateContent xmlns:mc="http://schemas.openxmlformats.org/markup-compatibility/2006">
-          <mc:Choice xmlns:a14="http://schemas.microsoft.com/office/drawing/2010/main" Requires="a14">
+        <mc:AlternateContent xmlns:mc="http://schemas.openxmlformats.org/markup-compatibility/2006" xmlns:a14="http://schemas.microsoft.com/office/drawing/2010/main">
+          <mc:Choice Requires="a14">
             <p:sp>
               <p:nvSpPr>
                 <p:cNvPr id="67" name="TextBox 66">
@@ -19638,7 +19742,7 @@
               </p:txBody>
             </p:sp>
           </mc:Choice>
-          <mc:Fallback>
+          <mc:Fallback xmlns="">
             <p:sp>
               <p:nvSpPr>
                 <p:cNvPr id="67" name="TextBox 66">
@@ -19776,8 +19880,8 @@
             </a:fontRef>
           </p:style>
         </p:cxnSp>
-        <mc:AlternateContent xmlns:mc="http://schemas.openxmlformats.org/markup-compatibility/2006">
-          <mc:Choice xmlns:a14="http://schemas.microsoft.com/office/drawing/2010/main" Requires="a14">
+        <mc:AlternateContent xmlns:mc="http://schemas.openxmlformats.org/markup-compatibility/2006" xmlns:a14="http://schemas.microsoft.com/office/drawing/2010/main">
+          <mc:Choice Requires="a14">
             <p:sp>
               <p:nvSpPr>
                 <p:cNvPr id="71" name="TextBox 70">
@@ -19837,7 +19941,7 @@
               </p:txBody>
             </p:sp>
           </mc:Choice>
-          <mc:Fallback>
+          <mc:Fallback xmlns="">
             <p:sp>
               <p:nvSpPr>
                 <p:cNvPr id="71" name="TextBox 70">
@@ -19929,8 +20033,8 @@
             </a:fontRef>
           </p:style>
         </p:cxnSp>
-        <mc:AlternateContent xmlns:mc="http://schemas.openxmlformats.org/markup-compatibility/2006">
-          <mc:Choice xmlns:a14="http://schemas.microsoft.com/office/drawing/2010/main" Requires="a14">
+        <mc:AlternateContent xmlns:mc="http://schemas.openxmlformats.org/markup-compatibility/2006" xmlns:a14="http://schemas.microsoft.com/office/drawing/2010/main">
+          <mc:Choice Requires="a14">
             <p:sp>
               <p:nvSpPr>
                 <p:cNvPr id="73" name="TextBox 72">
@@ -19990,7 +20094,7 @@
               </p:txBody>
             </p:sp>
           </mc:Choice>
-          <mc:Fallback>
+          <mc:Fallback xmlns="">
             <p:sp>
               <p:nvSpPr>
                 <p:cNvPr id="73" name="TextBox 72">
@@ -20151,8 +20255,8 @@
             </a:p>
           </p:txBody>
         </p:sp>
-        <mc:AlternateContent xmlns:mc="http://schemas.openxmlformats.org/markup-compatibility/2006">
-          <mc:Choice xmlns:a14="http://schemas.microsoft.com/office/drawing/2010/main" Requires="a14">
+        <mc:AlternateContent xmlns:mc="http://schemas.openxmlformats.org/markup-compatibility/2006" xmlns:a14="http://schemas.microsoft.com/office/drawing/2010/main">
+          <mc:Choice Requires="a14">
             <p:sp>
               <p:nvSpPr>
                 <p:cNvPr id="81" name="TextBox 80">
@@ -20224,7 +20328,7 @@
               </p:txBody>
             </p:sp>
           </mc:Choice>
-          <mc:Fallback>
+          <mc:Fallback xmlns="">
             <p:sp>
               <p:nvSpPr>
                 <p:cNvPr id="81" name="TextBox 80">
@@ -20269,8 +20373,8 @@
             </p:sp>
           </mc:Fallback>
         </mc:AlternateContent>
-        <mc:AlternateContent xmlns:mc="http://schemas.openxmlformats.org/markup-compatibility/2006">
-          <mc:Choice xmlns:a14="http://schemas.microsoft.com/office/drawing/2010/main" Requires="a14">
+        <mc:AlternateContent xmlns:mc="http://schemas.openxmlformats.org/markup-compatibility/2006" xmlns:a14="http://schemas.microsoft.com/office/drawing/2010/main">
+          <mc:Choice Requires="a14">
             <p:sp>
               <p:nvSpPr>
                 <p:cNvPr id="82" name="TextBox 81">
@@ -20342,7 +20446,7 @@
               </p:txBody>
             </p:sp>
           </mc:Choice>
-          <mc:Fallback>
+          <mc:Fallback xmlns="">
             <p:sp>
               <p:nvSpPr>
                 <p:cNvPr id="82" name="TextBox 81">
@@ -20583,8 +20687,8 @@
             </a:p>
           </p:txBody>
         </p:sp>
-        <mc:AlternateContent xmlns:mc="http://schemas.openxmlformats.org/markup-compatibility/2006">
-          <mc:Choice xmlns:a14="http://schemas.microsoft.com/office/drawing/2010/main" Requires="a14">
+        <mc:AlternateContent xmlns:mc="http://schemas.openxmlformats.org/markup-compatibility/2006" xmlns:a14="http://schemas.microsoft.com/office/drawing/2010/main">
+          <mc:Choice Requires="a14">
             <p:sp>
               <p:nvSpPr>
                 <p:cNvPr id="88" name="TextBox 87">
@@ -20659,7 +20763,7 @@
               </p:txBody>
             </p:sp>
           </mc:Choice>
-          <mc:Fallback>
+          <mc:Fallback xmlns="">
             <p:sp>
               <p:nvSpPr>
                 <p:cNvPr id="88" name="TextBox 87">
@@ -20820,8 +20924,8 @@
             </a:p>
           </p:txBody>
         </p:sp>
-        <mc:AlternateContent xmlns:mc="http://schemas.openxmlformats.org/markup-compatibility/2006">
-          <mc:Choice xmlns:a14="http://schemas.microsoft.com/office/drawing/2010/main" Requires="a14">
+        <mc:AlternateContent xmlns:mc="http://schemas.openxmlformats.org/markup-compatibility/2006" xmlns:a14="http://schemas.microsoft.com/office/drawing/2010/main">
+          <mc:Choice Requires="a14">
             <p:sp>
               <p:nvSpPr>
                 <p:cNvPr id="94" name="TextBox 93">
@@ -20893,7 +20997,7 @@
               </p:txBody>
             </p:sp>
           </mc:Choice>
-          <mc:Fallback>
+          <mc:Fallback xmlns="">
             <p:sp>
               <p:nvSpPr>
                 <p:cNvPr id="94" name="TextBox 93">
@@ -20938,8 +21042,8 @@
             </p:sp>
           </mc:Fallback>
         </mc:AlternateContent>
-        <mc:AlternateContent xmlns:mc="http://schemas.openxmlformats.org/markup-compatibility/2006">
-          <mc:Choice xmlns:a14="http://schemas.microsoft.com/office/drawing/2010/main" Requires="a14">
+        <mc:AlternateContent xmlns:mc="http://schemas.openxmlformats.org/markup-compatibility/2006" xmlns:a14="http://schemas.microsoft.com/office/drawing/2010/main">
+          <mc:Choice Requires="a14">
             <p:sp>
               <p:nvSpPr>
                 <p:cNvPr id="95" name="TextBox 94">
@@ -21011,7 +21115,7 @@
               </p:txBody>
             </p:sp>
           </mc:Choice>
-          <mc:Fallback>
+          <mc:Fallback xmlns="">
             <p:sp>
               <p:nvSpPr>
                 <p:cNvPr id="95" name="TextBox 94">
@@ -21252,8 +21356,8 @@
             </a:p>
           </p:txBody>
         </p:sp>
-        <mc:AlternateContent xmlns:mc="http://schemas.openxmlformats.org/markup-compatibility/2006">
-          <mc:Choice xmlns:a14="http://schemas.microsoft.com/office/drawing/2010/main" Requires="a14">
+        <mc:AlternateContent xmlns:mc="http://schemas.openxmlformats.org/markup-compatibility/2006" xmlns:a14="http://schemas.microsoft.com/office/drawing/2010/main">
+          <mc:Choice Requires="a14">
             <p:sp>
               <p:nvSpPr>
                 <p:cNvPr id="101" name="TextBox 100">
@@ -21328,7 +21432,7 @@
               </p:txBody>
             </p:sp>
           </mc:Choice>
-          <mc:Fallback>
+          <mc:Fallback xmlns="">
             <p:sp>
               <p:nvSpPr>
                 <p:cNvPr id="101" name="TextBox 100">
@@ -21512,8 +21616,8 @@
             </a:fontRef>
           </p:style>
         </p:cxnSp>
-        <mc:AlternateContent xmlns:mc="http://schemas.openxmlformats.org/markup-compatibility/2006">
-          <mc:Choice xmlns:a14="http://schemas.microsoft.com/office/drawing/2010/main" Requires="a14">
+        <mc:AlternateContent xmlns:mc="http://schemas.openxmlformats.org/markup-compatibility/2006" xmlns:a14="http://schemas.microsoft.com/office/drawing/2010/main">
+          <mc:Choice Requires="a14">
             <p:sp>
               <p:nvSpPr>
                 <p:cNvPr id="113" name="TextBox 112">
@@ -21573,7 +21677,7 @@
               </p:txBody>
             </p:sp>
           </mc:Choice>
-          <mc:Fallback>
+          <mc:Fallback xmlns="">
             <p:sp>
               <p:nvSpPr>
                 <p:cNvPr id="113" name="TextBox 112">
@@ -21665,8 +21769,8 @@
             </a:fontRef>
           </p:style>
         </p:cxnSp>
-        <mc:AlternateContent xmlns:mc="http://schemas.openxmlformats.org/markup-compatibility/2006">
-          <mc:Choice xmlns:a14="http://schemas.microsoft.com/office/drawing/2010/main" Requires="a14">
+        <mc:AlternateContent xmlns:mc="http://schemas.openxmlformats.org/markup-compatibility/2006" xmlns:a14="http://schemas.microsoft.com/office/drawing/2010/main">
+          <mc:Choice Requires="a14">
             <p:sp>
               <p:nvSpPr>
                 <p:cNvPr id="115" name="TextBox 114">
@@ -21726,7 +21830,7 @@
               </p:txBody>
             </p:sp>
           </mc:Choice>
-          <mc:Fallback>
+          <mc:Fallback xmlns="">
             <p:sp>
               <p:nvSpPr>
                 <p:cNvPr id="115" name="TextBox 114">
@@ -21818,8 +21922,8 @@
             </a:fontRef>
           </p:style>
         </p:cxnSp>
-        <mc:AlternateContent xmlns:mc="http://schemas.openxmlformats.org/markup-compatibility/2006">
-          <mc:Choice xmlns:a14="http://schemas.microsoft.com/office/drawing/2010/main" Requires="a14">
+        <mc:AlternateContent xmlns:mc="http://schemas.openxmlformats.org/markup-compatibility/2006" xmlns:a14="http://schemas.microsoft.com/office/drawing/2010/main">
+          <mc:Choice Requires="a14">
             <p:sp>
               <p:nvSpPr>
                 <p:cNvPr id="122" name="TextBox 121">
@@ -21907,7 +22011,7 @@
               </p:txBody>
             </p:sp>
           </mc:Choice>
-          <mc:Fallback>
+          <mc:Fallback xmlns="">
             <p:sp>
               <p:nvSpPr>
                 <p:cNvPr id="122" name="TextBox 121">
@@ -21999,8 +22103,8 @@
             </a:fontRef>
           </p:style>
         </p:cxnSp>
-        <mc:AlternateContent xmlns:mc="http://schemas.openxmlformats.org/markup-compatibility/2006">
-          <mc:Choice xmlns:a14="http://schemas.microsoft.com/office/drawing/2010/main" Requires="a14">
+        <mc:AlternateContent xmlns:mc="http://schemas.openxmlformats.org/markup-compatibility/2006" xmlns:a14="http://schemas.microsoft.com/office/drawing/2010/main">
+          <mc:Choice Requires="a14">
             <p:sp>
               <p:nvSpPr>
                 <p:cNvPr id="124" name="TextBox 123">
@@ -22088,7 +22192,7 @@
               </p:txBody>
             </p:sp>
           </mc:Choice>
-          <mc:Fallback>
+          <mc:Fallback xmlns="">
             <p:sp>
               <p:nvSpPr>
                 <p:cNvPr id="124" name="TextBox 123">
@@ -22180,8 +22284,8 @@
             </a:fontRef>
           </p:style>
         </p:cxnSp>
-        <mc:AlternateContent xmlns:mc="http://schemas.openxmlformats.org/markup-compatibility/2006">
-          <mc:Choice xmlns:a14="http://schemas.microsoft.com/office/drawing/2010/main" Requires="a14">
+        <mc:AlternateContent xmlns:mc="http://schemas.openxmlformats.org/markup-compatibility/2006" xmlns:a14="http://schemas.microsoft.com/office/drawing/2010/main">
+          <mc:Choice Requires="a14">
             <p:sp>
               <p:nvSpPr>
                 <p:cNvPr id="126" name="TextBox 125">
@@ -22269,7 +22373,7 @@
               </p:txBody>
             </p:sp>
           </mc:Choice>
-          <mc:Fallback>
+          <mc:Fallback xmlns="">
             <p:sp>
               <p:nvSpPr>
                 <p:cNvPr id="126" name="TextBox 125">
@@ -22314,8 +22418,8 @@
             </p:sp>
           </mc:Fallback>
         </mc:AlternateContent>
-        <mc:AlternateContent xmlns:mc="http://schemas.openxmlformats.org/markup-compatibility/2006">
-          <mc:Choice xmlns:a14="http://schemas.microsoft.com/office/drawing/2010/main" Requires="a14">
+        <mc:AlternateContent xmlns:mc="http://schemas.openxmlformats.org/markup-compatibility/2006" xmlns:a14="http://schemas.microsoft.com/office/drawing/2010/main">
+          <mc:Choice Requires="a14">
             <p:sp>
               <p:nvSpPr>
                 <p:cNvPr id="127" name="TextBox 126">
@@ -22495,7 +22599,7 @@
               </p:txBody>
             </p:sp>
           </mc:Choice>
-          <mc:Fallback>
+          <mc:Fallback xmlns="">
             <p:sp>
               <p:nvSpPr>
                 <p:cNvPr id="127" name="TextBox 126">
@@ -22824,8 +22928,8 @@
             </a:p>
           </p:txBody>
         </p:sp>
-        <mc:AlternateContent xmlns:mc="http://schemas.openxmlformats.org/markup-compatibility/2006">
-          <mc:Choice xmlns:a14="http://schemas.microsoft.com/office/drawing/2010/main" Requires="a14">
+        <mc:AlternateContent xmlns:mc="http://schemas.openxmlformats.org/markup-compatibility/2006" xmlns:a14="http://schemas.microsoft.com/office/drawing/2010/main">
+          <mc:Choice Requires="a14">
             <p:sp>
               <p:nvSpPr>
                 <p:cNvPr id="6" name="TextBox 5">
@@ -22894,7 +22998,7 @@
               </p:txBody>
             </p:sp>
           </mc:Choice>
-          <mc:Fallback>
+          <mc:Fallback xmlns="">
             <p:sp>
               <p:nvSpPr>
                 <p:cNvPr id="6" name="TextBox 5">
@@ -23055,8 +23159,8 @@
             </a:p>
           </p:txBody>
         </p:sp>
-        <mc:AlternateContent xmlns:mc="http://schemas.openxmlformats.org/markup-compatibility/2006">
-          <mc:Choice xmlns:a14="http://schemas.microsoft.com/office/drawing/2010/main" Requires="a14">
+        <mc:AlternateContent xmlns:mc="http://schemas.openxmlformats.org/markup-compatibility/2006" xmlns:a14="http://schemas.microsoft.com/office/drawing/2010/main">
+          <mc:Choice Requires="a14">
             <p:sp>
               <p:nvSpPr>
                 <p:cNvPr id="12" name="TextBox 11">
@@ -23128,7 +23232,7 @@
               </p:txBody>
             </p:sp>
           </mc:Choice>
-          <mc:Fallback>
+          <mc:Fallback xmlns="">
             <p:sp>
               <p:nvSpPr>
                 <p:cNvPr id="12" name="TextBox 11">
@@ -23463,8 +23567,8 @@
             </a:p>
           </p:txBody>
         </p:sp>
-        <mc:AlternateContent xmlns:mc="http://schemas.openxmlformats.org/markup-compatibility/2006">
-          <mc:Choice xmlns:a14="http://schemas.microsoft.com/office/drawing/2010/main" Requires="a14">
+        <mc:AlternateContent xmlns:mc="http://schemas.openxmlformats.org/markup-compatibility/2006" xmlns:a14="http://schemas.microsoft.com/office/drawing/2010/main">
+          <mc:Choice Requires="a14">
             <p:sp>
               <p:nvSpPr>
                 <p:cNvPr id="18" name="TextBox 17">
@@ -23536,7 +23640,7 @@
               </p:txBody>
             </p:sp>
           </mc:Choice>
-          <mc:Fallback>
+          <mc:Fallback xmlns="">
             <p:sp>
               <p:nvSpPr>
                 <p:cNvPr id="18" name="TextBox 17">
@@ -23581,8 +23685,8 @@
             </p:sp>
           </mc:Fallback>
         </mc:AlternateContent>
-        <mc:AlternateContent xmlns:mc="http://schemas.openxmlformats.org/markup-compatibility/2006">
-          <mc:Choice xmlns:a14="http://schemas.microsoft.com/office/drawing/2010/main" Requires="a14">
+        <mc:AlternateContent xmlns:mc="http://schemas.openxmlformats.org/markup-compatibility/2006" xmlns:a14="http://schemas.microsoft.com/office/drawing/2010/main">
+          <mc:Choice Requires="a14">
             <p:sp>
               <p:nvSpPr>
                 <p:cNvPr id="19" name="TextBox 18">
@@ -23654,7 +23758,7 @@
               </p:txBody>
             </p:sp>
           </mc:Choice>
-          <mc:Fallback>
+          <mc:Fallback xmlns="">
             <p:sp>
               <p:nvSpPr>
                 <p:cNvPr id="19" name="TextBox 18">
@@ -23699,8 +23803,8 @@
             </p:sp>
           </mc:Fallback>
         </mc:AlternateContent>
-        <mc:AlternateContent xmlns:mc="http://schemas.openxmlformats.org/markup-compatibility/2006">
-          <mc:Choice xmlns:a14="http://schemas.microsoft.com/office/drawing/2010/main" Requires="a14">
+        <mc:AlternateContent xmlns:mc="http://schemas.openxmlformats.org/markup-compatibility/2006" xmlns:a14="http://schemas.microsoft.com/office/drawing/2010/main">
+          <mc:Choice Requires="a14">
             <p:sp>
               <p:nvSpPr>
                 <p:cNvPr id="20" name="TextBox 19">
@@ -23772,7 +23876,7 @@
               </p:txBody>
             </p:sp>
           </mc:Choice>
-          <mc:Fallback>
+          <mc:Fallback xmlns="">
             <p:sp>
               <p:nvSpPr>
                 <p:cNvPr id="20" name="TextBox 19">
@@ -23817,8 +23921,8 @@
             </p:sp>
           </mc:Fallback>
         </mc:AlternateContent>
-        <mc:AlternateContent xmlns:mc="http://schemas.openxmlformats.org/markup-compatibility/2006">
-          <mc:Choice xmlns:a14="http://schemas.microsoft.com/office/drawing/2010/main" Requires="a14">
+        <mc:AlternateContent xmlns:mc="http://schemas.openxmlformats.org/markup-compatibility/2006" xmlns:a14="http://schemas.microsoft.com/office/drawing/2010/main">
+          <mc:Choice Requires="a14">
             <p:sp>
               <p:nvSpPr>
                 <p:cNvPr id="21" name="TextBox 20">
@@ -23890,7 +23994,7 @@
               </p:txBody>
             </p:sp>
           </mc:Choice>
-          <mc:Fallback>
+          <mc:Fallback xmlns="">
             <p:sp>
               <p:nvSpPr>
                 <p:cNvPr id="21" name="TextBox 20">
@@ -23935,8 +24039,8 @@
             </p:sp>
           </mc:Fallback>
         </mc:AlternateContent>
-        <mc:AlternateContent xmlns:mc="http://schemas.openxmlformats.org/markup-compatibility/2006">
-          <mc:Choice xmlns:a14="http://schemas.microsoft.com/office/drawing/2010/main" Requires="a14">
+        <mc:AlternateContent xmlns:mc="http://schemas.openxmlformats.org/markup-compatibility/2006" xmlns:a14="http://schemas.microsoft.com/office/drawing/2010/main">
+          <mc:Choice Requires="a14">
             <p:sp>
               <p:nvSpPr>
                 <p:cNvPr id="22" name="TextBox 21">
@@ -24008,7 +24112,7 @@
               </p:txBody>
             </p:sp>
           </mc:Choice>
-          <mc:Fallback>
+          <mc:Fallback xmlns="">
             <p:sp>
               <p:nvSpPr>
                 <p:cNvPr id="22" name="TextBox 21">
@@ -24632,8 +24736,8 @@
             </a:fontRef>
           </p:style>
         </p:cxnSp>
-        <mc:AlternateContent xmlns:mc="http://schemas.openxmlformats.org/markup-compatibility/2006">
-          <mc:Choice xmlns:a14="http://schemas.microsoft.com/office/drawing/2010/main" Requires="a14">
+        <mc:AlternateContent xmlns:mc="http://schemas.openxmlformats.org/markup-compatibility/2006" xmlns:a14="http://schemas.microsoft.com/office/drawing/2010/main">
+          <mc:Choice Requires="a14">
             <p:sp>
               <p:nvSpPr>
                 <p:cNvPr id="36" name="TextBox 35">
@@ -24770,7 +24874,7 @@
               </p:txBody>
             </p:sp>
           </mc:Choice>
-          <mc:Fallback>
+          <mc:Fallback xmlns="">
             <p:sp>
               <p:nvSpPr>
                 <p:cNvPr id="36" name="TextBox 35">
@@ -24815,8 +24919,8 @@
             </p:sp>
           </mc:Fallback>
         </mc:AlternateContent>
-        <mc:AlternateContent xmlns:mc="http://schemas.openxmlformats.org/markup-compatibility/2006">
-          <mc:Choice xmlns:a14="http://schemas.microsoft.com/office/drawing/2010/main" Requires="a14">
+        <mc:AlternateContent xmlns:mc="http://schemas.openxmlformats.org/markup-compatibility/2006" xmlns:a14="http://schemas.microsoft.com/office/drawing/2010/main">
+          <mc:Choice Requires="a14">
             <p:sp>
               <p:nvSpPr>
                 <p:cNvPr id="37" name="TextBox 36">
@@ -24876,7 +24980,7 @@
               </p:txBody>
             </p:sp>
           </mc:Choice>
-          <mc:Fallback>
+          <mc:Fallback xmlns="">
             <p:sp>
               <p:nvSpPr>
                 <p:cNvPr id="37" name="TextBox 36">
@@ -24921,8 +25025,8 @@
             </p:sp>
           </mc:Fallback>
         </mc:AlternateContent>
-        <mc:AlternateContent xmlns:mc="http://schemas.openxmlformats.org/markup-compatibility/2006">
-          <mc:Choice xmlns:a14="http://schemas.microsoft.com/office/drawing/2010/main" Requires="a14">
+        <mc:AlternateContent xmlns:mc="http://schemas.openxmlformats.org/markup-compatibility/2006" xmlns:a14="http://schemas.microsoft.com/office/drawing/2010/main">
+          <mc:Choice Requires="a14">
             <p:sp>
               <p:nvSpPr>
                 <p:cNvPr id="38" name="TextBox 37">
@@ -24982,7 +25086,7 @@
               </p:txBody>
             </p:sp>
           </mc:Choice>
-          <mc:Fallback>
+          <mc:Fallback xmlns="">
             <p:sp>
               <p:nvSpPr>
                 <p:cNvPr id="38" name="TextBox 37">
@@ -25027,8 +25131,8 @@
             </p:sp>
           </mc:Fallback>
         </mc:AlternateContent>
-        <mc:AlternateContent xmlns:mc="http://schemas.openxmlformats.org/markup-compatibility/2006">
-          <mc:Choice xmlns:a14="http://schemas.microsoft.com/office/drawing/2010/main" Requires="a14">
+        <mc:AlternateContent xmlns:mc="http://schemas.openxmlformats.org/markup-compatibility/2006" xmlns:a14="http://schemas.microsoft.com/office/drawing/2010/main">
+          <mc:Choice Requires="a14">
             <p:sp>
               <p:nvSpPr>
                 <p:cNvPr id="40" name="TextBox 39">
@@ -25208,7 +25312,7 @@
               </p:txBody>
             </p:sp>
           </mc:Choice>
-          <mc:Fallback>
+          <mc:Fallback xmlns="">
             <p:sp>
               <p:nvSpPr>
                 <p:cNvPr id="40" name="TextBox 39">
@@ -25253,8 +25357,8 @@
             </p:sp>
           </mc:Fallback>
         </mc:AlternateContent>
-        <mc:AlternateContent xmlns:mc="http://schemas.openxmlformats.org/markup-compatibility/2006">
-          <mc:Choice xmlns:a14="http://schemas.microsoft.com/office/drawing/2010/main" Requires="a14">
+        <mc:AlternateContent xmlns:mc="http://schemas.openxmlformats.org/markup-compatibility/2006" xmlns:a14="http://schemas.microsoft.com/office/drawing/2010/main">
+          <mc:Choice Requires="a14">
             <p:sp>
               <p:nvSpPr>
                 <p:cNvPr id="41" name="TextBox 40">
@@ -25335,7 +25439,7 @@
               </p:txBody>
             </p:sp>
           </mc:Choice>
-          <mc:Fallback>
+          <mc:Fallback xmlns="">
             <p:sp>
               <p:nvSpPr>
                 <p:cNvPr id="41" name="TextBox 40">
@@ -25438,8 +25542,8 @@
             </a:p>
           </p:txBody>
         </p:sp>
-        <mc:AlternateContent xmlns:mc="http://schemas.openxmlformats.org/markup-compatibility/2006">
-          <mc:Choice xmlns:a14="http://schemas.microsoft.com/office/drawing/2010/main" Requires="a14">
+        <mc:AlternateContent xmlns:mc="http://schemas.openxmlformats.org/markup-compatibility/2006" xmlns:a14="http://schemas.microsoft.com/office/drawing/2010/main">
+          <mc:Choice Requires="a14">
             <p:sp>
               <p:nvSpPr>
                 <p:cNvPr id="43" name="TextBox 42">
@@ -25520,7 +25624,7 @@
               </p:txBody>
             </p:sp>
           </mc:Choice>
-          <mc:Fallback>
+          <mc:Fallback xmlns="">
             <p:sp>
               <p:nvSpPr>
                 <p:cNvPr id="43" name="TextBox 42">
@@ -34741,8 +34845,8 @@
             </a:p>
           </p:txBody>
         </p:sp>
-        <mc:AlternateContent xmlns:mc="http://schemas.openxmlformats.org/markup-compatibility/2006">
-          <mc:Choice xmlns:a14="http://schemas.microsoft.com/office/drawing/2010/main" Requires="a14">
+        <mc:AlternateContent xmlns:mc="http://schemas.openxmlformats.org/markup-compatibility/2006" xmlns:a14="http://schemas.microsoft.com/office/drawing/2010/main">
+          <mc:Choice Requires="a14">
             <p:sp>
               <p:nvSpPr>
                 <p:cNvPr id="6" name="TextBox 5">
@@ -34961,7 +35065,7 @@
               </p:txBody>
             </p:sp>
           </mc:Choice>
-          <mc:Fallback>
+          <mc:Fallback xmlns="">
             <p:sp>
               <p:nvSpPr>
                 <p:cNvPr id="6" name="TextBox 5">
@@ -35006,8 +35110,8 @@
             </p:sp>
           </mc:Fallback>
         </mc:AlternateContent>
-        <mc:AlternateContent xmlns:mc="http://schemas.openxmlformats.org/markup-compatibility/2006">
-          <mc:Choice xmlns:a14="http://schemas.microsoft.com/office/drawing/2010/main" Requires="a14">
+        <mc:AlternateContent xmlns:mc="http://schemas.openxmlformats.org/markup-compatibility/2006" xmlns:a14="http://schemas.microsoft.com/office/drawing/2010/main">
+          <mc:Choice Requires="a14">
             <p:sp>
               <p:nvSpPr>
                 <p:cNvPr id="7" name="TextBox 6">
@@ -35239,7 +35343,7 @@
               </p:txBody>
             </p:sp>
           </mc:Choice>
-          <mc:Fallback>
+          <mc:Fallback xmlns="">
             <p:sp>
               <p:nvSpPr>
                 <p:cNvPr id="7" name="TextBox 6">
@@ -35284,8 +35388,8 @@
             </p:sp>
           </mc:Fallback>
         </mc:AlternateContent>
-        <mc:AlternateContent xmlns:mc="http://schemas.openxmlformats.org/markup-compatibility/2006">
-          <mc:Choice xmlns:a14="http://schemas.microsoft.com/office/drawing/2010/main" Requires="a14">
+        <mc:AlternateContent xmlns:mc="http://schemas.openxmlformats.org/markup-compatibility/2006" xmlns:a14="http://schemas.microsoft.com/office/drawing/2010/main">
+          <mc:Choice Requires="a14">
             <p:sp>
               <p:nvSpPr>
                 <p:cNvPr id="8" name="TextBox 7">
@@ -35466,7 +35570,7 @@
               </p:txBody>
             </p:sp>
           </mc:Choice>
-          <mc:Fallback>
+          <mc:Fallback xmlns="">
             <p:sp>
               <p:nvSpPr>
                 <p:cNvPr id="8" name="TextBox 7">
@@ -35902,8 +36006,8 @@
             </a:fontRef>
           </p:style>
         </p:cxnSp>
-        <mc:AlternateContent xmlns:mc="http://schemas.openxmlformats.org/markup-compatibility/2006">
-          <mc:Choice xmlns:a14="http://schemas.microsoft.com/office/drawing/2010/main" Requires="a14">
+        <mc:AlternateContent xmlns:mc="http://schemas.openxmlformats.org/markup-compatibility/2006" xmlns:a14="http://schemas.microsoft.com/office/drawing/2010/main">
+          <mc:Choice Requires="a14">
             <p:sp>
               <p:nvSpPr>
                 <p:cNvPr id="16" name="TextBox 15">
@@ -36071,7 +36175,7 @@
               </p:txBody>
             </p:sp>
           </mc:Choice>
-          <mc:Fallback>
+          <mc:Fallback xmlns="">
             <p:sp>
               <p:nvSpPr>
                 <p:cNvPr id="16" name="TextBox 15">
@@ -36116,8 +36220,8 @@
             </p:sp>
           </mc:Fallback>
         </mc:AlternateContent>
-        <mc:AlternateContent xmlns:mc="http://schemas.openxmlformats.org/markup-compatibility/2006">
-          <mc:Choice xmlns:a14="http://schemas.microsoft.com/office/drawing/2010/main" Requires="a14">
+        <mc:AlternateContent xmlns:mc="http://schemas.openxmlformats.org/markup-compatibility/2006" xmlns:a14="http://schemas.microsoft.com/office/drawing/2010/main">
+          <mc:Choice Requires="a14">
             <p:sp>
               <p:nvSpPr>
                 <p:cNvPr id="17" name="TextBox 16">
@@ -36349,7 +36453,7 @@
               </p:txBody>
             </p:sp>
           </mc:Choice>
-          <mc:Fallback>
+          <mc:Fallback xmlns="">
             <p:sp>
               <p:nvSpPr>
                 <p:cNvPr id="17" name="TextBox 16">
@@ -36394,8 +36498,8 @@
             </p:sp>
           </mc:Fallback>
         </mc:AlternateContent>
-        <mc:AlternateContent xmlns:mc="http://schemas.openxmlformats.org/markup-compatibility/2006">
-          <mc:Choice xmlns:a14="http://schemas.microsoft.com/office/drawing/2010/main" Requires="a14">
+        <mc:AlternateContent xmlns:mc="http://schemas.openxmlformats.org/markup-compatibility/2006" xmlns:a14="http://schemas.microsoft.com/office/drawing/2010/main">
+          <mc:Choice Requires="a14">
             <p:sp>
               <p:nvSpPr>
                 <p:cNvPr id="18" name="TextBox 17">
@@ -36601,7 +36705,7 @@
               </p:txBody>
             </p:sp>
           </mc:Choice>
-          <mc:Fallback>
+          <mc:Fallback xmlns="">
             <p:sp>
               <p:nvSpPr>
                 <p:cNvPr id="18" name="TextBox 17">
@@ -37273,8 +37377,8 @@
             </a:p>
           </p:txBody>
         </p:sp>
-        <mc:AlternateContent xmlns:mc="http://schemas.openxmlformats.org/markup-compatibility/2006">
-          <mc:Choice xmlns:a14="http://schemas.microsoft.com/office/drawing/2010/main" Requires="a14">
+        <mc:AlternateContent xmlns:mc="http://schemas.openxmlformats.org/markup-compatibility/2006" xmlns:a14="http://schemas.microsoft.com/office/drawing/2010/main">
+          <mc:Choice Requires="a14">
             <p:sp>
               <p:nvSpPr>
                 <p:cNvPr id="23" name="TextBox 22">
@@ -37464,7 +37568,7 @@
               </p:txBody>
             </p:sp>
           </mc:Choice>
-          <mc:Fallback>
+          <mc:Fallback xmlns="">
             <p:sp>
               <p:nvSpPr>
                 <p:cNvPr id="23" name="TextBox 22">
@@ -37509,8 +37613,8 @@
             </p:sp>
           </mc:Fallback>
         </mc:AlternateContent>
-        <mc:AlternateContent xmlns:mc="http://schemas.openxmlformats.org/markup-compatibility/2006">
-          <mc:Choice xmlns:a14="http://schemas.microsoft.com/office/drawing/2010/main" Requires="a14">
+        <mc:AlternateContent xmlns:mc="http://schemas.openxmlformats.org/markup-compatibility/2006" xmlns:a14="http://schemas.microsoft.com/office/drawing/2010/main">
+          <mc:Choice Requires="a14">
             <p:sp>
               <p:nvSpPr>
                 <p:cNvPr id="24" name="TextBox 23">
@@ -37742,7 +37846,7 @@
               </p:txBody>
             </p:sp>
           </mc:Choice>
-          <mc:Fallback>
+          <mc:Fallback xmlns="">
             <p:sp>
               <p:nvSpPr>
                 <p:cNvPr id="24" name="TextBox 23">
@@ -37787,8 +37891,8 @@
             </p:sp>
           </mc:Fallback>
         </mc:AlternateContent>
-        <mc:AlternateContent xmlns:mc="http://schemas.openxmlformats.org/markup-compatibility/2006">
-          <mc:Choice xmlns:a14="http://schemas.microsoft.com/office/drawing/2010/main" Requires="a14">
+        <mc:AlternateContent xmlns:mc="http://schemas.openxmlformats.org/markup-compatibility/2006" xmlns:a14="http://schemas.microsoft.com/office/drawing/2010/main">
+          <mc:Choice Requires="a14">
             <p:sp>
               <p:nvSpPr>
                 <p:cNvPr id="25" name="TextBox 24">
@@ -37994,7 +38098,7 @@
               </p:txBody>
             </p:sp>
           </mc:Choice>
-          <mc:Fallback>
+          <mc:Fallback xmlns="">
             <p:sp>
               <p:nvSpPr>
                 <p:cNvPr id="25" name="TextBox 24">
@@ -38263,6 +38367,450 @@
     <p:extLst>
       <p:ext uri="{BB962C8B-B14F-4D97-AF65-F5344CB8AC3E}">
         <p14:creationId xmlns:p14="http://schemas.microsoft.com/office/powerpoint/2010/main" val="1317523250"/>
+      </p:ext>
+    </p:extLst>
+  </p:cSld>
+  <p:clrMapOvr>
+    <a:masterClrMapping/>
+  </p:clrMapOvr>
+</p:sld>
+</file>
+
+<file path=ppt/slides/slide21.xml><?xml version="1.0" encoding="utf-8"?>
+<p:sld xmlns:a="http://schemas.openxmlformats.org/drawingml/2006/main" xmlns:r="http://schemas.openxmlformats.org/officeDocument/2006/relationships" xmlns:p="http://schemas.openxmlformats.org/presentationml/2006/main">
+  <p:cSld>
+    <p:spTree>
+      <p:nvGrpSpPr>
+        <p:cNvPr id="1" name=""/>
+        <p:cNvGrpSpPr/>
+        <p:nvPr/>
+      </p:nvGrpSpPr>
+      <p:grpSpPr>
+        <a:xfrm>
+          <a:off x="0" y="0"/>
+          <a:ext cx="0" cy="0"/>
+          <a:chOff x="0" y="0"/>
+          <a:chExt cx="0" cy="0"/>
+        </a:xfrm>
+      </p:grpSpPr>
+      <p:pic>
+        <p:nvPicPr>
+          <p:cNvPr id="1026" name="Picture 2" descr="Koalas at the Currumbin Wildlife Sanctuary">
+            <a:extLst>
+              <a:ext uri="{FF2B5EF4-FFF2-40B4-BE49-F238E27FC236}">
+                <a16:creationId xmlns:a16="http://schemas.microsoft.com/office/drawing/2014/main" id="{8E9DC94A-3FF6-F4C0-0F38-5E1511D95ED6}"/>
+              </a:ext>
+            </a:extLst>
+          </p:cNvPr>
+          <p:cNvPicPr>
+            <a:picLocks noChangeAspect="1" noChangeArrowheads="1"/>
+          </p:cNvPicPr>
+          <p:nvPr/>
+        </p:nvPicPr>
+        <p:blipFill rotWithShape="1">
+          <a:blip r:embed="rId2">
+            <a:extLst>
+              <a:ext uri="{28A0092B-C50C-407E-A947-70E740481C1C}">
+                <a14:useLocalDpi xmlns:a14="http://schemas.microsoft.com/office/drawing/2010/main" val="0"/>
+              </a:ext>
+            </a:extLst>
+          </a:blip>
+          <a:srcRect l="7241" r="9707"/>
+          <a:stretch>
+            <a:fillRect/>
+          </a:stretch>
+        </p:blipFill>
+        <p:spPr bwMode="auto">
+          <a:xfrm>
+            <a:off x="896815" y="488666"/>
+            <a:ext cx="8124094" cy="5880667"/>
+          </a:xfrm>
+          <a:prstGeom prst="rect">
+            <a:avLst/>
+          </a:prstGeom>
+          <a:noFill/>
+          <a:extLst>
+            <a:ext uri="{909E8E84-426E-40DD-AFC4-6F175D3DCCD1}">
+              <a14:hiddenFill xmlns:a14="http://schemas.microsoft.com/office/drawing/2010/main">
+                <a:solidFill>
+                  <a:srgbClr val="FFFFFF"/>
+                </a:solidFill>
+              </a14:hiddenFill>
+            </a:ext>
+          </a:extLst>
+        </p:spPr>
+      </p:pic>
+    </p:spTree>
+    <p:extLst>
+      <p:ext uri="{BB962C8B-B14F-4D97-AF65-F5344CB8AC3E}">
+        <p14:creationId xmlns:p14="http://schemas.microsoft.com/office/powerpoint/2010/main" val="2196613137"/>
+      </p:ext>
+    </p:extLst>
+  </p:cSld>
+  <p:clrMapOvr>
+    <a:masterClrMapping/>
+  </p:clrMapOvr>
+</p:sld>
+</file>
+
+<file path=ppt/slides/slide22.xml><?xml version="1.0" encoding="utf-8"?>
+<p:sld xmlns:a="http://schemas.openxmlformats.org/drawingml/2006/main" xmlns:r="http://schemas.openxmlformats.org/officeDocument/2006/relationships" xmlns:p="http://schemas.openxmlformats.org/presentationml/2006/main">
+  <p:cSld>
+    <p:spTree>
+      <p:nvGrpSpPr>
+        <p:cNvPr id="1" name="">
+          <a:extLst>
+            <a:ext uri="{FF2B5EF4-FFF2-40B4-BE49-F238E27FC236}">
+              <a16:creationId xmlns:a16="http://schemas.microsoft.com/office/drawing/2014/main" id="{795370AA-18B3-9844-1526-EBCCCBBB40ED}"/>
+            </a:ext>
+          </a:extLst>
+        </p:cNvPr>
+        <p:cNvGrpSpPr/>
+        <p:nvPr/>
+      </p:nvGrpSpPr>
+      <p:grpSpPr>
+        <a:xfrm>
+          <a:off x="0" y="0"/>
+          <a:ext cx="0" cy="0"/>
+          <a:chOff x="0" y="0"/>
+          <a:chExt cx="0" cy="0"/>
+        </a:xfrm>
+      </p:grpSpPr>
+      <p:pic>
+        <p:nvPicPr>
+          <p:cNvPr id="2050" name="Picture 2" descr="Koala Facts for Kids | Twinkl Science Homework Help Guide - Twinkl Homework">
+            <a:extLst>
+              <a:ext uri="{FF2B5EF4-FFF2-40B4-BE49-F238E27FC236}">
+                <a16:creationId xmlns:a16="http://schemas.microsoft.com/office/drawing/2014/main" id="{239F9DE5-55BA-774F-73A8-800A0C1CA630}"/>
+              </a:ext>
+            </a:extLst>
+          </p:cNvPr>
+          <p:cNvPicPr>
+            <a:picLocks noChangeAspect="1" noChangeArrowheads="1"/>
+          </p:cNvPicPr>
+          <p:nvPr/>
+        </p:nvPicPr>
+        <p:blipFill>
+          <a:blip r:embed="rId2">
+            <a:extLst>
+              <a:ext uri="{28A0092B-C50C-407E-A947-70E740481C1C}">
+                <a14:useLocalDpi xmlns:a14="http://schemas.microsoft.com/office/drawing/2010/main" val="0"/>
+              </a:ext>
+            </a:extLst>
+          </a:blip>
+          <a:srcRect/>
+          <a:stretch>
+            <a:fillRect/>
+          </a:stretch>
+        </p:blipFill>
+        <p:spPr bwMode="auto">
+          <a:xfrm>
+            <a:off x="512885" y="774700"/>
+            <a:ext cx="8001000" cy="5308600"/>
+          </a:xfrm>
+          <a:prstGeom prst="rect">
+            <a:avLst/>
+          </a:prstGeom>
+          <a:noFill/>
+          <a:extLst>
+            <a:ext uri="{909E8E84-426E-40DD-AFC4-6F175D3DCCD1}">
+              <a14:hiddenFill xmlns:a14="http://schemas.microsoft.com/office/drawing/2010/main">
+                <a:solidFill>
+                  <a:srgbClr val="FFFFFF"/>
+                </a:solidFill>
+              </a14:hiddenFill>
+            </a:ext>
+          </a:extLst>
+        </p:spPr>
+      </p:pic>
+    </p:spTree>
+    <p:extLst>
+      <p:ext uri="{BB962C8B-B14F-4D97-AF65-F5344CB8AC3E}">
+        <p14:creationId xmlns:p14="http://schemas.microsoft.com/office/powerpoint/2010/main" val="1975754424"/>
+      </p:ext>
+    </p:extLst>
+  </p:cSld>
+  <p:clrMapOvr>
+    <a:masterClrMapping/>
+  </p:clrMapOvr>
+</p:sld>
+</file>
+
+<file path=ppt/slides/slide23.xml><?xml version="1.0" encoding="utf-8"?>
+<p:sld xmlns:a="http://schemas.openxmlformats.org/drawingml/2006/main" xmlns:r="http://schemas.openxmlformats.org/officeDocument/2006/relationships" xmlns:p="http://schemas.openxmlformats.org/presentationml/2006/main">
+  <p:cSld>
+    <p:spTree>
+      <p:nvGrpSpPr>
+        <p:cNvPr id="1" name="">
+          <a:extLst>
+            <a:ext uri="{FF2B5EF4-FFF2-40B4-BE49-F238E27FC236}">
+              <a16:creationId xmlns:a16="http://schemas.microsoft.com/office/drawing/2014/main" id="{8B7BEC40-5E94-4A6F-6949-9E2BB8DD6CC3}"/>
+            </a:ext>
+          </a:extLst>
+        </p:cNvPr>
+        <p:cNvGrpSpPr/>
+        <p:nvPr/>
+      </p:nvGrpSpPr>
+      <p:grpSpPr>
+        <a:xfrm>
+          <a:off x="0" y="0"/>
+          <a:ext cx="0" cy="0"/>
+          <a:chOff x="0" y="0"/>
+          <a:chExt cx="0" cy="0"/>
+        </a:xfrm>
+      </p:grpSpPr>
+      <p:pic>
+        <p:nvPicPr>
+          <p:cNvPr id="2" name="Picture 1">
+            <a:extLst>
+              <a:ext uri="{FF2B5EF4-FFF2-40B4-BE49-F238E27FC236}">
+                <a16:creationId xmlns:a16="http://schemas.microsoft.com/office/drawing/2014/main" id="{B3FAAE97-4673-0181-2C11-49A4B43CA8FE}"/>
+              </a:ext>
+            </a:extLst>
+          </p:cNvPr>
+          <p:cNvPicPr>
+            <a:picLocks noChangeAspect="1"/>
+          </p:cNvPicPr>
+          <p:nvPr/>
+        </p:nvPicPr>
+        <p:blipFill>
+          <a:blip r:embed="rId2"/>
+          <a:stretch>
+            <a:fillRect/>
+          </a:stretch>
+        </p:blipFill>
+        <p:spPr>
+          <a:xfrm>
+            <a:off x="11419840" y="-5901386"/>
+            <a:ext cx="4561071" cy="5901386"/>
+          </a:xfrm>
+          <a:prstGeom prst="rect">
+            <a:avLst/>
+          </a:prstGeom>
+        </p:spPr>
+      </p:pic>
+      <p:grpSp>
+        <p:nvGrpSpPr>
+          <p:cNvPr id="5" name="Group 4">
+            <a:extLst>
+              <a:ext uri="{FF2B5EF4-FFF2-40B4-BE49-F238E27FC236}">
+                <a16:creationId xmlns:a16="http://schemas.microsoft.com/office/drawing/2014/main" id="{6579B60F-34F7-F1FA-F016-0D4D356A9214}"/>
+              </a:ext>
+            </a:extLst>
+          </p:cNvPr>
+          <p:cNvGrpSpPr/>
+          <p:nvPr/>
+        </p:nvGrpSpPr>
+        <p:grpSpPr>
+          <a:xfrm>
+            <a:off x="73855" y="827359"/>
+            <a:ext cx="5740400" cy="5203282"/>
+            <a:chOff x="1341498" y="1371600"/>
+            <a:chExt cx="4561071" cy="4471762"/>
+          </a:xfrm>
+        </p:grpSpPr>
+        <p:pic>
+          <p:nvPicPr>
+            <p:cNvPr id="3" name="Picture 2">
+              <a:extLst>
+                <a:ext uri="{FF2B5EF4-FFF2-40B4-BE49-F238E27FC236}">
+                  <a16:creationId xmlns:a16="http://schemas.microsoft.com/office/drawing/2014/main" id="{9F79A26B-FA51-47FD-26B4-8D6C746012D5}"/>
+                </a:ext>
+              </a:extLst>
+            </p:cNvPr>
+            <p:cNvPicPr>
+              <a:picLocks noChangeAspect="1"/>
+            </p:cNvPicPr>
+            <p:nvPr/>
+          </p:nvPicPr>
+          <p:blipFill>
+            <a:blip r:embed="rId2"/>
+            <a:srcRect t="1413" b="24017"/>
+            <a:stretch>
+              <a:fillRect/>
+            </a:stretch>
+          </p:blipFill>
+          <p:spPr>
+            <a:xfrm>
+              <a:off x="1341498" y="1442720"/>
+              <a:ext cx="4561071" cy="4400642"/>
+            </a:xfrm>
+            <a:prstGeom prst="rect">
+              <a:avLst/>
+            </a:prstGeom>
+          </p:spPr>
+        </p:pic>
+        <p:sp>
+          <p:nvSpPr>
+            <p:cNvPr id="4" name="Rectangle 3">
+              <a:extLst>
+                <a:ext uri="{FF2B5EF4-FFF2-40B4-BE49-F238E27FC236}">
+                  <a16:creationId xmlns:a16="http://schemas.microsoft.com/office/drawing/2014/main" id="{0D3BD8A8-6919-2EA8-2378-57451C8684EE}"/>
+                </a:ext>
+              </a:extLst>
+            </p:cNvPr>
+            <p:cNvSpPr/>
+            <p:nvPr/>
+          </p:nvSpPr>
+          <p:spPr>
+            <a:xfrm>
+              <a:off x="1441938" y="1371600"/>
+              <a:ext cx="1160585" cy="474785"/>
+            </a:xfrm>
+            <a:prstGeom prst="rect">
+              <a:avLst/>
+            </a:prstGeom>
+            <a:solidFill>
+              <a:schemeClr val="bg1"/>
+            </a:solidFill>
+            <a:ln>
+              <a:noFill/>
+            </a:ln>
+          </p:spPr>
+          <p:style>
+            <a:lnRef idx="2">
+              <a:schemeClr val="accent1">
+                <a:shade val="15000"/>
+              </a:schemeClr>
+            </a:lnRef>
+            <a:fillRef idx="1">
+              <a:schemeClr val="accent1"/>
+            </a:fillRef>
+            <a:effectRef idx="0">
+              <a:schemeClr val="accent1"/>
+            </a:effectRef>
+            <a:fontRef idx="minor">
+              <a:schemeClr val="lt1"/>
+            </a:fontRef>
+          </p:style>
+          <p:txBody>
+            <a:bodyPr rtlCol="0" anchor="ctr"/>
+            <a:lstStyle/>
+            <a:p>
+              <a:pPr algn="ctr"/>
+              <a:endParaRPr lang="en-US"/>
+            </a:p>
+          </p:txBody>
+        </p:sp>
+      </p:grpSp>
+      <p:pic>
+        <p:nvPicPr>
+          <p:cNvPr id="6" name="Picture 5">
+            <a:extLst>
+              <a:ext uri="{FF2B5EF4-FFF2-40B4-BE49-F238E27FC236}">
+                <a16:creationId xmlns:a16="http://schemas.microsoft.com/office/drawing/2014/main" id="{B68B9E57-02E6-CFA7-FCD2-45DE31B0FF1F}"/>
+              </a:ext>
+            </a:extLst>
+          </p:cNvPr>
+          <p:cNvPicPr>
+            <a:picLocks noChangeAspect="1"/>
+          </p:cNvPicPr>
+          <p:nvPr/>
+        </p:nvPicPr>
+        <p:blipFill>
+          <a:blip r:embed="rId2"/>
+          <a:srcRect t="76950"/>
+          <a:stretch>
+            <a:fillRect/>
+          </a:stretch>
+        </p:blipFill>
+        <p:spPr>
+          <a:xfrm>
+            <a:off x="1687329" y="5679328"/>
+            <a:ext cx="4561071" cy="1360256"/>
+          </a:xfrm>
+          <a:prstGeom prst="rect">
+            <a:avLst/>
+          </a:prstGeom>
+        </p:spPr>
+      </p:pic>
+      <p:pic>
+        <p:nvPicPr>
+          <p:cNvPr id="7" name="Picture 2" descr="Koalas at the Currumbin Wildlife Sanctuary">
+            <a:extLst>
+              <a:ext uri="{FF2B5EF4-FFF2-40B4-BE49-F238E27FC236}">
+                <a16:creationId xmlns:a16="http://schemas.microsoft.com/office/drawing/2014/main" id="{76FD31FE-3C38-5E34-241A-3DC409B34221}"/>
+              </a:ext>
+            </a:extLst>
+          </p:cNvPr>
+          <p:cNvPicPr>
+            <a:picLocks noChangeAspect="1" noChangeArrowheads="1"/>
+          </p:cNvPicPr>
+          <p:nvPr/>
+        </p:nvPicPr>
+        <p:blipFill rotWithShape="1">
+          <a:blip r:embed="rId3">
+            <a:extLst>
+              <a:ext uri="{28A0092B-C50C-407E-A947-70E740481C1C}">
+                <a14:useLocalDpi xmlns:a14="http://schemas.microsoft.com/office/drawing/2010/main" val="0"/>
+              </a:ext>
+            </a:extLst>
+          </a:blip>
+          <a:srcRect l="7241" r="9707"/>
+          <a:stretch>
+            <a:fillRect/>
+          </a:stretch>
+        </p:blipFill>
+        <p:spPr bwMode="auto">
+          <a:xfrm>
+            <a:off x="5814255" y="1202776"/>
+            <a:ext cx="6011985" cy="4351806"/>
+          </a:xfrm>
+          <a:prstGeom prst="rect">
+            <a:avLst/>
+          </a:prstGeom>
+          <a:noFill/>
+          <a:extLst>
+            <a:ext uri="{909E8E84-426E-40DD-AFC4-6F175D3DCCD1}">
+              <a14:hiddenFill xmlns:a14="http://schemas.microsoft.com/office/drawing/2010/main">
+                <a:solidFill>
+                  <a:srgbClr val="FFFFFF"/>
+                </a:solidFill>
+              </a14:hiddenFill>
+            </a:ext>
+          </a:extLst>
+        </p:spPr>
+      </p:pic>
+    </p:spTree>
+    <p:extLst>
+      <p:ext uri="{BB962C8B-B14F-4D97-AF65-F5344CB8AC3E}">
+        <p14:creationId xmlns:p14="http://schemas.microsoft.com/office/powerpoint/2010/main" val="3962258064"/>
+      </p:ext>
+    </p:extLst>
+  </p:cSld>
+  <p:clrMapOvr>
+    <a:masterClrMapping/>
+  </p:clrMapOvr>
+</p:sld>
+</file>
+
+<file path=ppt/slides/slide24.xml><?xml version="1.0" encoding="utf-8"?>
+<p:sld xmlns:a="http://schemas.openxmlformats.org/drawingml/2006/main" xmlns:r="http://schemas.openxmlformats.org/officeDocument/2006/relationships" xmlns:p="http://schemas.openxmlformats.org/presentationml/2006/main">
+  <p:cSld>
+    <p:spTree>
+      <p:nvGrpSpPr>
+        <p:cNvPr id="1" name="">
+          <a:extLst>
+            <a:ext uri="{FF2B5EF4-FFF2-40B4-BE49-F238E27FC236}">
+              <a16:creationId xmlns:a16="http://schemas.microsoft.com/office/drawing/2014/main" id="{2A2E0AAE-2376-95F8-0CC4-8AE47CA5B7F0}"/>
+            </a:ext>
+          </a:extLst>
+        </p:cNvPr>
+        <p:cNvGrpSpPr/>
+        <p:nvPr/>
+      </p:nvGrpSpPr>
+      <p:grpSpPr>
+        <a:xfrm>
+          <a:off x="0" y="0"/>
+          <a:ext cx="0" cy="0"/>
+          <a:chOff x="0" y="0"/>
+          <a:chExt cx="0" cy="0"/>
+        </a:xfrm>
+      </p:grpSpPr>
+    </p:spTree>
+    <p:extLst>
+      <p:ext uri="{BB962C8B-B14F-4D97-AF65-F5344CB8AC3E}">
+        <p14:creationId xmlns:p14="http://schemas.microsoft.com/office/powerpoint/2010/main" val="2176431548"/>
       </p:ext>
     </p:extLst>
   </p:cSld>
